--- a/docs/Materials.pptx
+++ b/docs/Materials.pptx
@@ -5,11 +5,12 @@
     <p:sldMasterId id="2147483648" r:id="rId4"/>
   </p:sldMasterIdLst>
   <p:sldIdLst>
-    <p:sldId id="264" r:id="rId5"/>
-    <p:sldId id="270" r:id="rId6"/>
-    <p:sldId id="275" r:id="rId7"/>
-    <p:sldId id="281" r:id="rId8"/>
-    <p:sldId id="282" r:id="rId9"/>
+    <p:sldId id="286" r:id="rId5"/>
+    <p:sldId id="283" r:id="rId6"/>
+    <p:sldId id="270" r:id="rId7"/>
+    <p:sldId id="275" r:id="rId8"/>
+    <p:sldId id="281" r:id="rId9"/>
+    <p:sldId id="282" r:id="rId10"/>
   </p:sldIdLst>
   <p:sldSz cx="12192000" cy="6858000"/>
   <p:notesSz cx="6858000" cy="9144000"/>
@@ -3332,730 +3333,345 @@
       </p:grpSpPr>
       <p:sp>
         <p:nvSpPr>
-          <p:cNvPr id="2" name="Title 1">
+          <p:cNvPr id="10" name="BgFull"/>
+          <p:cNvSpPr>
+            <a:spLocks noGrp="1"/>
+          </p:cNvSpPr>
+          <p:nvPr/>
+        </p:nvSpPr>
+        <p:spPr>
+          <a:xfrm>
+            <a:off x="0" y="0"/>
+            <a:ext cx="12192000" cy="6858000"/>
+          </a:xfrm>
+          <a:prstGeom prst="rect">
+            <a:avLst/>
+          </a:prstGeom>
+          <a:solidFill>
+            <a:srgbClr val="1F4E79"/>
+          </a:solidFill>
+          <a:ln>
+            <a:noFill/>
+          </a:ln>
+        </p:spPr>
+        <p:txBody>
+          <a:bodyPr vert="horz" anchor="ctr" anchorCtr="1">
+            <a:noAutofit/>
+          </a:bodyPr>
+          <a:lstStyle/>
+          <a:p>
+            <a:pPr>
+              <a:buNone/>
+            </a:pPr>
+            <a:endParaRPr/>
+          </a:p>
+        </p:txBody>
+      </p:sp>
+      <p:sp>
+        <p:nvSpPr>
+          <p:cNvPr id="11" name="RightPanel"/>
+          <p:cNvSpPr>
+            <a:spLocks noGrp="1"/>
+          </p:cNvSpPr>
+          <p:nvPr/>
+        </p:nvSpPr>
+        <p:spPr>
+          <a:xfrm>
+            <a:off x="6604000" y="0"/>
+            <a:ext cx="5588000" cy="6858000"/>
+          </a:xfrm>
+          <a:prstGeom prst="rect">
+            <a:avLst/>
+          </a:prstGeom>
+          <a:solidFill>
+            <a:srgbClr val="16406A"/>
+          </a:solidFill>
+          <a:ln>
+            <a:noFill/>
+          </a:ln>
+        </p:spPr>
+        <p:txBody>
+          <a:bodyPr vert="horz" anchor="ctr" anchorCtr="1">
+            <a:noAutofit/>
+          </a:bodyPr>
+          <a:lstStyle/>
+          <a:p>
+            <a:pPr>
+              <a:buNone/>
+            </a:pPr>
+            <a:endParaRPr/>
+          </a:p>
+        </p:txBody>
+      </p:sp>
+      <p:sp>
+        <p:nvSpPr>
+          <p:cNvPr id="12" name="AccentBar"/>
+          <p:cNvSpPr>
+            <a:spLocks noGrp="1"/>
+          </p:cNvSpPr>
+          <p:nvPr/>
+        </p:nvSpPr>
+        <p:spPr>
+          <a:xfrm>
+            <a:off x="0" y="0"/>
+            <a:ext cx="101600" cy="6858000"/>
+          </a:xfrm>
+          <a:prstGeom prst="rect">
+            <a:avLst/>
+          </a:prstGeom>
+          <a:solidFill>
+            <a:srgbClr val="7B2D8E"/>
+          </a:solidFill>
+          <a:ln>
+            <a:noFill/>
+          </a:ln>
+        </p:spPr>
+        <p:txBody>
+          <a:bodyPr vert="horz" anchor="ctr" anchorCtr="1">
+            <a:noAutofit/>
+          </a:bodyPr>
+          <a:lstStyle/>
+          <a:p>
+            <a:pPr>
+              <a:buNone/>
+            </a:pPr>
+            <a:endParaRPr/>
+          </a:p>
+        </p:txBody>
+      </p:sp>
+      <p:pic>
+        <p:nvPicPr>
+          <p:cNvPr id="2" name="Copied Picture 2">
             <a:extLst>
               <a:ext uri="{FF2B5EF4-FFF2-40B4-BE49-F238E27FC236}">
-                <a16:creationId xmlns:a16="http://schemas.microsoft.com/office/drawing/2014/main" id="{A78E0809-A875-D2EE-BD0C-1F47DBE113F3}"/>
+                <a16:creationId xmlns:a16="http://schemas.microsoft.com/office/drawing/2014/main" id="{96BBA74C-5CAE-D4FD-93F6-BAC5BE613195}"/>
               </a:ext>
             </a:extLst>
           </p:cNvPr>
-          <p:cNvSpPr>
-            <a:spLocks noGrp="1"/>
-          </p:cNvSpPr>
-          <p:nvPr>
-            <p:ph type="title"/>
-          </p:nvPr>
-        </p:nvSpPr>
-        <p:spPr/>
-        <p:txBody>
-          <a:bodyPr/>
+          <p:cNvPicPr>
+            <a:picLocks noChangeAspect="1"/>
+          </p:cNvPicPr>
+          <p:nvPr/>
+        </p:nvPicPr>
+        <p:blipFill>
+          <a:blip r:embed="rId2"/>
+          <a:stretch>
+            <a:fillRect/>
+          </a:stretch>
+        </p:blipFill>
+        <p:spPr>
+          <a:xfrm>
+            <a:off x="7175500" y="1765300"/>
+            <a:ext cx="4572000" cy="3340100"/>
+          </a:xfrm>
+          <a:prstGeom prst="rect">
+            <a:avLst/>
+          </a:prstGeom>
+        </p:spPr>
+      </p:pic>
+      <p:sp>
+        <p:nvSpPr>
+          <p:cNvPr id="13" name="Eyebrow"/>
+          <p:cNvSpPr>
+            <a:spLocks noGrp="1"/>
+          </p:cNvSpPr>
+          <p:nvPr/>
+        </p:nvSpPr>
+        <p:spPr>
+          <a:xfrm>
+            <a:off x="381000" y="1651000"/>
+            <a:ext cx="5969000" cy="355600"/>
+          </a:xfrm>
+          <a:prstGeom prst="rect">
+            <a:avLst/>
+          </a:prstGeom>
+          <a:solidFill>
+            <a:srgbClr val="1F4E79"/>
+          </a:solidFill>
+          <a:ln>
+            <a:noFill/>
+          </a:ln>
+        </p:spPr>
+        <p:txBody>
+          <a:bodyPr vert="horz" anchor="ctr" anchorCtr="1">
+            <a:noAutofit/>
+          </a:bodyPr>
           <a:lstStyle/>
           <a:p>
             <a:pPr algn="l">
               <a:buNone/>
             </a:pPr>
             <a:r>
-              <a:rPr lang="en-US" sz="3200" b="1" dirty="0"/>
-              <a:t>Context vs. Persona in AI</a:t>
-            </a:r>
-          </a:p>
+              <a:rPr lang="en-US" sz="1200" b="1" spc="300" dirty="0">
+                <a:solidFill>
+                  <a:srgbClr val="7B2D8E"/>
+                </a:solidFill>
+              </a:rPr>
+              <a:t>PERSONA WORKSHOP</a:t>
+            </a:r>
+          </a:p>
+        </p:txBody>
+      </p:sp>
+      <p:sp>
+        <p:nvSpPr>
+          <p:cNvPr id="14" name="MainTitle"/>
+          <p:cNvSpPr>
+            <a:spLocks noGrp="1"/>
+          </p:cNvSpPr>
+          <p:nvPr/>
+        </p:nvSpPr>
+        <p:spPr>
+          <a:xfrm>
+            <a:off x="381000" y="2095500"/>
+            <a:ext cx="5969000" cy="3048000"/>
+          </a:xfrm>
+          <a:prstGeom prst="rect">
+            <a:avLst/>
+          </a:prstGeom>
+          <a:solidFill>
+            <a:srgbClr val="1F4E79"/>
+          </a:solidFill>
+          <a:ln>
+            <a:noFill/>
+          </a:ln>
+        </p:spPr>
+        <p:txBody>
+          <a:bodyPr vert="horz" anchor="ctr" anchorCtr="1">
+            <a:noAutofit/>
+          </a:bodyPr>
+          <a:lstStyle/>
           <a:p>
             <a:pPr algn="l">
               <a:buNone/>
             </a:pPr>
             <a:r>
-              <a:rPr lang="en-US" sz="1600" i="1" dirty="0">
-                <a:solidFill>
-                  <a:schemeClr val="tx2"/>
+              <a:rPr lang="en-US" sz="3600" b="1" dirty="0">
+                <a:solidFill>
+                  <a:srgbClr val="FFFFFF"/>
                 </a:solidFill>
               </a:rPr>
-              <a:t>What the model knows about the situation vs. how the model behaves</a:t>
-            </a:r>
-          </a:p>
-        </p:txBody>
-      </p:sp>
-      <p:sp>
-        <p:nvSpPr>
-          <p:cNvPr id="3" name="Rectangle: Rounded Corners 2">
-            <a:extLst>
-              <a:ext uri="{FF2B5EF4-FFF2-40B4-BE49-F238E27FC236}">
-                <a16:creationId xmlns:a16="http://schemas.microsoft.com/office/drawing/2014/main" id="{D7259382-1FF0-4D73-9200-2519481E8E4F}"/>
-              </a:ext>
-            </a:extLst>
-          </p:cNvPr>
-          <p:cNvSpPr/>
-          <p:nvPr/>
-        </p:nvSpPr>
-        <p:spPr>
-          <a:xfrm>
-            <a:off x="762000" y="2349500"/>
-            <a:ext cx="5080000" cy="2984500"/>
-          </a:xfrm>
-          <a:prstGeom prst="roundRect">
+              <a:t>Create your</a:t>
+            </a:r>
+          </a:p>
+          <a:p>
+            <a:pPr algn="l">
+              <a:buNone/>
+            </a:pPr>
+            <a:r>
+              <a:rPr lang="en-US" sz="3600" b="1" dirty="0">
+                <a:solidFill>
+                  <a:srgbClr val="FFFFFF"/>
+                </a:solidFill>
+              </a:rPr>
+              <a:t>very own </a:t>
+            </a:r>
+            <a:r>
+              <a:rPr lang="en-US" sz="3600" b="1" dirty="0">
+                <a:solidFill>
+                  <a:srgbClr val="E5C4F0"/>
+                </a:solidFill>
+              </a:rPr>
+              <a:t>team</a:t>
+            </a:r>
+          </a:p>
+          <a:p>
+            <a:pPr algn="l">
+              <a:buNone/>
+            </a:pPr>
+            <a:r>
+              <a:rPr lang="en-US" sz="3600" b="1" dirty="0">
+                <a:solidFill>
+                  <a:srgbClr val="FFFFFF"/>
+                </a:solidFill>
+              </a:rPr>
+              <a:t>using </a:t>
+            </a:r>
+            <a:r>
+              <a:rPr lang="en-US" sz="3600" b="1" dirty="0">
+                <a:solidFill>
+                  <a:srgbClr val="AED4F0"/>
+                </a:solidFill>
+              </a:rPr>
+              <a:t>personas</a:t>
+            </a:r>
+          </a:p>
+        </p:txBody>
+      </p:sp>
+      <p:sp>
+        <p:nvSpPr>
+          <p:cNvPr id="15" name="Divider"/>
+          <p:cNvSpPr>
+            <a:spLocks noGrp="1"/>
+          </p:cNvSpPr>
+          <p:nvPr/>
+        </p:nvSpPr>
+        <p:spPr>
+          <a:xfrm>
+            <a:off x="381000" y="5270500"/>
+            <a:ext cx="2540000" cy="38100"/>
+          </a:xfrm>
+          <a:prstGeom prst="rect">
+            <a:avLst/>
+          </a:prstGeom>
+          <a:solidFill>
+            <a:srgbClr val="7B2D8E"/>
+          </a:solidFill>
+          <a:ln>
+            <a:noFill/>
+          </a:ln>
+        </p:spPr>
+        <p:txBody>
+          <a:bodyPr vert="horz" anchor="ctr" anchorCtr="1">
+            <a:noAutofit/>
+          </a:bodyPr>
+          <a:lstStyle/>
+          <a:p>
+            <a:pPr>
+              <a:buNone/>
+            </a:pPr>
+            <a:endParaRPr/>
+          </a:p>
+        </p:txBody>
+      </p:sp>
+      <p:sp>
+        <p:nvSpPr>
+          <p:cNvPr id="16" name="Subtitle"/>
+          <p:cNvSpPr>
+            <a:spLocks noGrp="1"/>
+          </p:cNvSpPr>
+          <p:nvPr/>
+        </p:nvSpPr>
+        <p:spPr>
+          <a:xfrm>
+            <a:off x="381000" y="5410200"/>
+            <a:ext cx="5969000" cy="558800"/>
+          </a:xfrm>
+          <a:prstGeom prst="rect">
             <a:avLst/>
           </a:prstGeom>
           <a:solidFill>
             <a:srgbClr val="1F4E79"/>
           </a:solidFill>
-          <a:ln w="12700" cap="flat" cmpd="sng" algn="ctr">
-            <a:noFill/>
-            <a:prstDash val="solid"/>
-            <a:miter lim="800000"/>
-          </a:ln>
-        </p:spPr>
-        <p:style>
-          <a:lnRef idx="2">
-            <a:schemeClr val="accent1">
-              <a:shade val="15000"/>
-            </a:schemeClr>
-          </a:lnRef>
-          <a:fillRef idx="1">
-            <a:schemeClr val="accent1"/>
-          </a:fillRef>
-          <a:effectRef idx="0">
-            <a:schemeClr val="accent1"/>
-          </a:effectRef>
-          <a:fontRef idx="minor">
-            <a:schemeClr val="lt1"/>
-          </a:fontRef>
-        </p:style>
-        <p:txBody>
-          <a:bodyPr vertOverflow="clip" horzOverflow="clip" rtlCol="0" anchor="t"/>
-          <a:lstStyle/>
-          <a:p>
-            <a:pPr algn="l"/>
-            <a:endParaRPr lang="en-US"/>
-          </a:p>
-        </p:txBody>
-      </p:sp>
-      <p:sp>
-        <p:nvSpPr>
-          <p:cNvPr id="4" name="TextBox 3">
-            <a:extLst>
-              <a:ext uri="{FF2B5EF4-FFF2-40B4-BE49-F238E27FC236}">
-                <a16:creationId xmlns:a16="http://schemas.microsoft.com/office/drawing/2014/main" id="{2671A5DA-AE8B-4712-A693-0D21B76E54A9}"/>
-              </a:ext>
-            </a:extLst>
-          </p:cNvPr>
-          <p:cNvSpPr txBox="1"/>
-          <p:nvPr/>
-        </p:nvSpPr>
-        <p:spPr>
-          <a:xfrm>
-            <a:off x="965200" y="2501900"/>
-            <a:ext cx="4673600" cy="381000"/>
-          </a:xfrm>
-          <a:prstGeom prst="rect">
-            <a:avLst/>
-          </a:prstGeom>
-          <a:noFill/>
-          <a:ln>
-            <a:noFill/>
-          </a:ln>
-        </p:spPr>
-        <p:txBody>
-          <a:bodyPr vertOverflow="overflow" vert="horz" wrap="square" rtlCol="0" anchor="t">
-            <a:spAutoFit/>
+          <a:ln>
+            <a:noFill/>
+          </a:ln>
+        </p:spPr>
+        <p:txBody>
+          <a:bodyPr vert="horz" anchor="ctr" anchorCtr="1">
+            <a:noAutofit/>
           </a:bodyPr>
           <a:lstStyle/>
           <a:p>
-            <a:pPr algn="l"/>
-            <a:r>
-              <a:rPr lang="en-US" sz="1400" b="1" dirty="0">
+            <a:pPr algn="l">
+              <a:buNone/>
+            </a:pPr>
+            <a:r>
+              <a:rPr lang="en-US" sz="1400" i="1" dirty="0">
                 <a:solidFill>
                   <a:srgbClr val="AED4F0"/>
                 </a:solidFill>
               </a:rPr>
-              <a:t>CONTEXT</a:t>
-            </a:r>
-          </a:p>
-        </p:txBody>
-      </p:sp>
-      <p:sp>
-        <p:nvSpPr>
-          <p:cNvPr id="5" name="TextBox 4">
-            <a:extLst>
-              <a:ext uri="{FF2B5EF4-FFF2-40B4-BE49-F238E27FC236}">
-                <a16:creationId xmlns:a16="http://schemas.microsoft.com/office/drawing/2014/main" id="{13040BB5-21F4-49CE-98A9-67223126E58C}"/>
-              </a:ext>
-            </a:extLst>
-          </p:cNvPr>
-          <p:cNvSpPr txBox="1"/>
-          <p:nvPr/>
-        </p:nvSpPr>
-        <p:spPr>
-          <a:xfrm>
-            <a:off x="965200" y="2806700"/>
-            <a:ext cx="4673600" cy="369332"/>
-          </a:xfrm>
-          <a:prstGeom prst="rect">
-            <a:avLst/>
-          </a:prstGeom>
-          <a:noFill/>
-          <a:ln>
-            <a:noFill/>
-          </a:ln>
-        </p:spPr>
-        <p:txBody>
-          <a:bodyPr vertOverflow="overflow" vert="horz" wrap="square" rtlCol="0" anchor="t">
-            <a:spAutoFit/>
-          </a:bodyPr>
-          <a:lstStyle/>
-          <a:p>
-            <a:pPr algn="l"/>
-            <a:r>
-              <a:rPr lang="en-US" b="1" dirty="0">
-                <a:solidFill>
-                  <a:srgbClr val="FFFFFF"/>
-                </a:solidFill>
-              </a:rPr>
-              <a:t>What the model is given (The work)</a:t>
-            </a:r>
-          </a:p>
-        </p:txBody>
-      </p:sp>
-      <p:sp>
-        <p:nvSpPr>
-          <p:cNvPr id="6" name="TextBox 5">
-            <a:extLst>
-              <a:ext uri="{FF2B5EF4-FFF2-40B4-BE49-F238E27FC236}">
-                <a16:creationId xmlns:a16="http://schemas.microsoft.com/office/drawing/2014/main" id="{5CC52DC4-05DC-404A-A32C-46C830F197A1}"/>
-              </a:ext>
-            </a:extLst>
-          </p:cNvPr>
-          <p:cNvSpPr txBox="1"/>
-          <p:nvPr/>
-        </p:nvSpPr>
-        <p:spPr>
-          <a:xfrm>
-            <a:off x="965200" y="3302000"/>
-            <a:ext cx="4673600" cy="1374735"/>
-          </a:xfrm>
-          <a:prstGeom prst="rect">
-            <a:avLst/>
-          </a:prstGeom>
-          <a:noFill/>
-          <a:ln>
-            <a:noFill/>
-          </a:ln>
-        </p:spPr>
-        <p:txBody>
-          <a:bodyPr vertOverflow="overflow" vert="horz" wrap="square" rtlCol="0" anchor="t">
-            <a:spAutoFit/>
-          </a:bodyPr>
-          <a:lstStyle/>
-          <a:p>
-            <a:pPr marL="228600" indent="-228600">
-              <a:lnSpc>
-                <a:spcPts val="1700"/>
-              </a:lnSpc>
-              <a:spcAft>
-                <a:spcPts val="500"/>
-              </a:spcAft>
-              <a:buFont typeface="Arial"/>
-              <a:buChar char="•"/>
-            </a:pPr>
-            <a:r>
-              <a:rPr lang="en-US" sz="1500" b="1" dirty="0">
-                <a:solidFill>
-                  <a:srgbClr val="FFFFFF"/>
-                </a:solidFill>
-              </a:rPr>
-              <a:t>Information </a:t>
-            </a:r>
-            <a:r>
-              <a:rPr lang="en-US" sz="1500" dirty="0">
-                <a:solidFill>
-                  <a:srgbClr val="FFFFFF"/>
-                </a:solidFill>
-              </a:rPr>
-              <a:t>fed to the model (documents, history, data)</a:t>
-            </a:r>
-          </a:p>
-          <a:p>
-            <a:pPr marL="228600" indent="-228600">
-              <a:lnSpc>
-                <a:spcPts val="1700"/>
-              </a:lnSpc>
-              <a:spcAft>
-                <a:spcPts val="500"/>
-              </a:spcAft>
-              <a:buFont typeface="Arial"/>
-              <a:buChar char="•"/>
-            </a:pPr>
-            <a:r>
-              <a:rPr lang="en-US" sz="1500" b="1" dirty="0">
-                <a:solidFill>
-                  <a:srgbClr val="FFFFFF"/>
-                </a:solidFill>
-              </a:rPr>
-              <a:t>Situational </a:t>
-            </a:r>
-            <a:r>
-              <a:rPr lang="en-US" sz="1500" dirty="0">
-                <a:solidFill>
-                  <a:srgbClr val="FFFFFF"/>
-                </a:solidFill>
-              </a:rPr>
-              <a:t>— changes per request or conversation</a:t>
-            </a:r>
-          </a:p>
-          <a:p>
-            <a:pPr marL="228600" indent="-228600">
-              <a:lnSpc>
-                <a:spcPts val="1700"/>
-              </a:lnSpc>
-              <a:spcAft>
-                <a:spcPts val="500"/>
-              </a:spcAft>
-              <a:buFont typeface="Arial"/>
-              <a:buChar char="•"/>
-            </a:pPr>
-            <a:r>
-              <a:rPr lang="en-US" sz="1500" b="1" dirty="0">
-                <a:solidFill>
-                  <a:srgbClr val="FFFFFF"/>
-                </a:solidFill>
-              </a:rPr>
-              <a:t>Answers </a:t>
-            </a:r>
-            <a:r>
-              <a:rPr lang="en-US" sz="1500" dirty="0">
-                <a:solidFill>
-                  <a:srgbClr val="FFFFFF"/>
-                </a:solidFill>
-              </a:rPr>
-              <a:t>“what does the model need to know?”</a:t>
-            </a:r>
-          </a:p>
-          <a:p>
-            <a:pPr marL="228600" indent="-228600">
-              <a:lnSpc>
-                <a:spcPts val="1700"/>
-              </a:lnSpc>
-              <a:spcAft>
-                <a:spcPts val="500"/>
-              </a:spcAft>
-              <a:buFont typeface="Arial"/>
-              <a:buChar char="•"/>
-            </a:pPr>
-            <a:r>
-              <a:rPr lang="en-US" sz="1500" b="1" dirty="0">
-                <a:solidFill>
-                  <a:srgbClr val="FFFFFF"/>
-                </a:solidFill>
-              </a:rPr>
-              <a:t>Examples: </a:t>
-            </a:r>
-            <a:r>
-              <a:rPr lang="en-US" sz="1500" dirty="0">
-                <a:solidFill>
-                  <a:srgbClr val="FFFFFF"/>
-                </a:solidFill>
-              </a:rPr>
-              <a:t>RAG results, prior messages, attached files</a:t>
-            </a:r>
-          </a:p>
-        </p:txBody>
-      </p:sp>
-      <p:sp>
-        <p:nvSpPr>
-          <p:cNvPr id="7" name="Rectangle: Rounded Corners 6">
-            <a:extLst>
-              <a:ext uri="{FF2B5EF4-FFF2-40B4-BE49-F238E27FC236}">
-                <a16:creationId xmlns:a16="http://schemas.microsoft.com/office/drawing/2014/main" id="{0B2A00A6-E8F0-466C-B3FB-1FF7A02CB336}"/>
-              </a:ext>
-            </a:extLst>
-          </p:cNvPr>
-          <p:cNvSpPr/>
-          <p:nvPr/>
-        </p:nvSpPr>
-        <p:spPr>
-          <a:xfrm>
-            <a:off x="6350000" y="2349500"/>
-            <a:ext cx="5080000" cy="2984500"/>
-          </a:xfrm>
-          <a:prstGeom prst="roundRect">
-            <a:avLst/>
-          </a:prstGeom>
-          <a:solidFill>
-            <a:srgbClr val="7B2D8E"/>
-          </a:solidFill>
-          <a:ln w="12700" cap="flat" cmpd="sng" algn="ctr">
-            <a:noFill/>
-            <a:prstDash val="solid"/>
-            <a:miter lim="800000"/>
-          </a:ln>
-        </p:spPr>
-        <p:style>
-          <a:lnRef idx="2">
-            <a:schemeClr val="accent1">
-              <a:shade val="15000"/>
-            </a:schemeClr>
-          </a:lnRef>
-          <a:fillRef idx="1">
-            <a:schemeClr val="accent1"/>
-          </a:fillRef>
-          <a:effectRef idx="0">
-            <a:schemeClr val="accent1"/>
-          </a:effectRef>
-          <a:fontRef idx="minor">
-            <a:schemeClr val="lt1"/>
-          </a:fontRef>
-        </p:style>
-        <p:txBody>
-          <a:bodyPr vertOverflow="clip" horzOverflow="clip" rtlCol="0" anchor="t"/>
-          <a:lstStyle/>
-          <a:p>
-            <a:pPr algn="l"/>
-            <a:endParaRPr lang="en-US"/>
-          </a:p>
-        </p:txBody>
-      </p:sp>
-      <p:sp>
-        <p:nvSpPr>
-          <p:cNvPr id="8" name="TextBox 7">
-            <a:extLst>
-              <a:ext uri="{FF2B5EF4-FFF2-40B4-BE49-F238E27FC236}">
-                <a16:creationId xmlns:a16="http://schemas.microsoft.com/office/drawing/2014/main" id="{CCD23F2E-8364-4640-9A8A-2C04C6477501}"/>
-              </a:ext>
-            </a:extLst>
-          </p:cNvPr>
-          <p:cNvSpPr txBox="1"/>
-          <p:nvPr/>
-        </p:nvSpPr>
-        <p:spPr>
-          <a:xfrm>
-            <a:off x="6553200" y="2501900"/>
-            <a:ext cx="4673600" cy="381000"/>
-          </a:xfrm>
-          <a:prstGeom prst="rect">
-            <a:avLst/>
-          </a:prstGeom>
-          <a:noFill/>
-          <a:ln>
-            <a:noFill/>
-          </a:ln>
-        </p:spPr>
-        <p:txBody>
-          <a:bodyPr vertOverflow="overflow" vert="horz" wrap="square" rtlCol="0" anchor="t">
-            <a:spAutoFit/>
-          </a:bodyPr>
-          <a:lstStyle/>
-          <a:p>
-            <a:pPr algn="l"/>
-            <a:r>
-              <a:rPr lang="en-US" sz="1400" b="1">
-                <a:solidFill>
-                  <a:srgbClr val="E5C4F0"/>
-                </a:solidFill>
-              </a:rPr>
-              <a:t>PERSONA</a:t>
-            </a:r>
-          </a:p>
-        </p:txBody>
-      </p:sp>
-      <p:sp>
-        <p:nvSpPr>
-          <p:cNvPr id="9" name="TextBox 8">
-            <a:extLst>
-              <a:ext uri="{FF2B5EF4-FFF2-40B4-BE49-F238E27FC236}">
-                <a16:creationId xmlns:a16="http://schemas.microsoft.com/office/drawing/2014/main" id="{17E22691-F4CA-4604-A6EF-9DC8546F600C}"/>
-              </a:ext>
-            </a:extLst>
-          </p:cNvPr>
-          <p:cNvSpPr txBox="1"/>
-          <p:nvPr/>
-        </p:nvSpPr>
-        <p:spPr>
-          <a:xfrm>
-            <a:off x="6553200" y="2806700"/>
-            <a:ext cx="4673600" cy="369332"/>
-          </a:xfrm>
-          <a:prstGeom prst="rect">
-            <a:avLst/>
-          </a:prstGeom>
-          <a:noFill/>
-          <a:ln>
-            <a:noFill/>
-          </a:ln>
-        </p:spPr>
-        <p:txBody>
-          <a:bodyPr vertOverflow="overflow" vert="horz" wrap="square" rtlCol="0" anchor="t">
-            <a:spAutoFit/>
-          </a:bodyPr>
-          <a:lstStyle/>
-          <a:p>
-            <a:pPr algn="l"/>
-            <a:r>
-              <a:rPr lang="en-US" b="1" dirty="0">
-                <a:solidFill>
-                  <a:srgbClr val="FFFFFF"/>
-                </a:solidFill>
-              </a:rPr>
-              <a:t>How the model acts (Who does the work)</a:t>
-            </a:r>
-          </a:p>
-        </p:txBody>
-      </p:sp>
-      <p:sp>
-        <p:nvSpPr>
-          <p:cNvPr id="10" name="TextBox 9">
-            <a:extLst>
-              <a:ext uri="{FF2B5EF4-FFF2-40B4-BE49-F238E27FC236}">
-                <a16:creationId xmlns:a16="http://schemas.microsoft.com/office/drawing/2014/main" id="{622075CD-36A9-4FD7-9F75-8A8215FC468F}"/>
-              </a:ext>
-            </a:extLst>
-          </p:cNvPr>
-          <p:cNvSpPr txBox="1"/>
-          <p:nvPr/>
-        </p:nvSpPr>
-        <p:spPr>
-          <a:xfrm>
-            <a:off x="6553200" y="3302000"/>
-            <a:ext cx="4673600" cy="1374735"/>
-          </a:xfrm>
-          <a:prstGeom prst="rect">
-            <a:avLst/>
-          </a:prstGeom>
-          <a:noFill/>
-          <a:ln>
-            <a:noFill/>
-          </a:ln>
-        </p:spPr>
-        <p:txBody>
-          <a:bodyPr vertOverflow="overflow" vert="horz" wrap="square" rtlCol="0" anchor="t">
-            <a:spAutoFit/>
-          </a:bodyPr>
-          <a:lstStyle/>
-          <a:p>
-            <a:pPr marL="228600" indent="-228600">
-              <a:lnSpc>
-                <a:spcPts val="1700"/>
-              </a:lnSpc>
-              <a:spcAft>
-                <a:spcPts val="500"/>
-              </a:spcAft>
-              <a:buFont typeface="Arial"/>
-              <a:buChar char="•"/>
-            </a:pPr>
-            <a:r>
-              <a:rPr lang="en-US" sz="1500" b="1" dirty="0">
-                <a:solidFill>
-                  <a:srgbClr val="FFFFFF"/>
-                </a:solidFill>
-              </a:rPr>
-              <a:t>Identity &amp; style </a:t>
-            </a:r>
-            <a:r>
-              <a:rPr lang="en-US" sz="1500" dirty="0">
-                <a:solidFill>
-                  <a:srgbClr val="FFFFFF"/>
-                </a:solidFill>
-              </a:rPr>
-              <a:t>the model adopts (tone, role, voice)</a:t>
-            </a:r>
-          </a:p>
-          <a:p>
-            <a:pPr marL="228600" indent="-228600">
-              <a:lnSpc>
-                <a:spcPts val="1700"/>
-              </a:lnSpc>
-              <a:spcAft>
-                <a:spcPts val="500"/>
-              </a:spcAft>
-              <a:buFont typeface="Arial"/>
-              <a:buChar char="•"/>
-            </a:pPr>
-            <a:r>
-              <a:rPr lang="en-US" sz="1500" b="1" dirty="0">
-                <a:solidFill>
-                  <a:srgbClr val="FFFFFF"/>
-                </a:solidFill>
-              </a:rPr>
-              <a:t>Behavioral </a:t>
-            </a:r>
-            <a:r>
-              <a:rPr lang="en-US" sz="1500" dirty="0">
-                <a:solidFill>
-                  <a:srgbClr val="FFFFFF"/>
-                </a:solidFill>
-              </a:rPr>
-              <a:t>— consistent across requests</a:t>
-            </a:r>
-          </a:p>
-          <a:p>
-            <a:pPr marL="228600" indent="-228600">
-              <a:lnSpc>
-                <a:spcPts val="1700"/>
-              </a:lnSpc>
-              <a:spcAft>
-                <a:spcPts val="500"/>
-              </a:spcAft>
-              <a:buFont typeface="Arial"/>
-              <a:buChar char="•"/>
-            </a:pPr>
-            <a:r>
-              <a:rPr lang="en-US" sz="1500" b="1" dirty="0">
-                <a:solidFill>
-                  <a:srgbClr val="FFFFFF"/>
-                </a:solidFill>
-              </a:rPr>
-              <a:t>Answers </a:t>
-            </a:r>
-            <a:r>
-              <a:rPr lang="en-US" sz="1500" dirty="0">
-                <a:solidFill>
-                  <a:srgbClr val="FFFFFF"/>
-                </a:solidFill>
-              </a:rPr>
-              <a:t>“how should the model respond?”</a:t>
-            </a:r>
-          </a:p>
-          <a:p>
-            <a:pPr marL="228600" indent="-228600">
-              <a:lnSpc>
-                <a:spcPts val="1700"/>
-              </a:lnSpc>
-              <a:spcAft>
-                <a:spcPts val="500"/>
-              </a:spcAft>
-              <a:buFont typeface="Arial"/>
-              <a:buChar char="•"/>
-            </a:pPr>
-            <a:r>
-              <a:rPr lang="en-US" sz="1500" b="1" dirty="0">
-                <a:solidFill>
-                  <a:srgbClr val="FFFFFF"/>
-                </a:solidFill>
-              </a:rPr>
-              <a:t>Examples: </a:t>
-            </a:r>
-            <a:r>
-              <a:rPr lang="en-US" sz="1500" dirty="0">
-                <a:solidFill>
-                  <a:srgbClr val="FFFFFF"/>
-                </a:solidFill>
-              </a:rPr>
-              <a:t>system prompt defining a coach, lawyer, tutor</a:t>
-            </a:r>
-          </a:p>
-        </p:txBody>
-      </p:sp>
-      <p:sp>
-        <p:nvSpPr>
-          <p:cNvPr id="11" name="Rectangle 10">
-            <a:extLst>
-              <a:ext uri="{FF2B5EF4-FFF2-40B4-BE49-F238E27FC236}">
-                <a16:creationId xmlns:a16="http://schemas.microsoft.com/office/drawing/2014/main" id="{9CD6E635-077C-4055-B431-B645082710F9}"/>
-              </a:ext>
-            </a:extLst>
-          </p:cNvPr>
-          <p:cNvSpPr/>
-          <p:nvPr/>
-        </p:nvSpPr>
-        <p:spPr>
-          <a:xfrm>
-            <a:off x="762000" y="5537200"/>
-            <a:ext cx="10668000" cy="1016000"/>
-          </a:xfrm>
-          <a:prstGeom prst="rect">
-            <a:avLst/>
-          </a:prstGeom>
-          <a:solidFill>
-            <a:srgbClr val="F2F4F7"/>
-          </a:solidFill>
-          <a:ln w="12700" cap="flat" cmpd="sng" algn="ctr">
-            <a:noFill/>
-            <a:prstDash val="solid"/>
-            <a:miter lim="800000"/>
-          </a:ln>
-        </p:spPr>
-        <p:style>
-          <a:lnRef idx="2">
-            <a:schemeClr val="accent1">
-              <a:shade val="15000"/>
-            </a:schemeClr>
-          </a:lnRef>
-          <a:fillRef idx="1">
-            <a:schemeClr val="accent1"/>
-          </a:fillRef>
-          <a:effectRef idx="0">
-            <a:schemeClr val="accent1"/>
-          </a:effectRef>
-          <a:fontRef idx="minor">
-            <a:schemeClr val="lt1"/>
-          </a:fontRef>
-        </p:style>
-        <p:txBody>
-          <a:bodyPr vertOverflow="clip" horzOverflow="clip" rtlCol="0" anchor="t"/>
-          <a:lstStyle/>
-          <a:p>
-            <a:pPr algn="l"/>
-            <a:endParaRPr lang="en-US"/>
-          </a:p>
-        </p:txBody>
-      </p:sp>
-      <p:sp>
-        <p:nvSpPr>
-          <p:cNvPr id="12" name="TextBox 11">
-            <a:extLst>
-              <a:ext uri="{FF2B5EF4-FFF2-40B4-BE49-F238E27FC236}">
-                <a16:creationId xmlns:a16="http://schemas.microsoft.com/office/drawing/2014/main" id="{117A8691-40DF-4730-AA20-F71D64BB0E8A}"/>
-              </a:ext>
-            </a:extLst>
-          </p:cNvPr>
-          <p:cNvSpPr txBox="1"/>
-          <p:nvPr/>
-        </p:nvSpPr>
-        <p:spPr>
-          <a:xfrm>
-            <a:off x="965200" y="5638800"/>
-            <a:ext cx="10261600" cy="557204"/>
-          </a:xfrm>
-          <a:prstGeom prst="rect">
-            <a:avLst/>
-          </a:prstGeom>
-          <a:noFill/>
-          <a:ln>
-            <a:noFill/>
-          </a:ln>
-        </p:spPr>
-        <p:txBody>
-          <a:bodyPr vertOverflow="overflow" vert="horz" wrap="square" rtlCol="0" anchor="t">
-            <a:spAutoFit/>
-          </a:bodyPr>
-          <a:lstStyle/>
-          <a:p>
-            <a:pPr algn="ctr">
-              <a:lnSpc>
-                <a:spcPts val="1800"/>
-              </a:lnSpc>
-              <a:buNone/>
-            </a:pPr>
-            <a:r>
-              <a:rPr lang="en-US" sz="1800" i="1" dirty="0">
-                <a:solidFill>
-                  <a:srgbClr val="555555"/>
-                </a:solidFill>
-              </a:rPr>
-              <a:t>Put simply: context is the material on the desk.</a:t>
-            </a:r>
-          </a:p>
-          <a:p>
-            <a:pPr algn="ctr">
-              <a:lnSpc>
-                <a:spcPts val="1800"/>
-              </a:lnSpc>
-              <a:buNone/>
-            </a:pPr>
-            <a:r>
-              <a:rPr lang="en-US" sz="1800" i="1" dirty="0">
-                <a:solidFill>
-                  <a:srgbClr val="555555"/>
-                </a:solidFill>
-              </a:rPr>
-              <a:t>The persona is the colleague you handed it to.</a:t>
+              <a:t>With Claude Code • Written in Markdown • Portable across LLMs</a:t>
             </a:r>
           </a:p>
         </p:txBody>
@@ -4063,7 +3679,7 @@
     </p:spTree>
     <p:extLst>
       <p:ext uri="{BB962C8B-B14F-4D97-AF65-F5344CB8AC3E}">
-        <p14:creationId xmlns:p14="http://schemas.microsoft.com/office/powerpoint/2010/main" val="1363818408"/>
+        <p14:creationId xmlns:p14="http://schemas.microsoft.com/office/powerpoint/2010/main" val="2235887798"/>
       </p:ext>
     </p:extLst>
   </p:cSld>
@@ -4092,16 +3708,16 @@
       </p:grpSpPr>
       <p:sp>
         <p:nvSpPr>
-          <p:cNvPr id="101" name="LeftHeader"/>
-          <p:cNvSpPr>
-            <a:spLocks noGrp="1"/>
-          </p:cNvSpPr>
-          <p:nvPr/>
-        </p:nvSpPr>
-        <p:spPr>
-          <a:xfrm>
-            <a:off x="508000" y="0"/>
-            <a:ext cx="5334000" cy="635000"/>
+          <p:cNvPr id="20" name="BgStrip"/>
+          <p:cNvSpPr>
+            <a:spLocks noGrp="1"/>
+          </p:cNvSpPr>
+          <p:nvPr/>
+        </p:nvSpPr>
+        <p:spPr>
+          <a:xfrm>
+            <a:off x="0" y="0"/>
+            <a:ext cx="12192000" cy="1587500"/>
           </a:xfrm>
           <a:prstGeom prst="rect">
             <a:avLst/>
@@ -4114,123 +3730,12 @@
           </a:ln>
         </p:spPr>
         <p:txBody>
-          <a:bodyPr anchor="ctr"/>
-          <a:lstStyle/>
-          <a:p>
-            <a:pPr algn="ctr">
-              <a:buNone/>
-            </a:pPr>
-            <a:r>
-              <a:rPr lang="en-US" sz="1600" b="1" i="0" dirty="0">
-                <a:solidFill>
-                  <a:srgbClr val="FFFFFF"/>
-                </a:solidFill>
-              </a:rPr>
-              <a:t>Working with Context</a:t>
-            </a:r>
-          </a:p>
-        </p:txBody>
-      </p:sp>
-      <p:sp>
-        <p:nvSpPr>
-          <p:cNvPr id="102" name="RightHeader"/>
-          <p:cNvSpPr>
-            <a:spLocks noGrp="1"/>
-          </p:cNvSpPr>
-          <p:nvPr/>
-        </p:nvSpPr>
-        <p:spPr>
-          <a:xfrm>
-            <a:off x="6350000" y="0"/>
-            <a:ext cx="5334000" cy="635000"/>
-          </a:xfrm>
-          <a:prstGeom prst="rect">
-            <a:avLst/>
-          </a:prstGeom>
-          <a:solidFill>
-            <a:srgbClr val="7B2D8E"/>
-          </a:solidFill>
-          <a:ln>
-            <a:noFill/>
-          </a:ln>
-        </p:spPr>
-        <p:txBody>
-          <a:bodyPr anchor="ctr"/>
-          <a:lstStyle/>
-          <a:p>
-            <a:pPr algn="ctr">
-              <a:buNone/>
-            </a:pPr>
-            <a:r>
-              <a:rPr lang="en-US" sz="1600" b="1" i="0" dirty="0">
-                <a:solidFill>
-                  <a:srgbClr val="FFFFFF"/>
-                </a:solidFill>
-              </a:rPr>
-              <a:t>Working with a Persona</a:t>
-            </a:r>
-          </a:p>
-        </p:txBody>
-      </p:sp>
-      <p:sp>
-        <p:nvSpPr>
-          <p:cNvPr id="103" name="Divider"/>
-          <p:cNvSpPr>
-            <a:spLocks noGrp="1"/>
-          </p:cNvSpPr>
-          <p:nvPr/>
-        </p:nvSpPr>
-        <p:spPr>
-          <a:xfrm>
-            <a:off x="6096000" y="0"/>
-            <a:ext cx="12700" cy="6858000"/>
-          </a:xfrm>
-          <a:prstGeom prst="rect">
-            <a:avLst/>
-          </a:prstGeom>
-          <a:solidFill>
-            <a:srgbClr val="CCCCCC"/>
-          </a:solidFill>
-          <a:ln>
-            <a:noFill/>
-          </a:ln>
-        </p:spPr>
-        <p:txBody>
-          <a:bodyPr/>
-          <a:lstStyle/>
-          <a:p>
-            <a:endParaRPr/>
-          </a:p>
-        </p:txBody>
-      </p:sp>
-      <p:sp>
-        <p:nvSpPr>
-          <p:cNvPr id="104" name="LeftIconZone"/>
-          <p:cNvSpPr>
-            <a:spLocks noGrp="1"/>
-          </p:cNvSpPr>
-          <p:nvPr/>
-        </p:nvSpPr>
-        <p:spPr>
-          <a:xfrm>
-            <a:off x="508000" y="660400"/>
-            <a:ext cx="5334000" cy="1905000"/>
-          </a:xfrm>
-          <a:prstGeom prst="rect">
-            <a:avLst/>
-          </a:prstGeom>
-          <a:solidFill>
-            <a:srgbClr val="E8F1F8"/>
-          </a:solidFill>
-          <a:ln>
-            <a:noFill/>
-          </a:ln>
-        </p:spPr>
-        <p:txBody>
-          <a:bodyPr anchor="ctr"/>
-          <a:lstStyle/>
-          <a:p>
-            <a:pPr algn="ctr">
+          <a:bodyPr vert="horz" anchor="ctr" anchorCtr="1">
+            <a:noAutofit/>
+          </a:bodyPr>
+          <a:lstStyle/>
+          <a:p>
+            <a:pPr>
               <a:buNone/>
             </a:pPr>
             <a:endParaRPr/>
@@ -4239,315 +3744,757 @@
       </p:sp>
       <p:sp>
         <p:nvSpPr>
-          <p:cNvPr id="105" name="RightIconZone"/>
-          <p:cNvSpPr>
-            <a:spLocks noGrp="1"/>
-          </p:cNvSpPr>
-          <p:nvPr/>
-        </p:nvSpPr>
-        <p:spPr>
-          <a:xfrm>
-            <a:off x="6350000" y="660400"/>
-            <a:ext cx="5334000" cy="1905000"/>
-          </a:xfrm>
-          <a:prstGeom prst="rect">
-            <a:avLst/>
-          </a:prstGeom>
-          <a:solidFill>
-            <a:srgbClr val="F3EAF7"/>
-          </a:solidFill>
-          <a:ln>
-            <a:noFill/>
-          </a:ln>
-        </p:spPr>
-        <p:txBody>
-          <a:bodyPr anchor="ctr"/>
+          <p:cNvPr id="21" name="TitleText"/>
+          <p:cNvSpPr>
+            <a:spLocks noGrp="1"/>
+          </p:cNvSpPr>
+          <p:nvPr/>
+        </p:nvSpPr>
+        <p:spPr>
+          <a:xfrm>
+            <a:off x="508000" y="228600"/>
+            <a:ext cx="11176000" cy="1168400"/>
+          </a:xfrm>
+          <a:prstGeom prst="rect">
+            <a:avLst/>
+          </a:prstGeom>
+          <a:solidFill>
+            <a:srgbClr val="1F4E79"/>
+          </a:solidFill>
+          <a:ln>
+            <a:noFill/>
+          </a:ln>
+        </p:spPr>
+        <p:txBody>
+          <a:bodyPr vert="horz" anchor="ctr" anchorCtr="1">
+            <a:noAutofit/>
+          </a:bodyPr>
+          <a:lstStyle/>
+          <a:p>
+            <a:pPr algn="l">
+              <a:buNone/>
+            </a:pPr>
+            <a:r>
+              <a:rPr lang="en-US" sz="3200" b="1" dirty="0">
+                <a:solidFill>
+                  <a:srgbClr val="FFFFFF"/>
+                </a:solidFill>
+              </a:rPr>
+              <a:t>Leveraging Personas in LLMs</a:t>
+            </a:r>
+          </a:p>
+          <a:p>
+            <a:pPr algn="l">
+              <a:buNone/>
+            </a:pPr>
+            <a:r>
+              <a:rPr lang="en-US" sz="1600" i="1" dirty="0">
+                <a:solidFill>
+                  <a:srgbClr val="AED4F0"/>
+                </a:solidFill>
+              </a:rPr>
+              <a:t>Introduction</a:t>
+            </a:r>
+          </a:p>
+        </p:txBody>
+      </p:sp>
+      <p:sp>
+        <p:nvSpPr>
+          <p:cNvPr id="22" name="Box1"/>
+          <p:cNvSpPr>
+            <a:spLocks noGrp="1"/>
+          </p:cNvSpPr>
+          <p:nvPr/>
+        </p:nvSpPr>
+        <p:spPr>
+          <a:xfrm>
+            <a:off x="698500" y="1968500"/>
+            <a:ext cx="2921000" cy="1397000"/>
+          </a:xfrm>
+          <a:prstGeom prst="roundRect">
+            <a:avLst>
+              <a:gd name="adj" fmla="val 3000"/>
+            </a:avLst>
+          </a:prstGeom>
+          <a:solidFill>
+            <a:srgbClr val="7B2D8E"/>
+          </a:solidFill>
+          <a:ln>
+            <a:noFill/>
+          </a:ln>
+        </p:spPr>
+        <p:txBody>
+          <a:bodyPr vert="horz" anchor="ctr" anchorCtr="1">
+            <a:noAutofit/>
+          </a:bodyPr>
           <a:lstStyle/>
           <a:p>
             <a:pPr algn="ctr">
+              <a:buNone/>
+            </a:pPr>
+            <a:r>
+              <a:rPr lang="en-US" sz="1800" b="1" dirty="0">
+                <a:solidFill>
+                  <a:srgbClr val="FFFFFF"/>
+                </a:solidFill>
+              </a:rPr>
+              <a:t>Persona</a:t>
+            </a:r>
+          </a:p>
+          <a:p>
+            <a:pPr algn="ctr">
+              <a:buNone/>
+            </a:pPr>
+            <a:r>
+              <a:rPr lang="en-US" sz="1400" dirty="0">
+                <a:solidFill>
+                  <a:srgbClr val="E5C4F0"/>
+                </a:solidFill>
+              </a:rPr>
+              <a:t>persona.md</a:t>
+            </a:r>
+          </a:p>
+        </p:txBody>
+      </p:sp>
+      <p:sp>
+        <p:nvSpPr>
+          <p:cNvPr id="23" name="Box2"/>
+          <p:cNvSpPr>
+            <a:spLocks noGrp="1"/>
+          </p:cNvSpPr>
+          <p:nvPr/>
+        </p:nvSpPr>
+        <p:spPr>
+          <a:xfrm>
+            <a:off x="4635500" y="1968500"/>
+            <a:ext cx="2921000" cy="1397000"/>
+          </a:xfrm>
+          <a:prstGeom prst="roundRect">
+            <a:avLst>
+              <a:gd name="adj" fmla="val 3000"/>
+            </a:avLst>
+          </a:prstGeom>
+          <a:solidFill>
+            <a:srgbClr val="AED4F0"/>
+          </a:solidFill>
+          <a:ln>
+            <a:noFill/>
+          </a:ln>
+        </p:spPr>
+        <p:txBody>
+          <a:bodyPr vert="horz" anchor="ctr" anchorCtr="1">
+            <a:noAutofit/>
+          </a:bodyPr>
+          <a:lstStyle/>
+          <a:p>
+            <a:pPr algn="ctr">
+              <a:buNone/>
+            </a:pPr>
+            <a:r>
+              <a:rPr lang="en-US" sz="1800" b="1" dirty="0">
+                <a:solidFill>
+                  <a:srgbClr val="1F4E79"/>
+                </a:solidFill>
+              </a:rPr>
+              <a:t>Markdown File</a:t>
+            </a:r>
+          </a:p>
+          <a:p>
+            <a:pPr algn="ctr">
+              <a:buNone/>
+            </a:pPr>
+            <a:r>
+              <a:rPr lang="en-US" sz="1400" dirty="0">
+                <a:solidFill>
+                  <a:srgbClr val="555555"/>
+                </a:solidFill>
+              </a:rPr>
+              <a:t>Plain text • portable • readable</a:t>
+            </a:r>
+          </a:p>
+        </p:txBody>
+      </p:sp>
+      <p:sp>
+        <p:nvSpPr>
+          <p:cNvPr id="24" name="Box3"/>
+          <p:cNvSpPr>
+            <a:spLocks noGrp="1"/>
+          </p:cNvSpPr>
+          <p:nvPr/>
+        </p:nvSpPr>
+        <p:spPr>
+          <a:xfrm>
+            <a:off x="8572500" y="1968500"/>
+            <a:ext cx="2921000" cy="1397000"/>
+          </a:xfrm>
+          <a:prstGeom prst="roundRect">
+            <a:avLst>
+              <a:gd name="adj" fmla="val 3000"/>
+            </a:avLst>
+          </a:prstGeom>
+          <a:solidFill>
+            <a:srgbClr val="1F4E79"/>
+          </a:solidFill>
+          <a:ln>
+            <a:noFill/>
+          </a:ln>
+        </p:spPr>
+        <p:txBody>
+          <a:bodyPr vert="horz" anchor="ctr" anchorCtr="1">
+            <a:noAutofit/>
+          </a:bodyPr>
+          <a:lstStyle/>
+          <a:p>
+            <a:pPr algn="ctr">
+              <a:buNone/>
+            </a:pPr>
+            <a:r>
+              <a:rPr lang="en-US" sz="1800" b="1" dirty="0">
+                <a:solidFill>
+                  <a:srgbClr val="FFFFFF"/>
+                </a:solidFill>
+              </a:rPr>
+              <a:t>Context</a:t>
+            </a:r>
+          </a:p>
+          <a:p>
+            <a:pPr algn="ctr">
+              <a:buNone/>
+            </a:pPr>
+            <a:r>
+              <a:rPr lang="en-US" sz="1400" dirty="0">
+                <a:solidFill>
+                  <a:srgbClr val="AED4F0"/>
+                </a:solidFill>
+              </a:rPr>
+              <a:t>Any LLM • Any platform</a:t>
+            </a:r>
+          </a:p>
+        </p:txBody>
+      </p:sp>
+      <p:sp>
+        <p:nvSpPr>
+          <p:cNvPr id="25" name="Arrow1"/>
+          <p:cNvSpPr>
+            <a:spLocks noGrp="1"/>
+          </p:cNvSpPr>
+          <p:nvPr/>
+        </p:nvSpPr>
+        <p:spPr>
+          <a:xfrm>
+            <a:off x="3708400" y="2451100"/>
+            <a:ext cx="863600" cy="431800"/>
+          </a:xfrm>
+          <a:prstGeom prst="rightArrow">
+            <a:avLst>
+              <a:gd name="adj1" fmla="val 50000"/>
+              <a:gd name="adj2" fmla="val 50000"/>
+            </a:avLst>
+          </a:prstGeom>
+          <a:solidFill>
+            <a:srgbClr val="7B2D8E"/>
+          </a:solidFill>
+          <a:ln>
+            <a:noFill/>
+          </a:ln>
+        </p:spPr>
+        <p:txBody>
+          <a:bodyPr/>
+          <a:lstStyle/>
+          <a:p>
+            <a:endParaRPr/>
+          </a:p>
+        </p:txBody>
+      </p:sp>
+      <p:sp>
+        <p:nvSpPr>
+          <p:cNvPr id="26" name="Arrow2"/>
+          <p:cNvSpPr>
+            <a:spLocks noGrp="1"/>
+          </p:cNvSpPr>
+          <p:nvPr/>
+        </p:nvSpPr>
+        <p:spPr>
+          <a:xfrm>
+            <a:off x="7645400" y="2451100"/>
+            <a:ext cx="863600" cy="431800"/>
+          </a:xfrm>
+          <a:prstGeom prst="rightArrow">
+            <a:avLst>
+              <a:gd name="adj1" fmla="val 50000"/>
+              <a:gd name="adj2" fmla="val 50000"/>
+            </a:avLst>
+          </a:prstGeom>
+          <a:solidFill>
+            <a:srgbClr val="1F4E79"/>
+          </a:solidFill>
+          <a:ln>
+            <a:noFill/>
+          </a:ln>
+        </p:spPr>
+        <p:txBody>
+          <a:bodyPr/>
+          <a:lstStyle/>
+          <a:p>
+            <a:endParaRPr/>
+          </a:p>
+        </p:txBody>
+      </p:sp>
+      <p:sp>
+        <p:nvSpPr>
+          <p:cNvPr id="27" name="IsLabel1"/>
+          <p:cNvSpPr>
+            <a:spLocks noGrp="1"/>
+          </p:cNvSpPr>
+          <p:nvPr/>
+        </p:nvSpPr>
+        <p:spPr>
+          <a:xfrm>
+            <a:off x="3708400" y="2324100"/>
+            <a:ext cx="863600" cy="228600"/>
+          </a:xfrm>
+          <a:prstGeom prst="rect">
+            <a:avLst/>
+          </a:prstGeom>
+          <a:solidFill>
+            <a:srgbClr val="F2F4F7"/>
+          </a:solidFill>
+          <a:ln>
+            <a:noFill/>
+          </a:ln>
+        </p:spPr>
+        <p:txBody>
+          <a:bodyPr vert="horz" anchor="ctr" anchorCtr="1">
+            <a:noAutofit/>
+          </a:bodyPr>
+          <a:lstStyle/>
+          <a:p>
+            <a:pPr algn="ctr">
+              <a:buNone/>
+            </a:pPr>
+            <a:r>
+              <a:rPr lang="en-US" sz="1100" b="1" dirty="0">
+                <a:solidFill>
+                  <a:srgbClr val="555555"/>
+                </a:solidFill>
+              </a:rPr>
+              <a:t>IS JUST</a:t>
+            </a:r>
+          </a:p>
+        </p:txBody>
+      </p:sp>
+      <p:sp>
+        <p:nvSpPr>
+          <p:cNvPr id="28" name="IsLabel2"/>
+          <p:cNvSpPr>
+            <a:spLocks noGrp="1"/>
+          </p:cNvSpPr>
+          <p:nvPr/>
+        </p:nvSpPr>
+        <p:spPr>
+          <a:xfrm>
+            <a:off x="7645400" y="2324100"/>
+            <a:ext cx="863600" cy="228600"/>
+          </a:xfrm>
+          <a:prstGeom prst="rect">
+            <a:avLst/>
+          </a:prstGeom>
+          <a:solidFill>
+            <a:srgbClr val="F2F4F7"/>
+          </a:solidFill>
+          <a:ln>
+            <a:noFill/>
+          </a:ln>
+        </p:spPr>
+        <p:txBody>
+          <a:bodyPr vert="horz" anchor="ctr" anchorCtr="1">
+            <a:noAutofit/>
+          </a:bodyPr>
+          <a:lstStyle/>
+          <a:p>
+            <a:pPr algn="ctr">
+              <a:buNone/>
+            </a:pPr>
+            <a:r>
+              <a:rPr lang="en-US" sz="1100" b="1" dirty="0">
+                <a:solidFill>
+                  <a:srgbClr val="555555"/>
+                </a:solidFill>
+              </a:rPr>
+              <a:t>IS JUST</a:t>
+            </a:r>
+          </a:p>
+        </p:txBody>
+      </p:sp>
+      <p:sp>
+        <p:nvSpPr>
+          <p:cNvPr id="29" name="PortHeader"/>
+          <p:cNvSpPr>
+            <a:spLocks noGrp="1"/>
+          </p:cNvSpPr>
+          <p:nvPr/>
+        </p:nvSpPr>
+        <p:spPr>
+          <a:xfrm>
+            <a:off x="698500" y="3746500"/>
+            <a:ext cx="10795000" cy="355600"/>
+          </a:xfrm>
+          <a:prstGeom prst="rect">
+            <a:avLst/>
+          </a:prstGeom>
+          <a:solidFill>
+            <a:srgbClr val="F2F4F7"/>
+          </a:solidFill>
+          <a:ln>
+            <a:noFill/>
+          </a:ln>
+        </p:spPr>
+        <p:txBody>
+          <a:bodyPr vert="horz" anchor="ctr" anchorCtr="1">
+            <a:noAutofit/>
+          </a:bodyPr>
+          <a:lstStyle/>
+          <a:p>
+            <a:pPr algn="ctr">
+              <a:buNone/>
+            </a:pPr>
+            <a:r>
+              <a:rPr lang="en-US" sz="1400" b="1" dirty="0">
+                <a:solidFill>
+                  <a:srgbClr val="555555"/>
+                </a:solidFill>
+              </a:rPr>
+              <a:t>Works in any LLM platform</a:t>
+            </a:r>
+          </a:p>
+        </p:txBody>
+      </p:sp>
+      <p:sp>
+        <p:nvSpPr>
+          <p:cNvPr id="30" name="ClaudePill"/>
+          <p:cNvSpPr>
+            <a:spLocks noGrp="1"/>
+          </p:cNvSpPr>
+          <p:nvPr/>
+        </p:nvSpPr>
+        <p:spPr>
+          <a:xfrm>
+            <a:off x="698500" y="4191000"/>
+            <a:ext cx="2032000" cy="558800"/>
+          </a:xfrm>
+          <a:prstGeom prst="roundRect">
+            <a:avLst>
+              <a:gd name="adj" fmla="val 16000"/>
+            </a:avLst>
+          </a:prstGeom>
+          <a:solidFill>
+            <a:srgbClr val="E5C4F0"/>
+          </a:solidFill>
+          <a:ln>
+            <a:noFill/>
+          </a:ln>
+        </p:spPr>
+        <p:txBody>
+          <a:bodyPr vert="horz" anchor="ctr" anchorCtr="1">
+            <a:noAutofit/>
+          </a:bodyPr>
+          <a:lstStyle/>
+          <a:p>
+            <a:pPr algn="ctr">
+              <a:buNone/>
+            </a:pPr>
+            <a:r>
+              <a:rPr lang="en-US" sz="1400" b="1" dirty="0">
+                <a:solidFill>
+                  <a:srgbClr val="7B2D8E"/>
+                </a:solidFill>
+              </a:rPr>
+              <a:t>Claude</a:t>
+            </a:r>
+          </a:p>
+        </p:txBody>
+      </p:sp>
+      <p:sp>
+        <p:nvSpPr>
+          <p:cNvPr id="31" name="ChatGPTPill"/>
+          <p:cNvSpPr>
+            <a:spLocks noGrp="1"/>
+          </p:cNvSpPr>
+          <p:nvPr/>
+        </p:nvSpPr>
+        <p:spPr>
+          <a:xfrm>
+            <a:off x="2857500" y="4191000"/>
+            <a:ext cx="2032000" cy="558800"/>
+          </a:xfrm>
+          <a:prstGeom prst="roundRect">
+            <a:avLst>
+              <a:gd name="adj" fmla="val 16000"/>
+            </a:avLst>
+          </a:prstGeom>
+          <a:solidFill>
+            <a:srgbClr val="AED4F0"/>
+          </a:solidFill>
+          <a:ln>
+            <a:noFill/>
+          </a:ln>
+        </p:spPr>
+        <p:txBody>
+          <a:bodyPr vert="horz" anchor="ctr" anchorCtr="1">
+            <a:noAutofit/>
+          </a:bodyPr>
+          <a:lstStyle/>
+          <a:p>
+            <a:pPr algn="ctr">
+              <a:buNone/>
+            </a:pPr>
+            <a:r>
+              <a:rPr lang="en-US" sz="1400" b="1" dirty="0">
+                <a:solidFill>
+                  <a:srgbClr val="1F4E79"/>
+                </a:solidFill>
+              </a:rPr>
+              <a:t>ChatGPT</a:t>
+            </a:r>
+          </a:p>
+        </p:txBody>
+      </p:sp>
+      <p:sp>
+        <p:nvSpPr>
+          <p:cNvPr id="32" name="GeminiPill"/>
+          <p:cNvSpPr>
+            <a:spLocks noGrp="1"/>
+          </p:cNvSpPr>
+          <p:nvPr/>
+        </p:nvSpPr>
+        <p:spPr>
+          <a:xfrm>
+            <a:off x="5016500" y="4191000"/>
+            <a:ext cx="2032000" cy="558800"/>
+          </a:xfrm>
+          <a:prstGeom prst="roundRect">
+            <a:avLst>
+              <a:gd name="adj" fmla="val 16000"/>
+            </a:avLst>
+          </a:prstGeom>
+          <a:solidFill>
+            <a:srgbClr val="AED4F0"/>
+          </a:solidFill>
+          <a:ln>
+            <a:noFill/>
+          </a:ln>
+        </p:spPr>
+        <p:txBody>
+          <a:bodyPr vert="horz" anchor="ctr" anchorCtr="1">
+            <a:noAutofit/>
+          </a:bodyPr>
+          <a:lstStyle/>
+          <a:p>
+            <a:pPr algn="ctr">
+              <a:buNone/>
+            </a:pPr>
+            <a:r>
+              <a:rPr lang="en-US" sz="1400" b="1" dirty="0">
+                <a:solidFill>
+                  <a:srgbClr val="1F4E79"/>
+                </a:solidFill>
+              </a:rPr>
+              <a:t>Gemini</a:t>
+            </a:r>
+          </a:p>
+        </p:txBody>
+      </p:sp>
+      <p:sp>
+        <p:nvSpPr>
+          <p:cNvPr id="33" name="CopilotPill"/>
+          <p:cNvSpPr>
+            <a:spLocks noGrp="1"/>
+          </p:cNvSpPr>
+          <p:nvPr/>
+        </p:nvSpPr>
+        <p:spPr>
+          <a:xfrm>
+            <a:off x="7175500" y="4191000"/>
+            <a:ext cx="2032000" cy="558800"/>
+          </a:xfrm>
+          <a:prstGeom prst="roundRect">
+            <a:avLst>
+              <a:gd name="adj" fmla="val 16000"/>
+            </a:avLst>
+          </a:prstGeom>
+          <a:solidFill>
+            <a:srgbClr val="AED4F0"/>
+          </a:solidFill>
+          <a:ln>
+            <a:noFill/>
+          </a:ln>
+        </p:spPr>
+        <p:txBody>
+          <a:bodyPr vert="horz" anchor="ctr" anchorCtr="1">
+            <a:noAutofit/>
+          </a:bodyPr>
+          <a:lstStyle/>
+          <a:p>
+            <a:pPr algn="ctr">
+              <a:buNone/>
+            </a:pPr>
+            <a:r>
+              <a:rPr lang="en-US" sz="1400" b="1" dirty="0">
+                <a:solidFill>
+                  <a:srgbClr val="1F4E79"/>
+                </a:solidFill>
+              </a:rPr>
+              <a:t>Copilot</a:t>
+            </a:r>
+          </a:p>
+        </p:txBody>
+      </p:sp>
+      <p:sp>
+        <p:nvSpPr>
+          <p:cNvPr id="34" name="OthersPill"/>
+          <p:cNvSpPr>
+            <a:spLocks noGrp="1"/>
+          </p:cNvSpPr>
+          <p:nvPr/>
+        </p:nvSpPr>
+        <p:spPr>
+          <a:xfrm>
+            <a:off x="9334500" y="4191000"/>
+            <a:ext cx="2032000" cy="558800"/>
+          </a:xfrm>
+          <a:prstGeom prst="roundRect">
+            <a:avLst>
+              <a:gd name="adj" fmla="val 16000"/>
+            </a:avLst>
+          </a:prstGeom>
+          <a:solidFill>
+            <a:srgbClr val="F2F4F7"/>
+          </a:solidFill>
+          <a:ln>
+            <a:noFill/>
+          </a:ln>
+        </p:spPr>
+        <p:txBody>
+          <a:bodyPr vert="horz" anchor="ctr" anchorCtr="1">
+            <a:noAutofit/>
+          </a:bodyPr>
+          <a:lstStyle/>
+          <a:p>
+            <a:pPr algn="ctr">
+              <a:buNone/>
+            </a:pPr>
+            <a:r>
+              <a:rPr lang="en-US" sz="1400" b="1" dirty="0">
+                <a:solidFill>
+                  <a:srgbClr val="555555"/>
+                </a:solidFill>
+              </a:rPr>
+              <a:t>...and more</a:t>
+            </a:r>
+          </a:p>
+        </p:txBody>
+      </p:sp>
+      <p:sp>
+        <p:nvSpPr>
+          <p:cNvPr id="35" name="Caption"/>
+          <p:cNvSpPr>
+            <a:spLocks noGrp="1"/>
+          </p:cNvSpPr>
+          <p:nvPr/>
+        </p:nvSpPr>
+        <p:spPr>
+          <a:xfrm>
+            <a:off x="698500" y="5080000"/>
+            <a:ext cx="10795000" cy="457200"/>
+          </a:xfrm>
+          <a:prstGeom prst="roundRect">
+            <a:avLst>
+              <a:gd name="adj" fmla="val 2000"/>
+            </a:avLst>
+          </a:prstGeom>
+          <a:solidFill>
+            <a:srgbClr val="F2F4F7"/>
+          </a:solidFill>
+          <a:ln>
+            <a:noFill/>
+          </a:ln>
+        </p:spPr>
+        <p:txBody>
+          <a:bodyPr vert="horz" anchor="ctr" anchorCtr="1">
+            <a:noAutofit/>
+          </a:bodyPr>
+          <a:lstStyle/>
+          <a:p>
+            <a:pPr algn="ctr">
+              <a:buNone/>
+            </a:pPr>
+            <a:r>
+              <a:rPr lang="en-US" sz="1400" dirty="0">
+                <a:solidFill>
+                  <a:srgbClr val="555555"/>
+                </a:solidFill>
+              </a:rPr>
+              <a:t>A persona is a </a:t>
+            </a:r>
+            <a:r>
+              <a:rPr lang="en-US" sz="1400" b="1" dirty="0">
+                <a:solidFill>
+                  <a:srgbClr val="7B2D8E"/>
+                </a:solidFill>
+              </a:rPr>
+              <a:t>.md file</a:t>
+            </a:r>
+            <a:r>
+              <a:rPr lang="en-US" sz="1400" dirty="0">
+                <a:solidFill>
+                  <a:srgbClr val="555555"/>
+                </a:solidFill>
+              </a:rPr>
+              <a:t> you paste into any LLM’s context window — nothing more, nothing less.</a:t>
+            </a:r>
+          </a:p>
+        </p:txBody>
+      </p:sp>
+      <p:sp>
+        <p:nvSpPr>
+          <p:cNvPr id="36" name="AccentLine"/>
+          <p:cNvSpPr>
+            <a:spLocks noGrp="1"/>
+          </p:cNvSpPr>
+          <p:nvPr/>
+        </p:nvSpPr>
+        <p:spPr>
+          <a:xfrm>
+            <a:off x="0" y="6604000"/>
+            <a:ext cx="12192000" cy="76200"/>
+          </a:xfrm>
+          <a:prstGeom prst="rect">
+            <a:avLst/>
+          </a:prstGeom>
+          <a:solidFill>
+            <a:srgbClr val="7B2D8E"/>
+          </a:solidFill>
+          <a:ln>
+            <a:noFill/>
+          </a:ln>
+        </p:spPr>
+        <p:txBody>
+          <a:bodyPr vert="horz" anchor="ctr" anchorCtr="1">
+            <a:noAutofit/>
+          </a:bodyPr>
+          <a:lstStyle/>
+          <a:p>
+            <a:pPr>
               <a:buNone/>
             </a:pPr>
             <a:endParaRPr/>
           </a:p>
         </p:txBody>
       </p:sp>
-      <p:sp>
-        <p:nvSpPr>
-          <p:cNvPr id="108" name="LeftContent"/>
-          <p:cNvSpPr>
-            <a:spLocks noGrp="1"/>
-          </p:cNvSpPr>
-          <p:nvPr/>
-        </p:nvSpPr>
-        <p:spPr>
-          <a:xfrm>
-            <a:off x="508000" y="2667000"/>
-            <a:ext cx="5334000" cy="4064000"/>
-          </a:xfrm>
-          <a:prstGeom prst="rect">
-            <a:avLst/>
-          </a:prstGeom>
-          <a:solidFill>
-            <a:srgbClr val="F7FAFD"/>
-          </a:solidFill>
-          <a:ln>
-            <a:noFill/>
-          </a:ln>
-        </p:spPr>
-        <p:txBody>
-          <a:bodyPr lIns="342900" tIns="342900" rIns="342900" anchor="t"/>
-          <a:lstStyle/>
-          <a:p>
-            <a:pPr algn="ctr">
-              <a:spcBef>
-                <a:spcPts val="400"/>
-              </a:spcBef>
-              <a:spcAft>
-                <a:spcPts val="200"/>
-              </a:spcAft>
-              <a:buNone/>
-            </a:pPr>
-            <a:r>
-              <a:rPr lang="en-US" sz="1600" b="1" dirty="0">
-                <a:solidFill>
-                  <a:srgbClr val="1F4E79"/>
-                </a:solidFill>
-              </a:rPr>
-              <a:t>How you work with context</a:t>
-            </a:r>
-          </a:p>
-          <a:p>
-            <a:pPr marL="342900" indent="-342900">
-              <a:spcBef>
-                <a:spcPts val="200"/>
-              </a:spcBef>
-              <a:buFont typeface="Arial"/>
-              <a:buChar char="•"/>
-            </a:pPr>
-            <a:r>
-              <a:rPr lang="en-US" sz="1500" dirty="0">
-                <a:solidFill>
-                  <a:srgbClr val="444444"/>
-                </a:solidFill>
-              </a:rPr>
-              <a:t>Upload an Excel Spreadsheet</a:t>
-            </a:r>
-          </a:p>
-          <a:p>
-            <a:pPr marL="342900" indent="-342900">
-              <a:spcBef>
-                <a:spcPts val="200"/>
-              </a:spcBef>
-              <a:buFont typeface="Arial"/>
-              <a:buChar char="•"/>
-            </a:pPr>
-            <a:r>
-              <a:rPr lang="en-US" sz="1500" dirty="0">
-                <a:solidFill>
-                  <a:srgbClr val="444444"/>
-                </a:solidFill>
-              </a:rPr>
-              <a:t>Ask agent to get a list of products</a:t>
-            </a:r>
-          </a:p>
-          <a:p>
-            <a:pPr marL="342900" indent="-342900">
-              <a:spcBef>
-                <a:spcPts val="200"/>
-              </a:spcBef>
-              <a:buFont typeface="Arial"/>
-              <a:buChar char="•"/>
-            </a:pPr>
-            <a:r>
-              <a:rPr lang="en-US" sz="1500" dirty="0">
-                <a:solidFill>
-                  <a:srgbClr val="444444"/>
-                </a:solidFill>
-              </a:rPr>
-              <a:t>Ask agent to query the database to get the total sales volume and put into the spreadsheet.</a:t>
-            </a:r>
-          </a:p>
-          <a:p>
-            <a:pPr marL="342900" indent="-342900">
-              <a:spcBef>
-                <a:spcPts val="200"/>
-              </a:spcBef>
-              <a:buFont typeface="Arial"/>
-              <a:buChar char="•"/>
-            </a:pPr>
-            <a:r>
-              <a:rPr lang="en-US" sz="1500" dirty="0">
-                <a:solidFill>
-                  <a:srgbClr val="444444"/>
-                </a:solidFill>
-              </a:rPr>
-              <a:t>Agent uses MCP tool or CLI to work with database</a:t>
-            </a:r>
-          </a:p>
-          <a:p>
-            <a:pPr marL="342900" indent="-342900">
-              <a:spcBef>
-                <a:spcPts val="200"/>
-              </a:spcBef>
-              <a:buFont typeface="Arial"/>
-              <a:buChar char="•"/>
-            </a:pPr>
-            <a:r>
-              <a:rPr lang="en-US" sz="1500" dirty="0">
-                <a:solidFill>
-                  <a:srgbClr val="444444"/>
-                </a:solidFill>
-              </a:rPr>
-              <a:t>Ask agent to get the top 10 grossing products</a:t>
-            </a:r>
-          </a:p>
-          <a:p>
-            <a:pPr marL="342900" indent="-342900">
-              <a:spcBef>
-                <a:spcPts val="200"/>
-              </a:spcBef>
-              <a:buFont typeface="Arial"/>
-              <a:buChar char="•"/>
-            </a:pPr>
-            <a:r>
-              <a:rPr lang="en-US" sz="1500" dirty="0">
-                <a:solidFill>
-                  <a:srgbClr val="444444"/>
-                </a:solidFill>
-              </a:rPr>
-              <a:t>Ask agent to notify team members by email</a:t>
-            </a:r>
-          </a:p>
-        </p:txBody>
-      </p:sp>
-      <p:sp>
-        <p:nvSpPr>
-          <p:cNvPr id="109" name="RightContent"/>
-          <p:cNvSpPr>
-            <a:spLocks noGrp="1"/>
-          </p:cNvSpPr>
-          <p:nvPr/>
-        </p:nvSpPr>
-        <p:spPr>
-          <a:xfrm>
-            <a:off x="6350000" y="2667000"/>
-            <a:ext cx="5334000" cy="4064000"/>
-          </a:xfrm>
-          <a:prstGeom prst="rect">
-            <a:avLst/>
-          </a:prstGeom>
-          <a:solidFill>
-            <a:srgbClr val="FAF4FD"/>
-          </a:solidFill>
-          <a:ln>
-            <a:noFill/>
-          </a:ln>
-        </p:spPr>
-        <p:txBody>
-          <a:bodyPr lIns="342900" tIns="342900" rIns="342900" anchor="t"/>
-          <a:lstStyle/>
-          <a:p>
-            <a:pPr algn="ctr">
-              <a:spcBef>
-                <a:spcPts val="400"/>
-              </a:spcBef>
-              <a:spcAft>
-                <a:spcPts val="200"/>
-              </a:spcAft>
-              <a:buNone/>
-            </a:pPr>
-            <a:r>
-              <a:rPr lang="en-US" sz="1600" b="1" dirty="0">
-                <a:solidFill>
-                  <a:srgbClr val="7B2D8E"/>
-                </a:solidFill>
-              </a:rPr>
-              <a:t>How you work with a persona</a:t>
-            </a:r>
-          </a:p>
-          <a:p>
-            <a:pPr marL="342900" indent="-342900">
-              <a:spcBef>
-                <a:spcPts val="200"/>
-              </a:spcBef>
-              <a:buFont typeface="Arial"/>
-              <a:buChar char="•"/>
-            </a:pPr>
-            <a:r>
-              <a:rPr lang="en-US" sz="1500" dirty="0">
-                <a:solidFill>
-                  <a:srgbClr val="444444"/>
-                </a:solidFill>
-              </a:rPr>
-              <a:t>Dana, can you send the top 10 grossing products that were included in last month’s sales spreadsheet and send it to the marketing team. Add a column for the sales volume for each product. </a:t>
-            </a:r>
-          </a:p>
-        </p:txBody>
-      </p:sp>
-      <p:pic>
-        <p:nvPicPr>
-          <p:cNvPr id="110" name="Graphic 110" descr="Cog/gear icon representing context"/>
-          <p:cNvPicPr>
-            <a:picLocks noChangeAspect="1"/>
-          </p:cNvPicPr>
-          <p:nvPr/>
-        </p:nvPicPr>
-        <p:blipFill>
-          <a:blip>
-            <a:extLst>
-              <a:ext uri="{96DAC541-7B7A-43D3-8B79-37D633B846F1}">
-                <asvg:svgBlip xmlns:asvg="http://schemas.microsoft.com/office/drawing/2016/SVG/main" r:embed="rId2"/>
-              </a:ext>
-            </a:extLst>
-          </a:blip>
-          <a:stretch>
-            <a:fillRect/>
-          </a:stretch>
-        </p:blipFill>
-        <p:spPr>
-          <a:xfrm>
-            <a:off x="2413000" y="977900"/>
-            <a:ext cx="1270000" cy="1270000"/>
-          </a:xfrm>
-          <a:prstGeom prst="rect">
-            <a:avLst/>
-          </a:prstGeom>
-        </p:spPr>
-      </p:pic>
-      <p:pic>
-        <p:nvPicPr>
-          <p:cNvPr id="111" name="Graphic 111" descr="Person avatar icon representing persona"/>
-          <p:cNvPicPr>
-            <a:picLocks noChangeAspect="1"/>
-          </p:cNvPicPr>
-          <p:nvPr/>
-        </p:nvPicPr>
-        <p:blipFill>
-          <a:blip>
-            <a:extLst>
-              <a:ext uri="{96DAC541-7B7A-43D3-8B79-37D633B846F1}">
-                <asvg:svgBlip xmlns:asvg="http://schemas.microsoft.com/office/drawing/2016/SVG/main" r:embed="rId3"/>
-              </a:ext>
-            </a:extLst>
-          </a:blip>
-          <a:stretch>
-            <a:fillRect/>
-          </a:stretch>
-        </p:blipFill>
-        <p:spPr>
-          <a:xfrm>
-            <a:off x="8255000" y="977900"/>
-            <a:ext cx="1270000" cy="1270000"/>
-          </a:xfrm>
-          <a:prstGeom prst="rect">
-            <a:avLst/>
-          </a:prstGeom>
-        </p:spPr>
-      </p:pic>
     </p:spTree>
     <p:extLst>
       <p:ext uri="{BB962C8B-B14F-4D97-AF65-F5344CB8AC3E}">
-        <p14:creationId xmlns:p14="http://schemas.microsoft.com/office/powerpoint/2010/main" val="3918661051"/>
+        <p14:creationId xmlns:p14="http://schemas.microsoft.com/office/powerpoint/2010/main" val="209961800"/>
       </p:ext>
     </p:extLst>
   </p:cSld>
@@ -4576,22 +4523,22 @@
       </p:grpSpPr>
       <p:sp>
         <p:nvSpPr>
-          <p:cNvPr id="200" name="TitleBg"/>
-          <p:cNvSpPr>
-            <a:spLocks noGrp="1"/>
-          </p:cNvSpPr>
-          <p:nvPr/>
-        </p:nvSpPr>
-        <p:spPr>
-          <a:xfrm>
-            <a:off x="0" y="0"/>
-            <a:ext cx="12192000" cy="609600"/>
-          </a:xfrm>
-          <a:prstGeom prst="rect">
-            <a:avLst/>
-          </a:prstGeom>
-          <a:solidFill>
-            <a:srgbClr val="1A1A2E"/>
+          <p:cNvPr id="101" name="LeftHeader"/>
+          <p:cNvSpPr>
+            <a:spLocks noGrp="1"/>
+          </p:cNvSpPr>
+          <p:nvPr/>
+        </p:nvSpPr>
+        <p:spPr>
+          <a:xfrm>
+            <a:off x="508000" y="0"/>
+            <a:ext cx="5334000" cy="635000"/>
+          </a:xfrm>
+          <a:prstGeom prst="rect">
+            <a:avLst/>
+          </a:prstGeom>
+          <a:solidFill>
+            <a:srgbClr val="1F4E79"/>
           </a:solidFill>
           <a:ln>
             <a:noFill/>
@@ -4601,2777 +4548,437 @@
           <a:bodyPr anchor="ctr"/>
           <a:lstStyle/>
           <a:p>
+            <a:pPr algn="ctr">
+              <a:buNone/>
+            </a:pPr>
+            <a:r>
+              <a:rPr lang="en-US" sz="1600" b="1" i="0" dirty="0">
+                <a:solidFill>
+                  <a:srgbClr val="FFFFFF"/>
+                </a:solidFill>
+              </a:rPr>
+              <a:t>Working with Context</a:t>
+            </a:r>
+          </a:p>
+        </p:txBody>
+      </p:sp>
+      <p:sp>
+        <p:nvSpPr>
+          <p:cNvPr id="102" name="RightHeader"/>
+          <p:cNvSpPr>
+            <a:spLocks noGrp="1"/>
+          </p:cNvSpPr>
+          <p:nvPr/>
+        </p:nvSpPr>
+        <p:spPr>
+          <a:xfrm>
+            <a:off x="6350000" y="0"/>
+            <a:ext cx="5334000" cy="635000"/>
+          </a:xfrm>
+          <a:prstGeom prst="rect">
+            <a:avLst/>
+          </a:prstGeom>
+          <a:solidFill>
+            <a:srgbClr val="7B2D8E"/>
+          </a:solidFill>
+          <a:ln>
+            <a:noFill/>
+          </a:ln>
+        </p:spPr>
+        <p:txBody>
+          <a:bodyPr anchor="ctr"/>
+          <a:lstStyle/>
+          <a:p>
+            <a:pPr algn="ctr">
+              <a:buNone/>
+            </a:pPr>
+            <a:r>
+              <a:rPr lang="en-US" sz="1600" b="1" i="0" dirty="0">
+                <a:solidFill>
+                  <a:srgbClr val="FFFFFF"/>
+                </a:solidFill>
+              </a:rPr>
+              <a:t>Working with a Persona</a:t>
+            </a:r>
+          </a:p>
+        </p:txBody>
+      </p:sp>
+      <p:sp>
+        <p:nvSpPr>
+          <p:cNvPr id="103" name="Divider"/>
+          <p:cNvSpPr>
+            <a:spLocks noGrp="1"/>
+          </p:cNvSpPr>
+          <p:nvPr/>
+        </p:nvSpPr>
+        <p:spPr>
+          <a:xfrm>
+            <a:off x="6096000" y="0"/>
+            <a:ext cx="12700" cy="6858000"/>
+          </a:xfrm>
+          <a:prstGeom prst="rect">
+            <a:avLst/>
+          </a:prstGeom>
+          <a:solidFill>
+            <a:srgbClr val="CCCCCC"/>
+          </a:solidFill>
+          <a:ln>
+            <a:noFill/>
+          </a:ln>
+        </p:spPr>
+        <p:txBody>
+          <a:bodyPr/>
+          <a:lstStyle/>
+          <a:p>
             <a:endParaRPr/>
           </a:p>
         </p:txBody>
       </p:sp>
       <p:sp>
         <p:nvSpPr>
-          <p:cNvPr id="201" name="Title"/>
-          <p:cNvSpPr>
-            <a:spLocks noGrp="1"/>
-          </p:cNvSpPr>
-          <p:nvPr/>
-        </p:nvSpPr>
-        <p:spPr>
-          <a:xfrm>
-            <a:off x="0" y="0"/>
-            <a:ext cx="12192000" cy="609600"/>
-          </a:xfrm>
-          <a:prstGeom prst="rect">
-            <a:avLst/>
-          </a:prstGeom>
-          <a:noFill/>
-          <a:ln>
-            <a:noFill/>
-          </a:ln>
-        </p:spPr>
-        <p:txBody>
-          <a:bodyPr lIns="91440" tIns="45720" rIns="91440" bIns="45720" anchor="ctr"/>
+          <p:cNvPr id="104" name="LeftIconZone"/>
+          <p:cNvSpPr>
+            <a:spLocks noGrp="1"/>
+          </p:cNvSpPr>
+          <p:nvPr/>
+        </p:nvSpPr>
+        <p:spPr>
+          <a:xfrm>
+            <a:off x="508000" y="660400"/>
+            <a:ext cx="5334000" cy="1905000"/>
+          </a:xfrm>
+          <a:prstGeom prst="rect">
+            <a:avLst/>
+          </a:prstGeom>
+          <a:solidFill>
+            <a:srgbClr val="E8F1F8"/>
+          </a:solidFill>
+          <a:ln>
+            <a:noFill/>
+          </a:ln>
+        </p:spPr>
+        <p:txBody>
+          <a:bodyPr anchor="ctr"/>
           <a:lstStyle/>
           <a:p>
             <a:pPr algn="ctr">
               <a:buNone/>
             </a:pPr>
-            <a:r>
-              <a:rPr lang="en-US" sz="2000" b="1" i="0" dirty="0">
-                <a:solidFill>
-                  <a:srgbClr val="FFFFFF"/>
+            <a:endParaRPr/>
+          </a:p>
+        </p:txBody>
+      </p:sp>
+      <p:sp>
+        <p:nvSpPr>
+          <p:cNvPr id="105" name="RightIconZone"/>
+          <p:cNvSpPr>
+            <a:spLocks noGrp="1"/>
+          </p:cNvSpPr>
+          <p:nvPr/>
+        </p:nvSpPr>
+        <p:spPr>
+          <a:xfrm>
+            <a:off x="6350000" y="660400"/>
+            <a:ext cx="5334000" cy="1905000"/>
+          </a:xfrm>
+          <a:prstGeom prst="rect">
+            <a:avLst/>
+          </a:prstGeom>
+          <a:solidFill>
+            <a:srgbClr val="F3EAF7"/>
+          </a:solidFill>
+          <a:ln>
+            <a:noFill/>
+          </a:ln>
+        </p:spPr>
+        <p:txBody>
+          <a:bodyPr anchor="ctr"/>
+          <a:lstStyle/>
+          <a:p>
+            <a:pPr algn="ctr">
+              <a:buNone/>
+            </a:pPr>
+            <a:endParaRPr/>
+          </a:p>
+        </p:txBody>
+      </p:sp>
+      <p:sp>
+        <p:nvSpPr>
+          <p:cNvPr id="108" name="LeftContent"/>
+          <p:cNvSpPr>
+            <a:spLocks noGrp="1"/>
+          </p:cNvSpPr>
+          <p:nvPr/>
+        </p:nvSpPr>
+        <p:spPr>
+          <a:xfrm>
+            <a:off x="508000" y="2667000"/>
+            <a:ext cx="5334000" cy="4064000"/>
+          </a:xfrm>
+          <a:prstGeom prst="rect">
+            <a:avLst/>
+          </a:prstGeom>
+          <a:solidFill>
+            <a:srgbClr val="F7FAFD"/>
+          </a:solidFill>
+          <a:ln>
+            <a:noFill/>
+          </a:ln>
+        </p:spPr>
+        <p:txBody>
+          <a:bodyPr lIns="342900" tIns="342900" rIns="342900" anchor="t"/>
+          <a:lstStyle/>
+          <a:p>
+            <a:pPr algn="ctr">
+              <a:spcBef>
+                <a:spcPts val="400"/>
+              </a:spcBef>
+              <a:spcAft>
+                <a:spcPts val="200"/>
+              </a:spcAft>
+              <a:buNone/>
+            </a:pPr>
+            <a:r>
+              <a:rPr lang="en-US" sz="1600" b="1" dirty="0">
+                <a:solidFill>
+                  <a:srgbClr val="1F4E79"/>
                 </a:solidFill>
               </a:rPr>
-              <a:t>Context sees everything · Persona gets what it needs</a:t>
-            </a:r>
-          </a:p>
-        </p:txBody>
-      </p:sp>
-      <p:sp>
-        <p:nvSpPr>
-          <p:cNvPr id="210" name="HubBg"/>
-          <p:cNvSpPr>
-            <a:spLocks noGrp="1"/>
-          </p:cNvSpPr>
-          <p:nvPr/>
-        </p:nvSpPr>
-        <p:spPr>
-          <a:xfrm>
-            <a:off x="4826000" y="2476500"/>
-            <a:ext cx="2540000" cy="1841500"/>
-          </a:xfrm>
-          <a:prstGeom prst="roundRect">
-            <a:avLst>
-              <a:gd name="adj" fmla="val 20000"/>
-            </a:avLst>
-          </a:prstGeom>
-          <a:solidFill>
-            <a:srgbClr val="1A1A2E"/>
-          </a:solidFill>
-          <a:ln w="12700">
-            <a:solidFill>
-              <a:srgbClr val="4FC3F7"/>
-            </a:solidFill>
-          </a:ln>
-        </p:spPr>
-        <p:txBody>
-          <a:bodyPr anchor="ctr"/>
-          <a:lstStyle/>
-          <a:p>
-            <a:endParaRPr/>
-          </a:p>
-        </p:txBody>
-      </p:sp>
-      <p:sp>
-        <p:nvSpPr>
-          <p:cNvPr id="211" name="HubLabel"/>
-          <p:cNvSpPr>
-            <a:spLocks noGrp="1"/>
-          </p:cNvSpPr>
-          <p:nvPr/>
-        </p:nvSpPr>
-        <p:spPr>
-          <a:xfrm>
-            <a:off x="4826000" y="2476500"/>
-            <a:ext cx="2540000" cy="482600"/>
-          </a:xfrm>
-          <a:prstGeom prst="rect">
-            <a:avLst/>
-          </a:prstGeom>
-          <a:noFill/>
-          <a:ln>
-            <a:noFill/>
-          </a:ln>
-        </p:spPr>
-        <p:txBody>
-          <a:bodyPr lIns="91440" tIns="45720" rIns="91440" bIns="45720" anchor="ctr"/>
+              <a:t>How you work with context</a:t>
+            </a:r>
+          </a:p>
+          <a:p>
+            <a:pPr marL="342900" indent="-342900">
+              <a:spcBef>
+                <a:spcPts val="200"/>
+              </a:spcBef>
+              <a:buFont typeface="Arial"/>
+              <a:buChar char="•"/>
+            </a:pPr>
+            <a:r>
+              <a:rPr lang="en-US" sz="1500" dirty="0">
+                <a:solidFill>
+                  <a:srgbClr val="444444"/>
+                </a:solidFill>
+              </a:rPr>
+              <a:t>Upload an Excel Spreadsheet</a:t>
+            </a:r>
+          </a:p>
+          <a:p>
+            <a:pPr marL="342900" indent="-342900">
+              <a:spcBef>
+                <a:spcPts val="200"/>
+              </a:spcBef>
+              <a:buFont typeface="Arial"/>
+              <a:buChar char="•"/>
+            </a:pPr>
+            <a:r>
+              <a:rPr lang="en-US" sz="1500" dirty="0">
+                <a:solidFill>
+                  <a:srgbClr val="444444"/>
+                </a:solidFill>
+              </a:rPr>
+              <a:t>Ask agent to get a list of products</a:t>
+            </a:r>
+          </a:p>
+          <a:p>
+            <a:pPr marL="342900" indent="-342900">
+              <a:spcBef>
+                <a:spcPts val="200"/>
+              </a:spcBef>
+              <a:buFont typeface="Arial"/>
+              <a:buChar char="•"/>
+            </a:pPr>
+            <a:r>
+              <a:rPr lang="en-US" sz="1500" dirty="0">
+                <a:solidFill>
+                  <a:srgbClr val="444444"/>
+                </a:solidFill>
+              </a:rPr>
+              <a:t>Ask agent to query the database to get the total sales volume and put into the spreadsheet.</a:t>
+            </a:r>
+          </a:p>
+          <a:p>
+            <a:pPr marL="342900" indent="-342900">
+              <a:spcBef>
+                <a:spcPts val="200"/>
+              </a:spcBef>
+              <a:buFont typeface="Arial"/>
+              <a:buChar char="•"/>
+            </a:pPr>
+            <a:r>
+              <a:rPr lang="en-US" sz="1500" dirty="0">
+                <a:solidFill>
+                  <a:srgbClr val="444444"/>
+                </a:solidFill>
+              </a:rPr>
+              <a:t>Agent uses MCP tool or CLI to work with database</a:t>
+            </a:r>
+          </a:p>
+          <a:p>
+            <a:pPr marL="342900" indent="-342900">
+              <a:spcBef>
+                <a:spcPts val="200"/>
+              </a:spcBef>
+              <a:buFont typeface="Arial"/>
+              <a:buChar char="•"/>
+            </a:pPr>
+            <a:r>
+              <a:rPr lang="en-US" sz="1500" dirty="0">
+                <a:solidFill>
+                  <a:srgbClr val="444444"/>
+                </a:solidFill>
+              </a:rPr>
+              <a:t>Ask agent to get the top 10 grossing products</a:t>
+            </a:r>
+          </a:p>
+          <a:p>
+            <a:pPr marL="342900" indent="-342900">
+              <a:spcBef>
+                <a:spcPts val="200"/>
+              </a:spcBef>
+              <a:buFont typeface="Arial"/>
+              <a:buChar char="•"/>
+            </a:pPr>
+            <a:r>
+              <a:rPr lang="en-US" sz="1500" dirty="0">
+                <a:solidFill>
+                  <a:srgbClr val="444444"/>
+                </a:solidFill>
+              </a:rPr>
+              <a:t>Ask agent to notify team members by email</a:t>
+            </a:r>
+          </a:p>
+        </p:txBody>
+      </p:sp>
+      <p:sp>
+        <p:nvSpPr>
+          <p:cNvPr id="109" name="RightContent"/>
+          <p:cNvSpPr>
+            <a:spLocks noGrp="1"/>
+          </p:cNvSpPr>
+          <p:nvPr/>
+        </p:nvSpPr>
+        <p:spPr>
+          <a:xfrm>
+            <a:off x="6350000" y="2667000"/>
+            <a:ext cx="5334000" cy="4064000"/>
+          </a:xfrm>
+          <a:prstGeom prst="rect">
+            <a:avLst/>
+          </a:prstGeom>
+          <a:solidFill>
+            <a:srgbClr val="FAF4FD"/>
+          </a:solidFill>
+          <a:ln>
+            <a:noFill/>
+          </a:ln>
+        </p:spPr>
+        <p:txBody>
+          <a:bodyPr lIns="342900" tIns="342900" rIns="342900" anchor="t"/>
           <a:lstStyle/>
           <a:p>
             <a:pPr algn="ctr">
+              <a:spcBef>
+                <a:spcPts val="400"/>
+              </a:spcBef>
+              <a:spcAft>
+                <a:spcPts val="200"/>
+              </a:spcAft>
               <a:buNone/>
             </a:pPr>
             <a:r>
-              <a:rPr lang="en-US" sz="1200" b="1" i="0" dirty="0">
-                <a:solidFill>
-                  <a:srgbClr val="4FC3F7"/>
+              <a:rPr lang="en-US" sz="1600" b="1" dirty="0">
+                <a:solidFill>
+                  <a:srgbClr val="7B2D8E"/>
                 </a:solidFill>
               </a:rPr>
-              <a:t>SKILL INVENTORY</a:t>
-            </a:r>
-          </a:p>
-        </p:txBody>
-      </p:sp>
-      <p:sp>
-        <p:nvSpPr>
-          <p:cNvPr id="212" name="HubSub"/>
-          <p:cNvSpPr>
-            <a:spLocks noGrp="1"/>
-          </p:cNvSpPr>
-          <p:nvPr/>
-        </p:nvSpPr>
-        <p:spPr>
-          <a:xfrm>
-            <a:off x="4826000" y="2857500"/>
-            <a:ext cx="2540000" cy="1460500"/>
-          </a:xfrm>
-          <a:prstGeom prst="rect">
-            <a:avLst/>
-          </a:prstGeom>
-          <a:noFill/>
-          <a:ln>
-            <a:noFill/>
-          </a:ln>
-        </p:spPr>
-        <p:txBody>
-          <a:bodyPr lIns="91440" tIns="45720" rIns="91440" bIns="45720" anchor="ctr"/>
-          <a:lstStyle/>
-          <a:p>
-            <a:pPr algn="ctr">
-              <a:buNone/>
+              <a:t>How you work with a persona</a:t>
+            </a:r>
+          </a:p>
+          <a:p>
+            <a:pPr marL="342900" indent="-342900">
+              <a:spcBef>
+                <a:spcPts val="200"/>
+              </a:spcBef>
+              <a:buFont typeface="Arial"/>
+              <a:buChar char="•"/>
             </a:pPr>
             <a:r>
-              <a:rPr lang="en-US" sz="1200" b="0" i="0" dirty="0">
-                <a:solidFill>
-                  <a:srgbClr val="CCDDEE"/>
+              <a:rPr lang="en-US" sz="1500" dirty="0">
+                <a:solidFill>
+                  <a:srgbClr val="444444"/>
                 </a:solidFill>
               </a:rPr>
-              <a:t>All skills available to the system</a:t>
-            </a:r>
-          </a:p>
-        </p:txBody>
-      </p:sp>
-      <p:sp>
-        <p:nvSpPr>
-          <p:cNvPr id="220" name="CtxPanel"/>
-          <p:cNvSpPr>
-            <a:spLocks noGrp="1"/>
-          </p:cNvSpPr>
-          <p:nvPr/>
-        </p:nvSpPr>
-        <p:spPr>
-          <a:xfrm>
-            <a:off x="254000" y="711200"/>
-            <a:ext cx="4318000" cy="6045200"/>
-          </a:xfrm>
-          <a:prstGeom prst="roundRect">
-            <a:avLst>
-              <a:gd name="adj" fmla="val 10000"/>
-            </a:avLst>
-          </a:prstGeom>
-          <a:solidFill>
-            <a:srgbClr val="E8F4FF"/>
-          </a:solidFill>
-          <a:ln w="12700">
-            <a:solidFill>
-              <a:srgbClr val="1F4E79"/>
-            </a:solidFill>
-          </a:ln>
-        </p:spPr>
-        <p:txBody>
-          <a:bodyPr anchor="ctr"/>
-          <a:lstStyle/>
-          <a:p>
-            <a:endParaRPr/>
-          </a:p>
-        </p:txBody>
-      </p:sp>
-      <p:sp>
-        <p:nvSpPr>
-          <p:cNvPr id="221" name="CtxHeader"/>
-          <p:cNvSpPr>
-            <a:spLocks noGrp="1"/>
-          </p:cNvSpPr>
-          <p:nvPr/>
-        </p:nvSpPr>
-        <p:spPr>
-          <a:xfrm>
-            <a:off x="254000" y="711200"/>
-            <a:ext cx="4318000" cy="508000"/>
-          </a:xfrm>
-          <a:prstGeom prst="rect">
-            <a:avLst/>
-          </a:prstGeom>
-          <a:solidFill>
-            <a:srgbClr val="1F4E79"/>
-          </a:solidFill>
-          <a:ln>
-            <a:noFill/>
-          </a:ln>
-        </p:spPr>
-        <p:txBody>
-          <a:bodyPr anchor="ctr"/>
-          <a:lstStyle/>
-          <a:p>
-            <a:endParaRPr/>
-          </a:p>
-        </p:txBody>
-      </p:sp>
-      <p:sp>
-        <p:nvSpPr>
-          <p:cNvPr id="222" name="CtxHeaderTxt"/>
-          <p:cNvSpPr>
-            <a:spLocks noGrp="1"/>
-          </p:cNvSpPr>
-          <p:nvPr/>
-        </p:nvSpPr>
-        <p:spPr>
-          <a:xfrm>
-            <a:off x="254000" y="711200"/>
-            <a:ext cx="4318000" cy="508000"/>
-          </a:xfrm>
-          <a:prstGeom prst="rect">
-            <a:avLst/>
-          </a:prstGeom>
-          <a:noFill/>
-          <a:ln>
-            <a:noFill/>
-          </a:ln>
-        </p:spPr>
-        <p:txBody>
-          <a:bodyPr lIns="91440" tIns="45720" rIns="91440" bIns="45720" anchor="ctr"/>
-          <a:lstStyle/>
-          <a:p>
-            <a:pPr algn="ctr">
-              <a:buNone/>
-            </a:pPr>
-            <a:r>
-              <a:rPr lang="en-US" sz="1500" b="1" i="0" dirty="0">
-                <a:solidFill>
-                  <a:srgbClr val="FFFFFF"/>
-                </a:solidFill>
-              </a:rPr>
-              <a:t>CONTEXT — Full Access</a:t>
-            </a:r>
-          </a:p>
-        </p:txBody>
-      </p:sp>
-      <p:sp>
-        <p:nvSpPr>
-          <p:cNvPr id="223" name="CtxSub"/>
-          <p:cNvSpPr>
-            <a:spLocks noGrp="1"/>
-          </p:cNvSpPr>
-          <p:nvPr/>
-        </p:nvSpPr>
-        <p:spPr>
-          <a:xfrm>
-            <a:off x="381000" y="1270000"/>
-            <a:ext cx="4064000" cy="355600"/>
-          </a:xfrm>
-          <a:prstGeom prst="rect">
-            <a:avLst/>
-          </a:prstGeom>
-          <a:noFill/>
-          <a:ln>
-            <a:noFill/>
-          </a:ln>
-        </p:spPr>
-        <p:txBody>
-          <a:bodyPr lIns="91440" tIns="45720" rIns="91440" bIns="45720" anchor="ctr"/>
-          <a:lstStyle/>
-          <a:p>
-            <a:pPr algn="ctr">
-              <a:buNone/>
-            </a:pPr>
-            <a:r>
-              <a:rPr lang="en-US" sz="1300" b="0" i="0" dirty="0">
-                <a:solidFill>
-                  <a:srgbClr val="1F4E79"/>
-                </a:solidFill>
-              </a:rPr>
-              <a:t>Can draw on any skill at any time</a:t>
-            </a:r>
-          </a:p>
-        </p:txBody>
-      </p:sp>
-      <p:sp>
-        <p:nvSpPr>
-          <p:cNvPr id="300" name="Chip_0"/>
-          <p:cNvSpPr>
-            <a:spLocks noGrp="1"/>
-          </p:cNvSpPr>
-          <p:nvPr/>
-        </p:nvSpPr>
-        <p:spPr>
-          <a:xfrm>
-            <a:off x="381000" y="1714500"/>
-            <a:ext cx="1270000" cy="330200"/>
-          </a:xfrm>
-          <a:prstGeom prst="roundRect">
-            <a:avLst>
-              <a:gd name="adj" fmla="val 50000"/>
-            </a:avLst>
-          </a:prstGeom>
-          <a:solidFill>
-            <a:srgbClr val="C7E3FF"/>
-          </a:solidFill>
-          <a:ln w="12700">
-            <a:solidFill>
-              <a:srgbClr val="1F4E79"/>
-            </a:solidFill>
-          </a:ln>
-        </p:spPr>
-        <p:txBody>
-          <a:bodyPr anchor="ctr"/>
-          <a:lstStyle/>
-          <a:p>
-            <a:endParaRPr/>
-          </a:p>
-        </p:txBody>
-      </p:sp>
-      <p:sp>
-        <p:nvSpPr>
-          <p:cNvPr id="400" name="ChipTxt_0"/>
-          <p:cNvSpPr>
-            <a:spLocks noGrp="1"/>
-          </p:cNvSpPr>
-          <p:nvPr/>
-        </p:nvSpPr>
-        <p:spPr>
-          <a:xfrm>
-            <a:off x="381000" y="1714500"/>
-            <a:ext cx="1270000" cy="330200"/>
-          </a:xfrm>
-          <a:prstGeom prst="rect">
-            <a:avLst/>
-          </a:prstGeom>
-          <a:noFill/>
-          <a:ln>
-            <a:noFill/>
-          </a:ln>
-        </p:spPr>
-        <p:txBody>
-          <a:bodyPr lIns="91440" tIns="45720" rIns="91440" bIns="45720" anchor="ctr"/>
-          <a:lstStyle/>
-          <a:p>
-            <a:pPr algn="ctr">
-              <a:buNone/>
-            </a:pPr>
-            <a:r>
-              <a:rPr lang="en-US" sz="1100" b="0" i="0" dirty="0">
-                <a:solidFill>
-                  <a:srgbClr val="1F4E79"/>
-                </a:solidFill>
-              </a:rPr>
-              <a:t>Summarise</a:t>
-            </a:r>
-          </a:p>
-        </p:txBody>
-      </p:sp>
-      <p:sp>
-        <p:nvSpPr>
-          <p:cNvPr id="301" name="Chip_1"/>
-          <p:cNvSpPr>
-            <a:spLocks noGrp="1"/>
-          </p:cNvSpPr>
-          <p:nvPr/>
-        </p:nvSpPr>
-        <p:spPr>
-          <a:xfrm>
-            <a:off x="1778000" y="1714500"/>
-            <a:ext cx="1270000" cy="330200"/>
-          </a:xfrm>
-          <a:prstGeom prst="roundRect">
-            <a:avLst>
-              <a:gd name="adj" fmla="val 50000"/>
-            </a:avLst>
-          </a:prstGeom>
-          <a:solidFill>
-            <a:srgbClr val="C7E3FF"/>
-          </a:solidFill>
-          <a:ln w="12700">
-            <a:solidFill>
-              <a:srgbClr val="1F4E79"/>
-            </a:solidFill>
-          </a:ln>
-        </p:spPr>
-        <p:txBody>
-          <a:bodyPr anchor="ctr"/>
-          <a:lstStyle/>
-          <a:p>
-            <a:endParaRPr/>
-          </a:p>
-        </p:txBody>
-      </p:sp>
-      <p:sp>
-        <p:nvSpPr>
-          <p:cNvPr id="401" name="ChipTxt_1"/>
-          <p:cNvSpPr>
-            <a:spLocks noGrp="1"/>
-          </p:cNvSpPr>
-          <p:nvPr/>
-        </p:nvSpPr>
-        <p:spPr>
-          <a:xfrm>
-            <a:off x="1778000" y="1714500"/>
-            <a:ext cx="1270000" cy="330200"/>
-          </a:xfrm>
-          <a:prstGeom prst="rect">
-            <a:avLst/>
-          </a:prstGeom>
-          <a:noFill/>
-          <a:ln>
-            <a:noFill/>
-          </a:ln>
-        </p:spPr>
-        <p:txBody>
-          <a:bodyPr lIns="91440" tIns="45720" rIns="91440" bIns="45720" anchor="ctr"/>
-          <a:lstStyle/>
-          <a:p>
-            <a:pPr algn="ctr">
-              <a:buNone/>
-            </a:pPr>
-            <a:r>
-              <a:rPr lang="en-US" sz="1100" b="0" i="0" dirty="0">
-                <a:solidFill>
-                  <a:srgbClr val="1F4E79"/>
-                </a:solidFill>
-              </a:rPr>
-              <a:t>Translate</a:t>
-            </a:r>
-          </a:p>
-        </p:txBody>
-      </p:sp>
-      <p:sp>
-        <p:nvSpPr>
-          <p:cNvPr id="302" name="Chip_2"/>
-          <p:cNvSpPr>
-            <a:spLocks noGrp="1"/>
-          </p:cNvSpPr>
-          <p:nvPr/>
-        </p:nvSpPr>
-        <p:spPr>
-          <a:xfrm>
-            <a:off x="3175000" y="1714500"/>
-            <a:ext cx="1270000" cy="330200"/>
-          </a:xfrm>
-          <a:prstGeom prst="roundRect">
-            <a:avLst>
-              <a:gd name="adj" fmla="val 50000"/>
-            </a:avLst>
-          </a:prstGeom>
-          <a:solidFill>
-            <a:srgbClr val="C7E3FF"/>
-          </a:solidFill>
-          <a:ln w="12700">
-            <a:solidFill>
-              <a:srgbClr val="1F4E79"/>
-            </a:solidFill>
-          </a:ln>
-        </p:spPr>
-        <p:txBody>
-          <a:bodyPr anchor="ctr"/>
-          <a:lstStyle/>
-          <a:p>
-            <a:endParaRPr/>
-          </a:p>
-        </p:txBody>
-      </p:sp>
-      <p:sp>
-        <p:nvSpPr>
-          <p:cNvPr id="402" name="ChipTxt_2"/>
-          <p:cNvSpPr>
-            <a:spLocks noGrp="1"/>
-          </p:cNvSpPr>
-          <p:nvPr/>
-        </p:nvSpPr>
-        <p:spPr>
-          <a:xfrm>
-            <a:off x="3175000" y="1714500"/>
-            <a:ext cx="1270000" cy="330200"/>
-          </a:xfrm>
-          <a:prstGeom prst="rect">
-            <a:avLst/>
-          </a:prstGeom>
-          <a:noFill/>
-          <a:ln>
-            <a:noFill/>
-          </a:ln>
-        </p:spPr>
-        <p:txBody>
-          <a:bodyPr lIns="91440" tIns="45720" rIns="91440" bIns="45720" anchor="ctr"/>
-          <a:lstStyle/>
-          <a:p>
-            <a:pPr algn="ctr">
-              <a:buNone/>
-            </a:pPr>
-            <a:r>
-              <a:rPr lang="en-US" sz="1100" b="0" i="0" dirty="0">
-                <a:solidFill>
-                  <a:srgbClr val="1F4E79"/>
-                </a:solidFill>
-              </a:rPr>
-              <a:t>Classify</a:t>
-            </a:r>
-          </a:p>
-        </p:txBody>
-      </p:sp>
-      <p:sp>
-        <p:nvSpPr>
-          <p:cNvPr id="303" name="Chip_3"/>
-          <p:cNvSpPr>
-            <a:spLocks noGrp="1"/>
-          </p:cNvSpPr>
-          <p:nvPr/>
-        </p:nvSpPr>
-        <p:spPr>
-          <a:xfrm>
-            <a:off x="381000" y="2146300"/>
-            <a:ext cx="1270000" cy="330200"/>
-          </a:xfrm>
-          <a:prstGeom prst="roundRect">
-            <a:avLst>
-              <a:gd name="adj" fmla="val 50000"/>
-            </a:avLst>
-          </a:prstGeom>
-          <a:solidFill>
-            <a:srgbClr val="C7E3FF"/>
-          </a:solidFill>
-          <a:ln w="12700">
-            <a:solidFill>
-              <a:srgbClr val="1F4E79"/>
-            </a:solidFill>
-          </a:ln>
-        </p:spPr>
-        <p:txBody>
-          <a:bodyPr anchor="ctr"/>
-          <a:lstStyle/>
-          <a:p>
-            <a:endParaRPr/>
-          </a:p>
-        </p:txBody>
-      </p:sp>
-      <p:sp>
-        <p:nvSpPr>
-          <p:cNvPr id="403" name="ChipTxt_3"/>
-          <p:cNvSpPr>
-            <a:spLocks noGrp="1"/>
-          </p:cNvSpPr>
-          <p:nvPr/>
-        </p:nvSpPr>
-        <p:spPr>
-          <a:xfrm>
-            <a:off x="381000" y="2146300"/>
-            <a:ext cx="1270000" cy="330200"/>
-          </a:xfrm>
-          <a:prstGeom prst="rect">
-            <a:avLst/>
-          </a:prstGeom>
-          <a:noFill/>
-          <a:ln>
-            <a:noFill/>
-          </a:ln>
-        </p:spPr>
-        <p:txBody>
-          <a:bodyPr lIns="91440" tIns="45720" rIns="91440" bIns="45720" anchor="ctr"/>
-          <a:lstStyle/>
-          <a:p>
-            <a:pPr algn="ctr">
-              <a:buNone/>
-            </a:pPr>
-            <a:r>
-              <a:rPr lang="en-US" sz="1100" b="0" i="0" dirty="0">
-                <a:solidFill>
-                  <a:srgbClr val="1F4E79"/>
-                </a:solidFill>
-              </a:rPr>
-              <a:t>Extract</a:t>
-            </a:r>
-          </a:p>
-        </p:txBody>
-      </p:sp>
-      <p:sp>
-        <p:nvSpPr>
-          <p:cNvPr id="304" name="Chip_4"/>
-          <p:cNvSpPr>
-            <a:spLocks noGrp="1"/>
-          </p:cNvSpPr>
-          <p:nvPr/>
-        </p:nvSpPr>
-        <p:spPr>
-          <a:xfrm>
-            <a:off x="1778000" y="2146300"/>
-            <a:ext cx="1270000" cy="330200"/>
-          </a:xfrm>
-          <a:prstGeom prst="roundRect">
-            <a:avLst>
-              <a:gd name="adj" fmla="val 50000"/>
-            </a:avLst>
-          </a:prstGeom>
-          <a:solidFill>
-            <a:srgbClr val="C7E3FF"/>
-          </a:solidFill>
-          <a:ln w="12700">
-            <a:solidFill>
-              <a:srgbClr val="1F4E79"/>
-            </a:solidFill>
-          </a:ln>
-        </p:spPr>
-        <p:txBody>
-          <a:bodyPr anchor="ctr"/>
-          <a:lstStyle/>
-          <a:p>
-            <a:endParaRPr/>
-          </a:p>
-        </p:txBody>
-      </p:sp>
-      <p:sp>
-        <p:nvSpPr>
-          <p:cNvPr id="404" name="ChipTxt_4"/>
-          <p:cNvSpPr>
-            <a:spLocks noGrp="1"/>
-          </p:cNvSpPr>
-          <p:nvPr/>
-        </p:nvSpPr>
-        <p:spPr>
-          <a:xfrm>
-            <a:off x="1778000" y="2146300"/>
-            <a:ext cx="1270000" cy="330200"/>
-          </a:xfrm>
-          <a:prstGeom prst="rect">
-            <a:avLst/>
-          </a:prstGeom>
-          <a:noFill/>
-          <a:ln>
-            <a:noFill/>
-          </a:ln>
-        </p:spPr>
-        <p:txBody>
-          <a:bodyPr lIns="91440" tIns="45720" rIns="91440" bIns="45720" anchor="ctr"/>
-          <a:lstStyle/>
-          <a:p>
-            <a:pPr algn="ctr">
-              <a:buNone/>
-            </a:pPr>
-            <a:r>
-              <a:rPr lang="en-US" sz="1100" b="0" i="0" dirty="0">
-                <a:solidFill>
-                  <a:srgbClr val="1F4E79"/>
-                </a:solidFill>
-              </a:rPr>
-              <a:t>Compare</a:t>
-            </a:r>
-          </a:p>
-        </p:txBody>
-      </p:sp>
-      <p:sp>
-        <p:nvSpPr>
-          <p:cNvPr id="305" name="Chip_5"/>
-          <p:cNvSpPr>
-            <a:spLocks noGrp="1"/>
-          </p:cNvSpPr>
-          <p:nvPr/>
-        </p:nvSpPr>
-        <p:spPr>
-          <a:xfrm>
-            <a:off x="3175000" y="2146300"/>
-            <a:ext cx="1270000" cy="330200"/>
-          </a:xfrm>
-          <a:prstGeom prst="roundRect">
-            <a:avLst>
-              <a:gd name="adj" fmla="val 50000"/>
-            </a:avLst>
-          </a:prstGeom>
-          <a:solidFill>
-            <a:srgbClr val="C7E3FF"/>
-          </a:solidFill>
-          <a:ln w="12700">
-            <a:solidFill>
-              <a:srgbClr val="1F4E79"/>
-            </a:solidFill>
-          </a:ln>
-        </p:spPr>
-        <p:txBody>
-          <a:bodyPr anchor="ctr"/>
-          <a:lstStyle/>
-          <a:p>
-            <a:endParaRPr/>
-          </a:p>
-        </p:txBody>
-      </p:sp>
-      <p:sp>
-        <p:nvSpPr>
-          <p:cNvPr id="405" name="ChipTxt_5"/>
-          <p:cNvSpPr>
-            <a:spLocks noGrp="1"/>
-          </p:cNvSpPr>
-          <p:nvPr/>
-        </p:nvSpPr>
-        <p:spPr>
-          <a:xfrm>
-            <a:off x="3175000" y="2146300"/>
-            <a:ext cx="1270000" cy="330200"/>
-          </a:xfrm>
-          <a:prstGeom prst="rect">
-            <a:avLst/>
-          </a:prstGeom>
-          <a:noFill/>
-          <a:ln>
-            <a:noFill/>
-          </a:ln>
-        </p:spPr>
-        <p:txBody>
-          <a:bodyPr lIns="91440" tIns="45720" rIns="91440" bIns="45720" anchor="ctr"/>
-          <a:lstStyle/>
-          <a:p>
-            <a:pPr algn="ctr">
-              <a:buNone/>
-            </a:pPr>
-            <a:r>
-              <a:rPr lang="en-US" sz="1100" b="0" i="0" dirty="0">
-                <a:solidFill>
-                  <a:srgbClr val="1F4E79"/>
-                </a:solidFill>
-              </a:rPr>
-              <a:t>Write Code</a:t>
-            </a:r>
-          </a:p>
-        </p:txBody>
-      </p:sp>
-      <p:sp>
-        <p:nvSpPr>
-          <p:cNvPr id="306" name="Chip_6"/>
-          <p:cNvSpPr>
-            <a:spLocks noGrp="1"/>
-          </p:cNvSpPr>
-          <p:nvPr/>
-        </p:nvSpPr>
-        <p:spPr>
-          <a:xfrm>
-            <a:off x="381000" y="2578100"/>
-            <a:ext cx="1270000" cy="330200"/>
-          </a:xfrm>
-          <a:prstGeom prst="roundRect">
-            <a:avLst>
-              <a:gd name="adj" fmla="val 50000"/>
-            </a:avLst>
-          </a:prstGeom>
-          <a:solidFill>
-            <a:srgbClr val="C7E3FF"/>
-          </a:solidFill>
-          <a:ln w="12700">
-            <a:solidFill>
-              <a:srgbClr val="1F4E79"/>
-            </a:solidFill>
-          </a:ln>
-        </p:spPr>
-        <p:txBody>
-          <a:bodyPr anchor="ctr"/>
-          <a:lstStyle/>
-          <a:p>
-            <a:endParaRPr/>
-          </a:p>
-        </p:txBody>
-      </p:sp>
-      <p:sp>
-        <p:nvSpPr>
-          <p:cNvPr id="406" name="ChipTxt_6"/>
-          <p:cNvSpPr>
-            <a:spLocks noGrp="1"/>
-          </p:cNvSpPr>
-          <p:nvPr/>
-        </p:nvSpPr>
-        <p:spPr>
-          <a:xfrm>
-            <a:off x="381000" y="2578100"/>
-            <a:ext cx="1270000" cy="330200"/>
-          </a:xfrm>
-          <a:prstGeom prst="rect">
-            <a:avLst/>
-          </a:prstGeom>
-          <a:noFill/>
-          <a:ln>
-            <a:noFill/>
-          </a:ln>
-        </p:spPr>
-        <p:txBody>
-          <a:bodyPr lIns="91440" tIns="45720" rIns="91440" bIns="45720" anchor="ctr"/>
-          <a:lstStyle/>
-          <a:p>
-            <a:pPr algn="ctr">
-              <a:buNone/>
-            </a:pPr>
-            <a:r>
-              <a:rPr lang="en-US" sz="1100" b="0" i="0" dirty="0">
-                <a:solidFill>
-                  <a:srgbClr val="1F4E79"/>
-                </a:solidFill>
-              </a:rPr>
-              <a:t>Debug</a:t>
-            </a:r>
-          </a:p>
-        </p:txBody>
-      </p:sp>
-      <p:sp>
-        <p:nvSpPr>
-          <p:cNvPr id="307" name="Chip_7"/>
-          <p:cNvSpPr>
-            <a:spLocks noGrp="1"/>
-          </p:cNvSpPr>
-          <p:nvPr/>
-        </p:nvSpPr>
-        <p:spPr>
-          <a:xfrm>
-            <a:off x="1778000" y="2578100"/>
-            <a:ext cx="1270000" cy="330200"/>
-          </a:xfrm>
-          <a:prstGeom prst="roundRect">
-            <a:avLst>
-              <a:gd name="adj" fmla="val 50000"/>
-            </a:avLst>
-          </a:prstGeom>
-          <a:solidFill>
-            <a:srgbClr val="C7E3FF"/>
-          </a:solidFill>
-          <a:ln w="12700">
-            <a:solidFill>
-              <a:srgbClr val="1F4E79"/>
-            </a:solidFill>
-          </a:ln>
-        </p:spPr>
-        <p:txBody>
-          <a:bodyPr anchor="ctr"/>
-          <a:lstStyle/>
-          <a:p>
-            <a:endParaRPr/>
-          </a:p>
-        </p:txBody>
-      </p:sp>
-      <p:sp>
-        <p:nvSpPr>
-          <p:cNvPr id="407" name="ChipTxt_7"/>
-          <p:cNvSpPr>
-            <a:spLocks noGrp="1"/>
-          </p:cNvSpPr>
-          <p:nvPr/>
-        </p:nvSpPr>
-        <p:spPr>
-          <a:xfrm>
-            <a:off x="1778000" y="2578100"/>
-            <a:ext cx="1270000" cy="330200"/>
-          </a:xfrm>
-          <a:prstGeom prst="rect">
-            <a:avLst/>
-          </a:prstGeom>
-          <a:noFill/>
-          <a:ln>
-            <a:noFill/>
-          </a:ln>
-        </p:spPr>
-        <p:txBody>
-          <a:bodyPr lIns="91440" tIns="45720" rIns="91440" bIns="45720" anchor="ctr"/>
-          <a:lstStyle/>
-          <a:p>
-            <a:pPr algn="ctr">
-              <a:buNone/>
-            </a:pPr>
-            <a:r>
-              <a:rPr lang="en-US" sz="1100" b="0" i="0" dirty="0">
-                <a:solidFill>
-                  <a:srgbClr val="1F4E79"/>
-                </a:solidFill>
-              </a:rPr>
-              <a:t>Reformat</a:t>
-            </a:r>
-          </a:p>
-        </p:txBody>
-      </p:sp>
-      <p:sp>
-        <p:nvSpPr>
-          <p:cNvPr id="308" name="Chip_8"/>
-          <p:cNvSpPr>
-            <a:spLocks noGrp="1"/>
-          </p:cNvSpPr>
-          <p:nvPr/>
-        </p:nvSpPr>
-        <p:spPr>
-          <a:xfrm>
-            <a:off x="3175000" y="2578100"/>
-            <a:ext cx="1270000" cy="330200"/>
-          </a:xfrm>
-          <a:prstGeom prst="roundRect">
-            <a:avLst>
-              <a:gd name="adj" fmla="val 50000"/>
-            </a:avLst>
-          </a:prstGeom>
-          <a:solidFill>
-            <a:srgbClr val="C7E3FF"/>
-          </a:solidFill>
-          <a:ln w="12700">
-            <a:solidFill>
-              <a:srgbClr val="1F4E79"/>
-            </a:solidFill>
-          </a:ln>
-        </p:spPr>
-        <p:txBody>
-          <a:bodyPr anchor="ctr"/>
-          <a:lstStyle/>
-          <a:p>
-            <a:endParaRPr/>
-          </a:p>
-        </p:txBody>
-      </p:sp>
-      <p:sp>
-        <p:nvSpPr>
-          <p:cNvPr id="408" name="ChipTxt_8"/>
-          <p:cNvSpPr>
-            <a:spLocks noGrp="1"/>
-          </p:cNvSpPr>
-          <p:nvPr/>
-        </p:nvSpPr>
-        <p:spPr>
-          <a:xfrm>
-            <a:off x="3175000" y="2578100"/>
-            <a:ext cx="1270000" cy="330200"/>
-          </a:xfrm>
-          <a:prstGeom prst="rect">
-            <a:avLst/>
-          </a:prstGeom>
-          <a:noFill/>
-          <a:ln>
-            <a:noFill/>
-          </a:ln>
-        </p:spPr>
-        <p:txBody>
-          <a:bodyPr lIns="91440" tIns="45720" rIns="91440" bIns="45720" anchor="ctr"/>
-          <a:lstStyle/>
-          <a:p>
-            <a:pPr algn="ctr">
-              <a:buNone/>
-            </a:pPr>
-            <a:r>
-              <a:rPr lang="en-US" sz="1100" b="0" i="0" dirty="0">
-                <a:solidFill>
-                  <a:srgbClr val="1F4E79"/>
-                </a:solidFill>
-              </a:rPr>
-              <a:t>Search</a:t>
-            </a:r>
-          </a:p>
-        </p:txBody>
-      </p:sp>
-      <p:sp>
-        <p:nvSpPr>
-          <p:cNvPr id="309" name="Chip_9"/>
-          <p:cNvSpPr>
-            <a:spLocks noGrp="1"/>
-          </p:cNvSpPr>
-          <p:nvPr/>
-        </p:nvSpPr>
-        <p:spPr>
-          <a:xfrm>
-            <a:off x="381000" y="3009900"/>
-            <a:ext cx="1270000" cy="330200"/>
-          </a:xfrm>
-          <a:prstGeom prst="roundRect">
-            <a:avLst>
-              <a:gd name="adj" fmla="val 50000"/>
-            </a:avLst>
-          </a:prstGeom>
-          <a:solidFill>
-            <a:srgbClr val="C7E3FF"/>
-          </a:solidFill>
-          <a:ln w="12700">
-            <a:solidFill>
-              <a:srgbClr val="1F4E79"/>
-            </a:solidFill>
-          </a:ln>
-        </p:spPr>
-        <p:txBody>
-          <a:bodyPr anchor="ctr"/>
-          <a:lstStyle/>
-          <a:p>
-            <a:endParaRPr/>
-          </a:p>
-        </p:txBody>
-      </p:sp>
-      <p:sp>
-        <p:nvSpPr>
-          <p:cNvPr id="409" name="ChipTxt_9"/>
-          <p:cNvSpPr>
-            <a:spLocks noGrp="1"/>
-          </p:cNvSpPr>
-          <p:nvPr/>
-        </p:nvSpPr>
-        <p:spPr>
-          <a:xfrm>
-            <a:off x="381000" y="3009900"/>
-            <a:ext cx="1270000" cy="330200"/>
-          </a:xfrm>
-          <a:prstGeom prst="rect">
-            <a:avLst/>
-          </a:prstGeom>
-          <a:noFill/>
-          <a:ln>
-            <a:noFill/>
-          </a:ln>
-        </p:spPr>
-        <p:txBody>
-          <a:bodyPr lIns="91440" tIns="45720" rIns="91440" bIns="45720" anchor="ctr"/>
-          <a:lstStyle/>
-          <a:p>
-            <a:pPr algn="ctr">
-              <a:buNone/>
-            </a:pPr>
-            <a:r>
-              <a:rPr lang="en-US" sz="1100" b="0" i="0" dirty="0">
-                <a:solidFill>
-                  <a:srgbClr val="1F4E79"/>
-                </a:solidFill>
-              </a:rPr>
-              <a:t>Explain</a:t>
-            </a:r>
-          </a:p>
-        </p:txBody>
-      </p:sp>
-      <p:sp>
-        <p:nvSpPr>
-          <p:cNvPr id="310" name="Chip_10"/>
-          <p:cNvSpPr>
-            <a:spLocks noGrp="1"/>
-          </p:cNvSpPr>
-          <p:nvPr/>
-        </p:nvSpPr>
-        <p:spPr>
-          <a:xfrm>
-            <a:off x="1778000" y="3009900"/>
-            <a:ext cx="1270000" cy="330200"/>
-          </a:xfrm>
-          <a:prstGeom prst="roundRect">
-            <a:avLst>
-              <a:gd name="adj" fmla="val 50000"/>
-            </a:avLst>
-          </a:prstGeom>
-          <a:solidFill>
-            <a:srgbClr val="C7E3FF"/>
-          </a:solidFill>
-          <a:ln w="12700">
-            <a:solidFill>
-              <a:srgbClr val="1F4E79"/>
-            </a:solidFill>
-          </a:ln>
-        </p:spPr>
-        <p:txBody>
-          <a:bodyPr anchor="ctr"/>
-          <a:lstStyle/>
-          <a:p>
-            <a:endParaRPr/>
-          </a:p>
-        </p:txBody>
-      </p:sp>
-      <p:sp>
-        <p:nvSpPr>
-          <p:cNvPr id="410" name="ChipTxt_10"/>
-          <p:cNvSpPr>
-            <a:spLocks noGrp="1"/>
-          </p:cNvSpPr>
-          <p:nvPr/>
-        </p:nvSpPr>
-        <p:spPr>
-          <a:xfrm>
-            <a:off x="1778000" y="3009900"/>
-            <a:ext cx="1270000" cy="330200"/>
-          </a:xfrm>
-          <a:prstGeom prst="rect">
-            <a:avLst/>
-          </a:prstGeom>
-          <a:noFill/>
-          <a:ln>
-            <a:noFill/>
-          </a:ln>
-        </p:spPr>
-        <p:txBody>
-          <a:bodyPr lIns="91440" tIns="45720" rIns="91440" bIns="45720" anchor="ctr"/>
-          <a:lstStyle/>
-          <a:p>
-            <a:pPr algn="ctr">
-              <a:buNone/>
-            </a:pPr>
-            <a:r>
-              <a:rPr lang="en-US" sz="1100" b="0" i="0" dirty="0">
-                <a:solidFill>
-                  <a:srgbClr val="1F4E79"/>
-                </a:solidFill>
-              </a:rPr>
-              <a:t>Draft Email</a:t>
-            </a:r>
-          </a:p>
-        </p:txBody>
-      </p:sp>
-      <p:sp>
-        <p:nvSpPr>
-          <p:cNvPr id="311" name="Chip_11"/>
-          <p:cNvSpPr>
-            <a:spLocks noGrp="1"/>
-          </p:cNvSpPr>
-          <p:nvPr/>
-        </p:nvSpPr>
-        <p:spPr>
-          <a:xfrm>
-            <a:off x="3175000" y="3009900"/>
-            <a:ext cx="1270000" cy="330200"/>
-          </a:xfrm>
-          <a:prstGeom prst="roundRect">
-            <a:avLst>
-              <a:gd name="adj" fmla="val 50000"/>
-            </a:avLst>
-          </a:prstGeom>
-          <a:solidFill>
-            <a:srgbClr val="C7E3FF"/>
-          </a:solidFill>
-          <a:ln w="12700">
-            <a:solidFill>
-              <a:srgbClr val="1F4E79"/>
-            </a:solidFill>
-          </a:ln>
-        </p:spPr>
-        <p:txBody>
-          <a:bodyPr anchor="ctr"/>
-          <a:lstStyle/>
-          <a:p>
-            <a:endParaRPr/>
-          </a:p>
-        </p:txBody>
-      </p:sp>
-      <p:sp>
-        <p:nvSpPr>
-          <p:cNvPr id="411" name="ChipTxt_11"/>
-          <p:cNvSpPr>
-            <a:spLocks noGrp="1"/>
-          </p:cNvSpPr>
-          <p:nvPr/>
-        </p:nvSpPr>
-        <p:spPr>
-          <a:xfrm>
-            <a:off x="3175000" y="3009900"/>
-            <a:ext cx="1270000" cy="330200"/>
-          </a:xfrm>
-          <a:prstGeom prst="rect">
-            <a:avLst/>
-          </a:prstGeom>
-          <a:noFill/>
-          <a:ln>
-            <a:noFill/>
-          </a:ln>
-        </p:spPr>
-        <p:txBody>
-          <a:bodyPr lIns="91440" tIns="45720" rIns="91440" bIns="45720" anchor="ctr"/>
-          <a:lstStyle/>
-          <a:p>
-            <a:pPr algn="ctr">
-              <a:buNone/>
-            </a:pPr>
-            <a:r>
-              <a:rPr lang="en-US" sz="1100" b="0" i="0" dirty="0">
-                <a:solidFill>
-                  <a:srgbClr val="1F4E79"/>
-                </a:solidFill>
-              </a:rPr>
-              <a:t>Brainstorm</a:t>
-            </a:r>
-          </a:p>
-        </p:txBody>
-      </p:sp>
-      <p:sp>
-        <p:nvSpPr>
-          <p:cNvPr id="312" name="Chip_12"/>
-          <p:cNvSpPr>
-            <a:spLocks noGrp="1"/>
-          </p:cNvSpPr>
-          <p:nvPr/>
-        </p:nvSpPr>
-        <p:spPr>
-          <a:xfrm>
-            <a:off x="381000" y="3441700"/>
-            <a:ext cx="1270000" cy="330200"/>
-          </a:xfrm>
-          <a:prstGeom prst="roundRect">
-            <a:avLst>
-              <a:gd name="adj" fmla="val 50000"/>
-            </a:avLst>
-          </a:prstGeom>
-          <a:solidFill>
-            <a:srgbClr val="C7E3FF"/>
-          </a:solidFill>
-          <a:ln w="12700">
-            <a:solidFill>
-              <a:srgbClr val="1F4E79"/>
-            </a:solidFill>
-          </a:ln>
-        </p:spPr>
-        <p:txBody>
-          <a:bodyPr anchor="ctr"/>
-          <a:lstStyle/>
-          <a:p>
-            <a:endParaRPr/>
-          </a:p>
-        </p:txBody>
-      </p:sp>
-      <p:sp>
-        <p:nvSpPr>
-          <p:cNvPr id="412" name="ChipTxt_12"/>
-          <p:cNvSpPr>
-            <a:spLocks noGrp="1"/>
-          </p:cNvSpPr>
-          <p:nvPr/>
-        </p:nvSpPr>
-        <p:spPr>
-          <a:xfrm>
-            <a:off x="381000" y="3441700"/>
-            <a:ext cx="1270000" cy="330200"/>
-          </a:xfrm>
-          <a:prstGeom prst="rect">
-            <a:avLst/>
-          </a:prstGeom>
-          <a:noFill/>
-          <a:ln>
-            <a:noFill/>
-          </a:ln>
-        </p:spPr>
-        <p:txBody>
-          <a:bodyPr lIns="91440" tIns="45720" rIns="91440" bIns="45720" anchor="ctr"/>
-          <a:lstStyle/>
-          <a:p>
-            <a:pPr algn="ctr">
-              <a:buNone/>
-            </a:pPr>
-            <a:r>
-              <a:rPr lang="en-US" sz="1100" b="0" i="0" dirty="0">
-                <a:solidFill>
-                  <a:srgbClr val="1F4E79"/>
-                </a:solidFill>
-              </a:rPr>
-              <a:t>Critique</a:t>
-            </a:r>
-          </a:p>
-        </p:txBody>
-      </p:sp>
-      <p:sp>
-        <p:nvSpPr>
-          <p:cNvPr id="313" name="Chip_13"/>
-          <p:cNvSpPr>
-            <a:spLocks noGrp="1"/>
-          </p:cNvSpPr>
-          <p:nvPr/>
-        </p:nvSpPr>
-        <p:spPr>
-          <a:xfrm>
-            <a:off x="1778000" y="3441700"/>
-            <a:ext cx="1270000" cy="330200"/>
-          </a:xfrm>
-          <a:prstGeom prst="roundRect">
-            <a:avLst>
-              <a:gd name="adj" fmla="val 50000"/>
-            </a:avLst>
-          </a:prstGeom>
-          <a:solidFill>
-            <a:srgbClr val="C7E3FF"/>
-          </a:solidFill>
-          <a:ln w="12700">
-            <a:solidFill>
-              <a:srgbClr val="1F4E79"/>
-            </a:solidFill>
-          </a:ln>
-        </p:spPr>
-        <p:txBody>
-          <a:bodyPr anchor="ctr"/>
-          <a:lstStyle/>
-          <a:p>
-            <a:endParaRPr/>
-          </a:p>
-        </p:txBody>
-      </p:sp>
-      <p:sp>
-        <p:nvSpPr>
-          <p:cNvPr id="413" name="ChipTxt_13"/>
-          <p:cNvSpPr>
-            <a:spLocks noGrp="1"/>
-          </p:cNvSpPr>
-          <p:nvPr/>
-        </p:nvSpPr>
-        <p:spPr>
-          <a:xfrm>
-            <a:off x="1778000" y="3441700"/>
-            <a:ext cx="1270000" cy="330200"/>
-          </a:xfrm>
-          <a:prstGeom prst="rect">
-            <a:avLst/>
-          </a:prstGeom>
-          <a:noFill/>
-          <a:ln>
-            <a:noFill/>
-          </a:ln>
-        </p:spPr>
-        <p:txBody>
-          <a:bodyPr lIns="91440" tIns="45720" rIns="91440" bIns="45720" anchor="ctr"/>
-          <a:lstStyle/>
-          <a:p>
-            <a:pPr algn="ctr">
-              <a:buNone/>
-            </a:pPr>
-            <a:r>
-              <a:rPr lang="en-US" sz="1100" b="0" i="0" dirty="0">
-                <a:solidFill>
-                  <a:srgbClr val="1F4E79"/>
-                </a:solidFill>
-              </a:rPr>
-              <a:t>Synthesise</a:t>
-            </a:r>
-          </a:p>
-        </p:txBody>
-      </p:sp>
-      <p:sp>
-        <p:nvSpPr>
-          <p:cNvPr id="314" name="Chip_14"/>
-          <p:cNvSpPr>
-            <a:spLocks noGrp="1"/>
-          </p:cNvSpPr>
-          <p:nvPr/>
-        </p:nvSpPr>
-        <p:spPr>
-          <a:xfrm>
-            <a:off x="3175000" y="3441700"/>
-            <a:ext cx="1270000" cy="330200"/>
-          </a:xfrm>
-          <a:prstGeom prst="roundRect">
-            <a:avLst>
-              <a:gd name="adj" fmla="val 50000"/>
-            </a:avLst>
-          </a:prstGeom>
-          <a:solidFill>
-            <a:srgbClr val="C7E3FF"/>
-          </a:solidFill>
-          <a:ln w="12700">
-            <a:solidFill>
-              <a:srgbClr val="1F4E79"/>
-            </a:solidFill>
-          </a:ln>
-        </p:spPr>
-        <p:txBody>
-          <a:bodyPr anchor="ctr"/>
-          <a:lstStyle/>
-          <a:p>
-            <a:endParaRPr/>
-          </a:p>
-        </p:txBody>
-      </p:sp>
-      <p:sp>
-        <p:nvSpPr>
-          <p:cNvPr id="414" name="ChipTxt_14"/>
-          <p:cNvSpPr>
-            <a:spLocks noGrp="1"/>
-          </p:cNvSpPr>
-          <p:nvPr/>
-        </p:nvSpPr>
-        <p:spPr>
-          <a:xfrm>
-            <a:off x="3175000" y="3441700"/>
-            <a:ext cx="1270000" cy="330200"/>
-          </a:xfrm>
-          <a:prstGeom prst="rect">
-            <a:avLst/>
-          </a:prstGeom>
-          <a:noFill/>
-          <a:ln>
-            <a:noFill/>
-          </a:ln>
-        </p:spPr>
-        <p:txBody>
-          <a:bodyPr lIns="91440" tIns="45720" rIns="91440" bIns="45720" anchor="ctr"/>
-          <a:lstStyle/>
-          <a:p>
-            <a:pPr algn="ctr">
-              <a:buNone/>
-            </a:pPr>
-            <a:r>
-              <a:rPr lang="en-US" sz="1100" b="0" i="0" dirty="0">
-                <a:solidFill>
-                  <a:srgbClr val="1F4E79"/>
-                </a:solidFill>
-              </a:rPr>
-              <a:t>Plan</a:t>
-            </a:r>
-          </a:p>
-        </p:txBody>
-      </p:sp>
-      <p:sp>
-        <p:nvSpPr>
-          <p:cNvPr id="500" name="PerPanel"/>
-          <p:cNvSpPr>
-            <a:spLocks noGrp="1"/>
-          </p:cNvSpPr>
-          <p:nvPr/>
-        </p:nvSpPr>
-        <p:spPr>
-          <a:xfrm>
-            <a:off x="7620000" y="711200"/>
-            <a:ext cx="4318000" cy="6045200"/>
-          </a:xfrm>
-          <a:prstGeom prst="roundRect">
-            <a:avLst>
-              <a:gd name="adj" fmla="val 10000"/>
-            </a:avLst>
-          </a:prstGeom>
-          <a:solidFill>
-            <a:srgbClr val="F6EAFD"/>
-          </a:solidFill>
-          <a:ln w="12700">
-            <a:solidFill>
-              <a:srgbClr val="7B2D8E"/>
-            </a:solidFill>
-          </a:ln>
-        </p:spPr>
-        <p:txBody>
-          <a:bodyPr anchor="ctr"/>
-          <a:lstStyle/>
-          <a:p>
-            <a:endParaRPr/>
-          </a:p>
-        </p:txBody>
-      </p:sp>
-      <p:sp>
-        <p:nvSpPr>
-          <p:cNvPr id="501" name="PerHeader"/>
-          <p:cNvSpPr>
-            <a:spLocks noGrp="1"/>
-          </p:cNvSpPr>
-          <p:nvPr/>
-        </p:nvSpPr>
-        <p:spPr>
-          <a:xfrm>
-            <a:off x="7620000" y="711200"/>
-            <a:ext cx="4318000" cy="508000"/>
-          </a:xfrm>
-          <a:prstGeom prst="rect">
-            <a:avLst/>
-          </a:prstGeom>
-          <a:solidFill>
-            <a:srgbClr val="7B2D8E"/>
-          </a:solidFill>
-          <a:ln>
-            <a:noFill/>
-          </a:ln>
-        </p:spPr>
-        <p:txBody>
-          <a:bodyPr anchor="ctr"/>
-          <a:lstStyle/>
-          <a:p>
-            <a:endParaRPr/>
-          </a:p>
-        </p:txBody>
-      </p:sp>
-      <p:sp>
-        <p:nvSpPr>
-          <p:cNvPr id="502" name="PerHeaderTxt"/>
-          <p:cNvSpPr>
-            <a:spLocks noGrp="1"/>
-          </p:cNvSpPr>
-          <p:nvPr/>
-        </p:nvSpPr>
-        <p:spPr>
-          <a:xfrm>
-            <a:off x="7620000" y="711200"/>
-            <a:ext cx="4318000" cy="508000"/>
-          </a:xfrm>
-          <a:prstGeom prst="rect">
-            <a:avLst/>
-          </a:prstGeom>
-          <a:noFill/>
-          <a:ln>
-            <a:noFill/>
-          </a:ln>
-        </p:spPr>
-        <p:txBody>
-          <a:bodyPr lIns="91440" tIns="45720" rIns="91440" bIns="45720" anchor="ctr"/>
-          <a:lstStyle/>
-          <a:p>
-            <a:pPr algn="ctr">
-              <a:buNone/>
-            </a:pPr>
-            <a:r>
-              <a:rPr lang="en-US" sz="1500" b="1" i="0" dirty="0">
-                <a:solidFill>
-                  <a:srgbClr val="FFFFFF"/>
-                </a:solidFill>
-              </a:rPr>
-              <a:t>PERSONA — Assigned Skills</a:t>
-            </a:r>
-          </a:p>
-        </p:txBody>
-      </p:sp>
-      <p:sp>
-        <p:nvSpPr>
-          <p:cNvPr id="503" name="PerSub"/>
-          <p:cNvSpPr>
-            <a:spLocks noGrp="1"/>
-          </p:cNvSpPr>
-          <p:nvPr/>
-        </p:nvSpPr>
-        <p:spPr>
-          <a:xfrm>
-            <a:off x="7747000" y="1270000"/>
-            <a:ext cx="4064000" cy="355600"/>
-          </a:xfrm>
-          <a:prstGeom prst="rect">
-            <a:avLst/>
-          </a:prstGeom>
-          <a:noFill/>
-          <a:ln>
-            <a:noFill/>
-          </a:ln>
-        </p:spPr>
-        <p:txBody>
-          <a:bodyPr lIns="91440" tIns="45720" rIns="91440" bIns="45720" anchor="ctr"/>
-          <a:lstStyle/>
-          <a:p>
-            <a:pPr algn="ctr">
-              <a:buNone/>
-            </a:pPr>
-            <a:r>
-              <a:rPr lang="en-US" sz="1300" b="0" i="0" dirty="0">
-                <a:solidFill>
-                  <a:srgbClr val="7B2D8E"/>
-                </a:solidFill>
-              </a:rPr>
-              <a:t>Only specific skills assigned to this role</a:t>
-            </a:r>
-          </a:p>
-        </p:txBody>
-      </p:sp>
-      <p:sp>
-        <p:nvSpPr>
-          <p:cNvPr id="504" name="PersonaBadge"/>
-          <p:cNvSpPr>
-            <a:spLocks noGrp="1"/>
-          </p:cNvSpPr>
-          <p:nvPr/>
-        </p:nvSpPr>
-        <p:spPr>
-          <a:xfrm>
-            <a:off x="8255000" y="1701800"/>
-            <a:ext cx="3048000" cy="457200"/>
-          </a:xfrm>
-          <a:prstGeom prst="roundRect">
-            <a:avLst>
-              <a:gd name="adj" fmla="val 30000"/>
-            </a:avLst>
-          </a:prstGeom>
-          <a:solidFill>
-            <a:srgbClr val="7B2D8E"/>
-          </a:solidFill>
-          <a:ln>
-            <a:noFill/>
-          </a:ln>
-        </p:spPr>
-        <p:txBody>
-          <a:bodyPr anchor="ctr"/>
-          <a:lstStyle/>
-          <a:p>
-            <a:endParaRPr/>
-          </a:p>
-        </p:txBody>
-      </p:sp>
-      <p:sp>
-        <p:nvSpPr>
-          <p:cNvPr id="505" name="PersonaName"/>
-          <p:cNvSpPr>
-            <a:spLocks noGrp="1"/>
-          </p:cNvSpPr>
-          <p:nvPr/>
-        </p:nvSpPr>
-        <p:spPr>
-          <a:xfrm>
-            <a:off x="8255000" y="1701800"/>
-            <a:ext cx="3048000" cy="457200"/>
-          </a:xfrm>
-          <a:prstGeom prst="rect">
-            <a:avLst/>
-          </a:prstGeom>
-          <a:noFill/>
-          <a:ln>
-            <a:noFill/>
-          </a:ln>
-        </p:spPr>
-        <p:txBody>
-          <a:bodyPr lIns="91440" tIns="45720" rIns="91440" bIns="45720" anchor="ctr"/>
-          <a:lstStyle/>
-          <a:p>
-            <a:pPr algn="ctr">
-              <a:buNone/>
-            </a:pPr>
-            <a:r>
-              <a:rPr lang="en-US" sz="1300" b="1" i="0" dirty="0">
-                <a:solidFill>
-                  <a:srgbClr val="FFFFFF"/>
-                </a:solidFill>
-              </a:rPr>
-              <a:t>★  Sales Assistant Persona</a:t>
-            </a:r>
-          </a:p>
-        </p:txBody>
-      </p:sp>
-      <p:sp>
-        <p:nvSpPr>
-          <p:cNvPr id="600" name="AChip_0"/>
-          <p:cNvSpPr>
-            <a:spLocks noGrp="1"/>
-          </p:cNvSpPr>
-          <p:nvPr/>
-        </p:nvSpPr>
-        <p:spPr>
-          <a:xfrm>
-            <a:off x="7874000" y="2311400"/>
-            <a:ext cx="1778000" cy="381000"/>
-          </a:xfrm>
-          <a:prstGeom prst="roundRect">
-            <a:avLst>
-              <a:gd name="adj" fmla="val 50000"/>
-            </a:avLst>
-          </a:prstGeom>
-          <a:solidFill>
-            <a:srgbClr val="E8C8F8"/>
-          </a:solidFill>
-          <a:ln w="12700">
-            <a:solidFill>
-              <a:srgbClr val="7B2D8E"/>
-            </a:solidFill>
-          </a:ln>
-        </p:spPr>
-        <p:txBody>
-          <a:bodyPr anchor="ctr"/>
-          <a:lstStyle/>
-          <a:p>
-            <a:endParaRPr/>
-          </a:p>
-        </p:txBody>
-      </p:sp>
-      <p:sp>
-        <p:nvSpPr>
-          <p:cNvPr id="700" name="AChipTxt_0"/>
-          <p:cNvSpPr>
-            <a:spLocks noGrp="1"/>
-          </p:cNvSpPr>
-          <p:nvPr/>
-        </p:nvSpPr>
-        <p:spPr>
-          <a:xfrm>
-            <a:off x="7874000" y="2311400"/>
-            <a:ext cx="1778000" cy="381000"/>
-          </a:xfrm>
-          <a:prstGeom prst="rect">
-            <a:avLst/>
-          </a:prstGeom>
-          <a:noFill/>
-          <a:ln>
-            <a:noFill/>
-          </a:ln>
-        </p:spPr>
-        <p:txBody>
-          <a:bodyPr lIns="91440" tIns="45720" rIns="91440" bIns="45720" anchor="ctr"/>
-          <a:lstStyle/>
-          <a:p>
-            <a:pPr algn="ctr">
-              <a:buNone/>
-            </a:pPr>
-            <a:r>
-              <a:rPr lang="en-US" sz="1200" b="1" i="0" dirty="0">
-                <a:solidFill>
-                  <a:srgbClr val="7B2D8E"/>
-                </a:solidFill>
-              </a:rPr>
-              <a:t>Summarise</a:t>
-            </a:r>
-          </a:p>
-        </p:txBody>
-      </p:sp>
-      <p:sp>
-        <p:nvSpPr>
-          <p:cNvPr id="601" name="AChip_1"/>
-          <p:cNvSpPr>
-            <a:spLocks noGrp="1"/>
-          </p:cNvSpPr>
-          <p:nvPr/>
-        </p:nvSpPr>
-        <p:spPr>
-          <a:xfrm>
-            <a:off x="9906000" y="2311400"/>
-            <a:ext cx="1778000" cy="381000"/>
-          </a:xfrm>
-          <a:prstGeom prst="roundRect">
-            <a:avLst>
-              <a:gd name="adj" fmla="val 50000"/>
-            </a:avLst>
-          </a:prstGeom>
-          <a:solidFill>
-            <a:srgbClr val="E8C8F8"/>
-          </a:solidFill>
-          <a:ln w="12700">
-            <a:solidFill>
-              <a:srgbClr val="7B2D8E"/>
-            </a:solidFill>
-          </a:ln>
-        </p:spPr>
-        <p:txBody>
-          <a:bodyPr anchor="ctr"/>
-          <a:lstStyle/>
-          <a:p>
-            <a:endParaRPr/>
-          </a:p>
-        </p:txBody>
-      </p:sp>
-      <p:sp>
-        <p:nvSpPr>
-          <p:cNvPr id="701" name="AChipTxt_1"/>
-          <p:cNvSpPr>
-            <a:spLocks noGrp="1"/>
-          </p:cNvSpPr>
-          <p:nvPr/>
-        </p:nvSpPr>
-        <p:spPr>
-          <a:xfrm>
-            <a:off x="9906000" y="2311400"/>
-            <a:ext cx="1778000" cy="381000"/>
-          </a:xfrm>
-          <a:prstGeom prst="rect">
-            <a:avLst/>
-          </a:prstGeom>
-          <a:noFill/>
-          <a:ln>
-            <a:noFill/>
-          </a:ln>
-        </p:spPr>
-        <p:txBody>
-          <a:bodyPr lIns="91440" tIns="45720" rIns="91440" bIns="45720" anchor="ctr"/>
-          <a:lstStyle/>
-          <a:p>
-            <a:pPr algn="ctr">
-              <a:buNone/>
-            </a:pPr>
-            <a:r>
-              <a:rPr lang="en-US" sz="1200" b="1" i="0" dirty="0">
-                <a:solidFill>
-                  <a:srgbClr val="7B2D8E"/>
-                </a:solidFill>
-              </a:rPr>
-              <a:t>Draft Email</a:t>
-            </a:r>
-          </a:p>
-        </p:txBody>
-      </p:sp>
-      <p:sp>
-        <p:nvSpPr>
-          <p:cNvPr id="602" name="AChip_2"/>
-          <p:cNvSpPr>
-            <a:spLocks noGrp="1"/>
-          </p:cNvSpPr>
-          <p:nvPr/>
-        </p:nvSpPr>
-        <p:spPr>
-          <a:xfrm>
-            <a:off x="7874000" y="2819400"/>
-            <a:ext cx="1778000" cy="381000"/>
-          </a:xfrm>
-          <a:prstGeom prst="roundRect">
-            <a:avLst>
-              <a:gd name="adj" fmla="val 50000"/>
-            </a:avLst>
-          </a:prstGeom>
-          <a:solidFill>
-            <a:srgbClr val="E8C8F8"/>
-          </a:solidFill>
-          <a:ln w="12700">
-            <a:solidFill>
-              <a:srgbClr val="7B2D8E"/>
-            </a:solidFill>
-          </a:ln>
-        </p:spPr>
-        <p:txBody>
-          <a:bodyPr anchor="ctr"/>
-          <a:lstStyle/>
-          <a:p>
-            <a:endParaRPr/>
-          </a:p>
-        </p:txBody>
-      </p:sp>
-      <p:sp>
-        <p:nvSpPr>
-          <p:cNvPr id="702" name="AChipTxt_2"/>
-          <p:cNvSpPr>
-            <a:spLocks noGrp="1"/>
-          </p:cNvSpPr>
-          <p:nvPr/>
-        </p:nvSpPr>
-        <p:spPr>
-          <a:xfrm>
-            <a:off x="7874000" y="2819400"/>
-            <a:ext cx="1778000" cy="381000"/>
-          </a:xfrm>
-          <a:prstGeom prst="rect">
-            <a:avLst/>
-          </a:prstGeom>
-          <a:noFill/>
-          <a:ln>
-            <a:noFill/>
-          </a:ln>
-        </p:spPr>
-        <p:txBody>
-          <a:bodyPr lIns="91440" tIns="45720" rIns="91440" bIns="45720" anchor="ctr"/>
-          <a:lstStyle/>
-          <a:p>
-            <a:pPr algn="ctr">
-              <a:buNone/>
-            </a:pPr>
-            <a:r>
-              <a:rPr lang="en-US" sz="1200" b="1" i="0" dirty="0">
-                <a:solidFill>
-                  <a:srgbClr val="7B2D8E"/>
-                </a:solidFill>
-              </a:rPr>
-              <a:t>Brainstorm</a:t>
-            </a:r>
-          </a:p>
-        </p:txBody>
-      </p:sp>
-      <p:sp>
-        <p:nvSpPr>
-          <p:cNvPr id="603" name="AChip_3"/>
-          <p:cNvSpPr>
-            <a:spLocks noGrp="1"/>
-          </p:cNvSpPr>
-          <p:nvPr/>
-        </p:nvSpPr>
-        <p:spPr>
-          <a:xfrm>
-            <a:off x="9906000" y="2819400"/>
-            <a:ext cx="1778000" cy="381000"/>
-          </a:xfrm>
-          <a:prstGeom prst="roundRect">
-            <a:avLst>
-              <a:gd name="adj" fmla="val 50000"/>
-            </a:avLst>
-          </a:prstGeom>
-          <a:solidFill>
-            <a:srgbClr val="E8C8F8"/>
-          </a:solidFill>
-          <a:ln w="12700">
-            <a:solidFill>
-              <a:srgbClr val="7B2D8E"/>
-            </a:solidFill>
-          </a:ln>
-        </p:spPr>
-        <p:txBody>
-          <a:bodyPr anchor="ctr"/>
-          <a:lstStyle/>
-          <a:p>
-            <a:endParaRPr/>
-          </a:p>
-        </p:txBody>
-      </p:sp>
-      <p:sp>
-        <p:nvSpPr>
-          <p:cNvPr id="703" name="AChipTxt_3"/>
-          <p:cNvSpPr>
-            <a:spLocks noGrp="1"/>
-          </p:cNvSpPr>
-          <p:nvPr/>
-        </p:nvSpPr>
-        <p:spPr>
-          <a:xfrm>
-            <a:off x="9906000" y="2819400"/>
-            <a:ext cx="1778000" cy="381000"/>
-          </a:xfrm>
-          <a:prstGeom prst="rect">
-            <a:avLst/>
-          </a:prstGeom>
-          <a:noFill/>
-          <a:ln>
-            <a:noFill/>
-          </a:ln>
-        </p:spPr>
-        <p:txBody>
-          <a:bodyPr lIns="91440" tIns="45720" rIns="91440" bIns="45720" anchor="ctr"/>
-          <a:lstStyle/>
-          <a:p>
-            <a:pPr algn="ctr">
-              <a:buNone/>
-            </a:pPr>
-            <a:r>
-              <a:rPr lang="en-US" sz="1200" b="1" i="0" dirty="0">
-                <a:solidFill>
-                  <a:srgbClr val="7B2D8E"/>
-                </a:solidFill>
-              </a:rPr>
-              <a:t>Classify</a:t>
-            </a:r>
-          </a:p>
-        </p:txBody>
-      </p:sp>
-      <p:sp>
-        <p:nvSpPr>
-          <p:cNvPr id="604" name="AChip_4"/>
-          <p:cNvSpPr>
-            <a:spLocks noGrp="1"/>
-          </p:cNvSpPr>
-          <p:nvPr/>
-        </p:nvSpPr>
-        <p:spPr>
-          <a:xfrm>
-            <a:off x="7874000" y="3327400"/>
-            <a:ext cx="1778000" cy="381000"/>
-          </a:xfrm>
-          <a:prstGeom prst="roundRect">
-            <a:avLst>
-              <a:gd name="adj" fmla="val 50000"/>
-            </a:avLst>
-          </a:prstGeom>
-          <a:solidFill>
-            <a:srgbClr val="E8C8F8"/>
-          </a:solidFill>
-          <a:ln w="12700">
-            <a:solidFill>
-              <a:srgbClr val="7B2D8E"/>
-            </a:solidFill>
-          </a:ln>
-        </p:spPr>
-        <p:txBody>
-          <a:bodyPr anchor="ctr"/>
-          <a:lstStyle/>
-          <a:p>
-            <a:endParaRPr/>
-          </a:p>
-        </p:txBody>
-      </p:sp>
-      <p:sp>
-        <p:nvSpPr>
-          <p:cNvPr id="704" name="AChipTxt_4"/>
-          <p:cNvSpPr>
-            <a:spLocks noGrp="1"/>
-          </p:cNvSpPr>
-          <p:nvPr/>
-        </p:nvSpPr>
-        <p:spPr>
-          <a:xfrm>
-            <a:off x="7874000" y="3327400"/>
-            <a:ext cx="1778000" cy="381000"/>
-          </a:xfrm>
-          <a:prstGeom prst="rect">
-            <a:avLst/>
-          </a:prstGeom>
-          <a:noFill/>
-          <a:ln>
-            <a:noFill/>
-          </a:ln>
-        </p:spPr>
-        <p:txBody>
-          <a:bodyPr lIns="91440" tIns="45720" rIns="91440" bIns="45720" anchor="ctr"/>
-          <a:lstStyle/>
-          <a:p>
-            <a:pPr algn="ctr">
-              <a:buNone/>
-            </a:pPr>
-            <a:r>
-              <a:rPr lang="en-US" sz="1200" b="1" i="0" dirty="0">
-                <a:solidFill>
-                  <a:srgbClr val="7B2D8E"/>
-                </a:solidFill>
-              </a:rPr>
-              <a:t>Synthesise</a:t>
-            </a:r>
-          </a:p>
-        </p:txBody>
-      </p:sp>
-      <p:sp>
-        <p:nvSpPr>
-          <p:cNvPr id="605" name="AChip_5"/>
-          <p:cNvSpPr>
-            <a:spLocks noGrp="1"/>
-          </p:cNvSpPr>
-          <p:nvPr/>
-        </p:nvSpPr>
-        <p:spPr>
-          <a:xfrm>
-            <a:off x="9906000" y="3327400"/>
-            <a:ext cx="1778000" cy="381000"/>
-          </a:xfrm>
-          <a:prstGeom prst="roundRect">
-            <a:avLst>
-              <a:gd name="adj" fmla="val 50000"/>
-            </a:avLst>
-          </a:prstGeom>
-          <a:solidFill>
-            <a:srgbClr val="E8C8F8"/>
-          </a:solidFill>
-          <a:ln w="12700">
-            <a:solidFill>
-              <a:srgbClr val="7B2D8E"/>
-            </a:solidFill>
-          </a:ln>
-        </p:spPr>
-        <p:txBody>
-          <a:bodyPr anchor="ctr"/>
-          <a:lstStyle/>
-          <a:p>
-            <a:endParaRPr/>
-          </a:p>
-        </p:txBody>
-      </p:sp>
-      <p:sp>
-        <p:nvSpPr>
-          <p:cNvPr id="705" name="AChipTxt_5"/>
-          <p:cNvSpPr>
-            <a:spLocks noGrp="1"/>
-          </p:cNvSpPr>
-          <p:nvPr/>
-        </p:nvSpPr>
-        <p:spPr>
-          <a:xfrm>
-            <a:off x="9906000" y="3327400"/>
-            <a:ext cx="1778000" cy="381000"/>
-          </a:xfrm>
-          <a:prstGeom prst="rect">
-            <a:avLst/>
-          </a:prstGeom>
-          <a:noFill/>
-          <a:ln>
-            <a:noFill/>
-          </a:ln>
-        </p:spPr>
-        <p:txBody>
-          <a:bodyPr lIns="91440" tIns="45720" rIns="91440" bIns="45720" anchor="ctr"/>
-          <a:lstStyle/>
-          <a:p>
-            <a:pPr algn="ctr">
-              <a:buNone/>
-            </a:pPr>
-            <a:r>
-              <a:rPr lang="en-US" sz="1200" b="1" i="0" dirty="0">
-                <a:solidFill>
-                  <a:srgbClr val="7B2D8E"/>
-                </a:solidFill>
-              </a:rPr>
-              <a:t>Plan</a:t>
-            </a:r>
-          </a:p>
-        </p:txBody>
-      </p:sp>
-      <p:sp>
-        <p:nvSpPr>
-          <p:cNvPr id="800" name="UnassignedLabel"/>
-          <p:cNvSpPr>
-            <a:spLocks noGrp="1"/>
-          </p:cNvSpPr>
-          <p:nvPr/>
-        </p:nvSpPr>
-        <p:spPr>
-          <a:xfrm>
-            <a:off x="7747000" y="4127500"/>
-            <a:ext cx="4064000" cy="254000"/>
-          </a:xfrm>
-          <a:prstGeom prst="rect">
-            <a:avLst/>
-          </a:prstGeom>
-          <a:noFill/>
-          <a:ln>
-            <a:noFill/>
-          </a:ln>
-        </p:spPr>
-        <p:txBody>
-          <a:bodyPr lIns="91440" tIns="45720" rIns="91440" bIns="45720" anchor="ctr"/>
-          <a:lstStyle/>
-          <a:p>
-            <a:pPr algn="l">
-              <a:buNone/>
-            </a:pPr>
-            <a:r>
-              <a:rPr lang="en-US" sz="1100" b="1" i="0" dirty="0">
-                <a:solidFill>
-                  <a:srgbClr val="444444"/>
-                </a:solidFill>
-              </a:rPr>
-              <a:t>Not assigned to this persona:</a:t>
-            </a:r>
-          </a:p>
-        </p:txBody>
-      </p:sp>
-      <p:sp>
-        <p:nvSpPr>
-          <p:cNvPr id="810" name="UChip_0"/>
-          <p:cNvSpPr>
-            <a:spLocks noGrp="1"/>
-          </p:cNvSpPr>
-          <p:nvPr/>
-        </p:nvSpPr>
-        <p:spPr>
-          <a:xfrm>
-            <a:off x="7874000" y="4318000"/>
-            <a:ext cx="1778000" cy="279400"/>
-          </a:xfrm>
-          <a:prstGeom prst="roundRect">
-            <a:avLst>
-              <a:gd name="adj" fmla="val 50000"/>
-            </a:avLst>
-          </a:prstGeom>
-          <a:solidFill>
-            <a:srgbClr val="F5F5F5"/>
-          </a:solidFill>
-          <a:ln w="12700">
-            <a:solidFill>
-              <a:srgbClr val="777777"/>
-            </a:solidFill>
-          </a:ln>
-        </p:spPr>
-        <p:txBody>
-          <a:bodyPr anchor="ctr"/>
-          <a:lstStyle/>
-          <a:p>
-            <a:endParaRPr/>
-          </a:p>
-        </p:txBody>
-      </p:sp>
-      <p:sp>
-        <p:nvSpPr>
-          <p:cNvPr id="820" name="UChipTxt_0"/>
-          <p:cNvSpPr>
-            <a:spLocks noGrp="1"/>
-          </p:cNvSpPr>
-          <p:nvPr/>
-        </p:nvSpPr>
-        <p:spPr>
-          <a:xfrm>
-            <a:off x="7874000" y="4318000"/>
-            <a:ext cx="1778000" cy="279400"/>
-          </a:xfrm>
-          <a:prstGeom prst="rect">
-            <a:avLst/>
-          </a:prstGeom>
-          <a:noFill/>
-          <a:ln>
-            <a:noFill/>
-          </a:ln>
-        </p:spPr>
-        <p:txBody>
-          <a:bodyPr lIns="91440" tIns="45720" rIns="91440" bIns="45720" anchor="ctr"/>
-          <a:lstStyle/>
-          <a:p>
-            <a:pPr algn="ctr">
-              <a:buNone/>
-            </a:pPr>
-            <a:r>
-              <a:rPr lang="en-US" sz="1200" b="1" i="0" dirty="0">
-                <a:solidFill>
-                  <a:srgbClr val="222222"/>
-                </a:solidFill>
-              </a:rPr>
-              <a:t>Write Code</a:t>
-            </a:r>
-          </a:p>
-        </p:txBody>
-      </p:sp>
-      <p:sp>
-        <p:nvSpPr>
-          <p:cNvPr id="811" name="UChip_1"/>
-          <p:cNvSpPr>
-            <a:spLocks noGrp="1"/>
-          </p:cNvSpPr>
-          <p:nvPr/>
-        </p:nvSpPr>
-        <p:spPr>
-          <a:xfrm>
-            <a:off x="9906000" y="4318000"/>
-            <a:ext cx="1778000" cy="279400"/>
-          </a:xfrm>
-          <a:prstGeom prst="roundRect">
-            <a:avLst>
-              <a:gd name="adj" fmla="val 50000"/>
-            </a:avLst>
-          </a:prstGeom>
-          <a:solidFill>
-            <a:srgbClr val="F5F5F5"/>
-          </a:solidFill>
-          <a:ln w="12700">
-            <a:solidFill>
-              <a:srgbClr val="777777"/>
-            </a:solidFill>
-          </a:ln>
-        </p:spPr>
-        <p:txBody>
-          <a:bodyPr anchor="ctr"/>
-          <a:lstStyle/>
-          <a:p>
-            <a:endParaRPr/>
-          </a:p>
-        </p:txBody>
-      </p:sp>
-      <p:sp>
-        <p:nvSpPr>
-          <p:cNvPr id="821" name="UChipTxt_1"/>
-          <p:cNvSpPr>
-            <a:spLocks noGrp="1"/>
-          </p:cNvSpPr>
-          <p:nvPr/>
-        </p:nvSpPr>
-        <p:spPr>
-          <a:xfrm>
-            <a:off x="9906000" y="4318000"/>
-            <a:ext cx="1778000" cy="279400"/>
-          </a:xfrm>
-          <a:prstGeom prst="rect">
-            <a:avLst/>
-          </a:prstGeom>
-          <a:noFill/>
-          <a:ln>
-            <a:noFill/>
-          </a:ln>
-        </p:spPr>
-        <p:txBody>
-          <a:bodyPr lIns="91440" tIns="45720" rIns="91440" bIns="45720" anchor="ctr"/>
-          <a:lstStyle/>
-          <a:p>
-            <a:pPr algn="ctr">
-              <a:buNone/>
-            </a:pPr>
-            <a:r>
-              <a:rPr lang="en-US" sz="1200" b="1" i="0" dirty="0">
-                <a:solidFill>
-                  <a:srgbClr val="222222"/>
-                </a:solidFill>
-              </a:rPr>
-              <a:t>Debug</a:t>
-            </a:r>
-          </a:p>
-        </p:txBody>
-      </p:sp>
-      <p:sp>
-        <p:nvSpPr>
-          <p:cNvPr id="812" name="UChip_2"/>
-          <p:cNvSpPr>
-            <a:spLocks noGrp="1"/>
-          </p:cNvSpPr>
-          <p:nvPr/>
-        </p:nvSpPr>
-        <p:spPr>
-          <a:xfrm>
-            <a:off x="7874000" y="4673600"/>
-            <a:ext cx="1778000" cy="279400"/>
-          </a:xfrm>
-          <a:prstGeom prst="roundRect">
-            <a:avLst>
-              <a:gd name="adj" fmla="val 50000"/>
-            </a:avLst>
-          </a:prstGeom>
-          <a:solidFill>
-            <a:srgbClr val="F5F5F5"/>
-          </a:solidFill>
-          <a:ln w="12700">
-            <a:solidFill>
-              <a:srgbClr val="777777"/>
-            </a:solidFill>
-          </a:ln>
-        </p:spPr>
-        <p:txBody>
-          <a:bodyPr anchor="ctr"/>
-          <a:lstStyle/>
-          <a:p>
-            <a:endParaRPr/>
-          </a:p>
-        </p:txBody>
-      </p:sp>
-      <p:sp>
-        <p:nvSpPr>
-          <p:cNvPr id="822" name="UChipTxt_2"/>
-          <p:cNvSpPr>
-            <a:spLocks noGrp="1"/>
-          </p:cNvSpPr>
-          <p:nvPr/>
-        </p:nvSpPr>
-        <p:spPr>
-          <a:xfrm>
-            <a:off x="7874000" y="4673600"/>
-            <a:ext cx="1778000" cy="279400"/>
-          </a:xfrm>
-          <a:prstGeom prst="rect">
-            <a:avLst/>
-          </a:prstGeom>
-          <a:noFill/>
-          <a:ln>
-            <a:noFill/>
-          </a:ln>
-        </p:spPr>
-        <p:txBody>
-          <a:bodyPr lIns="91440" tIns="45720" rIns="91440" bIns="45720" anchor="ctr"/>
-          <a:lstStyle/>
-          <a:p>
-            <a:pPr algn="ctr">
-              <a:buNone/>
-            </a:pPr>
-            <a:r>
-              <a:rPr lang="en-US" sz="1200" b="1" i="0" dirty="0">
-                <a:solidFill>
-                  <a:srgbClr val="222222"/>
-                </a:solidFill>
-              </a:rPr>
-              <a:t>Translate</a:t>
-            </a:r>
-          </a:p>
-        </p:txBody>
-      </p:sp>
-      <p:sp>
-        <p:nvSpPr>
-          <p:cNvPr id="813" name="UChip_3"/>
-          <p:cNvSpPr>
-            <a:spLocks noGrp="1"/>
-          </p:cNvSpPr>
-          <p:nvPr/>
-        </p:nvSpPr>
-        <p:spPr>
-          <a:xfrm>
-            <a:off x="9906000" y="4673600"/>
-            <a:ext cx="1778000" cy="279400"/>
-          </a:xfrm>
-          <a:prstGeom prst="roundRect">
-            <a:avLst>
-              <a:gd name="adj" fmla="val 50000"/>
-            </a:avLst>
-          </a:prstGeom>
-          <a:solidFill>
-            <a:srgbClr val="F5F5F5"/>
-          </a:solidFill>
-          <a:ln w="12700">
-            <a:solidFill>
-              <a:srgbClr val="777777"/>
-            </a:solidFill>
-          </a:ln>
-        </p:spPr>
-        <p:txBody>
-          <a:bodyPr anchor="ctr"/>
-          <a:lstStyle/>
-          <a:p>
-            <a:endParaRPr/>
-          </a:p>
-        </p:txBody>
-      </p:sp>
-      <p:sp>
-        <p:nvSpPr>
-          <p:cNvPr id="823" name="UChipTxt_3"/>
-          <p:cNvSpPr>
-            <a:spLocks noGrp="1"/>
-          </p:cNvSpPr>
-          <p:nvPr/>
-        </p:nvSpPr>
-        <p:spPr>
-          <a:xfrm>
-            <a:off x="9906000" y="4673600"/>
-            <a:ext cx="1778000" cy="279400"/>
-          </a:xfrm>
-          <a:prstGeom prst="rect">
-            <a:avLst/>
-          </a:prstGeom>
-          <a:noFill/>
-          <a:ln>
-            <a:noFill/>
-          </a:ln>
-        </p:spPr>
-        <p:txBody>
-          <a:bodyPr lIns="91440" tIns="45720" rIns="91440" bIns="45720" anchor="ctr"/>
-          <a:lstStyle/>
-          <a:p>
-            <a:pPr algn="ctr">
-              <a:buNone/>
-            </a:pPr>
-            <a:r>
-              <a:rPr lang="en-US" sz="1200" b="1" i="0" dirty="0">
-                <a:solidFill>
-                  <a:srgbClr val="222222"/>
-                </a:solidFill>
-              </a:rPr>
-              <a:t>Search</a:t>
-            </a:r>
-          </a:p>
-        </p:txBody>
-      </p:sp>
-      <p:sp>
-        <p:nvSpPr>
-          <p:cNvPr id="814" name="UChip_4"/>
-          <p:cNvSpPr>
-            <a:spLocks noGrp="1"/>
-          </p:cNvSpPr>
-          <p:nvPr/>
-        </p:nvSpPr>
-        <p:spPr>
-          <a:xfrm>
-            <a:off x="7874000" y="5029200"/>
-            <a:ext cx="1778000" cy="279400"/>
-          </a:xfrm>
-          <a:prstGeom prst="roundRect">
-            <a:avLst>
-              <a:gd name="adj" fmla="val 50000"/>
-            </a:avLst>
-          </a:prstGeom>
-          <a:solidFill>
-            <a:srgbClr val="F5F5F5"/>
-          </a:solidFill>
-          <a:ln w="12700">
-            <a:solidFill>
-              <a:srgbClr val="777777"/>
-            </a:solidFill>
-          </a:ln>
-        </p:spPr>
-        <p:txBody>
-          <a:bodyPr anchor="ctr"/>
-          <a:lstStyle/>
-          <a:p>
-            <a:endParaRPr/>
-          </a:p>
-        </p:txBody>
-      </p:sp>
-      <p:sp>
-        <p:nvSpPr>
-          <p:cNvPr id="824" name="UChipTxt_4"/>
-          <p:cNvSpPr>
-            <a:spLocks noGrp="1"/>
-          </p:cNvSpPr>
-          <p:nvPr/>
-        </p:nvSpPr>
-        <p:spPr>
-          <a:xfrm>
-            <a:off x="7874000" y="5029200"/>
-            <a:ext cx="1778000" cy="279400"/>
-          </a:xfrm>
-          <a:prstGeom prst="rect">
-            <a:avLst/>
-          </a:prstGeom>
-          <a:noFill/>
-          <a:ln>
-            <a:noFill/>
-          </a:ln>
-        </p:spPr>
-        <p:txBody>
-          <a:bodyPr lIns="91440" tIns="45720" rIns="91440" bIns="45720" anchor="ctr"/>
-          <a:lstStyle/>
-          <a:p>
-            <a:pPr algn="ctr">
-              <a:buNone/>
-            </a:pPr>
-            <a:r>
-              <a:rPr lang="en-US" sz="1200" b="1" i="0" dirty="0">
-                <a:solidFill>
-                  <a:srgbClr val="222222"/>
-                </a:solidFill>
-              </a:rPr>
-              <a:t>Reformat</a:t>
-            </a:r>
-          </a:p>
-        </p:txBody>
-      </p:sp>
-      <p:sp>
-        <p:nvSpPr>
-          <p:cNvPr id="815" name="UChip_5"/>
-          <p:cNvSpPr>
-            <a:spLocks noGrp="1"/>
-          </p:cNvSpPr>
-          <p:nvPr/>
-        </p:nvSpPr>
-        <p:spPr>
-          <a:xfrm>
-            <a:off x="9906000" y="5029200"/>
-            <a:ext cx="1778000" cy="279400"/>
-          </a:xfrm>
-          <a:prstGeom prst="roundRect">
-            <a:avLst>
-              <a:gd name="adj" fmla="val 50000"/>
-            </a:avLst>
-          </a:prstGeom>
-          <a:solidFill>
-            <a:srgbClr val="F5F5F5"/>
-          </a:solidFill>
-          <a:ln w="12700">
-            <a:solidFill>
-              <a:srgbClr val="777777"/>
-            </a:solidFill>
-          </a:ln>
-        </p:spPr>
-        <p:txBody>
-          <a:bodyPr anchor="ctr"/>
-          <a:lstStyle/>
-          <a:p>
-            <a:endParaRPr/>
-          </a:p>
-        </p:txBody>
-      </p:sp>
-      <p:sp>
-        <p:nvSpPr>
-          <p:cNvPr id="825" name="UChipTxt_5"/>
-          <p:cNvSpPr>
-            <a:spLocks noGrp="1"/>
-          </p:cNvSpPr>
-          <p:nvPr/>
-        </p:nvSpPr>
-        <p:spPr>
-          <a:xfrm>
-            <a:off x="9906000" y="5029200"/>
-            <a:ext cx="1778000" cy="279400"/>
-          </a:xfrm>
-          <a:prstGeom prst="rect">
-            <a:avLst/>
-          </a:prstGeom>
-          <a:noFill/>
-          <a:ln>
-            <a:noFill/>
-          </a:ln>
-        </p:spPr>
-        <p:txBody>
-          <a:bodyPr lIns="91440" tIns="45720" rIns="91440" bIns="45720" anchor="ctr"/>
-          <a:lstStyle/>
-          <a:p>
-            <a:pPr algn="ctr">
-              <a:buNone/>
-            </a:pPr>
-            <a:r>
-              <a:rPr lang="en-US" sz="1200" b="1" i="0" dirty="0">
-                <a:solidFill>
-                  <a:srgbClr val="222222"/>
-                </a:solidFill>
-              </a:rPr>
-              <a:t>Extract</a:t>
-            </a:r>
-          </a:p>
-        </p:txBody>
-      </p:sp>
-      <p:sp>
-        <p:nvSpPr>
-          <p:cNvPr id="900" name="Line900"/>
-          <p:cNvSpPr>
-            <a:spLocks noGrp="1"/>
-          </p:cNvSpPr>
-          <p:nvPr/>
-        </p:nvSpPr>
-        <p:spPr>
-          <a:xfrm>
-            <a:off x="4572000" y="3403600"/>
-            <a:ext cx="254000" cy="12700"/>
-          </a:xfrm>
-          <a:prstGeom prst="line">
-            <a:avLst/>
-          </a:prstGeom>
-          <a:noFill/>
-          <a:ln w="18000">
-            <a:solidFill>
-              <a:srgbClr val="1F4E79"/>
-            </a:solidFill>
-            <a:prstDash val="solid"/>
-          </a:ln>
-        </p:spPr>
-        <p:txBody>
-          <a:bodyPr/>
-          <a:lstStyle/>
-          <a:p>
-            <a:endParaRPr/>
-          </a:p>
-        </p:txBody>
-      </p:sp>
-      <p:sp>
-        <p:nvSpPr>
-          <p:cNvPr id="901" name="Line901"/>
-          <p:cNvSpPr>
-            <a:spLocks noGrp="1"/>
-          </p:cNvSpPr>
-          <p:nvPr/>
-        </p:nvSpPr>
-        <p:spPr>
-          <a:xfrm>
-            <a:off x="7366000" y="3403600"/>
-            <a:ext cx="254000" cy="12700"/>
-          </a:xfrm>
-          <a:prstGeom prst="line">
-            <a:avLst/>
-          </a:prstGeom>
-          <a:noFill/>
-          <a:ln w="18000">
-            <a:solidFill>
-              <a:srgbClr val="7B2D8E"/>
-            </a:solidFill>
-            <a:prstDash val="solid"/>
-          </a:ln>
-        </p:spPr>
-        <p:txBody>
-          <a:bodyPr/>
-          <a:lstStyle/>
-          <a:p>
-            <a:endParaRPr/>
-          </a:p>
-        </p:txBody>
-      </p:sp>
-      <p:sp>
-        <p:nvSpPr>
-          <p:cNvPr id="902" name="LineLabel1"/>
-          <p:cNvSpPr>
-            <a:spLocks noGrp="1"/>
-          </p:cNvSpPr>
-          <p:nvPr/>
-        </p:nvSpPr>
-        <p:spPr>
-          <a:xfrm>
-            <a:off x="4572000" y="3149600"/>
-            <a:ext cx="254000" cy="228600"/>
-          </a:xfrm>
-          <a:prstGeom prst="rect">
-            <a:avLst/>
-          </a:prstGeom>
-          <a:noFill/>
-          <a:ln>
-            <a:noFill/>
-          </a:ln>
-        </p:spPr>
-        <p:txBody>
-          <a:bodyPr lIns="91440" tIns="45720" rIns="91440" bIns="45720" anchor="ctr"/>
-          <a:lstStyle/>
-          <a:p>
-            <a:pPr algn="ctr">
-              <a:buNone/>
-            </a:pPr>
-            <a:r>
-              <a:rPr lang="en-US" sz="1400" b="1" i="0" dirty="0">
-                <a:solidFill>
-                  <a:srgbClr val="1F4E79"/>
-                </a:solidFill>
-              </a:rPr>
-              <a:t>→</a:t>
-            </a:r>
-          </a:p>
-        </p:txBody>
-      </p:sp>
-      <p:sp>
-        <p:nvSpPr>
-          <p:cNvPr id="903" name="LineLabel2"/>
-          <p:cNvSpPr>
-            <a:spLocks noGrp="1"/>
-          </p:cNvSpPr>
-          <p:nvPr/>
-        </p:nvSpPr>
-        <p:spPr>
-          <a:xfrm>
-            <a:off x="7366000" y="3149600"/>
-            <a:ext cx="254000" cy="228600"/>
-          </a:xfrm>
-          <a:prstGeom prst="rect">
-            <a:avLst/>
-          </a:prstGeom>
-          <a:noFill/>
-          <a:ln>
-            <a:noFill/>
-          </a:ln>
-        </p:spPr>
-        <p:txBody>
-          <a:bodyPr lIns="91440" tIns="45720" rIns="91440" bIns="45720" anchor="ctr"/>
-          <a:lstStyle/>
-          <a:p>
-            <a:pPr algn="ctr">
-              <a:buNone/>
-            </a:pPr>
-            <a:r>
-              <a:rPr lang="en-US" sz="1400" b="1" i="0" dirty="0">
-                <a:solidFill>
-                  <a:srgbClr val="7B2D8E"/>
-                </a:solidFill>
-              </a:rPr>
-              <a:t>→</a:t>
-            </a:r>
-          </a:p>
-        </p:txBody>
-      </p:sp>
-      <p:sp>
-        <p:nvSpPr>
-          <p:cNvPr id="950" name="KeyBg"/>
-          <p:cNvSpPr>
-            <a:spLocks noGrp="1"/>
-          </p:cNvSpPr>
-          <p:nvPr/>
-        </p:nvSpPr>
-        <p:spPr>
-          <a:xfrm>
-            <a:off x="254000" y="6350000"/>
-            <a:ext cx="11684000" cy="406400"/>
-          </a:xfrm>
-          <a:prstGeom prst="rect">
-            <a:avLst/>
-          </a:prstGeom>
-          <a:solidFill>
-            <a:srgbClr val="F0F0F0"/>
-          </a:solidFill>
-          <a:ln w="12700">
-            <a:solidFill>
-              <a:srgbClr val="CCCCCC"/>
-            </a:solidFill>
-          </a:ln>
-        </p:spPr>
-        <p:txBody>
-          <a:bodyPr anchor="ctr"/>
-          <a:lstStyle/>
-          <a:p>
-            <a:endParaRPr/>
-          </a:p>
-        </p:txBody>
-      </p:sp>
-      <p:sp>
-        <p:nvSpPr>
-          <p:cNvPr id="951" name="KeyTxt"/>
-          <p:cNvSpPr>
-            <a:spLocks noGrp="1"/>
-          </p:cNvSpPr>
-          <p:nvPr/>
-        </p:nvSpPr>
-        <p:spPr>
-          <a:xfrm>
-            <a:off x="254000" y="6350000"/>
-            <a:ext cx="11684000" cy="406400"/>
-          </a:xfrm>
-          <a:prstGeom prst="rect">
-            <a:avLst/>
-          </a:prstGeom>
-          <a:noFill/>
-          <a:ln>
-            <a:noFill/>
-          </a:ln>
-        </p:spPr>
-        <p:txBody>
-          <a:bodyPr lIns="91440" tIns="45720" rIns="91440" bIns="45720" anchor="ctr"/>
-          <a:lstStyle/>
-          <a:p>
-            <a:pPr algn="ctr">
-              <a:buNone/>
-            </a:pPr>
-            <a:r>
-              <a:rPr lang="en-US" sz="1100" b="0" i="0" dirty="0">
-                <a:solidFill>
-                  <a:srgbClr val="666666"/>
-                </a:solidFill>
-              </a:rPr>
-              <a:t>Context pulls from the full inventory each turn  ·  Persona is pre-configured with a fixed skill set  ·  Unassigned skills are unavailable to the persona</a:t>
-            </a:r>
-          </a:p>
-        </p:txBody>
-      </p:sp>
+              <a:t>Dana, can you send the top 10 grossing products that were included in last month’s sales spreadsheet and send it to the marketing team. Add a column for the sales volume for each product. </a:t>
+            </a:r>
+          </a:p>
+        </p:txBody>
+      </p:sp>
+      <p:pic>
+        <p:nvPicPr>
+          <p:cNvPr id="110" name="Graphic 110" descr="Cog/gear icon representing context"/>
+          <p:cNvPicPr>
+            <a:picLocks noChangeAspect="1"/>
+          </p:cNvPicPr>
+          <p:nvPr/>
+        </p:nvPicPr>
+        <p:blipFill>
+          <a:blip>
+            <a:extLst>
+              <a:ext uri="{96DAC541-7B7A-43D3-8B79-37D633B846F1}">
+                <asvg:svgBlip xmlns:asvg="http://schemas.microsoft.com/office/drawing/2016/SVG/main" r:embed="rId2"/>
+              </a:ext>
+            </a:extLst>
+          </a:blip>
+          <a:stretch>
+            <a:fillRect/>
+          </a:stretch>
+        </p:blipFill>
+        <p:spPr>
+          <a:xfrm>
+            <a:off x="2413000" y="977900"/>
+            <a:ext cx="1270000" cy="1270000"/>
+          </a:xfrm>
+          <a:prstGeom prst="rect">
+            <a:avLst/>
+          </a:prstGeom>
+        </p:spPr>
+      </p:pic>
+      <p:pic>
+        <p:nvPicPr>
+          <p:cNvPr id="111" name="Graphic 111" descr="Person avatar icon representing persona"/>
+          <p:cNvPicPr>
+            <a:picLocks noChangeAspect="1"/>
+          </p:cNvPicPr>
+          <p:nvPr/>
+        </p:nvPicPr>
+        <p:blipFill>
+          <a:blip>
+            <a:extLst>
+              <a:ext uri="{96DAC541-7B7A-43D3-8B79-37D633B846F1}">
+                <asvg:svgBlip xmlns:asvg="http://schemas.microsoft.com/office/drawing/2016/SVG/main" r:embed="rId3"/>
+              </a:ext>
+            </a:extLst>
+          </a:blip>
+          <a:stretch>
+            <a:fillRect/>
+          </a:stretch>
+        </p:blipFill>
+        <p:spPr>
+          <a:xfrm>
+            <a:off x="8255000" y="977900"/>
+            <a:ext cx="1270000" cy="1270000"/>
+          </a:xfrm>
+          <a:prstGeom prst="rect">
+            <a:avLst/>
+          </a:prstGeom>
+        </p:spPr>
+      </p:pic>
     </p:spTree>
     <p:extLst>
       <p:ext uri="{BB962C8B-B14F-4D97-AF65-F5344CB8AC3E}">
-        <p14:creationId xmlns:p14="http://schemas.microsoft.com/office/powerpoint/2010/main" val="891345001"/>
+        <p14:creationId xmlns:p14="http://schemas.microsoft.com/office/powerpoint/2010/main" val="3918661051"/>
       </p:ext>
     </p:extLst>
   </p:cSld>
@@ -7400,6 +5007,2830 @@
       </p:grpSpPr>
       <p:sp>
         <p:nvSpPr>
+          <p:cNvPr id="200" name="TitleBg"/>
+          <p:cNvSpPr>
+            <a:spLocks noGrp="1"/>
+          </p:cNvSpPr>
+          <p:nvPr/>
+        </p:nvSpPr>
+        <p:spPr>
+          <a:xfrm>
+            <a:off x="0" y="0"/>
+            <a:ext cx="12192000" cy="609600"/>
+          </a:xfrm>
+          <a:prstGeom prst="rect">
+            <a:avLst/>
+          </a:prstGeom>
+          <a:solidFill>
+            <a:srgbClr val="1A1A2E"/>
+          </a:solidFill>
+          <a:ln>
+            <a:noFill/>
+          </a:ln>
+        </p:spPr>
+        <p:txBody>
+          <a:bodyPr anchor="ctr"/>
+          <a:lstStyle/>
+          <a:p>
+            <a:endParaRPr/>
+          </a:p>
+        </p:txBody>
+      </p:sp>
+      <p:sp>
+        <p:nvSpPr>
+          <p:cNvPr id="201" name="Title"/>
+          <p:cNvSpPr>
+            <a:spLocks noGrp="1"/>
+          </p:cNvSpPr>
+          <p:nvPr/>
+        </p:nvSpPr>
+        <p:spPr>
+          <a:xfrm>
+            <a:off x="0" y="0"/>
+            <a:ext cx="12192000" cy="609600"/>
+          </a:xfrm>
+          <a:prstGeom prst="rect">
+            <a:avLst/>
+          </a:prstGeom>
+          <a:noFill/>
+          <a:ln>
+            <a:noFill/>
+          </a:ln>
+        </p:spPr>
+        <p:txBody>
+          <a:bodyPr lIns="91440" tIns="45720" rIns="91440" bIns="45720" anchor="ctr"/>
+          <a:lstStyle/>
+          <a:p>
+            <a:pPr algn="ctr">
+              <a:buNone/>
+            </a:pPr>
+            <a:r>
+              <a:rPr lang="en-US" sz="2000" b="1" i="0" dirty="0">
+                <a:solidFill>
+                  <a:srgbClr val="FFFFFF"/>
+                </a:solidFill>
+              </a:rPr>
+              <a:t>Context sees everything · Persona gets what it needs</a:t>
+            </a:r>
+          </a:p>
+        </p:txBody>
+      </p:sp>
+      <p:sp>
+        <p:nvSpPr>
+          <p:cNvPr id="210" name="HubBg"/>
+          <p:cNvSpPr>
+            <a:spLocks noGrp="1"/>
+          </p:cNvSpPr>
+          <p:nvPr/>
+        </p:nvSpPr>
+        <p:spPr>
+          <a:xfrm>
+            <a:off x="4826000" y="2476500"/>
+            <a:ext cx="2540000" cy="1841500"/>
+          </a:xfrm>
+          <a:prstGeom prst="roundRect">
+            <a:avLst>
+              <a:gd name="adj" fmla="val 20000"/>
+            </a:avLst>
+          </a:prstGeom>
+          <a:solidFill>
+            <a:srgbClr val="1A1A2E"/>
+          </a:solidFill>
+          <a:ln w="12700">
+            <a:solidFill>
+              <a:srgbClr val="4FC3F7"/>
+            </a:solidFill>
+          </a:ln>
+        </p:spPr>
+        <p:txBody>
+          <a:bodyPr anchor="ctr"/>
+          <a:lstStyle/>
+          <a:p>
+            <a:endParaRPr/>
+          </a:p>
+        </p:txBody>
+      </p:sp>
+      <p:sp>
+        <p:nvSpPr>
+          <p:cNvPr id="211" name="HubLabel"/>
+          <p:cNvSpPr>
+            <a:spLocks noGrp="1"/>
+          </p:cNvSpPr>
+          <p:nvPr/>
+        </p:nvSpPr>
+        <p:spPr>
+          <a:xfrm>
+            <a:off x="4826000" y="2476500"/>
+            <a:ext cx="2540000" cy="482600"/>
+          </a:xfrm>
+          <a:prstGeom prst="rect">
+            <a:avLst/>
+          </a:prstGeom>
+          <a:noFill/>
+          <a:ln>
+            <a:noFill/>
+          </a:ln>
+        </p:spPr>
+        <p:txBody>
+          <a:bodyPr lIns="91440" tIns="45720" rIns="91440" bIns="45720" anchor="ctr"/>
+          <a:lstStyle/>
+          <a:p>
+            <a:pPr algn="ctr">
+              <a:buNone/>
+            </a:pPr>
+            <a:r>
+              <a:rPr lang="en-US" sz="1200" b="1" i="0" dirty="0">
+                <a:solidFill>
+                  <a:srgbClr val="4FC3F7"/>
+                </a:solidFill>
+              </a:rPr>
+              <a:t>SKILL INVENTORY</a:t>
+            </a:r>
+          </a:p>
+        </p:txBody>
+      </p:sp>
+      <p:sp>
+        <p:nvSpPr>
+          <p:cNvPr id="212" name="HubSub"/>
+          <p:cNvSpPr>
+            <a:spLocks noGrp="1"/>
+          </p:cNvSpPr>
+          <p:nvPr/>
+        </p:nvSpPr>
+        <p:spPr>
+          <a:xfrm>
+            <a:off x="4826000" y="2857500"/>
+            <a:ext cx="2540000" cy="1460500"/>
+          </a:xfrm>
+          <a:prstGeom prst="rect">
+            <a:avLst/>
+          </a:prstGeom>
+          <a:noFill/>
+          <a:ln>
+            <a:noFill/>
+          </a:ln>
+        </p:spPr>
+        <p:txBody>
+          <a:bodyPr lIns="91440" tIns="45720" rIns="91440" bIns="45720" anchor="ctr"/>
+          <a:lstStyle/>
+          <a:p>
+            <a:pPr algn="ctr">
+              <a:buNone/>
+            </a:pPr>
+            <a:r>
+              <a:rPr lang="en-US" sz="1200" b="0" i="0" dirty="0">
+                <a:solidFill>
+                  <a:srgbClr val="CCDDEE"/>
+                </a:solidFill>
+              </a:rPr>
+              <a:t>All skills available to the system</a:t>
+            </a:r>
+          </a:p>
+        </p:txBody>
+      </p:sp>
+      <p:sp>
+        <p:nvSpPr>
+          <p:cNvPr id="220" name="CtxPanel"/>
+          <p:cNvSpPr>
+            <a:spLocks noGrp="1"/>
+          </p:cNvSpPr>
+          <p:nvPr/>
+        </p:nvSpPr>
+        <p:spPr>
+          <a:xfrm>
+            <a:off x="254000" y="711200"/>
+            <a:ext cx="4318000" cy="6045200"/>
+          </a:xfrm>
+          <a:prstGeom prst="roundRect">
+            <a:avLst>
+              <a:gd name="adj" fmla="val 10000"/>
+            </a:avLst>
+          </a:prstGeom>
+          <a:solidFill>
+            <a:srgbClr val="E8F4FF"/>
+          </a:solidFill>
+          <a:ln w="12700">
+            <a:solidFill>
+              <a:srgbClr val="1F4E79"/>
+            </a:solidFill>
+          </a:ln>
+        </p:spPr>
+        <p:txBody>
+          <a:bodyPr anchor="ctr"/>
+          <a:lstStyle/>
+          <a:p>
+            <a:endParaRPr/>
+          </a:p>
+        </p:txBody>
+      </p:sp>
+      <p:sp>
+        <p:nvSpPr>
+          <p:cNvPr id="221" name="CtxHeader"/>
+          <p:cNvSpPr>
+            <a:spLocks noGrp="1"/>
+          </p:cNvSpPr>
+          <p:nvPr/>
+        </p:nvSpPr>
+        <p:spPr>
+          <a:xfrm>
+            <a:off x="254000" y="711200"/>
+            <a:ext cx="4318000" cy="508000"/>
+          </a:xfrm>
+          <a:prstGeom prst="rect">
+            <a:avLst/>
+          </a:prstGeom>
+          <a:solidFill>
+            <a:srgbClr val="1F4E79"/>
+          </a:solidFill>
+          <a:ln>
+            <a:noFill/>
+          </a:ln>
+        </p:spPr>
+        <p:txBody>
+          <a:bodyPr anchor="ctr"/>
+          <a:lstStyle/>
+          <a:p>
+            <a:endParaRPr/>
+          </a:p>
+        </p:txBody>
+      </p:sp>
+      <p:sp>
+        <p:nvSpPr>
+          <p:cNvPr id="222" name="CtxHeaderTxt"/>
+          <p:cNvSpPr>
+            <a:spLocks noGrp="1"/>
+          </p:cNvSpPr>
+          <p:nvPr/>
+        </p:nvSpPr>
+        <p:spPr>
+          <a:xfrm>
+            <a:off x="254000" y="711200"/>
+            <a:ext cx="4318000" cy="508000"/>
+          </a:xfrm>
+          <a:prstGeom prst="rect">
+            <a:avLst/>
+          </a:prstGeom>
+          <a:noFill/>
+          <a:ln>
+            <a:noFill/>
+          </a:ln>
+        </p:spPr>
+        <p:txBody>
+          <a:bodyPr lIns="91440" tIns="45720" rIns="91440" bIns="45720" anchor="ctr"/>
+          <a:lstStyle/>
+          <a:p>
+            <a:pPr algn="ctr">
+              <a:buNone/>
+            </a:pPr>
+            <a:r>
+              <a:rPr lang="en-US" sz="1500" b="1" i="0" dirty="0">
+                <a:solidFill>
+                  <a:srgbClr val="FFFFFF"/>
+                </a:solidFill>
+              </a:rPr>
+              <a:t>CONTEXT — Full Access</a:t>
+            </a:r>
+          </a:p>
+        </p:txBody>
+      </p:sp>
+      <p:sp>
+        <p:nvSpPr>
+          <p:cNvPr id="223" name="CtxSub"/>
+          <p:cNvSpPr>
+            <a:spLocks noGrp="1"/>
+          </p:cNvSpPr>
+          <p:nvPr/>
+        </p:nvSpPr>
+        <p:spPr>
+          <a:xfrm>
+            <a:off x="381000" y="1270000"/>
+            <a:ext cx="4064000" cy="355600"/>
+          </a:xfrm>
+          <a:prstGeom prst="rect">
+            <a:avLst/>
+          </a:prstGeom>
+          <a:noFill/>
+          <a:ln>
+            <a:noFill/>
+          </a:ln>
+        </p:spPr>
+        <p:txBody>
+          <a:bodyPr lIns="91440" tIns="45720" rIns="91440" bIns="45720" anchor="ctr"/>
+          <a:lstStyle/>
+          <a:p>
+            <a:pPr algn="ctr">
+              <a:buNone/>
+            </a:pPr>
+            <a:r>
+              <a:rPr lang="en-US" sz="1300" b="0" i="0" dirty="0">
+                <a:solidFill>
+                  <a:srgbClr val="1F4E79"/>
+                </a:solidFill>
+              </a:rPr>
+              <a:t>Can draw on any skill at any time</a:t>
+            </a:r>
+          </a:p>
+        </p:txBody>
+      </p:sp>
+      <p:sp>
+        <p:nvSpPr>
+          <p:cNvPr id="300" name="Chip_0"/>
+          <p:cNvSpPr>
+            <a:spLocks noGrp="1"/>
+          </p:cNvSpPr>
+          <p:nvPr/>
+        </p:nvSpPr>
+        <p:spPr>
+          <a:xfrm>
+            <a:off x="381000" y="1714500"/>
+            <a:ext cx="1270000" cy="330200"/>
+          </a:xfrm>
+          <a:prstGeom prst="roundRect">
+            <a:avLst>
+              <a:gd name="adj" fmla="val 50000"/>
+            </a:avLst>
+          </a:prstGeom>
+          <a:solidFill>
+            <a:srgbClr val="C7E3FF"/>
+          </a:solidFill>
+          <a:ln w="12700">
+            <a:solidFill>
+              <a:srgbClr val="1F4E79"/>
+            </a:solidFill>
+          </a:ln>
+        </p:spPr>
+        <p:txBody>
+          <a:bodyPr anchor="ctr"/>
+          <a:lstStyle/>
+          <a:p>
+            <a:endParaRPr/>
+          </a:p>
+        </p:txBody>
+      </p:sp>
+      <p:sp>
+        <p:nvSpPr>
+          <p:cNvPr id="400" name="ChipTxt_0"/>
+          <p:cNvSpPr>
+            <a:spLocks noGrp="1"/>
+          </p:cNvSpPr>
+          <p:nvPr/>
+        </p:nvSpPr>
+        <p:spPr>
+          <a:xfrm>
+            <a:off x="381000" y="1714500"/>
+            <a:ext cx="1270000" cy="330200"/>
+          </a:xfrm>
+          <a:prstGeom prst="rect">
+            <a:avLst/>
+          </a:prstGeom>
+          <a:noFill/>
+          <a:ln>
+            <a:noFill/>
+          </a:ln>
+        </p:spPr>
+        <p:txBody>
+          <a:bodyPr lIns="91440" tIns="45720" rIns="91440" bIns="45720" anchor="ctr"/>
+          <a:lstStyle/>
+          <a:p>
+            <a:pPr algn="ctr">
+              <a:buNone/>
+            </a:pPr>
+            <a:r>
+              <a:rPr lang="en-US" sz="1100" b="0" i="0" dirty="0">
+                <a:solidFill>
+                  <a:srgbClr val="1F4E79"/>
+                </a:solidFill>
+              </a:rPr>
+              <a:t>Summarise</a:t>
+            </a:r>
+          </a:p>
+        </p:txBody>
+      </p:sp>
+      <p:sp>
+        <p:nvSpPr>
+          <p:cNvPr id="301" name="Chip_1"/>
+          <p:cNvSpPr>
+            <a:spLocks noGrp="1"/>
+          </p:cNvSpPr>
+          <p:nvPr/>
+        </p:nvSpPr>
+        <p:spPr>
+          <a:xfrm>
+            <a:off x="1778000" y="1714500"/>
+            <a:ext cx="1270000" cy="330200"/>
+          </a:xfrm>
+          <a:prstGeom prst="roundRect">
+            <a:avLst>
+              <a:gd name="adj" fmla="val 50000"/>
+            </a:avLst>
+          </a:prstGeom>
+          <a:solidFill>
+            <a:srgbClr val="C7E3FF"/>
+          </a:solidFill>
+          <a:ln w="12700">
+            <a:solidFill>
+              <a:srgbClr val="1F4E79"/>
+            </a:solidFill>
+          </a:ln>
+        </p:spPr>
+        <p:txBody>
+          <a:bodyPr anchor="ctr"/>
+          <a:lstStyle/>
+          <a:p>
+            <a:endParaRPr/>
+          </a:p>
+        </p:txBody>
+      </p:sp>
+      <p:sp>
+        <p:nvSpPr>
+          <p:cNvPr id="401" name="ChipTxt_1"/>
+          <p:cNvSpPr>
+            <a:spLocks noGrp="1"/>
+          </p:cNvSpPr>
+          <p:nvPr/>
+        </p:nvSpPr>
+        <p:spPr>
+          <a:xfrm>
+            <a:off x="1778000" y="1714500"/>
+            <a:ext cx="1270000" cy="330200"/>
+          </a:xfrm>
+          <a:prstGeom prst="rect">
+            <a:avLst/>
+          </a:prstGeom>
+          <a:noFill/>
+          <a:ln>
+            <a:noFill/>
+          </a:ln>
+        </p:spPr>
+        <p:txBody>
+          <a:bodyPr lIns="91440" tIns="45720" rIns="91440" bIns="45720" anchor="ctr"/>
+          <a:lstStyle/>
+          <a:p>
+            <a:pPr algn="ctr">
+              <a:buNone/>
+            </a:pPr>
+            <a:r>
+              <a:rPr lang="en-US" sz="1100" b="0" i="0" dirty="0">
+                <a:solidFill>
+                  <a:srgbClr val="1F4E79"/>
+                </a:solidFill>
+              </a:rPr>
+              <a:t>Translate</a:t>
+            </a:r>
+          </a:p>
+        </p:txBody>
+      </p:sp>
+      <p:sp>
+        <p:nvSpPr>
+          <p:cNvPr id="302" name="Chip_2"/>
+          <p:cNvSpPr>
+            <a:spLocks noGrp="1"/>
+          </p:cNvSpPr>
+          <p:nvPr/>
+        </p:nvSpPr>
+        <p:spPr>
+          <a:xfrm>
+            <a:off x="3175000" y="1714500"/>
+            <a:ext cx="1270000" cy="330200"/>
+          </a:xfrm>
+          <a:prstGeom prst="roundRect">
+            <a:avLst>
+              <a:gd name="adj" fmla="val 50000"/>
+            </a:avLst>
+          </a:prstGeom>
+          <a:solidFill>
+            <a:srgbClr val="C7E3FF"/>
+          </a:solidFill>
+          <a:ln w="12700">
+            <a:solidFill>
+              <a:srgbClr val="1F4E79"/>
+            </a:solidFill>
+          </a:ln>
+        </p:spPr>
+        <p:txBody>
+          <a:bodyPr anchor="ctr"/>
+          <a:lstStyle/>
+          <a:p>
+            <a:endParaRPr/>
+          </a:p>
+        </p:txBody>
+      </p:sp>
+      <p:sp>
+        <p:nvSpPr>
+          <p:cNvPr id="402" name="ChipTxt_2"/>
+          <p:cNvSpPr>
+            <a:spLocks noGrp="1"/>
+          </p:cNvSpPr>
+          <p:nvPr/>
+        </p:nvSpPr>
+        <p:spPr>
+          <a:xfrm>
+            <a:off x="3175000" y="1714500"/>
+            <a:ext cx="1270000" cy="330200"/>
+          </a:xfrm>
+          <a:prstGeom prst="rect">
+            <a:avLst/>
+          </a:prstGeom>
+          <a:noFill/>
+          <a:ln>
+            <a:noFill/>
+          </a:ln>
+        </p:spPr>
+        <p:txBody>
+          <a:bodyPr lIns="91440" tIns="45720" rIns="91440" bIns="45720" anchor="ctr"/>
+          <a:lstStyle/>
+          <a:p>
+            <a:pPr algn="ctr">
+              <a:buNone/>
+            </a:pPr>
+            <a:r>
+              <a:rPr lang="en-US" sz="1100" b="0" i="0" dirty="0">
+                <a:solidFill>
+                  <a:srgbClr val="1F4E79"/>
+                </a:solidFill>
+              </a:rPr>
+              <a:t>Classify</a:t>
+            </a:r>
+          </a:p>
+        </p:txBody>
+      </p:sp>
+      <p:sp>
+        <p:nvSpPr>
+          <p:cNvPr id="303" name="Chip_3"/>
+          <p:cNvSpPr>
+            <a:spLocks noGrp="1"/>
+          </p:cNvSpPr>
+          <p:nvPr/>
+        </p:nvSpPr>
+        <p:spPr>
+          <a:xfrm>
+            <a:off x="381000" y="2146300"/>
+            <a:ext cx="1270000" cy="330200"/>
+          </a:xfrm>
+          <a:prstGeom prst="roundRect">
+            <a:avLst>
+              <a:gd name="adj" fmla="val 50000"/>
+            </a:avLst>
+          </a:prstGeom>
+          <a:solidFill>
+            <a:srgbClr val="C7E3FF"/>
+          </a:solidFill>
+          <a:ln w="12700">
+            <a:solidFill>
+              <a:srgbClr val="1F4E79"/>
+            </a:solidFill>
+          </a:ln>
+        </p:spPr>
+        <p:txBody>
+          <a:bodyPr anchor="ctr"/>
+          <a:lstStyle/>
+          <a:p>
+            <a:endParaRPr/>
+          </a:p>
+        </p:txBody>
+      </p:sp>
+      <p:sp>
+        <p:nvSpPr>
+          <p:cNvPr id="403" name="ChipTxt_3"/>
+          <p:cNvSpPr>
+            <a:spLocks noGrp="1"/>
+          </p:cNvSpPr>
+          <p:nvPr/>
+        </p:nvSpPr>
+        <p:spPr>
+          <a:xfrm>
+            <a:off x="381000" y="2146300"/>
+            <a:ext cx="1270000" cy="330200"/>
+          </a:xfrm>
+          <a:prstGeom prst="rect">
+            <a:avLst/>
+          </a:prstGeom>
+          <a:noFill/>
+          <a:ln>
+            <a:noFill/>
+          </a:ln>
+        </p:spPr>
+        <p:txBody>
+          <a:bodyPr lIns="91440" tIns="45720" rIns="91440" bIns="45720" anchor="ctr"/>
+          <a:lstStyle/>
+          <a:p>
+            <a:pPr algn="ctr">
+              <a:buNone/>
+            </a:pPr>
+            <a:r>
+              <a:rPr lang="en-US" sz="1100" b="0" i="0" dirty="0">
+                <a:solidFill>
+                  <a:srgbClr val="1F4E79"/>
+                </a:solidFill>
+              </a:rPr>
+              <a:t>Extract</a:t>
+            </a:r>
+          </a:p>
+        </p:txBody>
+      </p:sp>
+      <p:sp>
+        <p:nvSpPr>
+          <p:cNvPr id="304" name="Chip_4"/>
+          <p:cNvSpPr>
+            <a:spLocks noGrp="1"/>
+          </p:cNvSpPr>
+          <p:nvPr/>
+        </p:nvSpPr>
+        <p:spPr>
+          <a:xfrm>
+            <a:off x="1778000" y="2146300"/>
+            <a:ext cx="1270000" cy="330200"/>
+          </a:xfrm>
+          <a:prstGeom prst="roundRect">
+            <a:avLst>
+              <a:gd name="adj" fmla="val 50000"/>
+            </a:avLst>
+          </a:prstGeom>
+          <a:solidFill>
+            <a:srgbClr val="C7E3FF"/>
+          </a:solidFill>
+          <a:ln w="12700">
+            <a:solidFill>
+              <a:srgbClr val="1F4E79"/>
+            </a:solidFill>
+          </a:ln>
+        </p:spPr>
+        <p:txBody>
+          <a:bodyPr anchor="ctr"/>
+          <a:lstStyle/>
+          <a:p>
+            <a:endParaRPr/>
+          </a:p>
+        </p:txBody>
+      </p:sp>
+      <p:sp>
+        <p:nvSpPr>
+          <p:cNvPr id="404" name="ChipTxt_4"/>
+          <p:cNvSpPr>
+            <a:spLocks noGrp="1"/>
+          </p:cNvSpPr>
+          <p:nvPr/>
+        </p:nvSpPr>
+        <p:spPr>
+          <a:xfrm>
+            <a:off x="1778000" y="2146300"/>
+            <a:ext cx="1270000" cy="330200"/>
+          </a:xfrm>
+          <a:prstGeom prst="rect">
+            <a:avLst/>
+          </a:prstGeom>
+          <a:noFill/>
+          <a:ln>
+            <a:noFill/>
+          </a:ln>
+        </p:spPr>
+        <p:txBody>
+          <a:bodyPr lIns="91440" tIns="45720" rIns="91440" bIns="45720" anchor="ctr"/>
+          <a:lstStyle/>
+          <a:p>
+            <a:pPr algn="ctr">
+              <a:buNone/>
+            </a:pPr>
+            <a:r>
+              <a:rPr lang="en-US" sz="1100" b="0" i="0" dirty="0">
+                <a:solidFill>
+                  <a:srgbClr val="1F4E79"/>
+                </a:solidFill>
+              </a:rPr>
+              <a:t>Compare</a:t>
+            </a:r>
+          </a:p>
+        </p:txBody>
+      </p:sp>
+      <p:sp>
+        <p:nvSpPr>
+          <p:cNvPr id="305" name="Chip_5"/>
+          <p:cNvSpPr>
+            <a:spLocks noGrp="1"/>
+          </p:cNvSpPr>
+          <p:nvPr/>
+        </p:nvSpPr>
+        <p:spPr>
+          <a:xfrm>
+            <a:off x="3175000" y="2146300"/>
+            <a:ext cx="1270000" cy="330200"/>
+          </a:xfrm>
+          <a:prstGeom prst="roundRect">
+            <a:avLst>
+              <a:gd name="adj" fmla="val 50000"/>
+            </a:avLst>
+          </a:prstGeom>
+          <a:solidFill>
+            <a:srgbClr val="C7E3FF"/>
+          </a:solidFill>
+          <a:ln w="12700">
+            <a:solidFill>
+              <a:srgbClr val="1F4E79"/>
+            </a:solidFill>
+          </a:ln>
+        </p:spPr>
+        <p:txBody>
+          <a:bodyPr anchor="ctr"/>
+          <a:lstStyle/>
+          <a:p>
+            <a:endParaRPr/>
+          </a:p>
+        </p:txBody>
+      </p:sp>
+      <p:sp>
+        <p:nvSpPr>
+          <p:cNvPr id="405" name="ChipTxt_5"/>
+          <p:cNvSpPr>
+            <a:spLocks noGrp="1"/>
+          </p:cNvSpPr>
+          <p:nvPr/>
+        </p:nvSpPr>
+        <p:spPr>
+          <a:xfrm>
+            <a:off x="3175000" y="2146300"/>
+            <a:ext cx="1270000" cy="330200"/>
+          </a:xfrm>
+          <a:prstGeom prst="rect">
+            <a:avLst/>
+          </a:prstGeom>
+          <a:noFill/>
+          <a:ln>
+            <a:noFill/>
+          </a:ln>
+        </p:spPr>
+        <p:txBody>
+          <a:bodyPr lIns="91440" tIns="45720" rIns="91440" bIns="45720" anchor="ctr"/>
+          <a:lstStyle/>
+          <a:p>
+            <a:pPr algn="ctr">
+              <a:buNone/>
+            </a:pPr>
+            <a:r>
+              <a:rPr lang="en-US" sz="1100" b="0" i="0" dirty="0">
+                <a:solidFill>
+                  <a:srgbClr val="1F4E79"/>
+                </a:solidFill>
+              </a:rPr>
+              <a:t>Write Code</a:t>
+            </a:r>
+          </a:p>
+        </p:txBody>
+      </p:sp>
+      <p:sp>
+        <p:nvSpPr>
+          <p:cNvPr id="306" name="Chip_6"/>
+          <p:cNvSpPr>
+            <a:spLocks noGrp="1"/>
+          </p:cNvSpPr>
+          <p:nvPr/>
+        </p:nvSpPr>
+        <p:spPr>
+          <a:xfrm>
+            <a:off x="381000" y="2578100"/>
+            <a:ext cx="1270000" cy="330200"/>
+          </a:xfrm>
+          <a:prstGeom prst="roundRect">
+            <a:avLst>
+              <a:gd name="adj" fmla="val 50000"/>
+            </a:avLst>
+          </a:prstGeom>
+          <a:solidFill>
+            <a:srgbClr val="C7E3FF"/>
+          </a:solidFill>
+          <a:ln w="12700">
+            <a:solidFill>
+              <a:srgbClr val="1F4E79"/>
+            </a:solidFill>
+          </a:ln>
+        </p:spPr>
+        <p:txBody>
+          <a:bodyPr anchor="ctr"/>
+          <a:lstStyle/>
+          <a:p>
+            <a:endParaRPr/>
+          </a:p>
+        </p:txBody>
+      </p:sp>
+      <p:sp>
+        <p:nvSpPr>
+          <p:cNvPr id="406" name="ChipTxt_6"/>
+          <p:cNvSpPr>
+            <a:spLocks noGrp="1"/>
+          </p:cNvSpPr>
+          <p:nvPr/>
+        </p:nvSpPr>
+        <p:spPr>
+          <a:xfrm>
+            <a:off x="381000" y="2578100"/>
+            <a:ext cx="1270000" cy="330200"/>
+          </a:xfrm>
+          <a:prstGeom prst="rect">
+            <a:avLst/>
+          </a:prstGeom>
+          <a:noFill/>
+          <a:ln>
+            <a:noFill/>
+          </a:ln>
+        </p:spPr>
+        <p:txBody>
+          <a:bodyPr lIns="91440" tIns="45720" rIns="91440" bIns="45720" anchor="ctr"/>
+          <a:lstStyle/>
+          <a:p>
+            <a:pPr algn="ctr">
+              <a:buNone/>
+            </a:pPr>
+            <a:r>
+              <a:rPr lang="en-US" sz="1100" b="0" i="0" dirty="0">
+                <a:solidFill>
+                  <a:srgbClr val="1F4E79"/>
+                </a:solidFill>
+              </a:rPr>
+              <a:t>Debug</a:t>
+            </a:r>
+          </a:p>
+        </p:txBody>
+      </p:sp>
+      <p:sp>
+        <p:nvSpPr>
+          <p:cNvPr id="307" name="Chip_7"/>
+          <p:cNvSpPr>
+            <a:spLocks noGrp="1"/>
+          </p:cNvSpPr>
+          <p:nvPr/>
+        </p:nvSpPr>
+        <p:spPr>
+          <a:xfrm>
+            <a:off x="1778000" y="2578100"/>
+            <a:ext cx="1270000" cy="330200"/>
+          </a:xfrm>
+          <a:prstGeom prst="roundRect">
+            <a:avLst>
+              <a:gd name="adj" fmla="val 50000"/>
+            </a:avLst>
+          </a:prstGeom>
+          <a:solidFill>
+            <a:srgbClr val="C7E3FF"/>
+          </a:solidFill>
+          <a:ln w="12700">
+            <a:solidFill>
+              <a:srgbClr val="1F4E79"/>
+            </a:solidFill>
+          </a:ln>
+        </p:spPr>
+        <p:txBody>
+          <a:bodyPr anchor="ctr"/>
+          <a:lstStyle/>
+          <a:p>
+            <a:endParaRPr/>
+          </a:p>
+        </p:txBody>
+      </p:sp>
+      <p:sp>
+        <p:nvSpPr>
+          <p:cNvPr id="407" name="ChipTxt_7"/>
+          <p:cNvSpPr>
+            <a:spLocks noGrp="1"/>
+          </p:cNvSpPr>
+          <p:nvPr/>
+        </p:nvSpPr>
+        <p:spPr>
+          <a:xfrm>
+            <a:off x="1778000" y="2578100"/>
+            <a:ext cx="1270000" cy="330200"/>
+          </a:xfrm>
+          <a:prstGeom prst="rect">
+            <a:avLst/>
+          </a:prstGeom>
+          <a:noFill/>
+          <a:ln>
+            <a:noFill/>
+          </a:ln>
+        </p:spPr>
+        <p:txBody>
+          <a:bodyPr lIns="91440" tIns="45720" rIns="91440" bIns="45720" anchor="ctr"/>
+          <a:lstStyle/>
+          <a:p>
+            <a:pPr algn="ctr">
+              <a:buNone/>
+            </a:pPr>
+            <a:r>
+              <a:rPr lang="en-US" sz="1100" b="0" i="0" dirty="0">
+                <a:solidFill>
+                  <a:srgbClr val="1F4E79"/>
+                </a:solidFill>
+              </a:rPr>
+              <a:t>Reformat</a:t>
+            </a:r>
+          </a:p>
+        </p:txBody>
+      </p:sp>
+      <p:sp>
+        <p:nvSpPr>
+          <p:cNvPr id="308" name="Chip_8"/>
+          <p:cNvSpPr>
+            <a:spLocks noGrp="1"/>
+          </p:cNvSpPr>
+          <p:nvPr/>
+        </p:nvSpPr>
+        <p:spPr>
+          <a:xfrm>
+            <a:off x="3175000" y="2578100"/>
+            <a:ext cx="1270000" cy="330200"/>
+          </a:xfrm>
+          <a:prstGeom prst="roundRect">
+            <a:avLst>
+              <a:gd name="adj" fmla="val 50000"/>
+            </a:avLst>
+          </a:prstGeom>
+          <a:solidFill>
+            <a:srgbClr val="C7E3FF"/>
+          </a:solidFill>
+          <a:ln w="12700">
+            <a:solidFill>
+              <a:srgbClr val="1F4E79"/>
+            </a:solidFill>
+          </a:ln>
+        </p:spPr>
+        <p:txBody>
+          <a:bodyPr anchor="ctr"/>
+          <a:lstStyle/>
+          <a:p>
+            <a:endParaRPr/>
+          </a:p>
+        </p:txBody>
+      </p:sp>
+      <p:sp>
+        <p:nvSpPr>
+          <p:cNvPr id="408" name="ChipTxt_8"/>
+          <p:cNvSpPr>
+            <a:spLocks noGrp="1"/>
+          </p:cNvSpPr>
+          <p:nvPr/>
+        </p:nvSpPr>
+        <p:spPr>
+          <a:xfrm>
+            <a:off x="3175000" y="2578100"/>
+            <a:ext cx="1270000" cy="330200"/>
+          </a:xfrm>
+          <a:prstGeom prst="rect">
+            <a:avLst/>
+          </a:prstGeom>
+          <a:noFill/>
+          <a:ln>
+            <a:noFill/>
+          </a:ln>
+        </p:spPr>
+        <p:txBody>
+          <a:bodyPr lIns="91440" tIns="45720" rIns="91440" bIns="45720" anchor="ctr"/>
+          <a:lstStyle/>
+          <a:p>
+            <a:pPr algn="ctr">
+              <a:buNone/>
+            </a:pPr>
+            <a:r>
+              <a:rPr lang="en-US" sz="1100" b="0" i="0" dirty="0">
+                <a:solidFill>
+                  <a:srgbClr val="1F4E79"/>
+                </a:solidFill>
+              </a:rPr>
+              <a:t>Search</a:t>
+            </a:r>
+          </a:p>
+        </p:txBody>
+      </p:sp>
+      <p:sp>
+        <p:nvSpPr>
+          <p:cNvPr id="309" name="Chip_9"/>
+          <p:cNvSpPr>
+            <a:spLocks noGrp="1"/>
+          </p:cNvSpPr>
+          <p:nvPr/>
+        </p:nvSpPr>
+        <p:spPr>
+          <a:xfrm>
+            <a:off x="381000" y="3009900"/>
+            <a:ext cx="1270000" cy="330200"/>
+          </a:xfrm>
+          <a:prstGeom prst="roundRect">
+            <a:avLst>
+              <a:gd name="adj" fmla="val 50000"/>
+            </a:avLst>
+          </a:prstGeom>
+          <a:solidFill>
+            <a:srgbClr val="C7E3FF"/>
+          </a:solidFill>
+          <a:ln w="12700">
+            <a:solidFill>
+              <a:srgbClr val="1F4E79"/>
+            </a:solidFill>
+          </a:ln>
+        </p:spPr>
+        <p:txBody>
+          <a:bodyPr anchor="ctr"/>
+          <a:lstStyle/>
+          <a:p>
+            <a:endParaRPr/>
+          </a:p>
+        </p:txBody>
+      </p:sp>
+      <p:sp>
+        <p:nvSpPr>
+          <p:cNvPr id="409" name="ChipTxt_9"/>
+          <p:cNvSpPr>
+            <a:spLocks noGrp="1"/>
+          </p:cNvSpPr>
+          <p:nvPr/>
+        </p:nvSpPr>
+        <p:spPr>
+          <a:xfrm>
+            <a:off x="381000" y="3009900"/>
+            <a:ext cx="1270000" cy="330200"/>
+          </a:xfrm>
+          <a:prstGeom prst="rect">
+            <a:avLst/>
+          </a:prstGeom>
+          <a:noFill/>
+          <a:ln>
+            <a:noFill/>
+          </a:ln>
+        </p:spPr>
+        <p:txBody>
+          <a:bodyPr lIns="91440" tIns="45720" rIns="91440" bIns="45720" anchor="ctr"/>
+          <a:lstStyle/>
+          <a:p>
+            <a:pPr algn="ctr">
+              <a:buNone/>
+            </a:pPr>
+            <a:r>
+              <a:rPr lang="en-US" sz="1100" b="0" i="0" dirty="0">
+                <a:solidFill>
+                  <a:srgbClr val="1F4E79"/>
+                </a:solidFill>
+              </a:rPr>
+              <a:t>Explain</a:t>
+            </a:r>
+          </a:p>
+        </p:txBody>
+      </p:sp>
+      <p:sp>
+        <p:nvSpPr>
+          <p:cNvPr id="310" name="Chip_10"/>
+          <p:cNvSpPr>
+            <a:spLocks noGrp="1"/>
+          </p:cNvSpPr>
+          <p:nvPr/>
+        </p:nvSpPr>
+        <p:spPr>
+          <a:xfrm>
+            <a:off x="1778000" y="3009900"/>
+            <a:ext cx="1270000" cy="330200"/>
+          </a:xfrm>
+          <a:prstGeom prst="roundRect">
+            <a:avLst>
+              <a:gd name="adj" fmla="val 50000"/>
+            </a:avLst>
+          </a:prstGeom>
+          <a:solidFill>
+            <a:srgbClr val="C7E3FF"/>
+          </a:solidFill>
+          <a:ln w="12700">
+            <a:solidFill>
+              <a:srgbClr val="1F4E79"/>
+            </a:solidFill>
+          </a:ln>
+        </p:spPr>
+        <p:txBody>
+          <a:bodyPr anchor="ctr"/>
+          <a:lstStyle/>
+          <a:p>
+            <a:endParaRPr/>
+          </a:p>
+        </p:txBody>
+      </p:sp>
+      <p:sp>
+        <p:nvSpPr>
+          <p:cNvPr id="410" name="ChipTxt_10"/>
+          <p:cNvSpPr>
+            <a:spLocks noGrp="1"/>
+          </p:cNvSpPr>
+          <p:nvPr/>
+        </p:nvSpPr>
+        <p:spPr>
+          <a:xfrm>
+            <a:off x="1778000" y="3009900"/>
+            <a:ext cx="1270000" cy="330200"/>
+          </a:xfrm>
+          <a:prstGeom prst="rect">
+            <a:avLst/>
+          </a:prstGeom>
+          <a:noFill/>
+          <a:ln>
+            <a:noFill/>
+          </a:ln>
+        </p:spPr>
+        <p:txBody>
+          <a:bodyPr lIns="91440" tIns="45720" rIns="91440" bIns="45720" anchor="ctr"/>
+          <a:lstStyle/>
+          <a:p>
+            <a:pPr algn="ctr">
+              <a:buNone/>
+            </a:pPr>
+            <a:r>
+              <a:rPr lang="en-US" sz="1100" b="0" i="0" dirty="0">
+                <a:solidFill>
+                  <a:srgbClr val="1F4E79"/>
+                </a:solidFill>
+              </a:rPr>
+              <a:t>Draft Email</a:t>
+            </a:r>
+          </a:p>
+        </p:txBody>
+      </p:sp>
+      <p:sp>
+        <p:nvSpPr>
+          <p:cNvPr id="311" name="Chip_11"/>
+          <p:cNvSpPr>
+            <a:spLocks noGrp="1"/>
+          </p:cNvSpPr>
+          <p:nvPr/>
+        </p:nvSpPr>
+        <p:spPr>
+          <a:xfrm>
+            <a:off x="3175000" y="3009900"/>
+            <a:ext cx="1270000" cy="330200"/>
+          </a:xfrm>
+          <a:prstGeom prst="roundRect">
+            <a:avLst>
+              <a:gd name="adj" fmla="val 50000"/>
+            </a:avLst>
+          </a:prstGeom>
+          <a:solidFill>
+            <a:srgbClr val="C7E3FF"/>
+          </a:solidFill>
+          <a:ln w="12700">
+            <a:solidFill>
+              <a:srgbClr val="1F4E79"/>
+            </a:solidFill>
+          </a:ln>
+        </p:spPr>
+        <p:txBody>
+          <a:bodyPr anchor="ctr"/>
+          <a:lstStyle/>
+          <a:p>
+            <a:endParaRPr/>
+          </a:p>
+        </p:txBody>
+      </p:sp>
+      <p:sp>
+        <p:nvSpPr>
+          <p:cNvPr id="411" name="ChipTxt_11"/>
+          <p:cNvSpPr>
+            <a:spLocks noGrp="1"/>
+          </p:cNvSpPr>
+          <p:nvPr/>
+        </p:nvSpPr>
+        <p:spPr>
+          <a:xfrm>
+            <a:off x="3175000" y="3009900"/>
+            <a:ext cx="1270000" cy="330200"/>
+          </a:xfrm>
+          <a:prstGeom prst="rect">
+            <a:avLst/>
+          </a:prstGeom>
+          <a:noFill/>
+          <a:ln>
+            <a:noFill/>
+          </a:ln>
+        </p:spPr>
+        <p:txBody>
+          <a:bodyPr lIns="91440" tIns="45720" rIns="91440" bIns="45720" anchor="ctr"/>
+          <a:lstStyle/>
+          <a:p>
+            <a:pPr algn="ctr">
+              <a:buNone/>
+            </a:pPr>
+            <a:r>
+              <a:rPr lang="en-US" sz="1100" b="0" i="0" dirty="0">
+                <a:solidFill>
+                  <a:srgbClr val="1F4E79"/>
+                </a:solidFill>
+              </a:rPr>
+              <a:t>Brainstorm</a:t>
+            </a:r>
+          </a:p>
+        </p:txBody>
+      </p:sp>
+      <p:sp>
+        <p:nvSpPr>
+          <p:cNvPr id="312" name="Chip_12"/>
+          <p:cNvSpPr>
+            <a:spLocks noGrp="1"/>
+          </p:cNvSpPr>
+          <p:nvPr/>
+        </p:nvSpPr>
+        <p:spPr>
+          <a:xfrm>
+            <a:off x="381000" y="3441700"/>
+            <a:ext cx="1270000" cy="330200"/>
+          </a:xfrm>
+          <a:prstGeom prst="roundRect">
+            <a:avLst>
+              <a:gd name="adj" fmla="val 50000"/>
+            </a:avLst>
+          </a:prstGeom>
+          <a:solidFill>
+            <a:srgbClr val="C7E3FF"/>
+          </a:solidFill>
+          <a:ln w="12700">
+            <a:solidFill>
+              <a:srgbClr val="1F4E79"/>
+            </a:solidFill>
+          </a:ln>
+        </p:spPr>
+        <p:txBody>
+          <a:bodyPr anchor="ctr"/>
+          <a:lstStyle/>
+          <a:p>
+            <a:endParaRPr/>
+          </a:p>
+        </p:txBody>
+      </p:sp>
+      <p:sp>
+        <p:nvSpPr>
+          <p:cNvPr id="412" name="ChipTxt_12"/>
+          <p:cNvSpPr>
+            <a:spLocks noGrp="1"/>
+          </p:cNvSpPr>
+          <p:nvPr/>
+        </p:nvSpPr>
+        <p:spPr>
+          <a:xfrm>
+            <a:off x="381000" y="3441700"/>
+            <a:ext cx="1270000" cy="330200"/>
+          </a:xfrm>
+          <a:prstGeom prst="rect">
+            <a:avLst/>
+          </a:prstGeom>
+          <a:noFill/>
+          <a:ln>
+            <a:noFill/>
+          </a:ln>
+        </p:spPr>
+        <p:txBody>
+          <a:bodyPr lIns="91440" tIns="45720" rIns="91440" bIns="45720" anchor="ctr"/>
+          <a:lstStyle/>
+          <a:p>
+            <a:pPr algn="ctr">
+              <a:buNone/>
+            </a:pPr>
+            <a:r>
+              <a:rPr lang="en-US" sz="1100" b="0" i="0" dirty="0">
+                <a:solidFill>
+                  <a:srgbClr val="1F4E79"/>
+                </a:solidFill>
+              </a:rPr>
+              <a:t>Critique</a:t>
+            </a:r>
+          </a:p>
+        </p:txBody>
+      </p:sp>
+      <p:sp>
+        <p:nvSpPr>
+          <p:cNvPr id="313" name="Chip_13"/>
+          <p:cNvSpPr>
+            <a:spLocks noGrp="1"/>
+          </p:cNvSpPr>
+          <p:nvPr/>
+        </p:nvSpPr>
+        <p:spPr>
+          <a:xfrm>
+            <a:off x="1778000" y="3441700"/>
+            <a:ext cx="1270000" cy="330200"/>
+          </a:xfrm>
+          <a:prstGeom prst="roundRect">
+            <a:avLst>
+              <a:gd name="adj" fmla="val 50000"/>
+            </a:avLst>
+          </a:prstGeom>
+          <a:solidFill>
+            <a:srgbClr val="C7E3FF"/>
+          </a:solidFill>
+          <a:ln w="12700">
+            <a:solidFill>
+              <a:srgbClr val="1F4E79"/>
+            </a:solidFill>
+          </a:ln>
+        </p:spPr>
+        <p:txBody>
+          <a:bodyPr anchor="ctr"/>
+          <a:lstStyle/>
+          <a:p>
+            <a:endParaRPr/>
+          </a:p>
+        </p:txBody>
+      </p:sp>
+      <p:sp>
+        <p:nvSpPr>
+          <p:cNvPr id="413" name="ChipTxt_13"/>
+          <p:cNvSpPr>
+            <a:spLocks noGrp="1"/>
+          </p:cNvSpPr>
+          <p:nvPr/>
+        </p:nvSpPr>
+        <p:spPr>
+          <a:xfrm>
+            <a:off x="1778000" y="3441700"/>
+            <a:ext cx="1270000" cy="330200"/>
+          </a:xfrm>
+          <a:prstGeom prst="rect">
+            <a:avLst/>
+          </a:prstGeom>
+          <a:noFill/>
+          <a:ln>
+            <a:noFill/>
+          </a:ln>
+        </p:spPr>
+        <p:txBody>
+          <a:bodyPr lIns="91440" tIns="45720" rIns="91440" bIns="45720" anchor="ctr"/>
+          <a:lstStyle/>
+          <a:p>
+            <a:pPr algn="ctr">
+              <a:buNone/>
+            </a:pPr>
+            <a:r>
+              <a:rPr lang="en-US" sz="1100" b="0" i="0" dirty="0">
+                <a:solidFill>
+                  <a:srgbClr val="1F4E79"/>
+                </a:solidFill>
+              </a:rPr>
+              <a:t>Synthesise</a:t>
+            </a:r>
+          </a:p>
+        </p:txBody>
+      </p:sp>
+      <p:sp>
+        <p:nvSpPr>
+          <p:cNvPr id="314" name="Chip_14"/>
+          <p:cNvSpPr>
+            <a:spLocks noGrp="1"/>
+          </p:cNvSpPr>
+          <p:nvPr/>
+        </p:nvSpPr>
+        <p:spPr>
+          <a:xfrm>
+            <a:off x="3175000" y="3441700"/>
+            <a:ext cx="1270000" cy="330200"/>
+          </a:xfrm>
+          <a:prstGeom prst="roundRect">
+            <a:avLst>
+              <a:gd name="adj" fmla="val 50000"/>
+            </a:avLst>
+          </a:prstGeom>
+          <a:solidFill>
+            <a:srgbClr val="C7E3FF"/>
+          </a:solidFill>
+          <a:ln w="12700">
+            <a:solidFill>
+              <a:srgbClr val="1F4E79"/>
+            </a:solidFill>
+          </a:ln>
+        </p:spPr>
+        <p:txBody>
+          <a:bodyPr anchor="ctr"/>
+          <a:lstStyle/>
+          <a:p>
+            <a:endParaRPr/>
+          </a:p>
+        </p:txBody>
+      </p:sp>
+      <p:sp>
+        <p:nvSpPr>
+          <p:cNvPr id="414" name="ChipTxt_14"/>
+          <p:cNvSpPr>
+            <a:spLocks noGrp="1"/>
+          </p:cNvSpPr>
+          <p:nvPr/>
+        </p:nvSpPr>
+        <p:spPr>
+          <a:xfrm>
+            <a:off x="3175000" y="3441700"/>
+            <a:ext cx="1270000" cy="330200"/>
+          </a:xfrm>
+          <a:prstGeom prst="rect">
+            <a:avLst/>
+          </a:prstGeom>
+          <a:noFill/>
+          <a:ln>
+            <a:noFill/>
+          </a:ln>
+        </p:spPr>
+        <p:txBody>
+          <a:bodyPr lIns="91440" tIns="45720" rIns="91440" bIns="45720" anchor="ctr"/>
+          <a:lstStyle/>
+          <a:p>
+            <a:pPr algn="ctr">
+              <a:buNone/>
+            </a:pPr>
+            <a:r>
+              <a:rPr lang="en-US" sz="1100" b="0" i="0" dirty="0">
+                <a:solidFill>
+                  <a:srgbClr val="1F4E79"/>
+                </a:solidFill>
+              </a:rPr>
+              <a:t>Plan</a:t>
+            </a:r>
+          </a:p>
+        </p:txBody>
+      </p:sp>
+      <p:sp>
+        <p:nvSpPr>
+          <p:cNvPr id="500" name="PerPanel"/>
+          <p:cNvSpPr>
+            <a:spLocks noGrp="1"/>
+          </p:cNvSpPr>
+          <p:nvPr/>
+        </p:nvSpPr>
+        <p:spPr>
+          <a:xfrm>
+            <a:off x="7620000" y="711200"/>
+            <a:ext cx="4318000" cy="6045200"/>
+          </a:xfrm>
+          <a:prstGeom prst="roundRect">
+            <a:avLst>
+              <a:gd name="adj" fmla="val 10000"/>
+            </a:avLst>
+          </a:prstGeom>
+          <a:solidFill>
+            <a:srgbClr val="F6EAFD"/>
+          </a:solidFill>
+          <a:ln w="12700">
+            <a:solidFill>
+              <a:srgbClr val="7B2D8E"/>
+            </a:solidFill>
+          </a:ln>
+        </p:spPr>
+        <p:txBody>
+          <a:bodyPr anchor="ctr"/>
+          <a:lstStyle/>
+          <a:p>
+            <a:endParaRPr/>
+          </a:p>
+        </p:txBody>
+      </p:sp>
+      <p:sp>
+        <p:nvSpPr>
+          <p:cNvPr id="501" name="PerHeader"/>
+          <p:cNvSpPr>
+            <a:spLocks noGrp="1"/>
+          </p:cNvSpPr>
+          <p:nvPr/>
+        </p:nvSpPr>
+        <p:spPr>
+          <a:xfrm>
+            <a:off x="7620000" y="711200"/>
+            <a:ext cx="4318000" cy="508000"/>
+          </a:xfrm>
+          <a:prstGeom prst="rect">
+            <a:avLst/>
+          </a:prstGeom>
+          <a:solidFill>
+            <a:srgbClr val="7B2D8E"/>
+          </a:solidFill>
+          <a:ln>
+            <a:noFill/>
+          </a:ln>
+        </p:spPr>
+        <p:txBody>
+          <a:bodyPr anchor="ctr"/>
+          <a:lstStyle/>
+          <a:p>
+            <a:endParaRPr/>
+          </a:p>
+        </p:txBody>
+      </p:sp>
+      <p:sp>
+        <p:nvSpPr>
+          <p:cNvPr id="502" name="PerHeaderTxt"/>
+          <p:cNvSpPr>
+            <a:spLocks noGrp="1"/>
+          </p:cNvSpPr>
+          <p:nvPr/>
+        </p:nvSpPr>
+        <p:spPr>
+          <a:xfrm>
+            <a:off x="7620000" y="711200"/>
+            <a:ext cx="4318000" cy="508000"/>
+          </a:xfrm>
+          <a:prstGeom prst="rect">
+            <a:avLst/>
+          </a:prstGeom>
+          <a:noFill/>
+          <a:ln>
+            <a:noFill/>
+          </a:ln>
+        </p:spPr>
+        <p:txBody>
+          <a:bodyPr lIns="91440" tIns="45720" rIns="91440" bIns="45720" anchor="ctr"/>
+          <a:lstStyle/>
+          <a:p>
+            <a:pPr algn="ctr">
+              <a:buNone/>
+            </a:pPr>
+            <a:r>
+              <a:rPr lang="en-US" sz="1500" b="1" i="0" dirty="0">
+                <a:solidFill>
+                  <a:srgbClr val="FFFFFF"/>
+                </a:solidFill>
+              </a:rPr>
+              <a:t>PERSONA — Assigned Skills</a:t>
+            </a:r>
+          </a:p>
+        </p:txBody>
+      </p:sp>
+      <p:sp>
+        <p:nvSpPr>
+          <p:cNvPr id="503" name="PerSub"/>
+          <p:cNvSpPr>
+            <a:spLocks noGrp="1"/>
+          </p:cNvSpPr>
+          <p:nvPr/>
+        </p:nvSpPr>
+        <p:spPr>
+          <a:xfrm>
+            <a:off x="7747000" y="1270000"/>
+            <a:ext cx="4064000" cy="355600"/>
+          </a:xfrm>
+          <a:prstGeom prst="rect">
+            <a:avLst/>
+          </a:prstGeom>
+          <a:noFill/>
+          <a:ln>
+            <a:noFill/>
+          </a:ln>
+        </p:spPr>
+        <p:txBody>
+          <a:bodyPr lIns="91440" tIns="45720" rIns="91440" bIns="45720" anchor="ctr"/>
+          <a:lstStyle/>
+          <a:p>
+            <a:pPr algn="ctr">
+              <a:buNone/>
+            </a:pPr>
+            <a:r>
+              <a:rPr lang="en-US" sz="1300" b="0" i="0" dirty="0">
+                <a:solidFill>
+                  <a:srgbClr val="7B2D8E"/>
+                </a:solidFill>
+              </a:rPr>
+              <a:t>Only specific skills assigned to this role</a:t>
+            </a:r>
+          </a:p>
+        </p:txBody>
+      </p:sp>
+      <p:sp>
+        <p:nvSpPr>
+          <p:cNvPr id="504" name="PersonaBadge"/>
+          <p:cNvSpPr>
+            <a:spLocks noGrp="1"/>
+          </p:cNvSpPr>
+          <p:nvPr/>
+        </p:nvSpPr>
+        <p:spPr>
+          <a:xfrm>
+            <a:off x="8255000" y="1701800"/>
+            <a:ext cx="3048000" cy="457200"/>
+          </a:xfrm>
+          <a:prstGeom prst="roundRect">
+            <a:avLst>
+              <a:gd name="adj" fmla="val 30000"/>
+            </a:avLst>
+          </a:prstGeom>
+          <a:solidFill>
+            <a:srgbClr val="7B2D8E"/>
+          </a:solidFill>
+          <a:ln>
+            <a:noFill/>
+          </a:ln>
+        </p:spPr>
+        <p:txBody>
+          <a:bodyPr anchor="ctr"/>
+          <a:lstStyle/>
+          <a:p>
+            <a:endParaRPr/>
+          </a:p>
+        </p:txBody>
+      </p:sp>
+      <p:sp>
+        <p:nvSpPr>
+          <p:cNvPr id="505" name="PersonaName"/>
+          <p:cNvSpPr>
+            <a:spLocks noGrp="1"/>
+          </p:cNvSpPr>
+          <p:nvPr/>
+        </p:nvSpPr>
+        <p:spPr>
+          <a:xfrm>
+            <a:off x="8255000" y="1701800"/>
+            <a:ext cx="3048000" cy="457200"/>
+          </a:xfrm>
+          <a:prstGeom prst="rect">
+            <a:avLst/>
+          </a:prstGeom>
+          <a:noFill/>
+          <a:ln>
+            <a:noFill/>
+          </a:ln>
+        </p:spPr>
+        <p:txBody>
+          <a:bodyPr lIns="91440" tIns="45720" rIns="91440" bIns="45720" anchor="ctr"/>
+          <a:lstStyle/>
+          <a:p>
+            <a:pPr algn="ctr">
+              <a:buNone/>
+            </a:pPr>
+            <a:r>
+              <a:rPr lang="en-US" sz="1300" b="1" i="0" dirty="0">
+                <a:solidFill>
+                  <a:srgbClr val="FFFFFF"/>
+                </a:solidFill>
+              </a:rPr>
+              <a:t>★  Sales Assistant Persona</a:t>
+            </a:r>
+          </a:p>
+        </p:txBody>
+      </p:sp>
+      <p:sp>
+        <p:nvSpPr>
+          <p:cNvPr id="600" name="AChip_0"/>
+          <p:cNvSpPr>
+            <a:spLocks noGrp="1"/>
+          </p:cNvSpPr>
+          <p:nvPr/>
+        </p:nvSpPr>
+        <p:spPr>
+          <a:xfrm>
+            <a:off x="7874000" y="2311400"/>
+            <a:ext cx="1778000" cy="381000"/>
+          </a:xfrm>
+          <a:prstGeom prst="roundRect">
+            <a:avLst>
+              <a:gd name="adj" fmla="val 50000"/>
+            </a:avLst>
+          </a:prstGeom>
+          <a:solidFill>
+            <a:srgbClr val="E8C8F8"/>
+          </a:solidFill>
+          <a:ln w="12700">
+            <a:solidFill>
+              <a:srgbClr val="7B2D8E"/>
+            </a:solidFill>
+          </a:ln>
+        </p:spPr>
+        <p:txBody>
+          <a:bodyPr anchor="ctr"/>
+          <a:lstStyle/>
+          <a:p>
+            <a:endParaRPr/>
+          </a:p>
+        </p:txBody>
+      </p:sp>
+      <p:sp>
+        <p:nvSpPr>
+          <p:cNvPr id="700" name="AChipTxt_0"/>
+          <p:cNvSpPr>
+            <a:spLocks noGrp="1"/>
+          </p:cNvSpPr>
+          <p:nvPr/>
+        </p:nvSpPr>
+        <p:spPr>
+          <a:xfrm>
+            <a:off x="7874000" y="2311400"/>
+            <a:ext cx="1778000" cy="381000"/>
+          </a:xfrm>
+          <a:prstGeom prst="rect">
+            <a:avLst/>
+          </a:prstGeom>
+          <a:noFill/>
+          <a:ln>
+            <a:noFill/>
+          </a:ln>
+        </p:spPr>
+        <p:txBody>
+          <a:bodyPr lIns="91440" tIns="45720" rIns="91440" bIns="45720" anchor="ctr"/>
+          <a:lstStyle/>
+          <a:p>
+            <a:pPr algn="ctr">
+              <a:buNone/>
+            </a:pPr>
+            <a:r>
+              <a:rPr lang="en-US" sz="1200" b="1" i="0" dirty="0">
+                <a:solidFill>
+                  <a:srgbClr val="7B2D8E"/>
+                </a:solidFill>
+              </a:rPr>
+              <a:t>Summarise</a:t>
+            </a:r>
+          </a:p>
+        </p:txBody>
+      </p:sp>
+      <p:sp>
+        <p:nvSpPr>
+          <p:cNvPr id="601" name="AChip_1"/>
+          <p:cNvSpPr>
+            <a:spLocks noGrp="1"/>
+          </p:cNvSpPr>
+          <p:nvPr/>
+        </p:nvSpPr>
+        <p:spPr>
+          <a:xfrm>
+            <a:off x="9906000" y="2311400"/>
+            <a:ext cx="1778000" cy="381000"/>
+          </a:xfrm>
+          <a:prstGeom prst="roundRect">
+            <a:avLst>
+              <a:gd name="adj" fmla="val 50000"/>
+            </a:avLst>
+          </a:prstGeom>
+          <a:solidFill>
+            <a:srgbClr val="E8C8F8"/>
+          </a:solidFill>
+          <a:ln w="12700">
+            <a:solidFill>
+              <a:srgbClr val="7B2D8E"/>
+            </a:solidFill>
+          </a:ln>
+        </p:spPr>
+        <p:txBody>
+          <a:bodyPr anchor="ctr"/>
+          <a:lstStyle/>
+          <a:p>
+            <a:endParaRPr/>
+          </a:p>
+        </p:txBody>
+      </p:sp>
+      <p:sp>
+        <p:nvSpPr>
+          <p:cNvPr id="701" name="AChipTxt_1"/>
+          <p:cNvSpPr>
+            <a:spLocks noGrp="1"/>
+          </p:cNvSpPr>
+          <p:nvPr/>
+        </p:nvSpPr>
+        <p:spPr>
+          <a:xfrm>
+            <a:off x="9906000" y="2311400"/>
+            <a:ext cx="1778000" cy="381000"/>
+          </a:xfrm>
+          <a:prstGeom prst="rect">
+            <a:avLst/>
+          </a:prstGeom>
+          <a:noFill/>
+          <a:ln>
+            <a:noFill/>
+          </a:ln>
+        </p:spPr>
+        <p:txBody>
+          <a:bodyPr lIns="91440" tIns="45720" rIns="91440" bIns="45720" anchor="ctr"/>
+          <a:lstStyle/>
+          <a:p>
+            <a:pPr algn="ctr">
+              <a:buNone/>
+            </a:pPr>
+            <a:r>
+              <a:rPr lang="en-US" sz="1200" b="1" i="0" dirty="0">
+                <a:solidFill>
+                  <a:srgbClr val="7B2D8E"/>
+                </a:solidFill>
+              </a:rPr>
+              <a:t>Draft Email</a:t>
+            </a:r>
+          </a:p>
+        </p:txBody>
+      </p:sp>
+      <p:sp>
+        <p:nvSpPr>
+          <p:cNvPr id="602" name="AChip_2"/>
+          <p:cNvSpPr>
+            <a:spLocks noGrp="1"/>
+          </p:cNvSpPr>
+          <p:nvPr/>
+        </p:nvSpPr>
+        <p:spPr>
+          <a:xfrm>
+            <a:off x="7874000" y="2819400"/>
+            <a:ext cx="1778000" cy="381000"/>
+          </a:xfrm>
+          <a:prstGeom prst="roundRect">
+            <a:avLst>
+              <a:gd name="adj" fmla="val 50000"/>
+            </a:avLst>
+          </a:prstGeom>
+          <a:solidFill>
+            <a:srgbClr val="E8C8F8"/>
+          </a:solidFill>
+          <a:ln w="12700">
+            <a:solidFill>
+              <a:srgbClr val="7B2D8E"/>
+            </a:solidFill>
+          </a:ln>
+        </p:spPr>
+        <p:txBody>
+          <a:bodyPr anchor="ctr"/>
+          <a:lstStyle/>
+          <a:p>
+            <a:endParaRPr/>
+          </a:p>
+        </p:txBody>
+      </p:sp>
+      <p:sp>
+        <p:nvSpPr>
+          <p:cNvPr id="702" name="AChipTxt_2"/>
+          <p:cNvSpPr>
+            <a:spLocks noGrp="1"/>
+          </p:cNvSpPr>
+          <p:nvPr/>
+        </p:nvSpPr>
+        <p:spPr>
+          <a:xfrm>
+            <a:off x="7874000" y="2819400"/>
+            <a:ext cx="1778000" cy="381000"/>
+          </a:xfrm>
+          <a:prstGeom prst="rect">
+            <a:avLst/>
+          </a:prstGeom>
+          <a:noFill/>
+          <a:ln>
+            <a:noFill/>
+          </a:ln>
+        </p:spPr>
+        <p:txBody>
+          <a:bodyPr lIns="91440" tIns="45720" rIns="91440" bIns="45720" anchor="ctr"/>
+          <a:lstStyle/>
+          <a:p>
+            <a:pPr algn="ctr">
+              <a:buNone/>
+            </a:pPr>
+            <a:r>
+              <a:rPr lang="en-US" sz="1200" b="1" i="0" dirty="0">
+                <a:solidFill>
+                  <a:srgbClr val="7B2D8E"/>
+                </a:solidFill>
+              </a:rPr>
+              <a:t>Brainstorm</a:t>
+            </a:r>
+          </a:p>
+        </p:txBody>
+      </p:sp>
+      <p:sp>
+        <p:nvSpPr>
+          <p:cNvPr id="603" name="AChip_3"/>
+          <p:cNvSpPr>
+            <a:spLocks noGrp="1"/>
+          </p:cNvSpPr>
+          <p:nvPr/>
+        </p:nvSpPr>
+        <p:spPr>
+          <a:xfrm>
+            <a:off x="9906000" y="2819400"/>
+            <a:ext cx="1778000" cy="381000"/>
+          </a:xfrm>
+          <a:prstGeom prst="roundRect">
+            <a:avLst>
+              <a:gd name="adj" fmla="val 50000"/>
+            </a:avLst>
+          </a:prstGeom>
+          <a:solidFill>
+            <a:srgbClr val="E8C8F8"/>
+          </a:solidFill>
+          <a:ln w="12700">
+            <a:solidFill>
+              <a:srgbClr val="7B2D8E"/>
+            </a:solidFill>
+          </a:ln>
+        </p:spPr>
+        <p:txBody>
+          <a:bodyPr anchor="ctr"/>
+          <a:lstStyle/>
+          <a:p>
+            <a:endParaRPr/>
+          </a:p>
+        </p:txBody>
+      </p:sp>
+      <p:sp>
+        <p:nvSpPr>
+          <p:cNvPr id="703" name="AChipTxt_3"/>
+          <p:cNvSpPr>
+            <a:spLocks noGrp="1"/>
+          </p:cNvSpPr>
+          <p:nvPr/>
+        </p:nvSpPr>
+        <p:spPr>
+          <a:xfrm>
+            <a:off x="9906000" y="2819400"/>
+            <a:ext cx="1778000" cy="381000"/>
+          </a:xfrm>
+          <a:prstGeom prst="rect">
+            <a:avLst/>
+          </a:prstGeom>
+          <a:noFill/>
+          <a:ln>
+            <a:noFill/>
+          </a:ln>
+        </p:spPr>
+        <p:txBody>
+          <a:bodyPr lIns="91440" tIns="45720" rIns="91440" bIns="45720" anchor="ctr"/>
+          <a:lstStyle/>
+          <a:p>
+            <a:pPr algn="ctr">
+              <a:buNone/>
+            </a:pPr>
+            <a:r>
+              <a:rPr lang="en-US" sz="1200" b="1" i="0" dirty="0">
+                <a:solidFill>
+                  <a:srgbClr val="7B2D8E"/>
+                </a:solidFill>
+              </a:rPr>
+              <a:t>Classify</a:t>
+            </a:r>
+          </a:p>
+        </p:txBody>
+      </p:sp>
+      <p:sp>
+        <p:nvSpPr>
+          <p:cNvPr id="604" name="AChip_4"/>
+          <p:cNvSpPr>
+            <a:spLocks noGrp="1"/>
+          </p:cNvSpPr>
+          <p:nvPr/>
+        </p:nvSpPr>
+        <p:spPr>
+          <a:xfrm>
+            <a:off x="7874000" y="3327400"/>
+            <a:ext cx="1778000" cy="381000"/>
+          </a:xfrm>
+          <a:prstGeom prst="roundRect">
+            <a:avLst>
+              <a:gd name="adj" fmla="val 50000"/>
+            </a:avLst>
+          </a:prstGeom>
+          <a:solidFill>
+            <a:srgbClr val="E8C8F8"/>
+          </a:solidFill>
+          <a:ln w="12700">
+            <a:solidFill>
+              <a:srgbClr val="7B2D8E"/>
+            </a:solidFill>
+          </a:ln>
+        </p:spPr>
+        <p:txBody>
+          <a:bodyPr anchor="ctr"/>
+          <a:lstStyle/>
+          <a:p>
+            <a:endParaRPr/>
+          </a:p>
+        </p:txBody>
+      </p:sp>
+      <p:sp>
+        <p:nvSpPr>
+          <p:cNvPr id="704" name="AChipTxt_4"/>
+          <p:cNvSpPr>
+            <a:spLocks noGrp="1"/>
+          </p:cNvSpPr>
+          <p:nvPr/>
+        </p:nvSpPr>
+        <p:spPr>
+          <a:xfrm>
+            <a:off x="7874000" y="3327400"/>
+            <a:ext cx="1778000" cy="381000"/>
+          </a:xfrm>
+          <a:prstGeom prst="rect">
+            <a:avLst/>
+          </a:prstGeom>
+          <a:noFill/>
+          <a:ln>
+            <a:noFill/>
+          </a:ln>
+        </p:spPr>
+        <p:txBody>
+          <a:bodyPr lIns="91440" tIns="45720" rIns="91440" bIns="45720" anchor="ctr"/>
+          <a:lstStyle/>
+          <a:p>
+            <a:pPr algn="ctr">
+              <a:buNone/>
+            </a:pPr>
+            <a:r>
+              <a:rPr lang="en-US" sz="1200" b="1" i="0" dirty="0">
+                <a:solidFill>
+                  <a:srgbClr val="7B2D8E"/>
+                </a:solidFill>
+              </a:rPr>
+              <a:t>Synthesise</a:t>
+            </a:r>
+          </a:p>
+        </p:txBody>
+      </p:sp>
+      <p:sp>
+        <p:nvSpPr>
+          <p:cNvPr id="605" name="AChip_5"/>
+          <p:cNvSpPr>
+            <a:spLocks noGrp="1"/>
+          </p:cNvSpPr>
+          <p:nvPr/>
+        </p:nvSpPr>
+        <p:spPr>
+          <a:xfrm>
+            <a:off x="9906000" y="3327400"/>
+            <a:ext cx="1778000" cy="381000"/>
+          </a:xfrm>
+          <a:prstGeom prst="roundRect">
+            <a:avLst>
+              <a:gd name="adj" fmla="val 50000"/>
+            </a:avLst>
+          </a:prstGeom>
+          <a:solidFill>
+            <a:srgbClr val="E8C8F8"/>
+          </a:solidFill>
+          <a:ln w="12700">
+            <a:solidFill>
+              <a:srgbClr val="7B2D8E"/>
+            </a:solidFill>
+          </a:ln>
+        </p:spPr>
+        <p:txBody>
+          <a:bodyPr anchor="ctr"/>
+          <a:lstStyle/>
+          <a:p>
+            <a:endParaRPr/>
+          </a:p>
+        </p:txBody>
+      </p:sp>
+      <p:sp>
+        <p:nvSpPr>
+          <p:cNvPr id="705" name="AChipTxt_5"/>
+          <p:cNvSpPr>
+            <a:spLocks noGrp="1"/>
+          </p:cNvSpPr>
+          <p:nvPr/>
+        </p:nvSpPr>
+        <p:spPr>
+          <a:xfrm>
+            <a:off x="9906000" y="3327400"/>
+            <a:ext cx="1778000" cy="381000"/>
+          </a:xfrm>
+          <a:prstGeom prst="rect">
+            <a:avLst/>
+          </a:prstGeom>
+          <a:noFill/>
+          <a:ln>
+            <a:noFill/>
+          </a:ln>
+        </p:spPr>
+        <p:txBody>
+          <a:bodyPr lIns="91440" tIns="45720" rIns="91440" bIns="45720" anchor="ctr"/>
+          <a:lstStyle/>
+          <a:p>
+            <a:pPr algn="ctr">
+              <a:buNone/>
+            </a:pPr>
+            <a:r>
+              <a:rPr lang="en-US" sz="1200" b="1" i="0" dirty="0">
+                <a:solidFill>
+                  <a:srgbClr val="7B2D8E"/>
+                </a:solidFill>
+              </a:rPr>
+              <a:t>Plan</a:t>
+            </a:r>
+          </a:p>
+        </p:txBody>
+      </p:sp>
+      <p:sp>
+        <p:nvSpPr>
+          <p:cNvPr id="800" name="UnassignedLabel"/>
+          <p:cNvSpPr>
+            <a:spLocks noGrp="1"/>
+          </p:cNvSpPr>
+          <p:nvPr/>
+        </p:nvSpPr>
+        <p:spPr>
+          <a:xfrm>
+            <a:off x="7747000" y="4127500"/>
+            <a:ext cx="4064000" cy="254000"/>
+          </a:xfrm>
+          <a:prstGeom prst="rect">
+            <a:avLst/>
+          </a:prstGeom>
+          <a:noFill/>
+          <a:ln>
+            <a:noFill/>
+          </a:ln>
+        </p:spPr>
+        <p:txBody>
+          <a:bodyPr lIns="91440" tIns="45720" rIns="91440" bIns="45720" anchor="ctr"/>
+          <a:lstStyle/>
+          <a:p>
+            <a:pPr algn="l">
+              <a:buNone/>
+            </a:pPr>
+            <a:r>
+              <a:rPr lang="en-US" sz="1100" b="1" i="0" dirty="0">
+                <a:solidFill>
+                  <a:srgbClr val="444444"/>
+                </a:solidFill>
+              </a:rPr>
+              <a:t>Not assigned to this persona:</a:t>
+            </a:r>
+          </a:p>
+        </p:txBody>
+      </p:sp>
+      <p:sp>
+        <p:nvSpPr>
+          <p:cNvPr id="810" name="UChip_0"/>
+          <p:cNvSpPr>
+            <a:spLocks noGrp="1"/>
+          </p:cNvSpPr>
+          <p:nvPr/>
+        </p:nvSpPr>
+        <p:spPr>
+          <a:xfrm>
+            <a:off x="7874000" y="4318000"/>
+            <a:ext cx="1778000" cy="279400"/>
+          </a:xfrm>
+          <a:prstGeom prst="roundRect">
+            <a:avLst>
+              <a:gd name="adj" fmla="val 50000"/>
+            </a:avLst>
+          </a:prstGeom>
+          <a:solidFill>
+            <a:srgbClr val="F5F5F5"/>
+          </a:solidFill>
+          <a:ln w="12700">
+            <a:solidFill>
+              <a:srgbClr val="777777"/>
+            </a:solidFill>
+          </a:ln>
+        </p:spPr>
+        <p:txBody>
+          <a:bodyPr anchor="ctr"/>
+          <a:lstStyle/>
+          <a:p>
+            <a:endParaRPr/>
+          </a:p>
+        </p:txBody>
+      </p:sp>
+      <p:sp>
+        <p:nvSpPr>
+          <p:cNvPr id="820" name="UChipTxt_0"/>
+          <p:cNvSpPr>
+            <a:spLocks noGrp="1"/>
+          </p:cNvSpPr>
+          <p:nvPr/>
+        </p:nvSpPr>
+        <p:spPr>
+          <a:xfrm>
+            <a:off x="7874000" y="4318000"/>
+            <a:ext cx="1778000" cy="279400"/>
+          </a:xfrm>
+          <a:prstGeom prst="rect">
+            <a:avLst/>
+          </a:prstGeom>
+          <a:noFill/>
+          <a:ln>
+            <a:noFill/>
+          </a:ln>
+        </p:spPr>
+        <p:txBody>
+          <a:bodyPr lIns="91440" tIns="45720" rIns="91440" bIns="45720" anchor="ctr"/>
+          <a:lstStyle/>
+          <a:p>
+            <a:pPr algn="ctr">
+              <a:buNone/>
+            </a:pPr>
+            <a:r>
+              <a:rPr lang="en-US" sz="1200" b="1" i="0" dirty="0">
+                <a:solidFill>
+                  <a:srgbClr val="222222"/>
+                </a:solidFill>
+              </a:rPr>
+              <a:t>Write Code</a:t>
+            </a:r>
+          </a:p>
+        </p:txBody>
+      </p:sp>
+      <p:sp>
+        <p:nvSpPr>
+          <p:cNvPr id="811" name="UChip_1"/>
+          <p:cNvSpPr>
+            <a:spLocks noGrp="1"/>
+          </p:cNvSpPr>
+          <p:nvPr/>
+        </p:nvSpPr>
+        <p:spPr>
+          <a:xfrm>
+            <a:off x="9906000" y="4318000"/>
+            <a:ext cx="1778000" cy="279400"/>
+          </a:xfrm>
+          <a:prstGeom prst="roundRect">
+            <a:avLst>
+              <a:gd name="adj" fmla="val 50000"/>
+            </a:avLst>
+          </a:prstGeom>
+          <a:solidFill>
+            <a:srgbClr val="F5F5F5"/>
+          </a:solidFill>
+          <a:ln w="12700">
+            <a:solidFill>
+              <a:srgbClr val="777777"/>
+            </a:solidFill>
+          </a:ln>
+        </p:spPr>
+        <p:txBody>
+          <a:bodyPr anchor="ctr"/>
+          <a:lstStyle/>
+          <a:p>
+            <a:endParaRPr/>
+          </a:p>
+        </p:txBody>
+      </p:sp>
+      <p:sp>
+        <p:nvSpPr>
+          <p:cNvPr id="821" name="UChipTxt_1"/>
+          <p:cNvSpPr>
+            <a:spLocks noGrp="1"/>
+          </p:cNvSpPr>
+          <p:nvPr/>
+        </p:nvSpPr>
+        <p:spPr>
+          <a:xfrm>
+            <a:off x="9906000" y="4318000"/>
+            <a:ext cx="1778000" cy="279400"/>
+          </a:xfrm>
+          <a:prstGeom prst="rect">
+            <a:avLst/>
+          </a:prstGeom>
+          <a:noFill/>
+          <a:ln>
+            <a:noFill/>
+          </a:ln>
+        </p:spPr>
+        <p:txBody>
+          <a:bodyPr lIns="91440" tIns="45720" rIns="91440" bIns="45720" anchor="ctr"/>
+          <a:lstStyle/>
+          <a:p>
+            <a:pPr algn="ctr">
+              <a:buNone/>
+            </a:pPr>
+            <a:r>
+              <a:rPr lang="en-US" sz="1200" b="1" i="0" dirty="0">
+                <a:solidFill>
+                  <a:srgbClr val="222222"/>
+                </a:solidFill>
+              </a:rPr>
+              <a:t>Debug</a:t>
+            </a:r>
+          </a:p>
+        </p:txBody>
+      </p:sp>
+      <p:sp>
+        <p:nvSpPr>
+          <p:cNvPr id="812" name="UChip_2"/>
+          <p:cNvSpPr>
+            <a:spLocks noGrp="1"/>
+          </p:cNvSpPr>
+          <p:nvPr/>
+        </p:nvSpPr>
+        <p:spPr>
+          <a:xfrm>
+            <a:off x="7874000" y="4673600"/>
+            <a:ext cx="1778000" cy="279400"/>
+          </a:xfrm>
+          <a:prstGeom prst="roundRect">
+            <a:avLst>
+              <a:gd name="adj" fmla="val 50000"/>
+            </a:avLst>
+          </a:prstGeom>
+          <a:solidFill>
+            <a:srgbClr val="F5F5F5"/>
+          </a:solidFill>
+          <a:ln w="12700">
+            <a:solidFill>
+              <a:srgbClr val="777777"/>
+            </a:solidFill>
+          </a:ln>
+        </p:spPr>
+        <p:txBody>
+          <a:bodyPr anchor="ctr"/>
+          <a:lstStyle/>
+          <a:p>
+            <a:endParaRPr/>
+          </a:p>
+        </p:txBody>
+      </p:sp>
+      <p:sp>
+        <p:nvSpPr>
+          <p:cNvPr id="822" name="UChipTxt_2"/>
+          <p:cNvSpPr>
+            <a:spLocks noGrp="1"/>
+          </p:cNvSpPr>
+          <p:nvPr/>
+        </p:nvSpPr>
+        <p:spPr>
+          <a:xfrm>
+            <a:off x="7874000" y="4673600"/>
+            <a:ext cx="1778000" cy="279400"/>
+          </a:xfrm>
+          <a:prstGeom prst="rect">
+            <a:avLst/>
+          </a:prstGeom>
+          <a:noFill/>
+          <a:ln>
+            <a:noFill/>
+          </a:ln>
+        </p:spPr>
+        <p:txBody>
+          <a:bodyPr lIns="91440" tIns="45720" rIns="91440" bIns="45720" anchor="ctr"/>
+          <a:lstStyle/>
+          <a:p>
+            <a:pPr algn="ctr">
+              <a:buNone/>
+            </a:pPr>
+            <a:r>
+              <a:rPr lang="en-US" sz="1200" b="1" i="0" dirty="0">
+                <a:solidFill>
+                  <a:srgbClr val="222222"/>
+                </a:solidFill>
+              </a:rPr>
+              <a:t>Translate</a:t>
+            </a:r>
+          </a:p>
+        </p:txBody>
+      </p:sp>
+      <p:sp>
+        <p:nvSpPr>
+          <p:cNvPr id="813" name="UChip_3"/>
+          <p:cNvSpPr>
+            <a:spLocks noGrp="1"/>
+          </p:cNvSpPr>
+          <p:nvPr/>
+        </p:nvSpPr>
+        <p:spPr>
+          <a:xfrm>
+            <a:off x="9906000" y="4673600"/>
+            <a:ext cx="1778000" cy="279400"/>
+          </a:xfrm>
+          <a:prstGeom prst="roundRect">
+            <a:avLst>
+              <a:gd name="adj" fmla="val 50000"/>
+            </a:avLst>
+          </a:prstGeom>
+          <a:solidFill>
+            <a:srgbClr val="F5F5F5"/>
+          </a:solidFill>
+          <a:ln w="12700">
+            <a:solidFill>
+              <a:srgbClr val="777777"/>
+            </a:solidFill>
+          </a:ln>
+        </p:spPr>
+        <p:txBody>
+          <a:bodyPr anchor="ctr"/>
+          <a:lstStyle/>
+          <a:p>
+            <a:endParaRPr/>
+          </a:p>
+        </p:txBody>
+      </p:sp>
+      <p:sp>
+        <p:nvSpPr>
+          <p:cNvPr id="823" name="UChipTxt_3"/>
+          <p:cNvSpPr>
+            <a:spLocks noGrp="1"/>
+          </p:cNvSpPr>
+          <p:nvPr/>
+        </p:nvSpPr>
+        <p:spPr>
+          <a:xfrm>
+            <a:off x="9906000" y="4673600"/>
+            <a:ext cx="1778000" cy="279400"/>
+          </a:xfrm>
+          <a:prstGeom prst="rect">
+            <a:avLst/>
+          </a:prstGeom>
+          <a:noFill/>
+          <a:ln>
+            <a:noFill/>
+          </a:ln>
+        </p:spPr>
+        <p:txBody>
+          <a:bodyPr lIns="91440" tIns="45720" rIns="91440" bIns="45720" anchor="ctr"/>
+          <a:lstStyle/>
+          <a:p>
+            <a:pPr algn="ctr">
+              <a:buNone/>
+            </a:pPr>
+            <a:r>
+              <a:rPr lang="en-US" sz="1200" b="1" i="0" dirty="0">
+                <a:solidFill>
+                  <a:srgbClr val="222222"/>
+                </a:solidFill>
+              </a:rPr>
+              <a:t>Search</a:t>
+            </a:r>
+          </a:p>
+        </p:txBody>
+      </p:sp>
+      <p:sp>
+        <p:nvSpPr>
+          <p:cNvPr id="814" name="UChip_4"/>
+          <p:cNvSpPr>
+            <a:spLocks noGrp="1"/>
+          </p:cNvSpPr>
+          <p:nvPr/>
+        </p:nvSpPr>
+        <p:spPr>
+          <a:xfrm>
+            <a:off x="7874000" y="5029200"/>
+            <a:ext cx="1778000" cy="279400"/>
+          </a:xfrm>
+          <a:prstGeom prst="roundRect">
+            <a:avLst>
+              <a:gd name="adj" fmla="val 50000"/>
+            </a:avLst>
+          </a:prstGeom>
+          <a:solidFill>
+            <a:srgbClr val="F5F5F5"/>
+          </a:solidFill>
+          <a:ln w="12700">
+            <a:solidFill>
+              <a:srgbClr val="777777"/>
+            </a:solidFill>
+          </a:ln>
+        </p:spPr>
+        <p:txBody>
+          <a:bodyPr anchor="ctr"/>
+          <a:lstStyle/>
+          <a:p>
+            <a:endParaRPr/>
+          </a:p>
+        </p:txBody>
+      </p:sp>
+      <p:sp>
+        <p:nvSpPr>
+          <p:cNvPr id="824" name="UChipTxt_4"/>
+          <p:cNvSpPr>
+            <a:spLocks noGrp="1"/>
+          </p:cNvSpPr>
+          <p:nvPr/>
+        </p:nvSpPr>
+        <p:spPr>
+          <a:xfrm>
+            <a:off x="7874000" y="5029200"/>
+            <a:ext cx="1778000" cy="279400"/>
+          </a:xfrm>
+          <a:prstGeom prst="rect">
+            <a:avLst/>
+          </a:prstGeom>
+          <a:noFill/>
+          <a:ln>
+            <a:noFill/>
+          </a:ln>
+        </p:spPr>
+        <p:txBody>
+          <a:bodyPr lIns="91440" tIns="45720" rIns="91440" bIns="45720" anchor="ctr"/>
+          <a:lstStyle/>
+          <a:p>
+            <a:pPr algn="ctr">
+              <a:buNone/>
+            </a:pPr>
+            <a:r>
+              <a:rPr lang="en-US" sz="1200" b="1" i="0" dirty="0">
+                <a:solidFill>
+                  <a:srgbClr val="222222"/>
+                </a:solidFill>
+              </a:rPr>
+              <a:t>Reformat</a:t>
+            </a:r>
+          </a:p>
+        </p:txBody>
+      </p:sp>
+      <p:sp>
+        <p:nvSpPr>
+          <p:cNvPr id="815" name="UChip_5"/>
+          <p:cNvSpPr>
+            <a:spLocks noGrp="1"/>
+          </p:cNvSpPr>
+          <p:nvPr/>
+        </p:nvSpPr>
+        <p:spPr>
+          <a:xfrm>
+            <a:off x="9906000" y="5029200"/>
+            <a:ext cx="1778000" cy="279400"/>
+          </a:xfrm>
+          <a:prstGeom prst="roundRect">
+            <a:avLst>
+              <a:gd name="adj" fmla="val 50000"/>
+            </a:avLst>
+          </a:prstGeom>
+          <a:solidFill>
+            <a:srgbClr val="F5F5F5"/>
+          </a:solidFill>
+          <a:ln w="12700">
+            <a:solidFill>
+              <a:srgbClr val="777777"/>
+            </a:solidFill>
+          </a:ln>
+        </p:spPr>
+        <p:txBody>
+          <a:bodyPr anchor="ctr"/>
+          <a:lstStyle/>
+          <a:p>
+            <a:endParaRPr/>
+          </a:p>
+        </p:txBody>
+      </p:sp>
+      <p:sp>
+        <p:nvSpPr>
+          <p:cNvPr id="825" name="UChipTxt_5"/>
+          <p:cNvSpPr>
+            <a:spLocks noGrp="1"/>
+          </p:cNvSpPr>
+          <p:nvPr/>
+        </p:nvSpPr>
+        <p:spPr>
+          <a:xfrm>
+            <a:off x="9906000" y="5029200"/>
+            <a:ext cx="1778000" cy="279400"/>
+          </a:xfrm>
+          <a:prstGeom prst="rect">
+            <a:avLst/>
+          </a:prstGeom>
+          <a:noFill/>
+          <a:ln>
+            <a:noFill/>
+          </a:ln>
+        </p:spPr>
+        <p:txBody>
+          <a:bodyPr lIns="91440" tIns="45720" rIns="91440" bIns="45720" anchor="ctr"/>
+          <a:lstStyle/>
+          <a:p>
+            <a:pPr algn="ctr">
+              <a:buNone/>
+            </a:pPr>
+            <a:r>
+              <a:rPr lang="en-US" sz="1200" b="1" i="0" dirty="0">
+                <a:solidFill>
+                  <a:srgbClr val="222222"/>
+                </a:solidFill>
+              </a:rPr>
+              <a:t>Extract</a:t>
+            </a:r>
+          </a:p>
+        </p:txBody>
+      </p:sp>
+      <p:sp>
+        <p:nvSpPr>
+          <p:cNvPr id="900" name="Line900"/>
+          <p:cNvSpPr>
+            <a:spLocks noGrp="1"/>
+          </p:cNvSpPr>
+          <p:nvPr/>
+        </p:nvSpPr>
+        <p:spPr>
+          <a:xfrm>
+            <a:off x="4572000" y="3403600"/>
+            <a:ext cx="254000" cy="12700"/>
+          </a:xfrm>
+          <a:prstGeom prst="line">
+            <a:avLst/>
+          </a:prstGeom>
+          <a:noFill/>
+          <a:ln w="18000">
+            <a:solidFill>
+              <a:srgbClr val="1F4E79"/>
+            </a:solidFill>
+            <a:prstDash val="solid"/>
+          </a:ln>
+        </p:spPr>
+        <p:txBody>
+          <a:bodyPr/>
+          <a:lstStyle/>
+          <a:p>
+            <a:endParaRPr/>
+          </a:p>
+        </p:txBody>
+      </p:sp>
+      <p:sp>
+        <p:nvSpPr>
+          <p:cNvPr id="901" name="Line901"/>
+          <p:cNvSpPr>
+            <a:spLocks noGrp="1"/>
+          </p:cNvSpPr>
+          <p:nvPr/>
+        </p:nvSpPr>
+        <p:spPr>
+          <a:xfrm>
+            <a:off x="7366000" y="3403600"/>
+            <a:ext cx="254000" cy="12700"/>
+          </a:xfrm>
+          <a:prstGeom prst="line">
+            <a:avLst/>
+          </a:prstGeom>
+          <a:noFill/>
+          <a:ln w="18000">
+            <a:solidFill>
+              <a:srgbClr val="7B2D8E"/>
+            </a:solidFill>
+            <a:prstDash val="solid"/>
+          </a:ln>
+        </p:spPr>
+        <p:txBody>
+          <a:bodyPr/>
+          <a:lstStyle/>
+          <a:p>
+            <a:endParaRPr/>
+          </a:p>
+        </p:txBody>
+      </p:sp>
+      <p:sp>
+        <p:nvSpPr>
+          <p:cNvPr id="902" name="LineLabel1"/>
+          <p:cNvSpPr>
+            <a:spLocks noGrp="1"/>
+          </p:cNvSpPr>
+          <p:nvPr/>
+        </p:nvSpPr>
+        <p:spPr>
+          <a:xfrm>
+            <a:off x="4572000" y="3149600"/>
+            <a:ext cx="254000" cy="228600"/>
+          </a:xfrm>
+          <a:prstGeom prst="rect">
+            <a:avLst/>
+          </a:prstGeom>
+          <a:noFill/>
+          <a:ln>
+            <a:noFill/>
+          </a:ln>
+        </p:spPr>
+        <p:txBody>
+          <a:bodyPr lIns="91440" tIns="45720" rIns="91440" bIns="45720" anchor="ctr"/>
+          <a:lstStyle/>
+          <a:p>
+            <a:pPr algn="ctr">
+              <a:buNone/>
+            </a:pPr>
+            <a:r>
+              <a:rPr lang="en-US" sz="1400" b="1" i="0" dirty="0">
+                <a:solidFill>
+                  <a:srgbClr val="1F4E79"/>
+                </a:solidFill>
+              </a:rPr>
+              <a:t>→</a:t>
+            </a:r>
+          </a:p>
+        </p:txBody>
+      </p:sp>
+      <p:sp>
+        <p:nvSpPr>
+          <p:cNvPr id="903" name="LineLabel2"/>
+          <p:cNvSpPr>
+            <a:spLocks noGrp="1"/>
+          </p:cNvSpPr>
+          <p:nvPr/>
+        </p:nvSpPr>
+        <p:spPr>
+          <a:xfrm>
+            <a:off x="7366000" y="3149600"/>
+            <a:ext cx="254000" cy="228600"/>
+          </a:xfrm>
+          <a:prstGeom prst="rect">
+            <a:avLst/>
+          </a:prstGeom>
+          <a:noFill/>
+          <a:ln>
+            <a:noFill/>
+          </a:ln>
+        </p:spPr>
+        <p:txBody>
+          <a:bodyPr lIns="91440" tIns="45720" rIns="91440" bIns="45720" anchor="ctr"/>
+          <a:lstStyle/>
+          <a:p>
+            <a:pPr algn="ctr">
+              <a:buNone/>
+            </a:pPr>
+            <a:r>
+              <a:rPr lang="en-US" sz="1400" b="1" i="0" dirty="0">
+                <a:solidFill>
+                  <a:srgbClr val="7B2D8E"/>
+                </a:solidFill>
+              </a:rPr>
+              <a:t>→</a:t>
+            </a:r>
+          </a:p>
+        </p:txBody>
+      </p:sp>
+      <p:sp>
+        <p:nvSpPr>
+          <p:cNvPr id="950" name="KeyBg"/>
+          <p:cNvSpPr>
+            <a:spLocks noGrp="1"/>
+          </p:cNvSpPr>
+          <p:nvPr/>
+        </p:nvSpPr>
+        <p:spPr>
+          <a:xfrm>
+            <a:off x="254000" y="6350000"/>
+            <a:ext cx="11684000" cy="406400"/>
+          </a:xfrm>
+          <a:prstGeom prst="rect">
+            <a:avLst/>
+          </a:prstGeom>
+          <a:solidFill>
+            <a:srgbClr val="F0F0F0"/>
+          </a:solidFill>
+          <a:ln w="12700">
+            <a:solidFill>
+              <a:srgbClr val="CCCCCC"/>
+            </a:solidFill>
+          </a:ln>
+        </p:spPr>
+        <p:txBody>
+          <a:bodyPr anchor="ctr"/>
+          <a:lstStyle/>
+          <a:p>
+            <a:endParaRPr/>
+          </a:p>
+        </p:txBody>
+      </p:sp>
+      <p:sp>
+        <p:nvSpPr>
+          <p:cNvPr id="951" name="KeyTxt"/>
+          <p:cNvSpPr>
+            <a:spLocks noGrp="1"/>
+          </p:cNvSpPr>
+          <p:nvPr/>
+        </p:nvSpPr>
+        <p:spPr>
+          <a:xfrm>
+            <a:off x="254000" y="6350000"/>
+            <a:ext cx="11684000" cy="406400"/>
+          </a:xfrm>
+          <a:prstGeom prst="rect">
+            <a:avLst/>
+          </a:prstGeom>
+          <a:noFill/>
+          <a:ln>
+            <a:noFill/>
+          </a:ln>
+        </p:spPr>
+        <p:txBody>
+          <a:bodyPr lIns="91440" tIns="45720" rIns="91440" bIns="45720" anchor="ctr"/>
+          <a:lstStyle/>
+          <a:p>
+            <a:pPr algn="ctr">
+              <a:buNone/>
+            </a:pPr>
+            <a:r>
+              <a:rPr lang="en-US" sz="1100" b="0" i="0" dirty="0">
+                <a:solidFill>
+                  <a:srgbClr val="666666"/>
+                </a:solidFill>
+              </a:rPr>
+              <a:t>Context pulls from the full inventory each turn  ·  Persona is pre-configured with a fixed skill set  ·  Unassigned skills are unavailable to the persona</a:t>
+            </a:r>
+          </a:p>
+        </p:txBody>
+      </p:sp>
+    </p:spTree>
+    <p:extLst>
+      <p:ext uri="{BB962C8B-B14F-4D97-AF65-F5344CB8AC3E}">
+        <p14:creationId xmlns:p14="http://schemas.microsoft.com/office/powerpoint/2010/main" val="891345001"/>
+      </p:ext>
+    </p:extLst>
+  </p:cSld>
+  <p:clrMapOvr>
+    <a:masterClrMapping/>
+  </p:clrMapOvr>
+</p:sld>
+</file>
+
+<file path=ppt/slides/slide5.xml><?xml version="1.0" encoding="utf-8"?>
+<p:sld xmlns:a="http://schemas.openxmlformats.org/drawingml/2006/main" xmlns:r="http://schemas.openxmlformats.org/officeDocument/2006/relationships" xmlns:p="http://schemas.openxmlformats.org/presentationml/2006/main">
+  <p:cSld>
+    <p:spTree>
+      <p:nvGrpSpPr>
+        <p:cNvPr id="1" name=""/>
+        <p:cNvGrpSpPr/>
+        <p:nvPr/>
+      </p:nvGrpSpPr>
+      <p:grpSpPr>
+        <a:xfrm>
+          <a:off x="0" y="0"/>
+          <a:ext cx="0" cy="0"/>
+          <a:chOff x="0" y="0"/>
+          <a:chExt cx="0" cy="0"/>
+        </a:xfrm>
+      </p:grpSpPr>
+      <p:sp>
+        <p:nvSpPr>
           <p:cNvPr id="200" name="bg"/>
           <p:cNvSpPr>
             <a:spLocks noGrp="1"/>
@@ -8952,7 +9383,7 @@
 </p:sld>
 </file>
 
-<file path=ppt/slides/slide5.xml><?xml version="1.0" encoding="utf-8"?>
+<file path=ppt/slides/slide6.xml><?xml version="1.0" encoding="utf-8"?>
 <p:sld xmlns:a="http://schemas.openxmlformats.org/drawingml/2006/main" xmlns:r="http://schemas.openxmlformats.org/officeDocument/2006/relationships" xmlns:p="http://schemas.openxmlformats.org/presentationml/2006/main">
   <p:cSld>
     <p:spTree>
@@ -9309,7 +9740,7 @@
 
 <file path=ppt/webextensions/taskpanes.xml><?xml version="1.0" encoding="utf-8"?>
 <wetp:taskpanes xmlns:wetp="http://schemas.microsoft.com/office/webextensions/taskpanes/2010/11">
-  <wetp:taskpane dockstate="right" visibility="1" width="525" row="1">
+  <wetp:taskpane dockstate="right" visibility="1" width="525" row="2">
     <wetp:webextensionref xmlns:r="http://schemas.openxmlformats.org/officeDocument/2006/relationships" r:id="rId1"/>
   </wetp:taskpane>
 </wetp:taskpanes>
@@ -9329,6 +9760,24 @@
 </file>
 
 <file path=customXml/item1.xml><?xml version="1.0" encoding="utf-8"?>
+<p:properties xmlns:p="http://schemas.microsoft.com/office/2006/metadata/properties" xmlns:xsi="http://www.w3.org/2001/XMLSchema-instance" xmlns:pc="http://schemas.microsoft.com/office/infopath/2007/PartnerControls">
+  <documentManagement>
+    <Document_x0020_Purpose xmlns="f577acbf-5b0b-4b4f-9948-268e97f8d3a4">Informational</Document_x0020_Purpose>
+    <Initiatives xmlns="f577acbf-5b0b-4b4f-9948-268e97f8d3a4"/>
+  </documentManagement>
+</p:properties>
+</file>
+
+<file path=customXml/item2.xml><?xml version="1.0" encoding="utf-8"?>
+<?mso-contentType ?>
+<FormTemplates xmlns="http://schemas.microsoft.com/sharepoint/v3/contenttype/forms">
+  <Display>DocumentLibraryForm</Display>
+  <Edit>DocumentLibraryForm</Edit>
+  <New>DocumentLibraryForm</New>
+</FormTemplates>
+</file>
+
+<file path=customXml/item3.xml><?xml version="1.0" encoding="utf-8"?>
 <ct:contentTypeSchema xmlns:ct="http://schemas.microsoft.com/office/2006/metadata/contentType" xmlns:ma="http://schemas.microsoft.com/office/2006/metadata/properties/metaAttributes" ct:_="" ma:_="" ma:contentTypeName="Document" ma:contentTypeID="0x010100CD401524DC532D42A0E0ED886331A72B" ma:contentTypeVersion="13" ma:contentTypeDescription="Create a new document." ma:contentTypeScope="" ma:versionID="d936d863d335d354da51eb78ca1ae338">
   <xsd:schema xmlns:xsd="http://www.w3.org/2001/XMLSchema" xmlns:xs="http://www.w3.org/2001/XMLSchema" xmlns:p="http://schemas.microsoft.com/office/2006/metadata/properties" xmlns:ns2="f577acbf-5b0b-4b4f-9948-268e97f8d3a4" xmlns:ns3="b1e4d6ee-9f6f-43f8-a618-24f3d84da28f" targetNamespace="http://schemas.microsoft.com/office/2006/metadata/properties" ma:root="true" ma:fieldsID="5fbac08d56b1b04aa33acbc31e882ce9" ns2:_="" ns3:_="">
     <xsd:import namespace="f577acbf-5b0b-4b4f-9948-268e97f8d3a4"/>
@@ -9572,25 +10021,32 @@
 </ct:contentTypeSchema>
 </file>
 
-<file path=customXml/item2.xml><?xml version="1.0" encoding="utf-8"?>
-<?mso-contentType ?>
-<FormTemplates xmlns="http://schemas.microsoft.com/sharepoint/v3/contenttype/forms">
-  <Display>DocumentLibraryForm</Display>
-  <Edit>DocumentLibraryForm</Edit>
-  <New>DocumentLibraryForm</New>
-</FormTemplates>
+<file path=customXml/itemProps1.xml><?xml version="1.0" encoding="utf-8"?>
+<ds:datastoreItem xmlns:ds="http://schemas.openxmlformats.org/officeDocument/2006/customXml" ds:itemID="{617AB1FA-2F28-4684-9230-02ACEB6C0B0A}">
+  <ds:schemaRefs>
+    <ds:schemaRef ds:uri="b1e4d6ee-9f6f-43f8-a618-24f3d84da28f"/>
+    <ds:schemaRef ds:uri="http://purl.org/dc/terms/"/>
+    <ds:schemaRef ds:uri="http://schemas.openxmlformats.org/package/2006/metadata/core-properties"/>
+    <ds:schemaRef ds:uri="f577acbf-5b0b-4b4f-9948-268e97f8d3a4"/>
+    <ds:schemaRef ds:uri="http://schemas.microsoft.com/office/2006/documentManagement/types"/>
+    <ds:schemaRef ds:uri="http://schemas.microsoft.com/office/infopath/2007/PartnerControls"/>
+    <ds:schemaRef ds:uri="http://purl.org/dc/elements/1.1/"/>
+    <ds:schemaRef ds:uri="http://schemas.microsoft.com/office/2006/metadata/properties"/>
+    <ds:schemaRef ds:uri="http://www.w3.org/XML/1998/namespace"/>
+    <ds:schemaRef ds:uri="http://purl.org/dc/dcmitype/"/>
+  </ds:schemaRefs>
+</ds:datastoreItem>
 </file>
 
-<file path=customXml/item3.xml><?xml version="1.0" encoding="utf-8"?>
-<p:properties xmlns:p="http://schemas.microsoft.com/office/2006/metadata/properties" xmlns:xsi="http://www.w3.org/2001/XMLSchema-instance" xmlns:pc="http://schemas.microsoft.com/office/infopath/2007/PartnerControls">
-  <documentManagement>
-    <Document_x0020_Purpose xmlns="f577acbf-5b0b-4b4f-9948-268e97f8d3a4">Informational</Document_x0020_Purpose>
-    <Initiatives xmlns="f577acbf-5b0b-4b4f-9948-268e97f8d3a4"/>
-  </documentManagement>
-</p:properties>
+<file path=customXml/itemProps2.xml><?xml version="1.0" encoding="utf-8"?>
+<ds:datastoreItem xmlns:ds="http://schemas.openxmlformats.org/officeDocument/2006/customXml" ds:itemID="{E21AFCC0-734A-4A90-A597-A1CB34860DCD}">
+  <ds:schemaRefs>
+    <ds:schemaRef ds:uri="http://schemas.microsoft.com/sharepoint/v3/contenttype/forms"/>
+  </ds:schemaRefs>
+</ds:datastoreItem>
 </file>
 
-<file path=customXml/itemProps1.xml><?xml version="1.0" encoding="utf-8"?>
+<file path=customXml/itemProps3.xml><?xml version="1.0" encoding="utf-8"?>
 <ds:datastoreItem xmlns:ds="http://schemas.openxmlformats.org/officeDocument/2006/customXml" ds:itemID="{A79EAE08-AAD0-49B9-BF66-164C225CC523}">
   <ds:schemaRefs>
     <ds:schemaRef ds:uri="http://schemas.microsoft.com/office/2006/metadata/contentType"/>
@@ -9607,29 +10063,4 @@
     <ds:schemaRef ds:uri="http://schemas.microsoft.com/internal/obd"/>
   </ds:schemaRefs>
 </ds:datastoreItem>
-</file>
-
-<file path=customXml/itemProps2.xml><?xml version="1.0" encoding="utf-8"?>
-<ds:datastoreItem xmlns:ds="http://schemas.openxmlformats.org/officeDocument/2006/customXml" ds:itemID="{E21AFCC0-734A-4A90-A597-A1CB34860DCD}">
-  <ds:schemaRefs>
-    <ds:schemaRef ds:uri="http://schemas.microsoft.com/sharepoint/v3/contenttype/forms"/>
-  </ds:schemaRefs>
-</ds:datastoreItem>
-</file>
-
-<file path=customXml/itemProps3.xml><?xml version="1.0" encoding="utf-8"?>
-<ds:datastoreItem xmlns:ds="http://schemas.openxmlformats.org/officeDocument/2006/customXml" ds:itemID="{617AB1FA-2F28-4684-9230-02ACEB6C0B0A}">
-  <ds:schemaRefs>
-    <ds:schemaRef ds:uri="b1e4d6ee-9f6f-43f8-a618-24f3d84da28f"/>
-    <ds:schemaRef ds:uri="http://purl.org/dc/terms/"/>
-    <ds:schemaRef ds:uri="http://schemas.openxmlformats.org/package/2006/metadata/core-properties"/>
-    <ds:schemaRef ds:uri="f577acbf-5b0b-4b4f-9948-268e97f8d3a4"/>
-    <ds:schemaRef ds:uri="http://schemas.microsoft.com/office/2006/documentManagement/types"/>
-    <ds:schemaRef ds:uri="http://schemas.microsoft.com/office/infopath/2007/PartnerControls"/>
-    <ds:schemaRef ds:uri="http://purl.org/dc/elements/1.1/"/>
-    <ds:schemaRef ds:uri="http://schemas.microsoft.com/office/2006/metadata/properties"/>
-    <ds:schemaRef ds:uri="http://www.w3.org/XML/1998/namespace"/>
-    <ds:schemaRef ds:uri="http://purl.org/dc/dcmitype/"/>
-  </ds:schemaRefs>
-</ds:datastoreItem>
 </file>
--- a/docs/Materials.pptx
+++ b/docs/Materials.pptx
@@ -5,11 +5,13 @@
     <p:sldMasterId id="2147483648" r:id="rId4"/>
   </p:sldMasterIdLst>
   <p:sldIdLst>
-    <p:sldId id="264" r:id="rId5"/>
-    <p:sldId id="270" r:id="rId6"/>
-    <p:sldId id="275" r:id="rId7"/>
-    <p:sldId id="281" r:id="rId8"/>
-    <p:sldId id="282" r:id="rId9"/>
+    <p:sldId id="285" r:id="rId5"/>
+    <p:sldId id="293" r:id="rId6"/>
+    <p:sldId id="264" r:id="rId7"/>
+    <p:sldId id="270" r:id="rId8"/>
+    <p:sldId id="275" r:id="rId9"/>
+    <p:sldId id="281" r:id="rId10"/>
+    <p:sldId id="282" r:id="rId11"/>
   </p:sldIdLst>
   <p:sldSz cx="12192000" cy="6858000"/>
   <p:notesSz cx="6858000" cy="9144000"/>
@@ -263,7 +265,7 @@
           <a:p>
             <a:fld id="{37A2730A-859E-B540-ADF3-E97069AD1FDB}" type="datetimeFigureOut">
               <a:rPr lang="en-US" smtClean="0"/>
-              <a:t>5/27/2026</a:t>
+              <a:t>5/28/2026</a:t>
             </a:fld>
             <a:endParaRPr lang="en-US"/>
           </a:p>
@@ -461,7 +463,7 @@
           <a:p>
             <a:fld id="{37A2730A-859E-B540-ADF3-E97069AD1FDB}" type="datetimeFigureOut">
               <a:rPr lang="en-US" smtClean="0"/>
-              <a:t>5/27/2026</a:t>
+              <a:t>5/28/2026</a:t>
             </a:fld>
             <a:endParaRPr lang="en-US"/>
           </a:p>
@@ -669,7 +671,7 @@
           <a:p>
             <a:fld id="{37A2730A-859E-B540-ADF3-E97069AD1FDB}" type="datetimeFigureOut">
               <a:rPr lang="en-US" smtClean="0"/>
-              <a:t>5/27/2026</a:t>
+              <a:t>5/28/2026</a:t>
             </a:fld>
             <a:endParaRPr lang="en-US"/>
           </a:p>
@@ -867,7 +869,7 @@
           <a:p>
             <a:fld id="{37A2730A-859E-B540-ADF3-E97069AD1FDB}" type="datetimeFigureOut">
               <a:rPr lang="en-US" smtClean="0"/>
-              <a:t>5/27/2026</a:t>
+              <a:t>5/28/2026</a:t>
             </a:fld>
             <a:endParaRPr lang="en-US"/>
           </a:p>
@@ -1142,7 +1144,7 @@
           <a:p>
             <a:fld id="{37A2730A-859E-B540-ADF3-E97069AD1FDB}" type="datetimeFigureOut">
               <a:rPr lang="en-US" smtClean="0"/>
-              <a:t>5/27/2026</a:t>
+              <a:t>5/28/2026</a:t>
             </a:fld>
             <a:endParaRPr lang="en-US"/>
           </a:p>
@@ -1407,7 +1409,7 @@
           <a:p>
             <a:fld id="{37A2730A-859E-B540-ADF3-E97069AD1FDB}" type="datetimeFigureOut">
               <a:rPr lang="en-US" smtClean="0"/>
-              <a:t>5/27/2026</a:t>
+              <a:t>5/28/2026</a:t>
             </a:fld>
             <a:endParaRPr lang="en-US"/>
           </a:p>
@@ -1819,7 +1821,7 @@
           <a:p>
             <a:fld id="{37A2730A-859E-B540-ADF3-E97069AD1FDB}" type="datetimeFigureOut">
               <a:rPr lang="en-US" smtClean="0"/>
-              <a:t>5/27/2026</a:t>
+              <a:t>5/28/2026</a:t>
             </a:fld>
             <a:endParaRPr lang="en-US"/>
           </a:p>
@@ -1960,7 +1962,7 @@
           <a:p>
             <a:fld id="{37A2730A-859E-B540-ADF3-E97069AD1FDB}" type="datetimeFigureOut">
               <a:rPr lang="en-US" smtClean="0"/>
-              <a:t>5/27/2026</a:t>
+              <a:t>5/28/2026</a:t>
             </a:fld>
             <a:endParaRPr lang="en-US"/>
           </a:p>
@@ -2073,7 +2075,7 @@
           <a:p>
             <a:fld id="{37A2730A-859E-B540-ADF3-E97069AD1FDB}" type="datetimeFigureOut">
               <a:rPr lang="en-US" smtClean="0"/>
-              <a:t>5/27/2026</a:t>
+              <a:t>5/28/2026</a:t>
             </a:fld>
             <a:endParaRPr lang="en-US"/>
           </a:p>
@@ -2384,7 +2386,7 @@
           <a:p>
             <a:fld id="{37A2730A-859E-B540-ADF3-E97069AD1FDB}" type="datetimeFigureOut">
               <a:rPr lang="en-US" smtClean="0"/>
-              <a:t>5/27/2026</a:t>
+              <a:t>5/28/2026</a:t>
             </a:fld>
             <a:endParaRPr lang="en-US"/>
           </a:p>
@@ -2672,7 +2674,7 @@
           <a:p>
             <a:fld id="{37A2730A-859E-B540-ADF3-E97069AD1FDB}" type="datetimeFigureOut">
               <a:rPr lang="en-US" smtClean="0"/>
-              <a:t>5/27/2026</a:t>
+              <a:t>5/28/2026</a:t>
             </a:fld>
             <a:endParaRPr lang="en-US"/>
           </a:p>
@@ -2913,7 +2915,7 @@
           <a:p>
             <a:fld id="{37A2730A-859E-B540-ADF3-E97069AD1FDB}" type="datetimeFigureOut">
               <a:rPr lang="en-US" smtClean="0"/>
-              <a:t>5/27/2026</a:t>
+              <a:t>5/28/2026</a:t>
             </a:fld>
             <a:endParaRPr lang="en-US"/>
           </a:p>
@@ -3332,54 +3334,10 @@
       </p:grpSpPr>
       <p:sp>
         <p:nvSpPr>
-          <p:cNvPr id="2" name="Title 1">
+          <p:cNvPr id="4" name="TitleBar">
             <a:extLst>
               <a:ext uri="{FF2B5EF4-FFF2-40B4-BE49-F238E27FC236}">
-                <a16:creationId xmlns:a16="http://schemas.microsoft.com/office/drawing/2014/main" id="{A78E0809-A875-D2EE-BD0C-1F47DBE113F3}"/>
-              </a:ext>
-            </a:extLst>
-          </p:cNvPr>
-          <p:cNvSpPr>
-            <a:spLocks noGrp="1"/>
-          </p:cNvSpPr>
-          <p:nvPr>
-            <p:ph type="title"/>
-          </p:nvPr>
-        </p:nvSpPr>
-        <p:spPr/>
-        <p:txBody>
-          <a:bodyPr/>
-          <a:lstStyle/>
-          <a:p>
-            <a:pPr algn="l">
-              <a:buNone/>
-            </a:pPr>
-            <a:r>
-              <a:rPr lang="en-US" sz="3200" b="1" dirty="0"/>
-              <a:t>Context vs. Persona in AI</a:t>
-            </a:r>
-          </a:p>
-          <a:p>
-            <a:pPr algn="l">
-              <a:buNone/>
-            </a:pPr>
-            <a:r>
-              <a:rPr lang="en-US" sz="1600" i="1" dirty="0">
-                <a:solidFill>
-                  <a:schemeClr val="tx2"/>
-                </a:solidFill>
-              </a:rPr>
-              <a:t>What the model knows about the situation vs. how the model behaves</a:t>
-            </a:r>
-          </a:p>
-        </p:txBody>
-      </p:sp>
-      <p:sp>
-        <p:nvSpPr>
-          <p:cNvPr id="3" name="Rectangle: Rounded Corners 2">
-            <a:extLst>
-              <a:ext uri="{FF2B5EF4-FFF2-40B4-BE49-F238E27FC236}">
-                <a16:creationId xmlns:a16="http://schemas.microsoft.com/office/drawing/2014/main" id="{D7259382-1FF0-4D73-9200-2519481E8E4F}"/>
+                <a16:creationId xmlns:a16="http://schemas.microsoft.com/office/drawing/2014/main" id="{BFE013B9-2424-4633-A70F-E0AD4B76010B}"/>
               </a:ext>
             </a:extLst>
           </p:cNvPr>
@@ -3388,14 +3346,14 @@
         </p:nvSpPr>
         <p:spPr>
           <a:xfrm>
-            <a:off x="762000" y="2349500"/>
-            <a:ext cx="5080000" cy="2984500"/>
-          </a:xfrm>
-          <a:prstGeom prst="roundRect">
+            <a:off x="0" y="0"/>
+            <a:ext cx="12192000" cy="1778000"/>
+          </a:xfrm>
+          <a:prstGeom prst="rect">
             <a:avLst/>
           </a:prstGeom>
           <a:solidFill>
-            <a:srgbClr val="1F4E79"/>
+            <a:srgbClr val="1F3A5F"/>
           </a:solidFill>
           <a:ln w="12700" cap="flat" cmpd="sng" algn="ctr">
             <a:noFill/>
@@ -3430,640 +3388,75 @@
       </p:sp>
       <p:sp>
         <p:nvSpPr>
-          <p:cNvPr id="4" name="TextBox 3">
+          <p:cNvPr id="2" name="Title 1">
             <a:extLst>
               <a:ext uri="{FF2B5EF4-FFF2-40B4-BE49-F238E27FC236}">
-                <a16:creationId xmlns:a16="http://schemas.microsoft.com/office/drawing/2014/main" id="{2671A5DA-AE8B-4712-A693-0D21B76E54A9}"/>
+                <a16:creationId xmlns:a16="http://schemas.microsoft.com/office/drawing/2014/main" id="{FAAB5B02-2800-DC53-EDBF-C2C2899590B0}"/>
               </a:ext>
             </a:extLst>
           </p:cNvPr>
-          <p:cNvSpPr txBox="1"/>
-          <p:nvPr/>
-        </p:nvSpPr>
-        <p:spPr>
-          <a:xfrm>
-            <a:off x="965200" y="2501900"/>
-            <a:ext cx="4673600" cy="381000"/>
-          </a:xfrm>
-          <a:prstGeom prst="rect">
-            <a:avLst/>
-          </a:prstGeom>
-          <a:noFill/>
-          <a:ln>
-            <a:noFill/>
-          </a:ln>
-        </p:spPr>
-        <p:txBody>
-          <a:bodyPr vertOverflow="overflow" vert="horz" wrap="square" rtlCol="0" anchor="t">
-            <a:spAutoFit/>
-          </a:bodyPr>
-          <a:lstStyle/>
-          <a:p>
-            <a:pPr algn="l"/>
-            <a:r>
-              <a:rPr lang="en-US" sz="1400" b="1" dirty="0">
-                <a:solidFill>
-                  <a:srgbClr val="AED4F0"/>
-                </a:solidFill>
-              </a:rPr>
-              <a:t>CONTEXT</a:t>
-            </a:r>
-          </a:p>
-        </p:txBody>
-      </p:sp>
-      <p:sp>
-        <p:nvSpPr>
-          <p:cNvPr id="5" name="TextBox 4">
+          <p:cNvSpPr>
+            <a:spLocks noGrp="1"/>
+          </p:cNvSpPr>
+          <p:nvPr>
+            <p:ph type="title"/>
+          </p:nvPr>
+        </p:nvSpPr>
+        <p:spPr>
+          <a:xfrm>
+            <a:off x="762000" y="482600"/>
+            <a:ext cx="10668000" cy="1016000"/>
+          </a:xfrm>
+        </p:spPr>
+        <p:txBody>
+          <a:bodyPr/>
+          <a:lstStyle/>
+          <a:p>
+            <a:r>
+              <a:rPr lang="en-US" dirty="0">
+                <a:solidFill>
+                  <a:srgbClr val="FFFFFF"/>
+                </a:solidFill>
+              </a:rPr>
+              <a:t>Hire a Team with AI Assistant Personas</a:t>
+            </a:r>
+          </a:p>
+        </p:txBody>
+      </p:sp>
+      <p:pic>
+        <p:nvPicPr>
+          <p:cNvPr id="3" name="Picture 2">
             <a:extLst>
               <a:ext uri="{FF2B5EF4-FFF2-40B4-BE49-F238E27FC236}">
-                <a16:creationId xmlns:a16="http://schemas.microsoft.com/office/drawing/2014/main" id="{13040BB5-21F4-49CE-98A9-67223126E58C}"/>
+                <a16:creationId xmlns:a16="http://schemas.microsoft.com/office/drawing/2014/main" id="{385E7326-4C8C-F296-2941-6C0CD226C610}"/>
               </a:ext>
             </a:extLst>
           </p:cNvPr>
-          <p:cNvSpPr txBox="1"/>
-          <p:nvPr/>
-        </p:nvSpPr>
-        <p:spPr>
-          <a:xfrm>
-            <a:off x="965200" y="2806700"/>
-            <a:ext cx="4673600" cy="369332"/>
-          </a:xfrm>
-          <a:prstGeom prst="rect">
-            <a:avLst/>
-          </a:prstGeom>
-          <a:noFill/>
-          <a:ln>
-            <a:noFill/>
-          </a:ln>
-        </p:spPr>
-        <p:txBody>
-          <a:bodyPr vertOverflow="overflow" vert="horz" wrap="square" rtlCol="0" anchor="t">
-            <a:spAutoFit/>
-          </a:bodyPr>
-          <a:lstStyle/>
-          <a:p>
-            <a:pPr algn="l"/>
-            <a:r>
-              <a:rPr lang="en-US" b="1" dirty="0">
-                <a:solidFill>
-                  <a:srgbClr val="FFFFFF"/>
-                </a:solidFill>
-              </a:rPr>
-              <a:t>What the model is given (The work)</a:t>
-            </a:r>
-          </a:p>
-        </p:txBody>
-      </p:sp>
-      <p:sp>
-        <p:nvSpPr>
-          <p:cNvPr id="6" name="TextBox 5">
-            <a:extLst>
-              <a:ext uri="{FF2B5EF4-FFF2-40B4-BE49-F238E27FC236}">
-                <a16:creationId xmlns:a16="http://schemas.microsoft.com/office/drawing/2014/main" id="{5CC52DC4-05DC-404A-A32C-46C830F197A1}"/>
-              </a:ext>
-            </a:extLst>
-          </p:cNvPr>
-          <p:cNvSpPr txBox="1"/>
-          <p:nvPr/>
-        </p:nvSpPr>
-        <p:spPr>
-          <a:xfrm>
-            <a:off x="965200" y="3302000"/>
-            <a:ext cx="4673600" cy="1374735"/>
-          </a:xfrm>
-          <a:prstGeom prst="rect">
-            <a:avLst/>
-          </a:prstGeom>
-          <a:noFill/>
-          <a:ln>
-            <a:noFill/>
-          </a:ln>
-        </p:spPr>
-        <p:txBody>
-          <a:bodyPr vertOverflow="overflow" vert="horz" wrap="square" rtlCol="0" anchor="t">
-            <a:spAutoFit/>
-          </a:bodyPr>
-          <a:lstStyle/>
-          <a:p>
-            <a:pPr marL="228600" indent="-228600">
-              <a:lnSpc>
-                <a:spcPts val="1700"/>
-              </a:lnSpc>
-              <a:spcAft>
-                <a:spcPts val="500"/>
-              </a:spcAft>
-              <a:buFont typeface="Arial"/>
-              <a:buChar char="•"/>
-            </a:pPr>
-            <a:r>
-              <a:rPr lang="en-US" sz="1500" b="1" dirty="0">
-                <a:solidFill>
-                  <a:srgbClr val="FFFFFF"/>
-                </a:solidFill>
-              </a:rPr>
-              <a:t>Information </a:t>
-            </a:r>
-            <a:r>
-              <a:rPr lang="en-US" sz="1500" dirty="0">
-                <a:solidFill>
-                  <a:srgbClr val="FFFFFF"/>
-                </a:solidFill>
-              </a:rPr>
-              <a:t>fed to the model (documents, history, data)</a:t>
-            </a:r>
-          </a:p>
-          <a:p>
-            <a:pPr marL="228600" indent="-228600">
-              <a:lnSpc>
-                <a:spcPts val="1700"/>
-              </a:lnSpc>
-              <a:spcAft>
-                <a:spcPts val="500"/>
-              </a:spcAft>
-              <a:buFont typeface="Arial"/>
-              <a:buChar char="•"/>
-            </a:pPr>
-            <a:r>
-              <a:rPr lang="en-US" sz="1500" b="1" dirty="0">
-                <a:solidFill>
-                  <a:srgbClr val="FFFFFF"/>
-                </a:solidFill>
-              </a:rPr>
-              <a:t>Situational </a:t>
-            </a:r>
-            <a:r>
-              <a:rPr lang="en-US" sz="1500" dirty="0">
-                <a:solidFill>
-                  <a:srgbClr val="FFFFFF"/>
-                </a:solidFill>
-              </a:rPr>
-              <a:t>— changes per request or conversation</a:t>
-            </a:r>
-          </a:p>
-          <a:p>
-            <a:pPr marL="228600" indent="-228600">
-              <a:lnSpc>
-                <a:spcPts val="1700"/>
-              </a:lnSpc>
-              <a:spcAft>
-                <a:spcPts val="500"/>
-              </a:spcAft>
-              <a:buFont typeface="Arial"/>
-              <a:buChar char="•"/>
-            </a:pPr>
-            <a:r>
-              <a:rPr lang="en-US" sz="1500" b="1" dirty="0">
-                <a:solidFill>
-                  <a:srgbClr val="FFFFFF"/>
-                </a:solidFill>
-              </a:rPr>
-              <a:t>Answers </a:t>
-            </a:r>
-            <a:r>
-              <a:rPr lang="en-US" sz="1500" dirty="0">
-                <a:solidFill>
-                  <a:srgbClr val="FFFFFF"/>
-                </a:solidFill>
-              </a:rPr>
-              <a:t>“what does the model need to know?”</a:t>
-            </a:r>
-          </a:p>
-          <a:p>
-            <a:pPr marL="228600" indent="-228600">
-              <a:lnSpc>
-                <a:spcPts val="1700"/>
-              </a:lnSpc>
-              <a:spcAft>
-                <a:spcPts val="500"/>
-              </a:spcAft>
-              <a:buFont typeface="Arial"/>
-              <a:buChar char="•"/>
-            </a:pPr>
-            <a:r>
-              <a:rPr lang="en-US" sz="1500" b="1" dirty="0">
-                <a:solidFill>
-                  <a:srgbClr val="FFFFFF"/>
-                </a:solidFill>
-              </a:rPr>
-              <a:t>Examples: </a:t>
-            </a:r>
-            <a:r>
-              <a:rPr lang="en-US" sz="1500" dirty="0">
-                <a:solidFill>
-                  <a:srgbClr val="FFFFFF"/>
-                </a:solidFill>
-              </a:rPr>
-              <a:t>RAG results, prior messages, attached files</a:t>
-            </a:r>
-          </a:p>
-        </p:txBody>
-      </p:sp>
-      <p:sp>
-        <p:nvSpPr>
-          <p:cNvPr id="7" name="Rectangle: Rounded Corners 6">
-            <a:extLst>
-              <a:ext uri="{FF2B5EF4-FFF2-40B4-BE49-F238E27FC236}">
-                <a16:creationId xmlns:a16="http://schemas.microsoft.com/office/drawing/2014/main" id="{0B2A00A6-E8F0-466C-B3FB-1FF7A02CB336}"/>
-              </a:ext>
-            </a:extLst>
-          </p:cNvPr>
-          <p:cNvSpPr/>
-          <p:nvPr/>
-        </p:nvSpPr>
-        <p:spPr>
-          <a:xfrm>
-            <a:off x="6350000" y="2349500"/>
-            <a:ext cx="5080000" cy="2984500"/>
-          </a:xfrm>
-          <a:prstGeom prst="roundRect">
-            <a:avLst/>
-          </a:prstGeom>
-          <a:solidFill>
-            <a:srgbClr val="7B2D8E"/>
-          </a:solidFill>
-          <a:ln w="12700" cap="flat" cmpd="sng" algn="ctr">
-            <a:noFill/>
-            <a:prstDash val="solid"/>
-            <a:miter lim="800000"/>
-          </a:ln>
-        </p:spPr>
-        <p:style>
-          <a:lnRef idx="2">
-            <a:schemeClr val="accent1">
-              <a:shade val="15000"/>
-            </a:schemeClr>
-          </a:lnRef>
-          <a:fillRef idx="1">
-            <a:schemeClr val="accent1"/>
-          </a:fillRef>
-          <a:effectRef idx="0">
-            <a:schemeClr val="accent1"/>
-          </a:effectRef>
-          <a:fontRef idx="minor">
-            <a:schemeClr val="lt1"/>
-          </a:fontRef>
-        </p:style>
-        <p:txBody>
-          <a:bodyPr vertOverflow="clip" horzOverflow="clip" rtlCol="0" anchor="t"/>
-          <a:lstStyle/>
-          <a:p>
-            <a:pPr algn="l"/>
-            <a:endParaRPr lang="en-US"/>
-          </a:p>
-        </p:txBody>
-      </p:sp>
-      <p:sp>
-        <p:nvSpPr>
-          <p:cNvPr id="8" name="TextBox 7">
-            <a:extLst>
-              <a:ext uri="{FF2B5EF4-FFF2-40B4-BE49-F238E27FC236}">
-                <a16:creationId xmlns:a16="http://schemas.microsoft.com/office/drawing/2014/main" id="{CCD23F2E-8364-4640-9A8A-2C04C6477501}"/>
-              </a:ext>
-            </a:extLst>
-          </p:cNvPr>
-          <p:cNvSpPr txBox="1"/>
-          <p:nvPr/>
-        </p:nvSpPr>
-        <p:spPr>
-          <a:xfrm>
-            <a:off x="6553200" y="2501900"/>
-            <a:ext cx="4673600" cy="381000"/>
-          </a:xfrm>
-          <a:prstGeom prst="rect">
-            <a:avLst/>
-          </a:prstGeom>
-          <a:noFill/>
-          <a:ln>
-            <a:noFill/>
-          </a:ln>
-        </p:spPr>
-        <p:txBody>
-          <a:bodyPr vertOverflow="overflow" vert="horz" wrap="square" rtlCol="0" anchor="t">
-            <a:spAutoFit/>
-          </a:bodyPr>
-          <a:lstStyle/>
-          <a:p>
-            <a:pPr algn="l"/>
-            <a:r>
-              <a:rPr lang="en-US" sz="1400" b="1">
-                <a:solidFill>
-                  <a:srgbClr val="E5C4F0"/>
-                </a:solidFill>
-              </a:rPr>
-              <a:t>PERSONA</a:t>
-            </a:r>
-          </a:p>
-        </p:txBody>
-      </p:sp>
-      <p:sp>
-        <p:nvSpPr>
-          <p:cNvPr id="9" name="TextBox 8">
-            <a:extLst>
-              <a:ext uri="{FF2B5EF4-FFF2-40B4-BE49-F238E27FC236}">
-                <a16:creationId xmlns:a16="http://schemas.microsoft.com/office/drawing/2014/main" id="{17E22691-F4CA-4604-A6EF-9DC8546F600C}"/>
-              </a:ext>
-            </a:extLst>
-          </p:cNvPr>
-          <p:cNvSpPr txBox="1"/>
-          <p:nvPr/>
-        </p:nvSpPr>
-        <p:spPr>
-          <a:xfrm>
-            <a:off x="6553200" y="2806700"/>
-            <a:ext cx="4673600" cy="369332"/>
-          </a:xfrm>
-          <a:prstGeom prst="rect">
-            <a:avLst/>
-          </a:prstGeom>
-          <a:noFill/>
-          <a:ln>
-            <a:noFill/>
-          </a:ln>
-        </p:spPr>
-        <p:txBody>
-          <a:bodyPr vertOverflow="overflow" vert="horz" wrap="square" rtlCol="0" anchor="t">
-            <a:spAutoFit/>
-          </a:bodyPr>
-          <a:lstStyle/>
-          <a:p>
-            <a:pPr algn="l"/>
-            <a:r>
-              <a:rPr lang="en-US" b="1" dirty="0">
-                <a:solidFill>
-                  <a:srgbClr val="FFFFFF"/>
-                </a:solidFill>
-              </a:rPr>
-              <a:t>How the model acts (Who does the work)</a:t>
-            </a:r>
-          </a:p>
-        </p:txBody>
-      </p:sp>
-      <p:sp>
-        <p:nvSpPr>
-          <p:cNvPr id="10" name="TextBox 9">
-            <a:extLst>
-              <a:ext uri="{FF2B5EF4-FFF2-40B4-BE49-F238E27FC236}">
-                <a16:creationId xmlns:a16="http://schemas.microsoft.com/office/drawing/2014/main" id="{622075CD-36A9-4FD7-9F75-8A8215FC468F}"/>
-              </a:ext>
-            </a:extLst>
-          </p:cNvPr>
-          <p:cNvSpPr txBox="1"/>
-          <p:nvPr/>
-        </p:nvSpPr>
-        <p:spPr>
-          <a:xfrm>
-            <a:off x="6553200" y="3302000"/>
-            <a:ext cx="4673600" cy="1374735"/>
-          </a:xfrm>
-          <a:prstGeom prst="rect">
-            <a:avLst/>
-          </a:prstGeom>
-          <a:noFill/>
-          <a:ln>
-            <a:noFill/>
-          </a:ln>
-        </p:spPr>
-        <p:txBody>
-          <a:bodyPr vertOverflow="overflow" vert="horz" wrap="square" rtlCol="0" anchor="t">
-            <a:spAutoFit/>
-          </a:bodyPr>
-          <a:lstStyle/>
-          <a:p>
-            <a:pPr marL="228600" indent="-228600">
-              <a:lnSpc>
-                <a:spcPts val="1700"/>
-              </a:lnSpc>
-              <a:spcAft>
-                <a:spcPts val="500"/>
-              </a:spcAft>
-              <a:buFont typeface="Arial"/>
-              <a:buChar char="•"/>
-            </a:pPr>
-            <a:r>
-              <a:rPr lang="en-US" sz="1500" b="1" dirty="0">
-                <a:solidFill>
-                  <a:srgbClr val="FFFFFF"/>
-                </a:solidFill>
-              </a:rPr>
-              <a:t>Identity &amp; style </a:t>
-            </a:r>
-            <a:r>
-              <a:rPr lang="en-US" sz="1500" dirty="0">
-                <a:solidFill>
-                  <a:srgbClr val="FFFFFF"/>
-                </a:solidFill>
-              </a:rPr>
-              <a:t>the model adopts (tone, role, voice)</a:t>
-            </a:r>
-          </a:p>
-          <a:p>
-            <a:pPr marL="228600" indent="-228600">
-              <a:lnSpc>
-                <a:spcPts val="1700"/>
-              </a:lnSpc>
-              <a:spcAft>
-                <a:spcPts val="500"/>
-              </a:spcAft>
-              <a:buFont typeface="Arial"/>
-              <a:buChar char="•"/>
-            </a:pPr>
-            <a:r>
-              <a:rPr lang="en-US" sz="1500" b="1" dirty="0">
-                <a:solidFill>
-                  <a:srgbClr val="FFFFFF"/>
-                </a:solidFill>
-              </a:rPr>
-              <a:t>Behavioral </a:t>
-            </a:r>
-            <a:r>
-              <a:rPr lang="en-US" sz="1500" dirty="0">
-                <a:solidFill>
-                  <a:srgbClr val="FFFFFF"/>
-                </a:solidFill>
-              </a:rPr>
-              <a:t>— consistent across requests</a:t>
-            </a:r>
-          </a:p>
-          <a:p>
-            <a:pPr marL="228600" indent="-228600">
-              <a:lnSpc>
-                <a:spcPts val="1700"/>
-              </a:lnSpc>
-              <a:spcAft>
-                <a:spcPts val="500"/>
-              </a:spcAft>
-              <a:buFont typeface="Arial"/>
-              <a:buChar char="•"/>
-            </a:pPr>
-            <a:r>
-              <a:rPr lang="en-US" sz="1500" b="1" dirty="0">
-                <a:solidFill>
-                  <a:srgbClr val="FFFFFF"/>
-                </a:solidFill>
-              </a:rPr>
-              <a:t>Answers </a:t>
-            </a:r>
-            <a:r>
-              <a:rPr lang="en-US" sz="1500" dirty="0">
-                <a:solidFill>
-                  <a:srgbClr val="FFFFFF"/>
-                </a:solidFill>
-              </a:rPr>
-              <a:t>“how should the model respond?”</a:t>
-            </a:r>
-          </a:p>
-          <a:p>
-            <a:pPr marL="228600" indent="-228600">
-              <a:lnSpc>
-                <a:spcPts val="1700"/>
-              </a:lnSpc>
-              <a:spcAft>
-                <a:spcPts val="500"/>
-              </a:spcAft>
-              <a:buFont typeface="Arial"/>
-              <a:buChar char="•"/>
-            </a:pPr>
-            <a:r>
-              <a:rPr lang="en-US" sz="1500" b="1" dirty="0">
-                <a:solidFill>
-                  <a:srgbClr val="FFFFFF"/>
-                </a:solidFill>
-              </a:rPr>
-              <a:t>Examples: </a:t>
-            </a:r>
-            <a:r>
-              <a:rPr lang="en-US" sz="1500" dirty="0">
-                <a:solidFill>
-                  <a:srgbClr val="FFFFFF"/>
-                </a:solidFill>
-              </a:rPr>
-              <a:t>system prompt defining a coach, lawyer, tutor</a:t>
-            </a:r>
-          </a:p>
-        </p:txBody>
-      </p:sp>
-      <p:sp>
-        <p:nvSpPr>
-          <p:cNvPr id="11" name="Rectangle 10">
-            <a:extLst>
-              <a:ext uri="{FF2B5EF4-FFF2-40B4-BE49-F238E27FC236}">
-                <a16:creationId xmlns:a16="http://schemas.microsoft.com/office/drawing/2014/main" id="{9CD6E635-077C-4055-B431-B645082710F9}"/>
-              </a:ext>
-            </a:extLst>
-          </p:cNvPr>
-          <p:cNvSpPr/>
-          <p:nvPr/>
-        </p:nvSpPr>
-        <p:spPr>
-          <a:xfrm>
-            <a:off x="762000" y="5537200"/>
-            <a:ext cx="10668000" cy="1016000"/>
-          </a:xfrm>
-          <a:prstGeom prst="rect">
-            <a:avLst/>
-          </a:prstGeom>
-          <a:solidFill>
-            <a:srgbClr val="F2F4F7"/>
-          </a:solidFill>
-          <a:ln w="12700" cap="flat" cmpd="sng" algn="ctr">
-            <a:noFill/>
-            <a:prstDash val="solid"/>
-            <a:miter lim="800000"/>
-          </a:ln>
-        </p:spPr>
-        <p:style>
-          <a:lnRef idx="2">
-            <a:schemeClr val="accent1">
-              <a:shade val="15000"/>
-            </a:schemeClr>
-          </a:lnRef>
-          <a:fillRef idx="1">
-            <a:schemeClr val="accent1"/>
-          </a:fillRef>
-          <a:effectRef idx="0">
-            <a:schemeClr val="accent1"/>
-          </a:effectRef>
-          <a:fontRef idx="minor">
-            <a:schemeClr val="lt1"/>
-          </a:fontRef>
-        </p:style>
-        <p:txBody>
-          <a:bodyPr vertOverflow="clip" horzOverflow="clip" rtlCol="0" anchor="t"/>
-          <a:lstStyle/>
-          <a:p>
-            <a:pPr algn="l"/>
-            <a:endParaRPr lang="en-US"/>
-          </a:p>
-        </p:txBody>
-      </p:sp>
-      <p:sp>
-        <p:nvSpPr>
-          <p:cNvPr id="12" name="TextBox 11">
-            <a:extLst>
-              <a:ext uri="{FF2B5EF4-FFF2-40B4-BE49-F238E27FC236}">
-                <a16:creationId xmlns:a16="http://schemas.microsoft.com/office/drawing/2014/main" id="{117A8691-40DF-4730-AA20-F71D64BB0E8A}"/>
-              </a:ext>
-            </a:extLst>
-          </p:cNvPr>
-          <p:cNvSpPr txBox="1"/>
-          <p:nvPr/>
-        </p:nvSpPr>
-        <p:spPr>
-          <a:xfrm>
-            <a:off x="965200" y="5638800"/>
-            <a:ext cx="10261600" cy="557204"/>
-          </a:xfrm>
-          <a:prstGeom prst="rect">
-            <a:avLst/>
-          </a:prstGeom>
-          <a:noFill/>
-          <a:ln>
-            <a:noFill/>
-          </a:ln>
-        </p:spPr>
-        <p:txBody>
-          <a:bodyPr vertOverflow="overflow" vert="horz" wrap="square" rtlCol="0" anchor="t">
-            <a:spAutoFit/>
-          </a:bodyPr>
-          <a:lstStyle/>
-          <a:p>
-            <a:pPr algn="ctr">
-              <a:lnSpc>
-                <a:spcPts val="1800"/>
-              </a:lnSpc>
-              <a:buNone/>
-            </a:pPr>
-            <a:r>
-              <a:rPr lang="en-US" sz="1800" i="1" dirty="0">
-                <a:solidFill>
-                  <a:srgbClr val="555555"/>
-                </a:solidFill>
-              </a:rPr>
-              <a:t>Put simply: context is the material on the desk.</a:t>
-            </a:r>
-          </a:p>
-          <a:p>
-            <a:pPr algn="ctr">
-              <a:lnSpc>
-                <a:spcPts val="1800"/>
-              </a:lnSpc>
-              <a:buNone/>
-            </a:pPr>
-            <a:r>
-              <a:rPr lang="en-US" sz="1800" i="1" dirty="0">
-                <a:solidFill>
-                  <a:srgbClr val="555555"/>
-                </a:solidFill>
-              </a:rPr>
-              <a:t>The persona is the colleague you handed it to.</a:t>
-            </a:r>
-          </a:p>
-        </p:txBody>
-      </p:sp>
+          <p:cNvPicPr>
+            <a:picLocks noChangeAspect="1"/>
+          </p:cNvPicPr>
+          <p:nvPr/>
+        </p:nvPicPr>
+        <p:blipFill>
+          <a:blip r:embed="rId2"/>
+          <a:stretch>
+            <a:fillRect/>
+          </a:stretch>
+        </p:blipFill>
+        <p:spPr>
+          <a:xfrm>
+            <a:off x="2885927" y="1873250"/>
+            <a:ext cx="6420145" cy="4699000"/>
+          </a:xfrm>
+          <a:prstGeom prst="rect">
+            <a:avLst/>
+          </a:prstGeom>
+        </p:spPr>
+      </p:pic>
     </p:spTree>
     <p:extLst>
       <p:ext uri="{BB962C8B-B14F-4D97-AF65-F5344CB8AC3E}">
-        <p14:creationId xmlns:p14="http://schemas.microsoft.com/office/powerpoint/2010/main" val="1363818408"/>
+        <p14:creationId xmlns:p14="http://schemas.microsoft.com/office/powerpoint/2010/main" val="504814876"/>
       </p:ext>
     </p:extLst>
   </p:cSld>
@@ -4092,110 +3485,530 @@
       </p:grpSpPr>
       <p:sp>
         <p:nvSpPr>
-          <p:cNvPr id="101" name="LeftHeader"/>
-          <p:cNvSpPr>
-            <a:spLocks noGrp="1"/>
-          </p:cNvSpPr>
-          <p:nvPr/>
-        </p:nvSpPr>
-        <p:spPr>
-          <a:xfrm>
-            <a:off x="508000" y="0"/>
-            <a:ext cx="5334000" cy="635000"/>
+          <p:cNvPr id="10" name="TitleBar"/>
+          <p:cNvSpPr>
+            <a:spLocks noGrp="1"/>
+          </p:cNvSpPr>
+          <p:nvPr/>
+        </p:nvSpPr>
+        <p:spPr>
+          <a:xfrm>
+            <a:off x="0" y="0"/>
+            <a:ext cx="12192000" cy="914400"/>
           </a:xfrm>
           <a:prstGeom prst="rect">
             <a:avLst/>
           </a:prstGeom>
           <a:solidFill>
-            <a:srgbClr val="1F4E79"/>
+            <a:srgbClr val="1F3A5F"/>
           </a:solidFill>
           <a:ln>
             <a:noFill/>
           </a:ln>
         </p:spPr>
         <p:txBody>
-          <a:bodyPr anchor="ctr"/>
+          <a:bodyPr wrap="square" anchor="ctr">
+            <a:normAutofit/>
+          </a:bodyPr>
           <a:lstStyle/>
           <a:p>
             <a:pPr algn="ctr">
               <a:buNone/>
             </a:pPr>
             <a:r>
+              <a:rPr lang="en-US" sz="2200" b="1" dirty="0">
+                <a:solidFill>
+                  <a:srgbClr val="FFFFFF"/>
+                </a:solidFill>
+              </a:rPr>
+              <a:t>No Magic. Just Text Files.</a:t>
+            </a:r>
+          </a:p>
+        </p:txBody>
+      </p:sp>
+      <p:sp>
+        <p:nvSpPr>
+          <p:cNvPr id="90" name="Tagline"/>
+          <p:cNvSpPr txBox="1">
+            <a:spLocks noGrp="1"/>
+          </p:cNvSpPr>
+          <p:nvPr/>
+        </p:nvSpPr>
+        <p:spPr>
+          <a:xfrm>
+            <a:off x="762000" y="6223000"/>
+            <a:ext cx="10668000" cy="457200"/>
+          </a:xfrm>
+          <a:prstGeom prst="rect">
+            <a:avLst/>
+          </a:prstGeom>
+          <a:noFill/>
+          <a:ln>
+            <a:noFill/>
+          </a:ln>
+        </p:spPr>
+        <p:txBody>
+          <a:bodyPr wrap="square" anchor="ctr">
+            <a:normAutofit/>
+          </a:bodyPr>
+          <a:lstStyle/>
+          <a:p>
+            <a:pPr algn="ctr">
+              <a:buNone/>
+            </a:pPr>
+            <a:r>
+              <a:rPr lang="en-US" sz="1400" b="0" i="1" dirty="0">
+                <a:solidFill>
+                  <a:srgbClr val="555555"/>
+                </a:solidFill>
+              </a:rPr>
+              <a:t>How you organize your text files is how you succeed with AI systems.</a:t>
+            </a:r>
+          </a:p>
+        </p:txBody>
+      </p:sp>
+      <p:sp>
+        <p:nvSpPr>
+          <p:cNvPr id="11" name="InHdr"/>
+          <p:cNvSpPr txBox="1"/>
+          <p:nvPr/>
+        </p:nvSpPr>
+        <p:spPr>
+          <a:xfrm>
+            <a:off x="355600" y="1041400"/>
+            <a:ext cx="2794000" cy="355600"/>
+          </a:xfrm>
+          <a:prstGeom prst="rect">
+            <a:avLst/>
+          </a:prstGeom>
+          <a:noFill/>
+          <a:ln>
+            <a:noFill/>
+          </a:ln>
+        </p:spPr>
+        <p:txBody>
+          <a:bodyPr wrap="square" anchor="ctr">
+            <a:normAutofit/>
+          </a:bodyPr>
+          <a:lstStyle/>
+          <a:p>
+            <a:pPr algn="ctr">
+              <a:buNone/>
+            </a:pPr>
+            <a:r>
+              <a:rPr lang="en-US" sz="1300" b="1" i="0" dirty="0">
+                <a:solidFill>
+                  <a:srgbClr val="1F3A5F"/>
+                </a:solidFill>
+              </a:rPr>
+              <a:t>INPUT</a:t>
+            </a:r>
+          </a:p>
+        </p:txBody>
+      </p:sp>
+      <p:sp>
+        <p:nvSpPr>
+          <p:cNvPr id="60" name="OutHdr"/>
+          <p:cNvSpPr txBox="1"/>
+          <p:nvPr/>
+        </p:nvSpPr>
+        <p:spPr>
+          <a:xfrm>
+            <a:off x="9042400" y="1041400"/>
+            <a:ext cx="2794000" cy="355600"/>
+          </a:xfrm>
+          <a:prstGeom prst="rect">
+            <a:avLst/>
+          </a:prstGeom>
+          <a:noFill/>
+          <a:ln>
+            <a:noFill/>
+          </a:ln>
+        </p:spPr>
+        <p:txBody>
+          <a:bodyPr wrap="square" anchor="ctr">
+            <a:normAutofit/>
+          </a:bodyPr>
+          <a:lstStyle/>
+          <a:p>
+            <a:pPr algn="ctr">
+              <a:buNone/>
+            </a:pPr>
+            <a:r>
+              <a:rPr lang="en-US" sz="1300" b="1" i="0" dirty="0">
+                <a:solidFill>
+                  <a:srgbClr val="1F3A5F"/>
+                </a:solidFill>
+              </a:rPr>
+              <a:t>OUTPUT</a:t>
+            </a:r>
+          </a:p>
+        </p:txBody>
+      </p:sp>
+      <p:sp>
+        <p:nvSpPr>
+          <p:cNvPr id="20" name="InCard0"/>
+          <p:cNvSpPr>
+            <a:spLocks noGrp="1"/>
+          </p:cNvSpPr>
+          <p:nvPr/>
+        </p:nvSpPr>
+        <p:spPr>
+          <a:xfrm>
+            <a:off x="355600" y="1936750"/>
+            <a:ext cx="2794000" cy="1079500"/>
+          </a:xfrm>
+          <a:prstGeom prst="rect">
+            <a:avLst/>
+          </a:prstGeom>
+          <a:solidFill>
+            <a:srgbClr val="E8EEF6"/>
+          </a:solidFill>
+          <a:ln w="12700">
+            <a:solidFill>
+              <a:srgbClr val="C5D3E8"/>
+            </a:solidFill>
+          </a:ln>
+        </p:spPr>
+        <p:txBody>
+          <a:bodyPr/>
+          <a:lstStyle/>
+          <a:p>
+            <a:endParaRPr/>
+          </a:p>
+        </p:txBody>
+      </p:sp>
+      <p:sp>
+        <p:nvSpPr>
+          <p:cNvPr id="120" name="InTxt0"/>
+          <p:cNvSpPr txBox="1"/>
+          <p:nvPr/>
+        </p:nvSpPr>
+        <p:spPr>
+          <a:xfrm>
+            <a:off x="355600" y="2012950"/>
+            <a:ext cx="2794000" cy="1003300"/>
+          </a:xfrm>
+          <a:prstGeom prst="rect">
+            <a:avLst/>
+          </a:prstGeom>
+          <a:noFill/>
+          <a:ln>
+            <a:noFill/>
+          </a:ln>
+        </p:spPr>
+        <p:txBody>
+          <a:bodyPr wrap="square" anchor="ctr">
+            <a:normAutofit/>
+          </a:bodyPr>
+          <a:lstStyle/>
+          <a:p>
+            <a:pPr algn="ctr">
+              <a:buNone/>
+            </a:pPr>
+            <a:r>
               <a:rPr lang="en-US" sz="1600" b="1" i="0" dirty="0">
                 <a:solidFill>
-                  <a:srgbClr val="FFFFFF"/>
-                </a:solidFill>
-              </a:rPr>
-              <a:t>Working with Context</a:t>
-            </a:r>
-          </a:p>
-        </p:txBody>
-      </p:sp>
-      <p:sp>
-        <p:nvSpPr>
-          <p:cNvPr id="102" name="RightHeader"/>
-          <p:cNvSpPr>
-            <a:spLocks noGrp="1"/>
-          </p:cNvSpPr>
-          <p:nvPr/>
-        </p:nvSpPr>
-        <p:spPr>
-          <a:xfrm>
-            <a:off x="6350000" y="0"/>
-            <a:ext cx="5334000" cy="635000"/>
+                  <a:srgbClr val="1F3A5F"/>
+                </a:solidFill>
+              </a:rPr>
+              <a:t>persona.txt</a:t>
+            </a:r>
+          </a:p>
+          <a:p>
+            <a:pPr algn="ctr">
+              <a:buNone/>
+            </a:pPr>
+            <a:r>
+              <a:rPr lang="en-US" sz="1300" b="0" i="0" dirty="0">
+                <a:solidFill>
+                  <a:srgbClr val="5A7BAF"/>
+                </a:solidFill>
+              </a:rPr>
+              <a:t>Role, tone, behavior</a:t>
+            </a:r>
+          </a:p>
+        </p:txBody>
+      </p:sp>
+      <p:sp>
+        <p:nvSpPr>
+          <p:cNvPr id="21" name="InCard1"/>
+          <p:cNvSpPr>
+            <a:spLocks noGrp="1"/>
+          </p:cNvSpPr>
+          <p:nvPr/>
+        </p:nvSpPr>
+        <p:spPr>
+          <a:xfrm>
+            <a:off x="355600" y="3079750"/>
+            <a:ext cx="2794000" cy="1079500"/>
           </a:xfrm>
           <a:prstGeom prst="rect">
             <a:avLst/>
           </a:prstGeom>
           <a:solidFill>
-            <a:srgbClr val="7B2D8E"/>
+            <a:srgbClr val="E8EEF6"/>
+          </a:solidFill>
+          <a:ln w="12700">
+            <a:solidFill>
+              <a:srgbClr val="C5D3E8"/>
+            </a:solidFill>
+          </a:ln>
+        </p:spPr>
+        <p:txBody>
+          <a:bodyPr/>
+          <a:lstStyle/>
+          <a:p>
+            <a:endParaRPr/>
+          </a:p>
+        </p:txBody>
+      </p:sp>
+      <p:sp>
+        <p:nvSpPr>
+          <p:cNvPr id="121" name="InTxt1"/>
+          <p:cNvSpPr txBox="1"/>
+          <p:nvPr/>
+        </p:nvSpPr>
+        <p:spPr>
+          <a:xfrm>
+            <a:off x="355600" y="3155950"/>
+            <a:ext cx="2794000" cy="1003300"/>
+          </a:xfrm>
+          <a:prstGeom prst="rect">
+            <a:avLst/>
+          </a:prstGeom>
+          <a:noFill/>
+          <a:ln>
+            <a:noFill/>
+          </a:ln>
+        </p:spPr>
+        <p:txBody>
+          <a:bodyPr wrap="square" anchor="ctr">
+            <a:normAutofit/>
+          </a:bodyPr>
+          <a:lstStyle/>
+          <a:p>
+            <a:pPr algn="ctr">
+              <a:buNone/>
+            </a:pPr>
+            <a:r>
+              <a:rPr lang="en-US" sz="1600" b="1" i="0" dirty="0">
+                <a:solidFill>
+                  <a:srgbClr val="1F3A5F"/>
+                </a:solidFill>
+              </a:rPr>
+              <a:t>skills.txt</a:t>
+            </a:r>
+          </a:p>
+          <a:p>
+            <a:pPr algn="ctr">
+              <a:buNone/>
+            </a:pPr>
+            <a:r>
+              <a:rPr lang="en-US" sz="1300" b="0" i="0" dirty="0">
+                <a:solidFill>
+                  <a:srgbClr val="5A7BAF"/>
+                </a:solidFill>
+              </a:rPr>
+              <a:t>What the AI can do</a:t>
+            </a:r>
+          </a:p>
+        </p:txBody>
+      </p:sp>
+      <p:sp>
+        <p:nvSpPr>
+          <p:cNvPr id="22" name="InCard2"/>
+          <p:cNvSpPr>
+            <a:spLocks noGrp="1"/>
+          </p:cNvSpPr>
+          <p:nvPr/>
+        </p:nvSpPr>
+        <p:spPr>
+          <a:xfrm>
+            <a:off x="355600" y="4222750"/>
+            <a:ext cx="2794000" cy="1079500"/>
+          </a:xfrm>
+          <a:prstGeom prst="rect">
+            <a:avLst/>
+          </a:prstGeom>
+          <a:solidFill>
+            <a:srgbClr val="E8EEF6"/>
+          </a:solidFill>
+          <a:ln w="12700">
+            <a:solidFill>
+              <a:srgbClr val="C5D3E8"/>
+            </a:solidFill>
+          </a:ln>
+        </p:spPr>
+        <p:txBody>
+          <a:bodyPr/>
+          <a:lstStyle/>
+          <a:p>
+            <a:endParaRPr/>
+          </a:p>
+        </p:txBody>
+      </p:sp>
+      <p:sp>
+        <p:nvSpPr>
+          <p:cNvPr id="122" name="InTxt2"/>
+          <p:cNvSpPr txBox="1"/>
+          <p:nvPr/>
+        </p:nvSpPr>
+        <p:spPr>
+          <a:xfrm>
+            <a:off x="355600" y="4298950"/>
+            <a:ext cx="2794000" cy="1003300"/>
+          </a:xfrm>
+          <a:prstGeom prst="rect">
+            <a:avLst/>
+          </a:prstGeom>
+          <a:noFill/>
+          <a:ln>
+            <a:noFill/>
+          </a:ln>
+        </p:spPr>
+        <p:txBody>
+          <a:bodyPr wrap="square" anchor="ctr">
+            <a:normAutofit/>
+          </a:bodyPr>
+          <a:lstStyle/>
+          <a:p>
+            <a:pPr algn="ctr">
+              <a:buNone/>
+            </a:pPr>
+            <a:r>
+              <a:rPr lang="en-US" sz="1600" b="1" i="0" dirty="0">
+                <a:solidFill>
+                  <a:srgbClr val="1F3A5F"/>
+                </a:solidFill>
+              </a:rPr>
+              <a:t>context.txt</a:t>
+            </a:r>
+          </a:p>
+          <a:p>
+            <a:pPr algn="ctr">
+              <a:buNone/>
+            </a:pPr>
+            <a:r>
+              <a:rPr lang="en-US" sz="1300" b="0" i="0" dirty="0">
+                <a:solidFill>
+                  <a:srgbClr val="5A7BAF"/>
+                </a:solidFill>
+              </a:rPr>
+              <a:t>Background &amp; goals</a:t>
+            </a:r>
+          </a:p>
+        </p:txBody>
+      </p:sp>
+      <p:sp>
+        <p:nvSpPr>
+          <p:cNvPr id="40" name="AICircle"/>
+          <p:cNvSpPr>
+            <a:spLocks noGrp="1"/>
+          </p:cNvSpPr>
+          <p:nvPr/>
+        </p:nvSpPr>
+        <p:spPr>
+          <a:xfrm>
+            <a:off x="4318000" y="1841500"/>
+            <a:ext cx="3556000" cy="3556000"/>
+          </a:xfrm>
+          <a:prstGeom prst="ellipse">
+            <a:avLst/>
+          </a:prstGeom>
+          <a:solidFill>
+            <a:srgbClr val="1F3A5F"/>
           </a:solidFill>
           <a:ln>
             <a:noFill/>
           </a:ln>
         </p:spPr>
         <p:txBody>
-          <a:bodyPr anchor="ctr"/>
-          <a:lstStyle/>
-          <a:p>
-            <a:pPr algn="ctr">
-              <a:buNone/>
-            </a:pPr>
-            <a:r>
-              <a:rPr lang="en-US" sz="1600" b="1" i="0" dirty="0">
-                <a:solidFill>
-                  <a:srgbClr val="FFFFFF"/>
-                </a:solidFill>
-              </a:rPr>
-              <a:t>Working with a Persona</a:t>
-            </a:r>
-          </a:p>
-        </p:txBody>
-      </p:sp>
-      <p:sp>
-        <p:nvSpPr>
-          <p:cNvPr id="103" name="Divider"/>
-          <p:cNvSpPr>
-            <a:spLocks noGrp="1"/>
-          </p:cNvSpPr>
-          <p:nvPr/>
-        </p:nvSpPr>
-        <p:spPr>
-          <a:xfrm>
-            <a:off x="6096000" y="0"/>
-            <a:ext cx="12700" cy="6858000"/>
-          </a:xfrm>
-          <a:prstGeom prst="rect">
-            <a:avLst/>
-          </a:prstGeom>
-          <a:solidFill>
-            <a:srgbClr val="CCCCCC"/>
-          </a:solidFill>
+          <a:bodyPr/>
+          <a:lstStyle/>
+          <a:p>
+            <a:endParaRPr/>
+          </a:p>
+        </p:txBody>
+      </p:sp>
+      <p:sp>
+        <p:nvSpPr>
+          <p:cNvPr id="41" name="AITxt"/>
+          <p:cNvSpPr txBox="1"/>
+          <p:nvPr/>
+        </p:nvSpPr>
+        <p:spPr>
+          <a:xfrm>
+            <a:off x="5080000" y="3238500"/>
+            <a:ext cx="2032000" cy="762000"/>
+          </a:xfrm>
+          <a:prstGeom prst="rect">
+            <a:avLst/>
+          </a:prstGeom>
+          <a:noFill/>
           <a:ln>
             <a:noFill/>
           </a:ln>
         </p:spPr>
         <p:txBody>
+          <a:bodyPr wrap="square" anchor="ctr">
+            <a:normAutofit/>
+          </a:bodyPr>
+          <a:lstStyle/>
+          <a:p>
+            <a:pPr algn="ctr">
+              <a:buNone/>
+            </a:pPr>
+            <a:r>
+              <a:rPr lang="en-US" sz="2200" b="1" i="0" dirty="0">
+                <a:solidFill>
+                  <a:srgbClr val="FFFFFF"/>
+                </a:solidFill>
+              </a:rPr>
+              <a:t>AI</a:t>
+            </a:r>
+          </a:p>
+          <a:p>
+            <a:pPr algn="ctr">
+              <a:buNone/>
+            </a:pPr>
+            <a:r>
+              <a:rPr lang="en-US" sz="2200" b="1" i="0" dirty="0">
+                <a:solidFill>
+                  <a:srgbClr val="FFFFFF"/>
+                </a:solidFill>
+              </a:rPr>
+              <a:t>Assistant</a:t>
+            </a:r>
+          </a:p>
+        </p:txBody>
+      </p:sp>
+      <p:sp>
+        <p:nvSpPr>
+          <p:cNvPr id="70" name="OutCard0"/>
+          <p:cNvSpPr>
+            <a:spLocks noGrp="1"/>
+          </p:cNvSpPr>
+          <p:nvPr/>
+        </p:nvSpPr>
+        <p:spPr>
+          <a:xfrm>
+            <a:off x="9042400" y="1936750"/>
+            <a:ext cx="2794000" cy="1079500"/>
+          </a:xfrm>
+          <a:prstGeom prst="rect">
+            <a:avLst/>
+          </a:prstGeom>
+          <a:solidFill>
+            <a:srgbClr val="E8F4EC"/>
+          </a:solidFill>
+          <a:ln w="12700">
+            <a:solidFill>
+              <a:srgbClr val="B8DEC4"/>
+            </a:solidFill>
+          </a:ln>
+        </p:spPr>
+        <p:txBody>
           <a:bodyPr/>
           <a:lstStyle/>
           <a:p>
@@ -4205,349 +4018,446 @@
       </p:sp>
       <p:sp>
         <p:nvSpPr>
-          <p:cNvPr id="104" name="LeftIconZone"/>
-          <p:cNvSpPr>
-            <a:spLocks noGrp="1"/>
-          </p:cNvSpPr>
-          <p:nvPr/>
-        </p:nvSpPr>
-        <p:spPr>
-          <a:xfrm>
-            <a:off x="508000" y="660400"/>
-            <a:ext cx="5334000" cy="1905000"/>
-          </a:xfrm>
-          <a:prstGeom prst="rect">
-            <a:avLst/>
-          </a:prstGeom>
-          <a:solidFill>
-            <a:srgbClr val="E8F1F8"/>
-          </a:solidFill>
+          <p:cNvPr id="170" name="OutTxt0"/>
+          <p:cNvSpPr txBox="1"/>
+          <p:nvPr/>
+        </p:nvSpPr>
+        <p:spPr>
+          <a:xfrm>
+            <a:off x="9042400" y="2012950"/>
+            <a:ext cx="2794000" cy="1003300"/>
+          </a:xfrm>
+          <a:prstGeom prst="rect">
+            <a:avLst/>
+          </a:prstGeom>
+          <a:noFill/>
           <a:ln>
             <a:noFill/>
           </a:ln>
         </p:spPr>
         <p:txBody>
-          <a:bodyPr anchor="ctr"/>
+          <a:bodyPr wrap="square" anchor="ctr">
+            <a:normAutofit/>
+          </a:bodyPr>
           <a:lstStyle/>
           <a:p>
             <a:pPr algn="ctr">
               <a:buNone/>
             </a:pPr>
+            <a:r>
+              <a:rPr lang="en-US" sz="1500" b="1" i="0" dirty="0">
+                <a:solidFill>
+                  <a:srgbClr val="1A5C35"/>
+                </a:solidFill>
+              </a:rPr>
+              <a:t>Focused Responses</a:t>
+            </a:r>
+          </a:p>
+          <a:p>
+            <a:pPr algn="ctr">
+              <a:buNone/>
+            </a:pPr>
+            <a:r>
+              <a:rPr lang="en-US" sz="1300" b="0" i="0" dirty="0">
+                <a:solidFill>
+                  <a:srgbClr val="2E8B57"/>
+                </a:solidFill>
+              </a:rPr>
+              <a:t>Stays in role &amp; scope</a:t>
+            </a:r>
+          </a:p>
+        </p:txBody>
+      </p:sp>
+      <p:sp>
+        <p:nvSpPr>
+          <p:cNvPr id="71" name="OutCard1"/>
+          <p:cNvSpPr>
+            <a:spLocks noGrp="1"/>
+          </p:cNvSpPr>
+          <p:nvPr/>
+        </p:nvSpPr>
+        <p:spPr>
+          <a:xfrm>
+            <a:off x="9042400" y="3079750"/>
+            <a:ext cx="2794000" cy="1079500"/>
+          </a:xfrm>
+          <a:prstGeom prst="rect">
+            <a:avLst/>
+          </a:prstGeom>
+          <a:solidFill>
+            <a:srgbClr val="E8F4EC"/>
+          </a:solidFill>
+          <a:ln w="12700">
+            <a:solidFill>
+              <a:srgbClr val="B8DEC4"/>
+            </a:solidFill>
+          </a:ln>
+        </p:spPr>
+        <p:txBody>
+          <a:bodyPr/>
+          <a:lstStyle/>
+          <a:p>
             <a:endParaRPr/>
           </a:p>
         </p:txBody>
       </p:sp>
       <p:sp>
         <p:nvSpPr>
-          <p:cNvPr id="105" name="RightIconZone"/>
-          <p:cNvSpPr>
-            <a:spLocks noGrp="1"/>
-          </p:cNvSpPr>
-          <p:nvPr/>
-        </p:nvSpPr>
-        <p:spPr>
-          <a:xfrm>
-            <a:off x="6350000" y="660400"/>
-            <a:ext cx="5334000" cy="1905000"/>
-          </a:xfrm>
-          <a:prstGeom prst="rect">
-            <a:avLst/>
-          </a:prstGeom>
-          <a:solidFill>
-            <a:srgbClr val="F3EAF7"/>
-          </a:solidFill>
+          <p:cNvPr id="171" name="OutTxt1"/>
+          <p:cNvSpPr txBox="1"/>
+          <p:nvPr/>
+        </p:nvSpPr>
+        <p:spPr>
+          <a:xfrm>
+            <a:off x="9042400" y="3155950"/>
+            <a:ext cx="2794000" cy="1003300"/>
+          </a:xfrm>
+          <a:prstGeom prst="rect">
+            <a:avLst/>
+          </a:prstGeom>
+          <a:noFill/>
           <a:ln>
             <a:noFill/>
           </a:ln>
         </p:spPr>
         <p:txBody>
-          <a:bodyPr anchor="ctr"/>
+          <a:bodyPr wrap="square" anchor="ctr">
+            <a:normAutofit/>
+          </a:bodyPr>
           <a:lstStyle/>
           <a:p>
             <a:pPr algn="ctr">
               <a:buNone/>
             </a:pPr>
+            <a:r>
+              <a:rPr lang="en-US" sz="1500" b="1" i="0" dirty="0">
+                <a:solidFill>
+                  <a:srgbClr val="1A5C35"/>
+                </a:solidFill>
+              </a:rPr>
+              <a:t>Consistent Voice</a:t>
+            </a:r>
+          </a:p>
+          <a:p>
+            <a:pPr algn="ctr">
+              <a:buNone/>
+            </a:pPr>
+            <a:r>
+              <a:rPr lang="en-US" sz="1300" b="0" i="0" dirty="0">
+                <a:solidFill>
+                  <a:srgbClr val="2E8B57"/>
+                </a:solidFill>
+              </a:rPr>
+              <a:t>Predictable behavior</a:t>
+            </a:r>
+          </a:p>
+        </p:txBody>
+      </p:sp>
+      <p:sp>
+        <p:nvSpPr>
+          <p:cNvPr id="72" name="OutCard2"/>
+          <p:cNvSpPr>
+            <a:spLocks noGrp="1"/>
+          </p:cNvSpPr>
+          <p:nvPr/>
+        </p:nvSpPr>
+        <p:spPr>
+          <a:xfrm>
+            <a:off x="9042400" y="4222750"/>
+            <a:ext cx="2794000" cy="1079500"/>
+          </a:xfrm>
+          <a:prstGeom prst="rect">
+            <a:avLst/>
+          </a:prstGeom>
+          <a:solidFill>
+            <a:srgbClr val="E8F4EC"/>
+          </a:solidFill>
+          <a:ln w="12700">
+            <a:solidFill>
+              <a:srgbClr val="B8DEC4"/>
+            </a:solidFill>
+          </a:ln>
+        </p:spPr>
+        <p:txBody>
+          <a:bodyPr/>
+          <a:lstStyle/>
+          <a:p>
             <a:endParaRPr/>
           </a:p>
         </p:txBody>
       </p:sp>
       <p:sp>
         <p:nvSpPr>
-          <p:cNvPr id="108" name="LeftContent"/>
-          <p:cNvSpPr>
-            <a:spLocks noGrp="1"/>
-          </p:cNvSpPr>
-          <p:nvPr/>
-        </p:nvSpPr>
-        <p:spPr>
-          <a:xfrm>
-            <a:off x="508000" y="2667000"/>
-            <a:ext cx="5334000" cy="4064000"/>
-          </a:xfrm>
-          <a:prstGeom prst="rect">
-            <a:avLst/>
-          </a:prstGeom>
-          <a:solidFill>
-            <a:srgbClr val="F7FAFD"/>
-          </a:solidFill>
+          <p:cNvPr id="172" name="OutTxt2"/>
+          <p:cNvSpPr txBox="1"/>
+          <p:nvPr/>
+        </p:nvSpPr>
+        <p:spPr>
+          <a:xfrm>
+            <a:off x="9042400" y="4298950"/>
+            <a:ext cx="2794000" cy="1003300"/>
+          </a:xfrm>
+          <a:prstGeom prst="rect">
+            <a:avLst/>
+          </a:prstGeom>
+          <a:noFill/>
           <a:ln>
             <a:noFill/>
           </a:ln>
         </p:spPr>
         <p:txBody>
-          <a:bodyPr lIns="342900" tIns="342900" rIns="342900" anchor="t"/>
+          <a:bodyPr wrap="square" anchor="ctr">
+            <a:normAutofit/>
+          </a:bodyPr>
           <a:lstStyle/>
           <a:p>
             <a:pPr algn="ctr">
-              <a:spcBef>
-                <a:spcPts val="400"/>
-              </a:spcBef>
-              <a:spcAft>
-                <a:spcPts val="200"/>
-              </a:spcAft>
               <a:buNone/>
             </a:pPr>
             <a:r>
-              <a:rPr lang="en-US" sz="1600" b="1" dirty="0">
-                <a:solidFill>
-                  <a:srgbClr val="1F4E79"/>
-                </a:solidFill>
-              </a:rPr>
-              <a:t>How you work with context</a:t>
-            </a:r>
-          </a:p>
-          <a:p>
-            <a:pPr marL="342900" indent="-342900">
-              <a:spcBef>
-                <a:spcPts val="200"/>
-              </a:spcBef>
-              <a:buFont typeface="Arial"/>
-              <a:buChar char="•"/>
+              <a:rPr lang="en-US" sz="1500" b="1" i="0" dirty="0">
+                <a:solidFill>
+                  <a:srgbClr val="1A5C35"/>
+                </a:solidFill>
+              </a:rPr>
+              <a:t>Reusable Systems</a:t>
+            </a:r>
+          </a:p>
+          <a:p>
+            <a:pPr algn="ctr">
+              <a:buNone/>
             </a:pPr>
             <a:r>
-              <a:rPr lang="en-US" sz="1500" dirty="0">
-                <a:solidFill>
-                  <a:srgbClr val="444444"/>
-                </a:solidFill>
-              </a:rPr>
-              <a:t>Upload an Excel Spreadsheet</a:t>
-            </a:r>
-          </a:p>
-          <a:p>
-            <a:pPr marL="342900" indent="-342900">
-              <a:spcBef>
-                <a:spcPts val="200"/>
-              </a:spcBef>
-              <a:buFont typeface="Arial"/>
-              <a:buChar char="•"/>
-            </a:pPr>
-            <a:r>
-              <a:rPr lang="en-US" sz="1500" dirty="0">
-                <a:solidFill>
-                  <a:srgbClr val="444444"/>
-                </a:solidFill>
-              </a:rPr>
-              <a:t>Ask agent to get a list of products</a:t>
-            </a:r>
-          </a:p>
-          <a:p>
-            <a:pPr marL="342900" indent="-342900">
-              <a:spcBef>
-                <a:spcPts val="200"/>
-              </a:spcBef>
-              <a:buFont typeface="Arial"/>
-              <a:buChar char="•"/>
-            </a:pPr>
-            <a:r>
-              <a:rPr lang="en-US" sz="1500" dirty="0">
-                <a:solidFill>
-                  <a:srgbClr val="444444"/>
-                </a:solidFill>
-              </a:rPr>
-              <a:t>Ask agent to query the database to get the total sales volume and put into the spreadsheet.</a:t>
-            </a:r>
-          </a:p>
-          <a:p>
-            <a:pPr marL="342900" indent="-342900">
-              <a:spcBef>
-                <a:spcPts val="200"/>
-              </a:spcBef>
-              <a:buFont typeface="Arial"/>
-              <a:buChar char="•"/>
-            </a:pPr>
-            <a:r>
-              <a:rPr lang="en-US" sz="1500" dirty="0">
-                <a:solidFill>
-                  <a:srgbClr val="444444"/>
-                </a:solidFill>
-              </a:rPr>
-              <a:t>Agent uses MCP tool or CLI to work with database</a:t>
-            </a:r>
-          </a:p>
-          <a:p>
-            <a:pPr marL="342900" indent="-342900">
-              <a:spcBef>
-                <a:spcPts val="200"/>
-              </a:spcBef>
-              <a:buFont typeface="Arial"/>
-              <a:buChar char="•"/>
-            </a:pPr>
-            <a:r>
-              <a:rPr lang="en-US" sz="1500" dirty="0">
-                <a:solidFill>
-                  <a:srgbClr val="444444"/>
-                </a:solidFill>
-              </a:rPr>
-              <a:t>Ask agent to get the top 10 grossing products</a:t>
-            </a:r>
-          </a:p>
-          <a:p>
-            <a:pPr marL="342900" indent="-342900">
-              <a:spcBef>
-                <a:spcPts val="200"/>
-              </a:spcBef>
-              <a:buFont typeface="Arial"/>
-              <a:buChar char="•"/>
-            </a:pPr>
-            <a:r>
-              <a:rPr lang="en-US" sz="1500" dirty="0">
-                <a:solidFill>
-                  <a:srgbClr val="444444"/>
-                </a:solidFill>
-              </a:rPr>
-              <a:t>Ask agent to notify team members by email</a:t>
-            </a:r>
-          </a:p>
-        </p:txBody>
-      </p:sp>
-      <p:sp>
-        <p:nvSpPr>
-          <p:cNvPr id="109" name="RightContent"/>
-          <p:cNvSpPr>
-            <a:spLocks noGrp="1"/>
-          </p:cNvSpPr>
-          <p:nvPr/>
-        </p:nvSpPr>
-        <p:spPr>
-          <a:xfrm>
-            <a:off x="6350000" y="2667000"/>
-            <a:ext cx="5334000" cy="4064000"/>
-          </a:xfrm>
-          <a:prstGeom prst="rect">
-            <a:avLst/>
-          </a:prstGeom>
-          <a:solidFill>
-            <a:srgbClr val="FAF4FD"/>
-          </a:solidFill>
-          <a:ln>
-            <a:noFill/>
-          </a:ln>
-        </p:spPr>
-        <p:txBody>
-          <a:bodyPr lIns="342900" tIns="342900" rIns="342900" anchor="t"/>
-          <a:lstStyle/>
-          <a:p>
-            <a:pPr algn="ctr">
-              <a:spcBef>
-                <a:spcPts val="400"/>
-              </a:spcBef>
-              <a:spcAft>
-                <a:spcPts val="200"/>
-              </a:spcAft>
-              <a:buNone/>
-            </a:pPr>
-            <a:r>
-              <a:rPr lang="en-US" sz="1600" b="1" dirty="0">
-                <a:solidFill>
-                  <a:srgbClr val="7B2D8E"/>
-                </a:solidFill>
-              </a:rPr>
-              <a:t>How you work with a persona</a:t>
-            </a:r>
-          </a:p>
-          <a:p>
-            <a:pPr marL="342900" indent="-342900">
-              <a:spcBef>
-                <a:spcPts val="200"/>
-              </a:spcBef>
-              <a:buFont typeface="Arial"/>
-              <a:buChar char="•"/>
-            </a:pPr>
-            <a:r>
-              <a:rPr lang="en-US" sz="1500" dirty="0">
-                <a:solidFill>
-                  <a:srgbClr val="444444"/>
-                </a:solidFill>
-              </a:rPr>
-              <a:t>Dana, can you send the top 10 grossing products that were included in last month’s sales spreadsheet and send it to the marketing team. Add a column for the sales volume for each product. </a:t>
-            </a:r>
-          </a:p>
-        </p:txBody>
-      </p:sp>
-      <p:pic>
-        <p:nvPicPr>
-          <p:cNvPr id="110" name="Graphic 110" descr="Cog/gear icon representing context"/>
-          <p:cNvPicPr>
-            <a:picLocks noChangeAspect="1"/>
-          </p:cNvPicPr>
-          <p:nvPr/>
-        </p:nvPicPr>
-        <p:blipFill>
-          <a:blip>
-            <a:extLst>
-              <a:ext uri="{96DAC541-7B7A-43D3-8B79-37D633B846F1}">
-                <asvg:svgBlip xmlns:asvg="http://schemas.microsoft.com/office/drawing/2016/SVG/main" r:embed="rId2"/>
-              </a:ext>
-            </a:extLst>
-          </a:blip>
-          <a:stretch>
-            <a:fillRect/>
-          </a:stretch>
-        </p:blipFill>
-        <p:spPr>
-          <a:xfrm>
-            <a:off x="2413000" y="977900"/>
-            <a:ext cx="1270000" cy="1270000"/>
-          </a:xfrm>
-          <a:prstGeom prst="rect">
-            <a:avLst/>
-          </a:prstGeom>
-        </p:spPr>
-      </p:pic>
-      <p:pic>
-        <p:nvPicPr>
-          <p:cNvPr id="111" name="Graphic 111" descr="Person avatar icon representing persona"/>
-          <p:cNvPicPr>
-            <a:picLocks noChangeAspect="1"/>
-          </p:cNvPicPr>
-          <p:nvPr/>
-        </p:nvPicPr>
-        <p:blipFill>
-          <a:blip>
-            <a:extLst>
-              <a:ext uri="{96DAC541-7B7A-43D3-8B79-37D633B846F1}">
-                <asvg:svgBlip xmlns:asvg="http://schemas.microsoft.com/office/drawing/2016/SVG/main" r:embed="rId3"/>
-              </a:ext>
-            </a:extLst>
-          </a:blip>
-          <a:stretch>
-            <a:fillRect/>
-          </a:stretch>
-        </p:blipFill>
-        <p:spPr>
-          <a:xfrm>
-            <a:off x="8255000" y="977900"/>
-            <a:ext cx="1270000" cy="1270000"/>
-          </a:xfrm>
-          <a:prstGeom prst="rect">
-            <a:avLst/>
-          </a:prstGeom>
-        </p:spPr>
-      </p:pic>
+              <a:rPr lang="en-US" sz="1300" b="0" i="0" dirty="0">
+                <a:solidFill>
+                  <a:srgbClr val="2E8B57"/>
+                </a:solidFill>
+              </a:rPr>
+              <a:t>Same files, any AI tool</a:t>
+            </a:r>
+          </a:p>
+        </p:txBody>
+      </p:sp>
+      <p:cxnSp>
+        <p:nvCxnSpPr>
+          <p:cNvPr id="30" name="ArrowIn0"/>
+          <p:cNvCxnSpPr/>
+          <p:nvPr/>
+        </p:nvCxnSpPr>
+        <p:spPr>
+          <a:xfrm>
+            <a:off x="3200400" y="2476500"/>
+            <a:ext cx="1813077" cy="0"/>
+          </a:xfrm>
+          <a:prstGeom prst="straightConnector1">
+            <a:avLst/>
+          </a:prstGeom>
+          <a:ln w="28575">
+            <a:solidFill>
+              <a:srgbClr val="1F3A5F"/>
+            </a:solidFill>
+            <a:tailEnd type="arrow" w="med" len="med"/>
+          </a:ln>
+        </p:spPr>
+        <p:style>
+          <a:lnRef idx="1">
+            <a:schemeClr val="accent1"/>
+          </a:lnRef>
+          <a:fillRef idx="0">
+            <a:schemeClr val="accent1"/>
+          </a:fillRef>
+          <a:effectRef idx="0">
+            <a:schemeClr val="accent1"/>
+          </a:effectRef>
+          <a:fontRef idx="minor">
+            <a:schemeClr val="tx1"/>
+          </a:fontRef>
+        </p:style>
+      </p:cxnSp>
+      <p:cxnSp>
+        <p:nvCxnSpPr>
+          <p:cNvPr id="50" name="ArrowOut0"/>
+          <p:cNvCxnSpPr/>
+          <p:nvPr/>
+        </p:nvCxnSpPr>
+        <p:spPr>
+          <a:xfrm>
+            <a:off x="7178523" y="2476500"/>
+            <a:ext cx="1813077" cy="0"/>
+          </a:xfrm>
+          <a:prstGeom prst="straightConnector1">
+            <a:avLst/>
+          </a:prstGeom>
+          <a:ln w="28575">
+            <a:solidFill>
+              <a:srgbClr val="1F3A5F"/>
+            </a:solidFill>
+            <a:tailEnd type="arrow" w="med" len="med"/>
+          </a:ln>
+        </p:spPr>
+        <p:style>
+          <a:lnRef idx="1">
+            <a:schemeClr val="accent1"/>
+          </a:lnRef>
+          <a:fillRef idx="0">
+            <a:schemeClr val="accent1"/>
+          </a:fillRef>
+          <a:effectRef idx="0">
+            <a:schemeClr val="accent1"/>
+          </a:effectRef>
+          <a:fontRef idx="minor">
+            <a:schemeClr val="tx1"/>
+          </a:fontRef>
+        </p:style>
+      </p:cxnSp>
+      <p:cxnSp>
+        <p:nvCxnSpPr>
+          <p:cNvPr id="31" name="ArrowIn1"/>
+          <p:cNvCxnSpPr/>
+          <p:nvPr/>
+        </p:nvCxnSpPr>
+        <p:spPr>
+          <a:xfrm>
+            <a:off x="3200400" y="3619500"/>
+            <a:ext cx="1397000" cy="0"/>
+          </a:xfrm>
+          <a:prstGeom prst="straightConnector1">
+            <a:avLst/>
+          </a:prstGeom>
+          <a:ln w="28575">
+            <a:solidFill>
+              <a:srgbClr val="1F3A5F"/>
+            </a:solidFill>
+            <a:tailEnd type="arrow" w="med" len="med"/>
+          </a:ln>
+        </p:spPr>
+        <p:style>
+          <a:lnRef idx="1">
+            <a:schemeClr val="accent1"/>
+          </a:lnRef>
+          <a:fillRef idx="0">
+            <a:schemeClr val="accent1"/>
+          </a:fillRef>
+          <a:effectRef idx="0">
+            <a:schemeClr val="accent1"/>
+          </a:effectRef>
+          <a:fontRef idx="minor">
+            <a:schemeClr val="tx1"/>
+          </a:fontRef>
+        </p:style>
+      </p:cxnSp>
+      <p:cxnSp>
+        <p:nvCxnSpPr>
+          <p:cNvPr id="51" name="ArrowOut1"/>
+          <p:cNvCxnSpPr/>
+          <p:nvPr/>
+        </p:nvCxnSpPr>
+        <p:spPr>
+          <a:xfrm>
+            <a:off x="7594600" y="3619500"/>
+            <a:ext cx="1397000" cy="0"/>
+          </a:xfrm>
+          <a:prstGeom prst="straightConnector1">
+            <a:avLst/>
+          </a:prstGeom>
+          <a:ln w="28575">
+            <a:solidFill>
+              <a:srgbClr val="1F3A5F"/>
+            </a:solidFill>
+            <a:tailEnd type="arrow" w="med" len="med"/>
+          </a:ln>
+        </p:spPr>
+        <p:style>
+          <a:lnRef idx="1">
+            <a:schemeClr val="accent1"/>
+          </a:lnRef>
+          <a:fillRef idx="0">
+            <a:schemeClr val="accent1"/>
+          </a:fillRef>
+          <a:effectRef idx="0">
+            <a:schemeClr val="accent1"/>
+          </a:effectRef>
+          <a:fontRef idx="minor">
+            <a:schemeClr val="tx1"/>
+          </a:fontRef>
+        </p:style>
+      </p:cxnSp>
+      <p:cxnSp>
+        <p:nvCxnSpPr>
+          <p:cNvPr id="32" name="ArrowIn2"/>
+          <p:cNvCxnSpPr/>
+          <p:nvPr/>
+        </p:nvCxnSpPr>
+        <p:spPr>
+          <a:xfrm>
+            <a:off x="3200400" y="4762500"/>
+            <a:ext cx="1813077" cy="0"/>
+          </a:xfrm>
+          <a:prstGeom prst="straightConnector1">
+            <a:avLst/>
+          </a:prstGeom>
+          <a:ln w="28575">
+            <a:solidFill>
+              <a:srgbClr val="1F3A5F"/>
+            </a:solidFill>
+            <a:tailEnd type="arrow" w="med" len="med"/>
+          </a:ln>
+        </p:spPr>
+        <p:style>
+          <a:lnRef idx="1">
+            <a:schemeClr val="accent1"/>
+          </a:lnRef>
+          <a:fillRef idx="0">
+            <a:schemeClr val="accent1"/>
+          </a:fillRef>
+          <a:effectRef idx="0">
+            <a:schemeClr val="accent1"/>
+          </a:effectRef>
+          <a:fontRef idx="minor">
+            <a:schemeClr val="tx1"/>
+          </a:fontRef>
+        </p:style>
+      </p:cxnSp>
+      <p:cxnSp>
+        <p:nvCxnSpPr>
+          <p:cNvPr id="52" name="ArrowOut2"/>
+          <p:cNvCxnSpPr/>
+          <p:nvPr/>
+        </p:nvCxnSpPr>
+        <p:spPr>
+          <a:xfrm>
+            <a:off x="7178523" y="4762500"/>
+            <a:ext cx="1813077" cy="0"/>
+          </a:xfrm>
+          <a:prstGeom prst="straightConnector1">
+            <a:avLst/>
+          </a:prstGeom>
+          <a:ln w="28575">
+            <a:solidFill>
+              <a:srgbClr val="1F3A5F"/>
+            </a:solidFill>
+            <a:tailEnd type="arrow" w="med" len="med"/>
+          </a:ln>
+        </p:spPr>
+        <p:style>
+          <a:lnRef idx="1">
+            <a:schemeClr val="accent1"/>
+          </a:lnRef>
+          <a:fillRef idx="0">
+            <a:schemeClr val="accent1"/>
+          </a:fillRef>
+          <a:effectRef idx="0">
+            <a:schemeClr val="accent1"/>
+          </a:effectRef>
+          <a:fontRef idx="minor">
+            <a:schemeClr val="tx1"/>
+          </a:fontRef>
+        </p:style>
+      </p:cxnSp>
     </p:spTree>
     <p:extLst>
       <p:ext uri="{BB962C8B-B14F-4D97-AF65-F5344CB8AC3E}">
-        <p14:creationId xmlns:p14="http://schemas.microsoft.com/office/powerpoint/2010/main" val="3918661051"/>
+        <p14:creationId xmlns:p14="http://schemas.microsoft.com/office/powerpoint/2010/main" val="2531011967"/>
       </p:ext>
     </p:extLst>
   </p:cSld>
@@ -4576,47 +4486,118 @@
       </p:grpSpPr>
       <p:sp>
         <p:nvSpPr>
-          <p:cNvPr id="200" name="TitleBg"/>
-          <p:cNvSpPr>
-            <a:spLocks noGrp="1"/>
-          </p:cNvSpPr>
-          <p:nvPr/>
-        </p:nvSpPr>
-        <p:spPr>
-          <a:xfrm>
-            <a:off x="0" y="0"/>
-            <a:ext cx="12192000" cy="609600"/>
-          </a:xfrm>
-          <a:prstGeom prst="rect">
+          <p:cNvPr id="2" name="Title 1">
+            <a:extLst>
+              <a:ext uri="{FF2B5EF4-FFF2-40B4-BE49-F238E27FC236}">
+                <a16:creationId xmlns:a16="http://schemas.microsoft.com/office/drawing/2014/main" id="{A78E0809-A875-D2EE-BD0C-1F47DBE113F3}"/>
+              </a:ext>
+            </a:extLst>
+          </p:cNvPr>
+          <p:cNvSpPr>
+            <a:spLocks noGrp="1"/>
+          </p:cNvSpPr>
+          <p:nvPr>
+            <p:ph type="title"/>
+          </p:nvPr>
+        </p:nvSpPr>
+        <p:spPr/>
+        <p:txBody>
+          <a:bodyPr/>
+          <a:lstStyle/>
+          <a:p>
+            <a:pPr algn="l">
+              <a:buNone/>
+            </a:pPr>
+            <a:r>
+              <a:rPr lang="en-US" sz="3200" b="1" dirty="0"/>
+              <a:t>Context vs. Persona in AI</a:t>
+            </a:r>
+          </a:p>
+          <a:p>
+            <a:pPr algn="l">
+              <a:buNone/>
+            </a:pPr>
+            <a:r>
+              <a:rPr lang="en-US" sz="1600" i="1" dirty="0">
+                <a:solidFill>
+                  <a:schemeClr val="tx2"/>
+                </a:solidFill>
+              </a:rPr>
+              <a:t>What the model knows about the situation vs. how the model behaves</a:t>
+            </a:r>
+          </a:p>
+        </p:txBody>
+      </p:sp>
+      <p:sp>
+        <p:nvSpPr>
+          <p:cNvPr id="3" name="Rectangle: Rounded Corners 2">
+            <a:extLst>
+              <a:ext uri="{FF2B5EF4-FFF2-40B4-BE49-F238E27FC236}">
+                <a16:creationId xmlns:a16="http://schemas.microsoft.com/office/drawing/2014/main" id="{D7259382-1FF0-4D73-9200-2519481E8E4F}"/>
+              </a:ext>
+            </a:extLst>
+          </p:cNvPr>
+          <p:cNvSpPr/>
+          <p:nvPr/>
+        </p:nvSpPr>
+        <p:spPr>
+          <a:xfrm>
+            <a:off x="762000" y="2349500"/>
+            <a:ext cx="5080000" cy="2984500"/>
+          </a:xfrm>
+          <a:prstGeom prst="roundRect">
             <a:avLst/>
           </a:prstGeom>
           <a:solidFill>
-            <a:srgbClr val="1A1A2E"/>
+            <a:srgbClr val="1F4E79"/>
           </a:solidFill>
-          <a:ln>
+          <a:ln w="12700" cap="flat" cmpd="sng" algn="ctr">
             <a:noFill/>
-          </a:ln>
-        </p:spPr>
-        <p:txBody>
-          <a:bodyPr anchor="ctr"/>
-          <a:lstStyle/>
-          <a:p>
-            <a:endParaRPr/>
-          </a:p>
-        </p:txBody>
-      </p:sp>
-      <p:sp>
-        <p:nvSpPr>
-          <p:cNvPr id="201" name="Title"/>
-          <p:cNvSpPr>
-            <a:spLocks noGrp="1"/>
-          </p:cNvSpPr>
-          <p:nvPr/>
-        </p:nvSpPr>
-        <p:spPr>
-          <a:xfrm>
-            <a:off x="0" y="0"/>
-            <a:ext cx="12192000" cy="609600"/>
+            <a:prstDash val="solid"/>
+            <a:miter lim="800000"/>
+          </a:ln>
+        </p:spPr>
+        <p:style>
+          <a:lnRef idx="2">
+            <a:schemeClr val="accent1">
+              <a:shade val="15000"/>
+            </a:schemeClr>
+          </a:lnRef>
+          <a:fillRef idx="1">
+            <a:schemeClr val="accent1"/>
+          </a:fillRef>
+          <a:effectRef idx="0">
+            <a:schemeClr val="accent1"/>
+          </a:effectRef>
+          <a:fontRef idx="minor">
+            <a:schemeClr val="lt1"/>
+          </a:fontRef>
+        </p:style>
+        <p:txBody>
+          <a:bodyPr vertOverflow="clip" horzOverflow="clip" rtlCol="0" anchor="t"/>
+          <a:lstStyle/>
+          <a:p>
+            <a:pPr algn="l"/>
+            <a:endParaRPr lang="en-US"/>
+          </a:p>
+        </p:txBody>
+      </p:sp>
+      <p:sp>
+        <p:nvSpPr>
+          <p:cNvPr id="4" name="TextBox 3">
+            <a:extLst>
+              <a:ext uri="{FF2B5EF4-FFF2-40B4-BE49-F238E27FC236}">
+                <a16:creationId xmlns:a16="http://schemas.microsoft.com/office/drawing/2014/main" id="{2671A5DA-AE8B-4712-A693-0D21B76E54A9}"/>
+              </a:ext>
+            </a:extLst>
+          </p:cNvPr>
+          <p:cNvSpPr txBox="1"/>
+          <p:nvPr/>
+        </p:nvSpPr>
+        <p:spPr>
+          <a:xfrm>
+            <a:off x="965200" y="2501900"/>
+            <a:ext cx="4673600" cy="381000"/>
           </a:xfrm>
           <a:prstGeom prst="rect">
             <a:avLst/>
@@ -4627,70 +4608,39 @@
           </a:ln>
         </p:spPr>
         <p:txBody>
-          <a:bodyPr lIns="91440" tIns="45720" rIns="91440" bIns="45720" anchor="ctr"/>
-          <a:lstStyle/>
-          <a:p>
-            <a:pPr algn="ctr">
-              <a:buNone/>
-            </a:pPr>
-            <a:r>
-              <a:rPr lang="en-US" sz="2000" b="1" i="0" dirty="0">
-                <a:solidFill>
-                  <a:srgbClr val="FFFFFF"/>
-                </a:solidFill>
-              </a:rPr>
-              <a:t>Context sees everything · Persona gets what it needs</a:t>
-            </a:r>
-          </a:p>
-        </p:txBody>
-      </p:sp>
-      <p:sp>
-        <p:nvSpPr>
-          <p:cNvPr id="210" name="HubBg"/>
-          <p:cNvSpPr>
-            <a:spLocks noGrp="1"/>
-          </p:cNvSpPr>
-          <p:nvPr/>
-        </p:nvSpPr>
-        <p:spPr>
-          <a:xfrm>
-            <a:off x="4826000" y="2476500"/>
-            <a:ext cx="2540000" cy="1841500"/>
-          </a:xfrm>
-          <a:prstGeom prst="roundRect">
-            <a:avLst>
-              <a:gd name="adj" fmla="val 20000"/>
-            </a:avLst>
-          </a:prstGeom>
-          <a:solidFill>
-            <a:srgbClr val="1A1A2E"/>
-          </a:solidFill>
-          <a:ln w="12700">
-            <a:solidFill>
-              <a:srgbClr val="4FC3F7"/>
-            </a:solidFill>
-          </a:ln>
-        </p:spPr>
-        <p:txBody>
-          <a:bodyPr anchor="ctr"/>
-          <a:lstStyle/>
-          <a:p>
-            <a:endParaRPr/>
-          </a:p>
-        </p:txBody>
-      </p:sp>
-      <p:sp>
-        <p:nvSpPr>
-          <p:cNvPr id="211" name="HubLabel"/>
-          <p:cNvSpPr>
-            <a:spLocks noGrp="1"/>
-          </p:cNvSpPr>
-          <p:nvPr/>
-        </p:nvSpPr>
-        <p:spPr>
-          <a:xfrm>
-            <a:off x="4826000" y="2476500"/>
-            <a:ext cx="2540000" cy="482600"/>
+          <a:bodyPr vertOverflow="overflow" vert="horz" wrap="square" rtlCol="0" anchor="t">
+            <a:spAutoFit/>
+          </a:bodyPr>
+          <a:lstStyle/>
+          <a:p>
+            <a:pPr algn="l"/>
+            <a:r>
+              <a:rPr lang="en-US" sz="1400" b="1" dirty="0">
+                <a:solidFill>
+                  <a:srgbClr val="AED4F0"/>
+                </a:solidFill>
+              </a:rPr>
+              <a:t>CONTEXT</a:t>
+            </a:r>
+          </a:p>
+        </p:txBody>
+      </p:sp>
+      <p:sp>
+        <p:nvSpPr>
+          <p:cNvPr id="5" name="TextBox 4">
+            <a:extLst>
+              <a:ext uri="{FF2B5EF4-FFF2-40B4-BE49-F238E27FC236}">
+                <a16:creationId xmlns:a16="http://schemas.microsoft.com/office/drawing/2014/main" id="{13040BB5-21F4-49CE-98A9-67223126E58C}"/>
+              </a:ext>
+            </a:extLst>
+          </p:cNvPr>
+          <p:cNvSpPr txBox="1"/>
+          <p:nvPr/>
+        </p:nvSpPr>
+        <p:spPr>
+          <a:xfrm>
+            <a:off x="965200" y="2806700"/>
+            <a:ext cx="4673600" cy="369332"/>
           </a:xfrm>
           <a:prstGeom prst="rect">
             <a:avLst/>
@@ -4701,35 +4651,39 @@
           </a:ln>
         </p:spPr>
         <p:txBody>
-          <a:bodyPr lIns="91440" tIns="45720" rIns="91440" bIns="45720" anchor="ctr"/>
-          <a:lstStyle/>
-          <a:p>
-            <a:pPr algn="ctr">
-              <a:buNone/>
-            </a:pPr>
-            <a:r>
-              <a:rPr lang="en-US" sz="1200" b="1" i="0" dirty="0">
-                <a:solidFill>
-                  <a:srgbClr val="4FC3F7"/>
-                </a:solidFill>
-              </a:rPr>
-              <a:t>SKILL INVENTORY</a:t>
-            </a:r>
-          </a:p>
-        </p:txBody>
-      </p:sp>
-      <p:sp>
-        <p:nvSpPr>
-          <p:cNvPr id="212" name="HubSub"/>
-          <p:cNvSpPr>
-            <a:spLocks noGrp="1"/>
-          </p:cNvSpPr>
-          <p:nvPr/>
-        </p:nvSpPr>
-        <p:spPr>
-          <a:xfrm>
-            <a:off x="4826000" y="2857500"/>
-            <a:ext cx="2540000" cy="1460500"/>
+          <a:bodyPr vertOverflow="overflow" vert="horz" wrap="square" rtlCol="0" anchor="t">
+            <a:spAutoFit/>
+          </a:bodyPr>
+          <a:lstStyle/>
+          <a:p>
+            <a:pPr algn="l"/>
+            <a:r>
+              <a:rPr lang="en-US" b="1" dirty="0">
+                <a:solidFill>
+                  <a:srgbClr val="FFFFFF"/>
+                </a:solidFill>
+              </a:rPr>
+              <a:t>What the model is given (The work)</a:t>
+            </a:r>
+          </a:p>
+        </p:txBody>
+      </p:sp>
+      <p:sp>
+        <p:nvSpPr>
+          <p:cNvPr id="6" name="TextBox 5">
+            <a:extLst>
+              <a:ext uri="{FF2B5EF4-FFF2-40B4-BE49-F238E27FC236}">
+                <a16:creationId xmlns:a16="http://schemas.microsoft.com/office/drawing/2014/main" id="{5CC52DC4-05DC-404A-A32C-46C830F197A1}"/>
+              </a:ext>
+            </a:extLst>
+          </p:cNvPr>
+          <p:cNvSpPr txBox="1"/>
+          <p:nvPr/>
+        </p:nvSpPr>
+        <p:spPr>
+          <a:xfrm>
+            <a:off x="965200" y="3302000"/>
+            <a:ext cx="4673600" cy="1374735"/>
           </a:xfrm>
           <a:prstGeom prst="rect">
             <a:avLst/>
@@ -4740,101 +4694,194 @@
           </a:ln>
         </p:spPr>
         <p:txBody>
-          <a:bodyPr lIns="91440" tIns="45720" rIns="91440" bIns="45720" anchor="ctr"/>
-          <a:lstStyle/>
-          <a:p>
-            <a:pPr algn="ctr">
-              <a:buNone/>
+          <a:bodyPr vertOverflow="overflow" vert="horz" wrap="square" rtlCol="0" anchor="t">
+            <a:spAutoFit/>
+          </a:bodyPr>
+          <a:lstStyle/>
+          <a:p>
+            <a:pPr marL="228600" indent="-228600">
+              <a:lnSpc>
+                <a:spcPts val="1700"/>
+              </a:lnSpc>
+              <a:spcAft>
+                <a:spcPts val="500"/>
+              </a:spcAft>
+              <a:buFont typeface="Arial"/>
+              <a:buChar char="•"/>
             </a:pPr>
             <a:r>
-              <a:rPr lang="en-US" sz="1200" b="0" i="0" dirty="0">
-                <a:solidFill>
-                  <a:srgbClr val="CCDDEE"/>
-                </a:solidFill>
-              </a:rPr>
-              <a:t>All skills available to the system</a:t>
-            </a:r>
-          </a:p>
-        </p:txBody>
-      </p:sp>
-      <p:sp>
-        <p:nvSpPr>
-          <p:cNvPr id="220" name="CtxPanel"/>
-          <p:cNvSpPr>
-            <a:spLocks noGrp="1"/>
-          </p:cNvSpPr>
-          <p:nvPr/>
-        </p:nvSpPr>
-        <p:spPr>
-          <a:xfrm>
-            <a:off x="254000" y="711200"/>
-            <a:ext cx="4318000" cy="6045200"/>
+              <a:rPr lang="en-US" sz="1500" b="1" dirty="0">
+                <a:solidFill>
+                  <a:srgbClr val="FFFFFF"/>
+                </a:solidFill>
+              </a:rPr>
+              <a:t>Information </a:t>
+            </a:r>
+            <a:r>
+              <a:rPr lang="en-US" sz="1500" dirty="0">
+                <a:solidFill>
+                  <a:srgbClr val="FFFFFF"/>
+                </a:solidFill>
+              </a:rPr>
+              <a:t>fed to the model (documents, history, data)</a:t>
+            </a:r>
+          </a:p>
+          <a:p>
+            <a:pPr marL="228600" indent="-228600">
+              <a:lnSpc>
+                <a:spcPts val="1700"/>
+              </a:lnSpc>
+              <a:spcAft>
+                <a:spcPts val="500"/>
+              </a:spcAft>
+              <a:buFont typeface="Arial"/>
+              <a:buChar char="•"/>
+            </a:pPr>
+            <a:r>
+              <a:rPr lang="en-US" sz="1500" b="1" dirty="0">
+                <a:solidFill>
+                  <a:srgbClr val="FFFFFF"/>
+                </a:solidFill>
+              </a:rPr>
+              <a:t>Situational </a:t>
+            </a:r>
+            <a:r>
+              <a:rPr lang="en-US" sz="1500" dirty="0">
+                <a:solidFill>
+                  <a:srgbClr val="FFFFFF"/>
+                </a:solidFill>
+              </a:rPr>
+              <a:t>— changes per request or conversation</a:t>
+            </a:r>
+          </a:p>
+          <a:p>
+            <a:pPr marL="228600" indent="-228600">
+              <a:lnSpc>
+                <a:spcPts val="1700"/>
+              </a:lnSpc>
+              <a:spcAft>
+                <a:spcPts val="500"/>
+              </a:spcAft>
+              <a:buFont typeface="Arial"/>
+              <a:buChar char="•"/>
+            </a:pPr>
+            <a:r>
+              <a:rPr lang="en-US" sz="1500" b="1" dirty="0">
+                <a:solidFill>
+                  <a:srgbClr val="FFFFFF"/>
+                </a:solidFill>
+              </a:rPr>
+              <a:t>Answers </a:t>
+            </a:r>
+            <a:r>
+              <a:rPr lang="en-US" sz="1500" dirty="0">
+                <a:solidFill>
+                  <a:srgbClr val="FFFFFF"/>
+                </a:solidFill>
+              </a:rPr>
+              <a:t>“what does the model need to know?”</a:t>
+            </a:r>
+          </a:p>
+          <a:p>
+            <a:pPr marL="228600" indent="-228600">
+              <a:lnSpc>
+                <a:spcPts val="1700"/>
+              </a:lnSpc>
+              <a:spcAft>
+                <a:spcPts val="500"/>
+              </a:spcAft>
+              <a:buFont typeface="Arial"/>
+              <a:buChar char="•"/>
+            </a:pPr>
+            <a:r>
+              <a:rPr lang="en-US" sz="1500" b="1" dirty="0">
+                <a:solidFill>
+                  <a:srgbClr val="FFFFFF"/>
+                </a:solidFill>
+              </a:rPr>
+              <a:t>Examples: </a:t>
+            </a:r>
+            <a:r>
+              <a:rPr lang="en-US" sz="1500" dirty="0">
+                <a:solidFill>
+                  <a:srgbClr val="FFFFFF"/>
+                </a:solidFill>
+              </a:rPr>
+              <a:t>RAG results, prior messages, attached files</a:t>
+            </a:r>
+          </a:p>
+        </p:txBody>
+      </p:sp>
+      <p:sp>
+        <p:nvSpPr>
+          <p:cNvPr id="7" name="Rectangle: Rounded Corners 6">
+            <a:extLst>
+              <a:ext uri="{FF2B5EF4-FFF2-40B4-BE49-F238E27FC236}">
+                <a16:creationId xmlns:a16="http://schemas.microsoft.com/office/drawing/2014/main" id="{0B2A00A6-E8F0-466C-B3FB-1FF7A02CB336}"/>
+              </a:ext>
+            </a:extLst>
+          </p:cNvPr>
+          <p:cNvSpPr/>
+          <p:nvPr/>
+        </p:nvSpPr>
+        <p:spPr>
+          <a:xfrm>
+            <a:off x="6350000" y="2349500"/>
+            <a:ext cx="5080000" cy="2984500"/>
           </a:xfrm>
           <a:prstGeom prst="roundRect">
-            <a:avLst>
-              <a:gd name="adj" fmla="val 10000"/>
-            </a:avLst>
+            <a:avLst/>
           </a:prstGeom>
           <a:solidFill>
-            <a:srgbClr val="E8F4FF"/>
+            <a:srgbClr val="7B2D8E"/>
           </a:solidFill>
-          <a:ln w="12700">
-            <a:solidFill>
-              <a:srgbClr val="1F4E79"/>
-            </a:solidFill>
-          </a:ln>
-        </p:spPr>
-        <p:txBody>
-          <a:bodyPr anchor="ctr"/>
-          <a:lstStyle/>
-          <a:p>
-            <a:endParaRPr/>
-          </a:p>
-        </p:txBody>
-      </p:sp>
-      <p:sp>
-        <p:nvSpPr>
-          <p:cNvPr id="221" name="CtxHeader"/>
-          <p:cNvSpPr>
-            <a:spLocks noGrp="1"/>
-          </p:cNvSpPr>
-          <p:nvPr/>
-        </p:nvSpPr>
-        <p:spPr>
-          <a:xfrm>
-            <a:off x="254000" y="711200"/>
-            <a:ext cx="4318000" cy="508000"/>
-          </a:xfrm>
-          <a:prstGeom prst="rect">
-            <a:avLst/>
-          </a:prstGeom>
-          <a:solidFill>
-            <a:srgbClr val="1F4E79"/>
-          </a:solidFill>
-          <a:ln>
+          <a:ln w="12700" cap="flat" cmpd="sng" algn="ctr">
             <a:noFill/>
-          </a:ln>
-        </p:spPr>
-        <p:txBody>
-          <a:bodyPr anchor="ctr"/>
-          <a:lstStyle/>
-          <a:p>
-            <a:endParaRPr/>
-          </a:p>
-        </p:txBody>
-      </p:sp>
-      <p:sp>
-        <p:nvSpPr>
-          <p:cNvPr id="222" name="CtxHeaderTxt"/>
-          <p:cNvSpPr>
-            <a:spLocks noGrp="1"/>
-          </p:cNvSpPr>
-          <p:nvPr/>
-        </p:nvSpPr>
-        <p:spPr>
-          <a:xfrm>
-            <a:off x="254000" y="711200"/>
-            <a:ext cx="4318000" cy="508000"/>
+            <a:prstDash val="solid"/>
+            <a:miter lim="800000"/>
+          </a:ln>
+        </p:spPr>
+        <p:style>
+          <a:lnRef idx="2">
+            <a:schemeClr val="accent1">
+              <a:shade val="15000"/>
+            </a:schemeClr>
+          </a:lnRef>
+          <a:fillRef idx="1">
+            <a:schemeClr val="accent1"/>
+          </a:fillRef>
+          <a:effectRef idx="0">
+            <a:schemeClr val="accent1"/>
+          </a:effectRef>
+          <a:fontRef idx="minor">
+            <a:schemeClr val="lt1"/>
+          </a:fontRef>
+        </p:style>
+        <p:txBody>
+          <a:bodyPr vertOverflow="clip" horzOverflow="clip" rtlCol="0" anchor="t"/>
+          <a:lstStyle/>
+          <a:p>
+            <a:pPr algn="l"/>
+            <a:endParaRPr lang="en-US"/>
+          </a:p>
+        </p:txBody>
+      </p:sp>
+      <p:sp>
+        <p:nvSpPr>
+          <p:cNvPr id="8" name="TextBox 7">
+            <a:extLst>
+              <a:ext uri="{FF2B5EF4-FFF2-40B4-BE49-F238E27FC236}">
+                <a16:creationId xmlns:a16="http://schemas.microsoft.com/office/drawing/2014/main" id="{CCD23F2E-8364-4640-9A8A-2C04C6477501}"/>
+              </a:ext>
+            </a:extLst>
+          </p:cNvPr>
+          <p:cNvSpPr txBox="1"/>
+          <p:nvPr/>
+        </p:nvSpPr>
+        <p:spPr>
+          <a:xfrm>
+            <a:off x="6553200" y="2501900"/>
+            <a:ext cx="4673600" cy="381000"/>
           </a:xfrm>
           <a:prstGeom prst="rect">
             <a:avLst/>
@@ -4845,35 +4892,39 @@
           </a:ln>
         </p:spPr>
         <p:txBody>
-          <a:bodyPr lIns="91440" tIns="45720" rIns="91440" bIns="45720" anchor="ctr"/>
-          <a:lstStyle/>
-          <a:p>
-            <a:pPr algn="ctr">
-              <a:buNone/>
-            </a:pPr>
-            <a:r>
-              <a:rPr lang="en-US" sz="1500" b="1" i="0" dirty="0">
-                <a:solidFill>
-                  <a:srgbClr val="FFFFFF"/>
-                </a:solidFill>
-              </a:rPr>
-              <a:t>CONTEXT — Full Access</a:t>
-            </a:r>
-          </a:p>
-        </p:txBody>
-      </p:sp>
-      <p:sp>
-        <p:nvSpPr>
-          <p:cNvPr id="223" name="CtxSub"/>
-          <p:cNvSpPr>
-            <a:spLocks noGrp="1"/>
-          </p:cNvSpPr>
-          <p:nvPr/>
-        </p:nvSpPr>
-        <p:spPr>
-          <a:xfrm>
-            <a:off x="381000" y="1270000"/>
-            <a:ext cx="4064000" cy="355600"/>
+          <a:bodyPr vertOverflow="overflow" vert="horz" wrap="square" rtlCol="0" anchor="t">
+            <a:spAutoFit/>
+          </a:bodyPr>
+          <a:lstStyle/>
+          <a:p>
+            <a:pPr algn="l"/>
+            <a:r>
+              <a:rPr lang="en-US" sz="1400" b="1">
+                <a:solidFill>
+                  <a:srgbClr val="E5C4F0"/>
+                </a:solidFill>
+              </a:rPr>
+              <a:t>PERSONA</a:t>
+            </a:r>
+          </a:p>
+        </p:txBody>
+      </p:sp>
+      <p:sp>
+        <p:nvSpPr>
+          <p:cNvPr id="9" name="TextBox 8">
+            <a:extLst>
+              <a:ext uri="{FF2B5EF4-FFF2-40B4-BE49-F238E27FC236}">
+                <a16:creationId xmlns:a16="http://schemas.microsoft.com/office/drawing/2014/main" id="{17E22691-F4CA-4604-A6EF-9DC8546F600C}"/>
+              </a:ext>
+            </a:extLst>
+          </p:cNvPr>
+          <p:cNvSpPr txBox="1"/>
+          <p:nvPr/>
+        </p:nvSpPr>
+        <p:spPr>
+          <a:xfrm>
+            <a:off x="6553200" y="2806700"/>
+            <a:ext cx="4673600" cy="369332"/>
           </a:xfrm>
           <a:prstGeom prst="rect">
             <a:avLst/>
@@ -4884,70 +4935,39 @@
           </a:ln>
         </p:spPr>
         <p:txBody>
-          <a:bodyPr lIns="91440" tIns="45720" rIns="91440" bIns="45720" anchor="ctr"/>
-          <a:lstStyle/>
-          <a:p>
-            <a:pPr algn="ctr">
-              <a:buNone/>
-            </a:pPr>
-            <a:r>
-              <a:rPr lang="en-US" sz="1300" b="0" i="0" dirty="0">
-                <a:solidFill>
-                  <a:srgbClr val="1F4E79"/>
-                </a:solidFill>
-              </a:rPr>
-              <a:t>Can draw on any skill at any time</a:t>
-            </a:r>
-          </a:p>
-        </p:txBody>
-      </p:sp>
-      <p:sp>
-        <p:nvSpPr>
-          <p:cNvPr id="300" name="Chip_0"/>
-          <p:cNvSpPr>
-            <a:spLocks noGrp="1"/>
-          </p:cNvSpPr>
-          <p:nvPr/>
-        </p:nvSpPr>
-        <p:spPr>
-          <a:xfrm>
-            <a:off x="381000" y="1714500"/>
-            <a:ext cx="1270000" cy="330200"/>
-          </a:xfrm>
-          <a:prstGeom prst="roundRect">
-            <a:avLst>
-              <a:gd name="adj" fmla="val 50000"/>
-            </a:avLst>
-          </a:prstGeom>
-          <a:solidFill>
-            <a:srgbClr val="C7E3FF"/>
-          </a:solidFill>
-          <a:ln w="12700">
-            <a:solidFill>
-              <a:srgbClr val="1F4E79"/>
-            </a:solidFill>
-          </a:ln>
-        </p:spPr>
-        <p:txBody>
-          <a:bodyPr anchor="ctr"/>
-          <a:lstStyle/>
-          <a:p>
-            <a:endParaRPr/>
-          </a:p>
-        </p:txBody>
-      </p:sp>
-      <p:sp>
-        <p:nvSpPr>
-          <p:cNvPr id="400" name="ChipTxt_0"/>
-          <p:cNvSpPr>
-            <a:spLocks noGrp="1"/>
-          </p:cNvSpPr>
-          <p:nvPr/>
-        </p:nvSpPr>
-        <p:spPr>
-          <a:xfrm>
-            <a:off x="381000" y="1714500"/>
-            <a:ext cx="1270000" cy="330200"/>
+          <a:bodyPr vertOverflow="overflow" vert="horz" wrap="square" rtlCol="0" anchor="t">
+            <a:spAutoFit/>
+          </a:bodyPr>
+          <a:lstStyle/>
+          <a:p>
+            <a:pPr algn="l"/>
+            <a:r>
+              <a:rPr lang="en-US" b="1" dirty="0">
+                <a:solidFill>
+                  <a:srgbClr val="FFFFFF"/>
+                </a:solidFill>
+              </a:rPr>
+              <a:t>How the model acts (Who does the work)</a:t>
+            </a:r>
+          </a:p>
+        </p:txBody>
+      </p:sp>
+      <p:sp>
+        <p:nvSpPr>
+          <p:cNvPr id="10" name="TextBox 9">
+            <a:extLst>
+              <a:ext uri="{FF2B5EF4-FFF2-40B4-BE49-F238E27FC236}">
+                <a16:creationId xmlns:a16="http://schemas.microsoft.com/office/drawing/2014/main" id="{622075CD-36A9-4FD7-9F75-8A8215FC468F}"/>
+              </a:ext>
+            </a:extLst>
+          </p:cNvPr>
+          <p:cNvSpPr txBox="1"/>
+          <p:nvPr/>
+        </p:nvSpPr>
+        <p:spPr>
+          <a:xfrm>
+            <a:off x="6553200" y="3302000"/>
+            <a:ext cx="4673600" cy="1374735"/>
           </a:xfrm>
           <a:prstGeom prst="rect">
             <a:avLst/>
@@ -4958,70 +4978,194 @@
           </a:ln>
         </p:spPr>
         <p:txBody>
-          <a:bodyPr lIns="91440" tIns="45720" rIns="91440" bIns="45720" anchor="ctr"/>
-          <a:lstStyle/>
-          <a:p>
-            <a:pPr algn="ctr">
-              <a:buNone/>
+          <a:bodyPr vertOverflow="overflow" vert="horz" wrap="square" rtlCol="0" anchor="t">
+            <a:spAutoFit/>
+          </a:bodyPr>
+          <a:lstStyle/>
+          <a:p>
+            <a:pPr marL="228600" indent="-228600">
+              <a:lnSpc>
+                <a:spcPts val="1700"/>
+              </a:lnSpc>
+              <a:spcAft>
+                <a:spcPts val="500"/>
+              </a:spcAft>
+              <a:buFont typeface="Arial"/>
+              <a:buChar char="•"/>
             </a:pPr>
             <a:r>
-              <a:rPr lang="en-US" sz="1100" b="0" i="0" dirty="0">
-                <a:solidFill>
-                  <a:srgbClr val="1F4E79"/>
-                </a:solidFill>
-              </a:rPr>
-              <a:t>Summarise</a:t>
-            </a:r>
-          </a:p>
-        </p:txBody>
-      </p:sp>
-      <p:sp>
-        <p:nvSpPr>
-          <p:cNvPr id="301" name="Chip_1"/>
-          <p:cNvSpPr>
-            <a:spLocks noGrp="1"/>
-          </p:cNvSpPr>
-          <p:nvPr/>
-        </p:nvSpPr>
-        <p:spPr>
-          <a:xfrm>
-            <a:off x="1778000" y="1714500"/>
-            <a:ext cx="1270000" cy="330200"/>
-          </a:xfrm>
-          <a:prstGeom prst="roundRect">
-            <a:avLst>
-              <a:gd name="adj" fmla="val 50000"/>
-            </a:avLst>
+              <a:rPr lang="en-US" sz="1500" b="1" dirty="0">
+                <a:solidFill>
+                  <a:srgbClr val="FFFFFF"/>
+                </a:solidFill>
+              </a:rPr>
+              <a:t>Identity &amp; style </a:t>
+            </a:r>
+            <a:r>
+              <a:rPr lang="en-US" sz="1500" dirty="0">
+                <a:solidFill>
+                  <a:srgbClr val="FFFFFF"/>
+                </a:solidFill>
+              </a:rPr>
+              <a:t>the model adopts (tone, role, voice)</a:t>
+            </a:r>
+          </a:p>
+          <a:p>
+            <a:pPr marL="228600" indent="-228600">
+              <a:lnSpc>
+                <a:spcPts val="1700"/>
+              </a:lnSpc>
+              <a:spcAft>
+                <a:spcPts val="500"/>
+              </a:spcAft>
+              <a:buFont typeface="Arial"/>
+              <a:buChar char="•"/>
+            </a:pPr>
+            <a:r>
+              <a:rPr lang="en-US" sz="1500" b="1" dirty="0">
+                <a:solidFill>
+                  <a:srgbClr val="FFFFFF"/>
+                </a:solidFill>
+              </a:rPr>
+              <a:t>Behavioral </a:t>
+            </a:r>
+            <a:r>
+              <a:rPr lang="en-US" sz="1500" dirty="0">
+                <a:solidFill>
+                  <a:srgbClr val="FFFFFF"/>
+                </a:solidFill>
+              </a:rPr>
+              <a:t>— consistent across requests</a:t>
+            </a:r>
+          </a:p>
+          <a:p>
+            <a:pPr marL="228600" indent="-228600">
+              <a:lnSpc>
+                <a:spcPts val="1700"/>
+              </a:lnSpc>
+              <a:spcAft>
+                <a:spcPts val="500"/>
+              </a:spcAft>
+              <a:buFont typeface="Arial"/>
+              <a:buChar char="•"/>
+            </a:pPr>
+            <a:r>
+              <a:rPr lang="en-US" sz="1500" b="1" dirty="0">
+                <a:solidFill>
+                  <a:srgbClr val="FFFFFF"/>
+                </a:solidFill>
+              </a:rPr>
+              <a:t>Answers </a:t>
+            </a:r>
+            <a:r>
+              <a:rPr lang="en-US" sz="1500" dirty="0">
+                <a:solidFill>
+                  <a:srgbClr val="FFFFFF"/>
+                </a:solidFill>
+              </a:rPr>
+              <a:t>“how should the model respond?”</a:t>
+            </a:r>
+          </a:p>
+          <a:p>
+            <a:pPr marL="228600" indent="-228600">
+              <a:lnSpc>
+                <a:spcPts val="1700"/>
+              </a:lnSpc>
+              <a:spcAft>
+                <a:spcPts val="500"/>
+              </a:spcAft>
+              <a:buFont typeface="Arial"/>
+              <a:buChar char="•"/>
+            </a:pPr>
+            <a:r>
+              <a:rPr lang="en-US" sz="1500" b="1" dirty="0">
+                <a:solidFill>
+                  <a:srgbClr val="FFFFFF"/>
+                </a:solidFill>
+              </a:rPr>
+              <a:t>Examples: </a:t>
+            </a:r>
+            <a:r>
+              <a:rPr lang="en-US" sz="1500" dirty="0">
+                <a:solidFill>
+                  <a:srgbClr val="FFFFFF"/>
+                </a:solidFill>
+              </a:rPr>
+              <a:t>system prompt defining a coach, lawyer, tutor</a:t>
+            </a:r>
+          </a:p>
+        </p:txBody>
+      </p:sp>
+      <p:sp>
+        <p:nvSpPr>
+          <p:cNvPr id="11" name="Rectangle 10">
+            <a:extLst>
+              <a:ext uri="{FF2B5EF4-FFF2-40B4-BE49-F238E27FC236}">
+                <a16:creationId xmlns:a16="http://schemas.microsoft.com/office/drawing/2014/main" id="{9CD6E635-077C-4055-B431-B645082710F9}"/>
+              </a:ext>
+            </a:extLst>
+          </p:cNvPr>
+          <p:cNvSpPr/>
+          <p:nvPr/>
+        </p:nvSpPr>
+        <p:spPr>
+          <a:xfrm>
+            <a:off x="762000" y="5537200"/>
+            <a:ext cx="10668000" cy="1016000"/>
+          </a:xfrm>
+          <a:prstGeom prst="rect">
+            <a:avLst/>
           </a:prstGeom>
           <a:solidFill>
-            <a:srgbClr val="C7E3FF"/>
+            <a:srgbClr val="F2F4F7"/>
           </a:solidFill>
-          <a:ln w="12700">
-            <a:solidFill>
-              <a:srgbClr val="1F4E79"/>
-            </a:solidFill>
-          </a:ln>
-        </p:spPr>
-        <p:txBody>
-          <a:bodyPr anchor="ctr"/>
-          <a:lstStyle/>
-          <a:p>
-            <a:endParaRPr/>
-          </a:p>
-        </p:txBody>
-      </p:sp>
-      <p:sp>
-        <p:nvSpPr>
-          <p:cNvPr id="401" name="ChipTxt_1"/>
-          <p:cNvSpPr>
-            <a:spLocks noGrp="1"/>
-          </p:cNvSpPr>
-          <p:nvPr/>
-        </p:nvSpPr>
-        <p:spPr>
-          <a:xfrm>
-            <a:off x="1778000" y="1714500"/>
-            <a:ext cx="1270000" cy="330200"/>
+          <a:ln w="12700" cap="flat" cmpd="sng" algn="ctr">
+            <a:noFill/>
+            <a:prstDash val="solid"/>
+            <a:miter lim="800000"/>
+          </a:ln>
+        </p:spPr>
+        <p:style>
+          <a:lnRef idx="2">
+            <a:schemeClr val="accent1">
+              <a:shade val="15000"/>
+            </a:schemeClr>
+          </a:lnRef>
+          <a:fillRef idx="1">
+            <a:schemeClr val="accent1"/>
+          </a:fillRef>
+          <a:effectRef idx="0">
+            <a:schemeClr val="accent1"/>
+          </a:effectRef>
+          <a:fontRef idx="minor">
+            <a:schemeClr val="lt1"/>
+          </a:fontRef>
+        </p:style>
+        <p:txBody>
+          <a:bodyPr vertOverflow="clip" horzOverflow="clip" rtlCol="0" anchor="t"/>
+          <a:lstStyle/>
+          <a:p>
+            <a:pPr algn="l"/>
+            <a:endParaRPr lang="en-US"/>
+          </a:p>
+        </p:txBody>
+      </p:sp>
+      <p:sp>
+        <p:nvSpPr>
+          <p:cNvPr id="12" name="TextBox 11">
+            <a:extLst>
+              <a:ext uri="{FF2B5EF4-FFF2-40B4-BE49-F238E27FC236}">
+                <a16:creationId xmlns:a16="http://schemas.microsoft.com/office/drawing/2014/main" id="{117A8691-40DF-4730-AA20-F71D64BB0E8A}"/>
+              </a:ext>
+            </a:extLst>
+          </p:cNvPr>
+          <p:cNvSpPr txBox="1"/>
+          <p:nvPr/>
+        </p:nvSpPr>
+        <p:spPr>
+          <a:xfrm>
+            <a:off x="965200" y="5638800"/>
+            <a:ext cx="10261600" cy="557204"/>
           </a:xfrm>
           <a:prstGeom prst="rect">
             <a:avLst/>
@@ -5032,2338 +5176,40 @@
           </a:ln>
         </p:spPr>
         <p:txBody>
-          <a:bodyPr lIns="91440" tIns="45720" rIns="91440" bIns="45720" anchor="ctr"/>
+          <a:bodyPr vertOverflow="overflow" vert="horz" wrap="square" rtlCol="0" anchor="t">
+            <a:spAutoFit/>
+          </a:bodyPr>
           <a:lstStyle/>
           <a:p>
             <a:pPr algn="ctr">
+              <a:lnSpc>
+                <a:spcPts val="1800"/>
+              </a:lnSpc>
               <a:buNone/>
             </a:pPr>
             <a:r>
-              <a:rPr lang="en-US" sz="1100" b="0" i="0" dirty="0">
-                <a:solidFill>
-                  <a:srgbClr val="1F4E79"/>
-                </a:solidFill>
-              </a:rPr>
-              <a:t>Translate</a:t>
-            </a:r>
-          </a:p>
-        </p:txBody>
-      </p:sp>
-      <p:sp>
-        <p:nvSpPr>
-          <p:cNvPr id="302" name="Chip_2"/>
-          <p:cNvSpPr>
-            <a:spLocks noGrp="1"/>
-          </p:cNvSpPr>
-          <p:nvPr/>
-        </p:nvSpPr>
-        <p:spPr>
-          <a:xfrm>
-            <a:off x="3175000" y="1714500"/>
-            <a:ext cx="1270000" cy="330200"/>
-          </a:xfrm>
-          <a:prstGeom prst="roundRect">
-            <a:avLst>
-              <a:gd name="adj" fmla="val 50000"/>
-            </a:avLst>
-          </a:prstGeom>
-          <a:solidFill>
-            <a:srgbClr val="C7E3FF"/>
-          </a:solidFill>
-          <a:ln w="12700">
-            <a:solidFill>
-              <a:srgbClr val="1F4E79"/>
-            </a:solidFill>
-          </a:ln>
-        </p:spPr>
-        <p:txBody>
-          <a:bodyPr anchor="ctr"/>
-          <a:lstStyle/>
-          <a:p>
-            <a:endParaRPr/>
-          </a:p>
-        </p:txBody>
-      </p:sp>
-      <p:sp>
-        <p:nvSpPr>
-          <p:cNvPr id="402" name="ChipTxt_2"/>
-          <p:cNvSpPr>
-            <a:spLocks noGrp="1"/>
-          </p:cNvSpPr>
-          <p:nvPr/>
-        </p:nvSpPr>
-        <p:spPr>
-          <a:xfrm>
-            <a:off x="3175000" y="1714500"/>
-            <a:ext cx="1270000" cy="330200"/>
-          </a:xfrm>
-          <a:prstGeom prst="rect">
-            <a:avLst/>
-          </a:prstGeom>
-          <a:noFill/>
-          <a:ln>
-            <a:noFill/>
-          </a:ln>
-        </p:spPr>
-        <p:txBody>
-          <a:bodyPr lIns="91440" tIns="45720" rIns="91440" bIns="45720" anchor="ctr"/>
-          <a:lstStyle/>
+              <a:rPr lang="en-US" sz="1800" i="1" dirty="0">
+                <a:solidFill>
+                  <a:srgbClr val="555555"/>
+                </a:solidFill>
+              </a:rPr>
+              <a:t>Put simply: context is the material on the desk.</a:t>
+            </a:r>
+          </a:p>
           <a:p>
             <a:pPr algn="ctr">
+              <a:lnSpc>
+                <a:spcPts val="1800"/>
+              </a:lnSpc>
               <a:buNone/>
             </a:pPr>
             <a:r>
-              <a:rPr lang="en-US" sz="1100" b="0" i="0" dirty="0">
-                <a:solidFill>
-                  <a:srgbClr val="1F4E79"/>
-                </a:solidFill>
-              </a:rPr>
-              <a:t>Classify</a:t>
-            </a:r>
-          </a:p>
-        </p:txBody>
-      </p:sp>
-      <p:sp>
-        <p:nvSpPr>
-          <p:cNvPr id="303" name="Chip_3"/>
-          <p:cNvSpPr>
-            <a:spLocks noGrp="1"/>
-          </p:cNvSpPr>
-          <p:nvPr/>
-        </p:nvSpPr>
-        <p:spPr>
-          <a:xfrm>
-            <a:off x="381000" y="2146300"/>
-            <a:ext cx="1270000" cy="330200"/>
-          </a:xfrm>
-          <a:prstGeom prst="roundRect">
-            <a:avLst>
-              <a:gd name="adj" fmla="val 50000"/>
-            </a:avLst>
-          </a:prstGeom>
-          <a:solidFill>
-            <a:srgbClr val="C7E3FF"/>
-          </a:solidFill>
-          <a:ln w="12700">
-            <a:solidFill>
-              <a:srgbClr val="1F4E79"/>
-            </a:solidFill>
-          </a:ln>
-        </p:spPr>
-        <p:txBody>
-          <a:bodyPr anchor="ctr"/>
-          <a:lstStyle/>
-          <a:p>
-            <a:endParaRPr/>
-          </a:p>
-        </p:txBody>
-      </p:sp>
-      <p:sp>
-        <p:nvSpPr>
-          <p:cNvPr id="403" name="ChipTxt_3"/>
-          <p:cNvSpPr>
-            <a:spLocks noGrp="1"/>
-          </p:cNvSpPr>
-          <p:nvPr/>
-        </p:nvSpPr>
-        <p:spPr>
-          <a:xfrm>
-            <a:off x="381000" y="2146300"/>
-            <a:ext cx="1270000" cy="330200"/>
-          </a:xfrm>
-          <a:prstGeom prst="rect">
-            <a:avLst/>
-          </a:prstGeom>
-          <a:noFill/>
-          <a:ln>
-            <a:noFill/>
-          </a:ln>
-        </p:spPr>
-        <p:txBody>
-          <a:bodyPr lIns="91440" tIns="45720" rIns="91440" bIns="45720" anchor="ctr"/>
-          <a:lstStyle/>
-          <a:p>
-            <a:pPr algn="ctr">
-              <a:buNone/>
-            </a:pPr>
-            <a:r>
-              <a:rPr lang="en-US" sz="1100" b="0" i="0" dirty="0">
-                <a:solidFill>
-                  <a:srgbClr val="1F4E79"/>
-                </a:solidFill>
-              </a:rPr>
-              <a:t>Extract</a:t>
-            </a:r>
-          </a:p>
-        </p:txBody>
-      </p:sp>
-      <p:sp>
-        <p:nvSpPr>
-          <p:cNvPr id="304" name="Chip_4"/>
-          <p:cNvSpPr>
-            <a:spLocks noGrp="1"/>
-          </p:cNvSpPr>
-          <p:nvPr/>
-        </p:nvSpPr>
-        <p:spPr>
-          <a:xfrm>
-            <a:off x="1778000" y="2146300"/>
-            <a:ext cx="1270000" cy="330200"/>
-          </a:xfrm>
-          <a:prstGeom prst="roundRect">
-            <a:avLst>
-              <a:gd name="adj" fmla="val 50000"/>
-            </a:avLst>
-          </a:prstGeom>
-          <a:solidFill>
-            <a:srgbClr val="C7E3FF"/>
-          </a:solidFill>
-          <a:ln w="12700">
-            <a:solidFill>
-              <a:srgbClr val="1F4E79"/>
-            </a:solidFill>
-          </a:ln>
-        </p:spPr>
-        <p:txBody>
-          <a:bodyPr anchor="ctr"/>
-          <a:lstStyle/>
-          <a:p>
-            <a:endParaRPr/>
-          </a:p>
-        </p:txBody>
-      </p:sp>
-      <p:sp>
-        <p:nvSpPr>
-          <p:cNvPr id="404" name="ChipTxt_4"/>
-          <p:cNvSpPr>
-            <a:spLocks noGrp="1"/>
-          </p:cNvSpPr>
-          <p:nvPr/>
-        </p:nvSpPr>
-        <p:spPr>
-          <a:xfrm>
-            <a:off x="1778000" y="2146300"/>
-            <a:ext cx="1270000" cy="330200"/>
-          </a:xfrm>
-          <a:prstGeom prst="rect">
-            <a:avLst/>
-          </a:prstGeom>
-          <a:noFill/>
-          <a:ln>
-            <a:noFill/>
-          </a:ln>
-        </p:spPr>
-        <p:txBody>
-          <a:bodyPr lIns="91440" tIns="45720" rIns="91440" bIns="45720" anchor="ctr"/>
-          <a:lstStyle/>
-          <a:p>
-            <a:pPr algn="ctr">
-              <a:buNone/>
-            </a:pPr>
-            <a:r>
-              <a:rPr lang="en-US" sz="1100" b="0" i="0" dirty="0">
-                <a:solidFill>
-                  <a:srgbClr val="1F4E79"/>
-                </a:solidFill>
-              </a:rPr>
-              <a:t>Compare</a:t>
-            </a:r>
-          </a:p>
-        </p:txBody>
-      </p:sp>
-      <p:sp>
-        <p:nvSpPr>
-          <p:cNvPr id="305" name="Chip_5"/>
-          <p:cNvSpPr>
-            <a:spLocks noGrp="1"/>
-          </p:cNvSpPr>
-          <p:nvPr/>
-        </p:nvSpPr>
-        <p:spPr>
-          <a:xfrm>
-            <a:off x="3175000" y="2146300"/>
-            <a:ext cx="1270000" cy="330200"/>
-          </a:xfrm>
-          <a:prstGeom prst="roundRect">
-            <a:avLst>
-              <a:gd name="adj" fmla="val 50000"/>
-            </a:avLst>
-          </a:prstGeom>
-          <a:solidFill>
-            <a:srgbClr val="C7E3FF"/>
-          </a:solidFill>
-          <a:ln w="12700">
-            <a:solidFill>
-              <a:srgbClr val="1F4E79"/>
-            </a:solidFill>
-          </a:ln>
-        </p:spPr>
-        <p:txBody>
-          <a:bodyPr anchor="ctr"/>
-          <a:lstStyle/>
-          <a:p>
-            <a:endParaRPr/>
-          </a:p>
-        </p:txBody>
-      </p:sp>
-      <p:sp>
-        <p:nvSpPr>
-          <p:cNvPr id="405" name="ChipTxt_5"/>
-          <p:cNvSpPr>
-            <a:spLocks noGrp="1"/>
-          </p:cNvSpPr>
-          <p:nvPr/>
-        </p:nvSpPr>
-        <p:spPr>
-          <a:xfrm>
-            <a:off x="3175000" y="2146300"/>
-            <a:ext cx="1270000" cy="330200"/>
-          </a:xfrm>
-          <a:prstGeom prst="rect">
-            <a:avLst/>
-          </a:prstGeom>
-          <a:noFill/>
-          <a:ln>
-            <a:noFill/>
-          </a:ln>
-        </p:spPr>
-        <p:txBody>
-          <a:bodyPr lIns="91440" tIns="45720" rIns="91440" bIns="45720" anchor="ctr"/>
-          <a:lstStyle/>
-          <a:p>
-            <a:pPr algn="ctr">
-              <a:buNone/>
-            </a:pPr>
-            <a:r>
-              <a:rPr lang="en-US" sz="1100" b="0" i="0" dirty="0">
-                <a:solidFill>
-                  <a:srgbClr val="1F4E79"/>
-                </a:solidFill>
-              </a:rPr>
-              <a:t>Write Code</a:t>
-            </a:r>
-          </a:p>
-        </p:txBody>
-      </p:sp>
-      <p:sp>
-        <p:nvSpPr>
-          <p:cNvPr id="306" name="Chip_6"/>
-          <p:cNvSpPr>
-            <a:spLocks noGrp="1"/>
-          </p:cNvSpPr>
-          <p:nvPr/>
-        </p:nvSpPr>
-        <p:spPr>
-          <a:xfrm>
-            <a:off x="381000" y="2578100"/>
-            <a:ext cx="1270000" cy="330200"/>
-          </a:xfrm>
-          <a:prstGeom prst="roundRect">
-            <a:avLst>
-              <a:gd name="adj" fmla="val 50000"/>
-            </a:avLst>
-          </a:prstGeom>
-          <a:solidFill>
-            <a:srgbClr val="C7E3FF"/>
-          </a:solidFill>
-          <a:ln w="12700">
-            <a:solidFill>
-              <a:srgbClr val="1F4E79"/>
-            </a:solidFill>
-          </a:ln>
-        </p:spPr>
-        <p:txBody>
-          <a:bodyPr anchor="ctr"/>
-          <a:lstStyle/>
-          <a:p>
-            <a:endParaRPr/>
-          </a:p>
-        </p:txBody>
-      </p:sp>
-      <p:sp>
-        <p:nvSpPr>
-          <p:cNvPr id="406" name="ChipTxt_6"/>
-          <p:cNvSpPr>
-            <a:spLocks noGrp="1"/>
-          </p:cNvSpPr>
-          <p:nvPr/>
-        </p:nvSpPr>
-        <p:spPr>
-          <a:xfrm>
-            <a:off x="381000" y="2578100"/>
-            <a:ext cx="1270000" cy="330200"/>
-          </a:xfrm>
-          <a:prstGeom prst="rect">
-            <a:avLst/>
-          </a:prstGeom>
-          <a:noFill/>
-          <a:ln>
-            <a:noFill/>
-          </a:ln>
-        </p:spPr>
-        <p:txBody>
-          <a:bodyPr lIns="91440" tIns="45720" rIns="91440" bIns="45720" anchor="ctr"/>
-          <a:lstStyle/>
-          <a:p>
-            <a:pPr algn="ctr">
-              <a:buNone/>
-            </a:pPr>
-            <a:r>
-              <a:rPr lang="en-US" sz="1100" b="0" i="0" dirty="0">
-                <a:solidFill>
-                  <a:srgbClr val="1F4E79"/>
-                </a:solidFill>
-              </a:rPr>
-              <a:t>Debug</a:t>
-            </a:r>
-          </a:p>
-        </p:txBody>
-      </p:sp>
-      <p:sp>
-        <p:nvSpPr>
-          <p:cNvPr id="307" name="Chip_7"/>
-          <p:cNvSpPr>
-            <a:spLocks noGrp="1"/>
-          </p:cNvSpPr>
-          <p:nvPr/>
-        </p:nvSpPr>
-        <p:spPr>
-          <a:xfrm>
-            <a:off x="1778000" y="2578100"/>
-            <a:ext cx="1270000" cy="330200"/>
-          </a:xfrm>
-          <a:prstGeom prst="roundRect">
-            <a:avLst>
-              <a:gd name="adj" fmla="val 50000"/>
-            </a:avLst>
-          </a:prstGeom>
-          <a:solidFill>
-            <a:srgbClr val="C7E3FF"/>
-          </a:solidFill>
-          <a:ln w="12700">
-            <a:solidFill>
-              <a:srgbClr val="1F4E79"/>
-            </a:solidFill>
-          </a:ln>
-        </p:spPr>
-        <p:txBody>
-          <a:bodyPr anchor="ctr"/>
-          <a:lstStyle/>
-          <a:p>
-            <a:endParaRPr/>
-          </a:p>
-        </p:txBody>
-      </p:sp>
-      <p:sp>
-        <p:nvSpPr>
-          <p:cNvPr id="407" name="ChipTxt_7"/>
-          <p:cNvSpPr>
-            <a:spLocks noGrp="1"/>
-          </p:cNvSpPr>
-          <p:nvPr/>
-        </p:nvSpPr>
-        <p:spPr>
-          <a:xfrm>
-            <a:off x="1778000" y="2578100"/>
-            <a:ext cx="1270000" cy="330200"/>
-          </a:xfrm>
-          <a:prstGeom prst="rect">
-            <a:avLst/>
-          </a:prstGeom>
-          <a:noFill/>
-          <a:ln>
-            <a:noFill/>
-          </a:ln>
-        </p:spPr>
-        <p:txBody>
-          <a:bodyPr lIns="91440" tIns="45720" rIns="91440" bIns="45720" anchor="ctr"/>
-          <a:lstStyle/>
-          <a:p>
-            <a:pPr algn="ctr">
-              <a:buNone/>
-            </a:pPr>
-            <a:r>
-              <a:rPr lang="en-US" sz="1100" b="0" i="0" dirty="0">
-                <a:solidFill>
-                  <a:srgbClr val="1F4E79"/>
-                </a:solidFill>
-              </a:rPr>
-              <a:t>Reformat</a:t>
-            </a:r>
-          </a:p>
-        </p:txBody>
-      </p:sp>
-      <p:sp>
-        <p:nvSpPr>
-          <p:cNvPr id="308" name="Chip_8"/>
-          <p:cNvSpPr>
-            <a:spLocks noGrp="1"/>
-          </p:cNvSpPr>
-          <p:nvPr/>
-        </p:nvSpPr>
-        <p:spPr>
-          <a:xfrm>
-            <a:off x="3175000" y="2578100"/>
-            <a:ext cx="1270000" cy="330200"/>
-          </a:xfrm>
-          <a:prstGeom prst="roundRect">
-            <a:avLst>
-              <a:gd name="adj" fmla="val 50000"/>
-            </a:avLst>
-          </a:prstGeom>
-          <a:solidFill>
-            <a:srgbClr val="C7E3FF"/>
-          </a:solidFill>
-          <a:ln w="12700">
-            <a:solidFill>
-              <a:srgbClr val="1F4E79"/>
-            </a:solidFill>
-          </a:ln>
-        </p:spPr>
-        <p:txBody>
-          <a:bodyPr anchor="ctr"/>
-          <a:lstStyle/>
-          <a:p>
-            <a:endParaRPr/>
-          </a:p>
-        </p:txBody>
-      </p:sp>
-      <p:sp>
-        <p:nvSpPr>
-          <p:cNvPr id="408" name="ChipTxt_8"/>
-          <p:cNvSpPr>
-            <a:spLocks noGrp="1"/>
-          </p:cNvSpPr>
-          <p:nvPr/>
-        </p:nvSpPr>
-        <p:spPr>
-          <a:xfrm>
-            <a:off x="3175000" y="2578100"/>
-            <a:ext cx="1270000" cy="330200"/>
-          </a:xfrm>
-          <a:prstGeom prst="rect">
-            <a:avLst/>
-          </a:prstGeom>
-          <a:noFill/>
-          <a:ln>
-            <a:noFill/>
-          </a:ln>
-        </p:spPr>
-        <p:txBody>
-          <a:bodyPr lIns="91440" tIns="45720" rIns="91440" bIns="45720" anchor="ctr"/>
-          <a:lstStyle/>
-          <a:p>
-            <a:pPr algn="ctr">
-              <a:buNone/>
-            </a:pPr>
-            <a:r>
-              <a:rPr lang="en-US" sz="1100" b="0" i="0" dirty="0">
-                <a:solidFill>
-                  <a:srgbClr val="1F4E79"/>
-                </a:solidFill>
-              </a:rPr>
-              <a:t>Search</a:t>
-            </a:r>
-          </a:p>
-        </p:txBody>
-      </p:sp>
-      <p:sp>
-        <p:nvSpPr>
-          <p:cNvPr id="309" name="Chip_9"/>
-          <p:cNvSpPr>
-            <a:spLocks noGrp="1"/>
-          </p:cNvSpPr>
-          <p:nvPr/>
-        </p:nvSpPr>
-        <p:spPr>
-          <a:xfrm>
-            <a:off x="381000" y="3009900"/>
-            <a:ext cx="1270000" cy="330200"/>
-          </a:xfrm>
-          <a:prstGeom prst="roundRect">
-            <a:avLst>
-              <a:gd name="adj" fmla="val 50000"/>
-            </a:avLst>
-          </a:prstGeom>
-          <a:solidFill>
-            <a:srgbClr val="C7E3FF"/>
-          </a:solidFill>
-          <a:ln w="12700">
-            <a:solidFill>
-              <a:srgbClr val="1F4E79"/>
-            </a:solidFill>
-          </a:ln>
-        </p:spPr>
-        <p:txBody>
-          <a:bodyPr anchor="ctr"/>
-          <a:lstStyle/>
-          <a:p>
-            <a:endParaRPr/>
-          </a:p>
-        </p:txBody>
-      </p:sp>
-      <p:sp>
-        <p:nvSpPr>
-          <p:cNvPr id="409" name="ChipTxt_9"/>
-          <p:cNvSpPr>
-            <a:spLocks noGrp="1"/>
-          </p:cNvSpPr>
-          <p:nvPr/>
-        </p:nvSpPr>
-        <p:spPr>
-          <a:xfrm>
-            <a:off x="381000" y="3009900"/>
-            <a:ext cx="1270000" cy="330200"/>
-          </a:xfrm>
-          <a:prstGeom prst="rect">
-            <a:avLst/>
-          </a:prstGeom>
-          <a:noFill/>
-          <a:ln>
-            <a:noFill/>
-          </a:ln>
-        </p:spPr>
-        <p:txBody>
-          <a:bodyPr lIns="91440" tIns="45720" rIns="91440" bIns="45720" anchor="ctr"/>
-          <a:lstStyle/>
-          <a:p>
-            <a:pPr algn="ctr">
-              <a:buNone/>
-            </a:pPr>
-            <a:r>
-              <a:rPr lang="en-US" sz="1100" b="0" i="0" dirty="0">
-                <a:solidFill>
-                  <a:srgbClr val="1F4E79"/>
-                </a:solidFill>
-              </a:rPr>
-              <a:t>Explain</a:t>
-            </a:r>
-          </a:p>
-        </p:txBody>
-      </p:sp>
-      <p:sp>
-        <p:nvSpPr>
-          <p:cNvPr id="310" name="Chip_10"/>
-          <p:cNvSpPr>
-            <a:spLocks noGrp="1"/>
-          </p:cNvSpPr>
-          <p:nvPr/>
-        </p:nvSpPr>
-        <p:spPr>
-          <a:xfrm>
-            <a:off x="1778000" y="3009900"/>
-            <a:ext cx="1270000" cy="330200"/>
-          </a:xfrm>
-          <a:prstGeom prst="roundRect">
-            <a:avLst>
-              <a:gd name="adj" fmla="val 50000"/>
-            </a:avLst>
-          </a:prstGeom>
-          <a:solidFill>
-            <a:srgbClr val="C7E3FF"/>
-          </a:solidFill>
-          <a:ln w="12700">
-            <a:solidFill>
-              <a:srgbClr val="1F4E79"/>
-            </a:solidFill>
-          </a:ln>
-        </p:spPr>
-        <p:txBody>
-          <a:bodyPr anchor="ctr"/>
-          <a:lstStyle/>
-          <a:p>
-            <a:endParaRPr/>
-          </a:p>
-        </p:txBody>
-      </p:sp>
-      <p:sp>
-        <p:nvSpPr>
-          <p:cNvPr id="410" name="ChipTxt_10"/>
-          <p:cNvSpPr>
-            <a:spLocks noGrp="1"/>
-          </p:cNvSpPr>
-          <p:nvPr/>
-        </p:nvSpPr>
-        <p:spPr>
-          <a:xfrm>
-            <a:off x="1778000" y="3009900"/>
-            <a:ext cx="1270000" cy="330200"/>
-          </a:xfrm>
-          <a:prstGeom prst="rect">
-            <a:avLst/>
-          </a:prstGeom>
-          <a:noFill/>
-          <a:ln>
-            <a:noFill/>
-          </a:ln>
-        </p:spPr>
-        <p:txBody>
-          <a:bodyPr lIns="91440" tIns="45720" rIns="91440" bIns="45720" anchor="ctr"/>
-          <a:lstStyle/>
-          <a:p>
-            <a:pPr algn="ctr">
-              <a:buNone/>
-            </a:pPr>
-            <a:r>
-              <a:rPr lang="en-US" sz="1100" b="0" i="0" dirty="0">
-                <a:solidFill>
-                  <a:srgbClr val="1F4E79"/>
-                </a:solidFill>
-              </a:rPr>
-              <a:t>Draft Email</a:t>
-            </a:r>
-          </a:p>
-        </p:txBody>
-      </p:sp>
-      <p:sp>
-        <p:nvSpPr>
-          <p:cNvPr id="311" name="Chip_11"/>
-          <p:cNvSpPr>
-            <a:spLocks noGrp="1"/>
-          </p:cNvSpPr>
-          <p:nvPr/>
-        </p:nvSpPr>
-        <p:spPr>
-          <a:xfrm>
-            <a:off x="3175000" y="3009900"/>
-            <a:ext cx="1270000" cy="330200"/>
-          </a:xfrm>
-          <a:prstGeom prst="roundRect">
-            <a:avLst>
-              <a:gd name="adj" fmla="val 50000"/>
-            </a:avLst>
-          </a:prstGeom>
-          <a:solidFill>
-            <a:srgbClr val="C7E3FF"/>
-          </a:solidFill>
-          <a:ln w="12700">
-            <a:solidFill>
-              <a:srgbClr val="1F4E79"/>
-            </a:solidFill>
-          </a:ln>
-        </p:spPr>
-        <p:txBody>
-          <a:bodyPr anchor="ctr"/>
-          <a:lstStyle/>
-          <a:p>
-            <a:endParaRPr/>
-          </a:p>
-        </p:txBody>
-      </p:sp>
-      <p:sp>
-        <p:nvSpPr>
-          <p:cNvPr id="411" name="ChipTxt_11"/>
-          <p:cNvSpPr>
-            <a:spLocks noGrp="1"/>
-          </p:cNvSpPr>
-          <p:nvPr/>
-        </p:nvSpPr>
-        <p:spPr>
-          <a:xfrm>
-            <a:off x="3175000" y="3009900"/>
-            <a:ext cx="1270000" cy="330200"/>
-          </a:xfrm>
-          <a:prstGeom prst="rect">
-            <a:avLst/>
-          </a:prstGeom>
-          <a:noFill/>
-          <a:ln>
-            <a:noFill/>
-          </a:ln>
-        </p:spPr>
-        <p:txBody>
-          <a:bodyPr lIns="91440" tIns="45720" rIns="91440" bIns="45720" anchor="ctr"/>
-          <a:lstStyle/>
-          <a:p>
-            <a:pPr algn="ctr">
-              <a:buNone/>
-            </a:pPr>
-            <a:r>
-              <a:rPr lang="en-US" sz="1100" b="0" i="0" dirty="0">
-                <a:solidFill>
-                  <a:srgbClr val="1F4E79"/>
-                </a:solidFill>
-              </a:rPr>
-              <a:t>Brainstorm</a:t>
-            </a:r>
-          </a:p>
-        </p:txBody>
-      </p:sp>
-      <p:sp>
-        <p:nvSpPr>
-          <p:cNvPr id="312" name="Chip_12"/>
-          <p:cNvSpPr>
-            <a:spLocks noGrp="1"/>
-          </p:cNvSpPr>
-          <p:nvPr/>
-        </p:nvSpPr>
-        <p:spPr>
-          <a:xfrm>
-            <a:off x="381000" y="3441700"/>
-            <a:ext cx="1270000" cy="330200"/>
-          </a:xfrm>
-          <a:prstGeom prst="roundRect">
-            <a:avLst>
-              <a:gd name="adj" fmla="val 50000"/>
-            </a:avLst>
-          </a:prstGeom>
-          <a:solidFill>
-            <a:srgbClr val="C7E3FF"/>
-          </a:solidFill>
-          <a:ln w="12700">
-            <a:solidFill>
-              <a:srgbClr val="1F4E79"/>
-            </a:solidFill>
-          </a:ln>
-        </p:spPr>
-        <p:txBody>
-          <a:bodyPr anchor="ctr"/>
-          <a:lstStyle/>
-          <a:p>
-            <a:endParaRPr/>
-          </a:p>
-        </p:txBody>
-      </p:sp>
-      <p:sp>
-        <p:nvSpPr>
-          <p:cNvPr id="412" name="ChipTxt_12"/>
-          <p:cNvSpPr>
-            <a:spLocks noGrp="1"/>
-          </p:cNvSpPr>
-          <p:nvPr/>
-        </p:nvSpPr>
-        <p:spPr>
-          <a:xfrm>
-            <a:off x="381000" y="3441700"/>
-            <a:ext cx="1270000" cy="330200"/>
-          </a:xfrm>
-          <a:prstGeom prst="rect">
-            <a:avLst/>
-          </a:prstGeom>
-          <a:noFill/>
-          <a:ln>
-            <a:noFill/>
-          </a:ln>
-        </p:spPr>
-        <p:txBody>
-          <a:bodyPr lIns="91440" tIns="45720" rIns="91440" bIns="45720" anchor="ctr"/>
-          <a:lstStyle/>
-          <a:p>
-            <a:pPr algn="ctr">
-              <a:buNone/>
-            </a:pPr>
-            <a:r>
-              <a:rPr lang="en-US" sz="1100" b="0" i="0" dirty="0">
-                <a:solidFill>
-                  <a:srgbClr val="1F4E79"/>
-                </a:solidFill>
-              </a:rPr>
-              <a:t>Critique</a:t>
-            </a:r>
-          </a:p>
-        </p:txBody>
-      </p:sp>
-      <p:sp>
-        <p:nvSpPr>
-          <p:cNvPr id="313" name="Chip_13"/>
-          <p:cNvSpPr>
-            <a:spLocks noGrp="1"/>
-          </p:cNvSpPr>
-          <p:nvPr/>
-        </p:nvSpPr>
-        <p:spPr>
-          <a:xfrm>
-            <a:off x="1778000" y="3441700"/>
-            <a:ext cx="1270000" cy="330200"/>
-          </a:xfrm>
-          <a:prstGeom prst="roundRect">
-            <a:avLst>
-              <a:gd name="adj" fmla="val 50000"/>
-            </a:avLst>
-          </a:prstGeom>
-          <a:solidFill>
-            <a:srgbClr val="C7E3FF"/>
-          </a:solidFill>
-          <a:ln w="12700">
-            <a:solidFill>
-              <a:srgbClr val="1F4E79"/>
-            </a:solidFill>
-          </a:ln>
-        </p:spPr>
-        <p:txBody>
-          <a:bodyPr anchor="ctr"/>
-          <a:lstStyle/>
-          <a:p>
-            <a:endParaRPr/>
-          </a:p>
-        </p:txBody>
-      </p:sp>
-      <p:sp>
-        <p:nvSpPr>
-          <p:cNvPr id="413" name="ChipTxt_13"/>
-          <p:cNvSpPr>
-            <a:spLocks noGrp="1"/>
-          </p:cNvSpPr>
-          <p:nvPr/>
-        </p:nvSpPr>
-        <p:spPr>
-          <a:xfrm>
-            <a:off x="1778000" y="3441700"/>
-            <a:ext cx="1270000" cy="330200"/>
-          </a:xfrm>
-          <a:prstGeom prst="rect">
-            <a:avLst/>
-          </a:prstGeom>
-          <a:noFill/>
-          <a:ln>
-            <a:noFill/>
-          </a:ln>
-        </p:spPr>
-        <p:txBody>
-          <a:bodyPr lIns="91440" tIns="45720" rIns="91440" bIns="45720" anchor="ctr"/>
-          <a:lstStyle/>
-          <a:p>
-            <a:pPr algn="ctr">
-              <a:buNone/>
-            </a:pPr>
-            <a:r>
-              <a:rPr lang="en-US" sz="1100" b="0" i="0" dirty="0">
-                <a:solidFill>
-                  <a:srgbClr val="1F4E79"/>
-                </a:solidFill>
-              </a:rPr>
-              <a:t>Synthesise</a:t>
-            </a:r>
-          </a:p>
-        </p:txBody>
-      </p:sp>
-      <p:sp>
-        <p:nvSpPr>
-          <p:cNvPr id="314" name="Chip_14"/>
-          <p:cNvSpPr>
-            <a:spLocks noGrp="1"/>
-          </p:cNvSpPr>
-          <p:nvPr/>
-        </p:nvSpPr>
-        <p:spPr>
-          <a:xfrm>
-            <a:off x="3175000" y="3441700"/>
-            <a:ext cx="1270000" cy="330200"/>
-          </a:xfrm>
-          <a:prstGeom prst="roundRect">
-            <a:avLst>
-              <a:gd name="adj" fmla="val 50000"/>
-            </a:avLst>
-          </a:prstGeom>
-          <a:solidFill>
-            <a:srgbClr val="C7E3FF"/>
-          </a:solidFill>
-          <a:ln w="12700">
-            <a:solidFill>
-              <a:srgbClr val="1F4E79"/>
-            </a:solidFill>
-          </a:ln>
-        </p:spPr>
-        <p:txBody>
-          <a:bodyPr anchor="ctr"/>
-          <a:lstStyle/>
-          <a:p>
-            <a:endParaRPr/>
-          </a:p>
-        </p:txBody>
-      </p:sp>
-      <p:sp>
-        <p:nvSpPr>
-          <p:cNvPr id="414" name="ChipTxt_14"/>
-          <p:cNvSpPr>
-            <a:spLocks noGrp="1"/>
-          </p:cNvSpPr>
-          <p:nvPr/>
-        </p:nvSpPr>
-        <p:spPr>
-          <a:xfrm>
-            <a:off x="3175000" y="3441700"/>
-            <a:ext cx="1270000" cy="330200"/>
-          </a:xfrm>
-          <a:prstGeom prst="rect">
-            <a:avLst/>
-          </a:prstGeom>
-          <a:noFill/>
-          <a:ln>
-            <a:noFill/>
-          </a:ln>
-        </p:spPr>
-        <p:txBody>
-          <a:bodyPr lIns="91440" tIns="45720" rIns="91440" bIns="45720" anchor="ctr"/>
-          <a:lstStyle/>
-          <a:p>
-            <a:pPr algn="ctr">
-              <a:buNone/>
-            </a:pPr>
-            <a:r>
-              <a:rPr lang="en-US" sz="1100" b="0" i="0" dirty="0">
-                <a:solidFill>
-                  <a:srgbClr val="1F4E79"/>
-                </a:solidFill>
-              </a:rPr>
-              <a:t>Plan</a:t>
-            </a:r>
-          </a:p>
-        </p:txBody>
-      </p:sp>
-      <p:sp>
-        <p:nvSpPr>
-          <p:cNvPr id="500" name="PerPanel"/>
-          <p:cNvSpPr>
-            <a:spLocks noGrp="1"/>
-          </p:cNvSpPr>
-          <p:nvPr/>
-        </p:nvSpPr>
-        <p:spPr>
-          <a:xfrm>
-            <a:off x="7620000" y="711200"/>
-            <a:ext cx="4318000" cy="6045200"/>
-          </a:xfrm>
-          <a:prstGeom prst="roundRect">
-            <a:avLst>
-              <a:gd name="adj" fmla="val 10000"/>
-            </a:avLst>
-          </a:prstGeom>
-          <a:solidFill>
-            <a:srgbClr val="F6EAFD"/>
-          </a:solidFill>
-          <a:ln w="12700">
-            <a:solidFill>
-              <a:srgbClr val="7B2D8E"/>
-            </a:solidFill>
-          </a:ln>
-        </p:spPr>
-        <p:txBody>
-          <a:bodyPr anchor="ctr"/>
-          <a:lstStyle/>
-          <a:p>
-            <a:endParaRPr/>
-          </a:p>
-        </p:txBody>
-      </p:sp>
-      <p:sp>
-        <p:nvSpPr>
-          <p:cNvPr id="501" name="PerHeader"/>
-          <p:cNvSpPr>
-            <a:spLocks noGrp="1"/>
-          </p:cNvSpPr>
-          <p:nvPr/>
-        </p:nvSpPr>
-        <p:spPr>
-          <a:xfrm>
-            <a:off x="7620000" y="711200"/>
-            <a:ext cx="4318000" cy="508000"/>
-          </a:xfrm>
-          <a:prstGeom prst="rect">
-            <a:avLst/>
-          </a:prstGeom>
-          <a:solidFill>
-            <a:srgbClr val="7B2D8E"/>
-          </a:solidFill>
-          <a:ln>
-            <a:noFill/>
-          </a:ln>
-        </p:spPr>
-        <p:txBody>
-          <a:bodyPr anchor="ctr"/>
-          <a:lstStyle/>
-          <a:p>
-            <a:endParaRPr/>
-          </a:p>
-        </p:txBody>
-      </p:sp>
-      <p:sp>
-        <p:nvSpPr>
-          <p:cNvPr id="502" name="PerHeaderTxt"/>
-          <p:cNvSpPr>
-            <a:spLocks noGrp="1"/>
-          </p:cNvSpPr>
-          <p:nvPr/>
-        </p:nvSpPr>
-        <p:spPr>
-          <a:xfrm>
-            <a:off x="7620000" y="711200"/>
-            <a:ext cx="4318000" cy="508000"/>
-          </a:xfrm>
-          <a:prstGeom prst="rect">
-            <a:avLst/>
-          </a:prstGeom>
-          <a:noFill/>
-          <a:ln>
-            <a:noFill/>
-          </a:ln>
-        </p:spPr>
-        <p:txBody>
-          <a:bodyPr lIns="91440" tIns="45720" rIns="91440" bIns="45720" anchor="ctr"/>
-          <a:lstStyle/>
-          <a:p>
-            <a:pPr algn="ctr">
-              <a:buNone/>
-            </a:pPr>
-            <a:r>
-              <a:rPr lang="en-US" sz="1500" b="1" i="0" dirty="0">
-                <a:solidFill>
-                  <a:srgbClr val="FFFFFF"/>
-                </a:solidFill>
-              </a:rPr>
-              <a:t>PERSONA — Assigned Skills</a:t>
-            </a:r>
-          </a:p>
-        </p:txBody>
-      </p:sp>
-      <p:sp>
-        <p:nvSpPr>
-          <p:cNvPr id="503" name="PerSub"/>
-          <p:cNvSpPr>
-            <a:spLocks noGrp="1"/>
-          </p:cNvSpPr>
-          <p:nvPr/>
-        </p:nvSpPr>
-        <p:spPr>
-          <a:xfrm>
-            <a:off x="7747000" y="1270000"/>
-            <a:ext cx="4064000" cy="355600"/>
-          </a:xfrm>
-          <a:prstGeom prst="rect">
-            <a:avLst/>
-          </a:prstGeom>
-          <a:noFill/>
-          <a:ln>
-            <a:noFill/>
-          </a:ln>
-        </p:spPr>
-        <p:txBody>
-          <a:bodyPr lIns="91440" tIns="45720" rIns="91440" bIns="45720" anchor="ctr"/>
-          <a:lstStyle/>
-          <a:p>
-            <a:pPr algn="ctr">
-              <a:buNone/>
-            </a:pPr>
-            <a:r>
-              <a:rPr lang="en-US" sz="1300" b="0" i="0" dirty="0">
-                <a:solidFill>
-                  <a:srgbClr val="7B2D8E"/>
-                </a:solidFill>
-              </a:rPr>
-              <a:t>Only specific skills assigned to this role</a:t>
-            </a:r>
-          </a:p>
-        </p:txBody>
-      </p:sp>
-      <p:sp>
-        <p:nvSpPr>
-          <p:cNvPr id="504" name="PersonaBadge"/>
-          <p:cNvSpPr>
-            <a:spLocks noGrp="1"/>
-          </p:cNvSpPr>
-          <p:nvPr/>
-        </p:nvSpPr>
-        <p:spPr>
-          <a:xfrm>
-            <a:off x="8255000" y="1701800"/>
-            <a:ext cx="3048000" cy="457200"/>
-          </a:xfrm>
-          <a:prstGeom prst="roundRect">
-            <a:avLst>
-              <a:gd name="adj" fmla="val 30000"/>
-            </a:avLst>
-          </a:prstGeom>
-          <a:solidFill>
-            <a:srgbClr val="7B2D8E"/>
-          </a:solidFill>
-          <a:ln>
-            <a:noFill/>
-          </a:ln>
-        </p:spPr>
-        <p:txBody>
-          <a:bodyPr anchor="ctr"/>
-          <a:lstStyle/>
-          <a:p>
-            <a:endParaRPr/>
-          </a:p>
-        </p:txBody>
-      </p:sp>
-      <p:sp>
-        <p:nvSpPr>
-          <p:cNvPr id="505" name="PersonaName"/>
-          <p:cNvSpPr>
-            <a:spLocks noGrp="1"/>
-          </p:cNvSpPr>
-          <p:nvPr/>
-        </p:nvSpPr>
-        <p:spPr>
-          <a:xfrm>
-            <a:off x="8255000" y="1701800"/>
-            <a:ext cx="3048000" cy="457200"/>
-          </a:xfrm>
-          <a:prstGeom prst="rect">
-            <a:avLst/>
-          </a:prstGeom>
-          <a:noFill/>
-          <a:ln>
-            <a:noFill/>
-          </a:ln>
-        </p:spPr>
-        <p:txBody>
-          <a:bodyPr lIns="91440" tIns="45720" rIns="91440" bIns="45720" anchor="ctr"/>
-          <a:lstStyle/>
-          <a:p>
-            <a:pPr algn="ctr">
-              <a:buNone/>
-            </a:pPr>
-            <a:r>
-              <a:rPr lang="en-US" sz="1300" b="1" i="0" dirty="0">
-                <a:solidFill>
-                  <a:srgbClr val="FFFFFF"/>
-                </a:solidFill>
-              </a:rPr>
-              <a:t>★  Sales Assistant Persona</a:t>
-            </a:r>
-          </a:p>
-        </p:txBody>
-      </p:sp>
-      <p:sp>
-        <p:nvSpPr>
-          <p:cNvPr id="600" name="AChip_0"/>
-          <p:cNvSpPr>
-            <a:spLocks noGrp="1"/>
-          </p:cNvSpPr>
-          <p:nvPr/>
-        </p:nvSpPr>
-        <p:spPr>
-          <a:xfrm>
-            <a:off x="7874000" y="2311400"/>
-            <a:ext cx="1778000" cy="381000"/>
-          </a:xfrm>
-          <a:prstGeom prst="roundRect">
-            <a:avLst>
-              <a:gd name="adj" fmla="val 50000"/>
-            </a:avLst>
-          </a:prstGeom>
-          <a:solidFill>
-            <a:srgbClr val="E8C8F8"/>
-          </a:solidFill>
-          <a:ln w="12700">
-            <a:solidFill>
-              <a:srgbClr val="7B2D8E"/>
-            </a:solidFill>
-          </a:ln>
-        </p:spPr>
-        <p:txBody>
-          <a:bodyPr anchor="ctr"/>
-          <a:lstStyle/>
-          <a:p>
-            <a:endParaRPr/>
-          </a:p>
-        </p:txBody>
-      </p:sp>
-      <p:sp>
-        <p:nvSpPr>
-          <p:cNvPr id="700" name="AChipTxt_0"/>
-          <p:cNvSpPr>
-            <a:spLocks noGrp="1"/>
-          </p:cNvSpPr>
-          <p:nvPr/>
-        </p:nvSpPr>
-        <p:spPr>
-          <a:xfrm>
-            <a:off x="7874000" y="2311400"/>
-            <a:ext cx="1778000" cy="381000"/>
-          </a:xfrm>
-          <a:prstGeom prst="rect">
-            <a:avLst/>
-          </a:prstGeom>
-          <a:noFill/>
-          <a:ln>
-            <a:noFill/>
-          </a:ln>
-        </p:spPr>
-        <p:txBody>
-          <a:bodyPr lIns="91440" tIns="45720" rIns="91440" bIns="45720" anchor="ctr"/>
-          <a:lstStyle/>
-          <a:p>
-            <a:pPr algn="ctr">
-              <a:buNone/>
-            </a:pPr>
-            <a:r>
-              <a:rPr lang="en-US" sz="1200" b="1" i="0" dirty="0">
-                <a:solidFill>
-                  <a:srgbClr val="7B2D8E"/>
-                </a:solidFill>
-              </a:rPr>
-              <a:t>Summarise</a:t>
-            </a:r>
-          </a:p>
-        </p:txBody>
-      </p:sp>
-      <p:sp>
-        <p:nvSpPr>
-          <p:cNvPr id="601" name="AChip_1"/>
-          <p:cNvSpPr>
-            <a:spLocks noGrp="1"/>
-          </p:cNvSpPr>
-          <p:nvPr/>
-        </p:nvSpPr>
-        <p:spPr>
-          <a:xfrm>
-            <a:off x="9906000" y="2311400"/>
-            <a:ext cx="1778000" cy="381000"/>
-          </a:xfrm>
-          <a:prstGeom prst="roundRect">
-            <a:avLst>
-              <a:gd name="adj" fmla="val 50000"/>
-            </a:avLst>
-          </a:prstGeom>
-          <a:solidFill>
-            <a:srgbClr val="E8C8F8"/>
-          </a:solidFill>
-          <a:ln w="12700">
-            <a:solidFill>
-              <a:srgbClr val="7B2D8E"/>
-            </a:solidFill>
-          </a:ln>
-        </p:spPr>
-        <p:txBody>
-          <a:bodyPr anchor="ctr"/>
-          <a:lstStyle/>
-          <a:p>
-            <a:endParaRPr/>
-          </a:p>
-        </p:txBody>
-      </p:sp>
-      <p:sp>
-        <p:nvSpPr>
-          <p:cNvPr id="701" name="AChipTxt_1"/>
-          <p:cNvSpPr>
-            <a:spLocks noGrp="1"/>
-          </p:cNvSpPr>
-          <p:nvPr/>
-        </p:nvSpPr>
-        <p:spPr>
-          <a:xfrm>
-            <a:off x="9906000" y="2311400"/>
-            <a:ext cx="1778000" cy="381000"/>
-          </a:xfrm>
-          <a:prstGeom prst="rect">
-            <a:avLst/>
-          </a:prstGeom>
-          <a:noFill/>
-          <a:ln>
-            <a:noFill/>
-          </a:ln>
-        </p:spPr>
-        <p:txBody>
-          <a:bodyPr lIns="91440" tIns="45720" rIns="91440" bIns="45720" anchor="ctr"/>
-          <a:lstStyle/>
-          <a:p>
-            <a:pPr algn="ctr">
-              <a:buNone/>
-            </a:pPr>
-            <a:r>
-              <a:rPr lang="en-US" sz="1200" b="1" i="0" dirty="0">
-                <a:solidFill>
-                  <a:srgbClr val="7B2D8E"/>
-                </a:solidFill>
-              </a:rPr>
-              <a:t>Draft Email</a:t>
-            </a:r>
-          </a:p>
-        </p:txBody>
-      </p:sp>
-      <p:sp>
-        <p:nvSpPr>
-          <p:cNvPr id="602" name="AChip_2"/>
-          <p:cNvSpPr>
-            <a:spLocks noGrp="1"/>
-          </p:cNvSpPr>
-          <p:nvPr/>
-        </p:nvSpPr>
-        <p:spPr>
-          <a:xfrm>
-            <a:off x="7874000" y="2819400"/>
-            <a:ext cx="1778000" cy="381000"/>
-          </a:xfrm>
-          <a:prstGeom prst="roundRect">
-            <a:avLst>
-              <a:gd name="adj" fmla="val 50000"/>
-            </a:avLst>
-          </a:prstGeom>
-          <a:solidFill>
-            <a:srgbClr val="E8C8F8"/>
-          </a:solidFill>
-          <a:ln w="12700">
-            <a:solidFill>
-              <a:srgbClr val="7B2D8E"/>
-            </a:solidFill>
-          </a:ln>
-        </p:spPr>
-        <p:txBody>
-          <a:bodyPr anchor="ctr"/>
-          <a:lstStyle/>
-          <a:p>
-            <a:endParaRPr/>
-          </a:p>
-        </p:txBody>
-      </p:sp>
-      <p:sp>
-        <p:nvSpPr>
-          <p:cNvPr id="702" name="AChipTxt_2"/>
-          <p:cNvSpPr>
-            <a:spLocks noGrp="1"/>
-          </p:cNvSpPr>
-          <p:nvPr/>
-        </p:nvSpPr>
-        <p:spPr>
-          <a:xfrm>
-            <a:off x="7874000" y="2819400"/>
-            <a:ext cx="1778000" cy="381000"/>
-          </a:xfrm>
-          <a:prstGeom prst="rect">
-            <a:avLst/>
-          </a:prstGeom>
-          <a:noFill/>
-          <a:ln>
-            <a:noFill/>
-          </a:ln>
-        </p:spPr>
-        <p:txBody>
-          <a:bodyPr lIns="91440" tIns="45720" rIns="91440" bIns="45720" anchor="ctr"/>
-          <a:lstStyle/>
-          <a:p>
-            <a:pPr algn="ctr">
-              <a:buNone/>
-            </a:pPr>
-            <a:r>
-              <a:rPr lang="en-US" sz="1200" b="1" i="0" dirty="0">
-                <a:solidFill>
-                  <a:srgbClr val="7B2D8E"/>
-                </a:solidFill>
-              </a:rPr>
-              <a:t>Brainstorm</a:t>
-            </a:r>
-          </a:p>
-        </p:txBody>
-      </p:sp>
-      <p:sp>
-        <p:nvSpPr>
-          <p:cNvPr id="603" name="AChip_3"/>
-          <p:cNvSpPr>
-            <a:spLocks noGrp="1"/>
-          </p:cNvSpPr>
-          <p:nvPr/>
-        </p:nvSpPr>
-        <p:spPr>
-          <a:xfrm>
-            <a:off x="9906000" y="2819400"/>
-            <a:ext cx="1778000" cy="381000"/>
-          </a:xfrm>
-          <a:prstGeom prst="roundRect">
-            <a:avLst>
-              <a:gd name="adj" fmla="val 50000"/>
-            </a:avLst>
-          </a:prstGeom>
-          <a:solidFill>
-            <a:srgbClr val="E8C8F8"/>
-          </a:solidFill>
-          <a:ln w="12700">
-            <a:solidFill>
-              <a:srgbClr val="7B2D8E"/>
-            </a:solidFill>
-          </a:ln>
-        </p:spPr>
-        <p:txBody>
-          <a:bodyPr anchor="ctr"/>
-          <a:lstStyle/>
-          <a:p>
-            <a:endParaRPr/>
-          </a:p>
-        </p:txBody>
-      </p:sp>
-      <p:sp>
-        <p:nvSpPr>
-          <p:cNvPr id="703" name="AChipTxt_3"/>
-          <p:cNvSpPr>
-            <a:spLocks noGrp="1"/>
-          </p:cNvSpPr>
-          <p:nvPr/>
-        </p:nvSpPr>
-        <p:spPr>
-          <a:xfrm>
-            <a:off x="9906000" y="2819400"/>
-            <a:ext cx="1778000" cy="381000"/>
-          </a:xfrm>
-          <a:prstGeom prst="rect">
-            <a:avLst/>
-          </a:prstGeom>
-          <a:noFill/>
-          <a:ln>
-            <a:noFill/>
-          </a:ln>
-        </p:spPr>
-        <p:txBody>
-          <a:bodyPr lIns="91440" tIns="45720" rIns="91440" bIns="45720" anchor="ctr"/>
-          <a:lstStyle/>
-          <a:p>
-            <a:pPr algn="ctr">
-              <a:buNone/>
-            </a:pPr>
-            <a:r>
-              <a:rPr lang="en-US" sz="1200" b="1" i="0" dirty="0">
-                <a:solidFill>
-                  <a:srgbClr val="7B2D8E"/>
-                </a:solidFill>
-              </a:rPr>
-              <a:t>Classify</a:t>
-            </a:r>
-          </a:p>
-        </p:txBody>
-      </p:sp>
-      <p:sp>
-        <p:nvSpPr>
-          <p:cNvPr id="604" name="AChip_4"/>
-          <p:cNvSpPr>
-            <a:spLocks noGrp="1"/>
-          </p:cNvSpPr>
-          <p:nvPr/>
-        </p:nvSpPr>
-        <p:spPr>
-          <a:xfrm>
-            <a:off x="7874000" y="3327400"/>
-            <a:ext cx="1778000" cy="381000"/>
-          </a:xfrm>
-          <a:prstGeom prst="roundRect">
-            <a:avLst>
-              <a:gd name="adj" fmla="val 50000"/>
-            </a:avLst>
-          </a:prstGeom>
-          <a:solidFill>
-            <a:srgbClr val="E8C8F8"/>
-          </a:solidFill>
-          <a:ln w="12700">
-            <a:solidFill>
-              <a:srgbClr val="7B2D8E"/>
-            </a:solidFill>
-          </a:ln>
-        </p:spPr>
-        <p:txBody>
-          <a:bodyPr anchor="ctr"/>
-          <a:lstStyle/>
-          <a:p>
-            <a:endParaRPr/>
-          </a:p>
-        </p:txBody>
-      </p:sp>
-      <p:sp>
-        <p:nvSpPr>
-          <p:cNvPr id="704" name="AChipTxt_4"/>
-          <p:cNvSpPr>
-            <a:spLocks noGrp="1"/>
-          </p:cNvSpPr>
-          <p:nvPr/>
-        </p:nvSpPr>
-        <p:spPr>
-          <a:xfrm>
-            <a:off x="7874000" y="3327400"/>
-            <a:ext cx="1778000" cy="381000"/>
-          </a:xfrm>
-          <a:prstGeom prst="rect">
-            <a:avLst/>
-          </a:prstGeom>
-          <a:noFill/>
-          <a:ln>
-            <a:noFill/>
-          </a:ln>
-        </p:spPr>
-        <p:txBody>
-          <a:bodyPr lIns="91440" tIns="45720" rIns="91440" bIns="45720" anchor="ctr"/>
-          <a:lstStyle/>
-          <a:p>
-            <a:pPr algn="ctr">
-              <a:buNone/>
-            </a:pPr>
-            <a:r>
-              <a:rPr lang="en-US" sz="1200" b="1" i="0" dirty="0">
-                <a:solidFill>
-                  <a:srgbClr val="7B2D8E"/>
-                </a:solidFill>
-              </a:rPr>
-              <a:t>Synthesise</a:t>
-            </a:r>
-          </a:p>
-        </p:txBody>
-      </p:sp>
-      <p:sp>
-        <p:nvSpPr>
-          <p:cNvPr id="605" name="AChip_5"/>
-          <p:cNvSpPr>
-            <a:spLocks noGrp="1"/>
-          </p:cNvSpPr>
-          <p:nvPr/>
-        </p:nvSpPr>
-        <p:spPr>
-          <a:xfrm>
-            <a:off x="9906000" y="3327400"/>
-            <a:ext cx="1778000" cy="381000"/>
-          </a:xfrm>
-          <a:prstGeom prst="roundRect">
-            <a:avLst>
-              <a:gd name="adj" fmla="val 50000"/>
-            </a:avLst>
-          </a:prstGeom>
-          <a:solidFill>
-            <a:srgbClr val="E8C8F8"/>
-          </a:solidFill>
-          <a:ln w="12700">
-            <a:solidFill>
-              <a:srgbClr val="7B2D8E"/>
-            </a:solidFill>
-          </a:ln>
-        </p:spPr>
-        <p:txBody>
-          <a:bodyPr anchor="ctr"/>
-          <a:lstStyle/>
-          <a:p>
-            <a:endParaRPr/>
-          </a:p>
-        </p:txBody>
-      </p:sp>
-      <p:sp>
-        <p:nvSpPr>
-          <p:cNvPr id="705" name="AChipTxt_5"/>
-          <p:cNvSpPr>
-            <a:spLocks noGrp="1"/>
-          </p:cNvSpPr>
-          <p:nvPr/>
-        </p:nvSpPr>
-        <p:spPr>
-          <a:xfrm>
-            <a:off x="9906000" y="3327400"/>
-            <a:ext cx="1778000" cy="381000"/>
-          </a:xfrm>
-          <a:prstGeom prst="rect">
-            <a:avLst/>
-          </a:prstGeom>
-          <a:noFill/>
-          <a:ln>
-            <a:noFill/>
-          </a:ln>
-        </p:spPr>
-        <p:txBody>
-          <a:bodyPr lIns="91440" tIns="45720" rIns="91440" bIns="45720" anchor="ctr"/>
-          <a:lstStyle/>
-          <a:p>
-            <a:pPr algn="ctr">
-              <a:buNone/>
-            </a:pPr>
-            <a:r>
-              <a:rPr lang="en-US" sz="1200" b="1" i="0" dirty="0">
-                <a:solidFill>
-                  <a:srgbClr val="7B2D8E"/>
-                </a:solidFill>
-              </a:rPr>
-              <a:t>Plan</a:t>
-            </a:r>
-          </a:p>
-        </p:txBody>
-      </p:sp>
-      <p:sp>
-        <p:nvSpPr>
-          <p:cNvPr id="800" name="UnassignedLabel"/>
-          <p:cNvSpPr>
-            <a:spLocks noGrp="1"/>
-          </p:cNvSpPr>
-          <p:nvPr/>
-        </p:nvSpPr>
-        <p:spPr>
-          <a:xfrm>
-            <a:off x="7747000" y="4127500"/>
-            <a:ext cx="4064000" cy="254000"/>
-          </a:xfrm>
-          <a:prstGeom prst="rect">
-            <a:avLst/>
-          </a:prstGeom>
-          <a:noFill/>
-          <a:ln>
-            <a:noFill/>
-          </a:ln>
-        </p:spPr>
-        <p:txBody>
-          <a:bodyPr lIns="91440" tIns="45720" rIns="91440" bIns="45720" anchor="ctr"/>
-          <a:lstStyle/>
-          <a:p>
-            <a:pPr algn="l">
-              <a:buNone/>
-            </a:pPr>
-            <a:r>
-              <a:rPr lang="en-US" sz="1100" b="1" i="0" dirty="0">
-                <a:solidFill>
-                  <a:srgbClr val="444444"/>
-                </a:solidFill>
-              </a:rPr>
-              <a:t>Not assigned to this persona:</a:t>
-            </a:r>
-          </a:p>
-        </p:txBody>
-      </p:sp>
-      <p:sp>
-        <p:nvSpPr>
-          <p:cNvPr id="810" name="UChip_0"/>
-          <p:cNvSpPr>
-            <a:spLocks noGrp="1"/>
-          </p:cNvSpPr>
-          <p:nvPr/>
-        </p:nvSpPr>
-        <p:spPr>
-          <a:xfrm>
-            <a:off x="7874000" y="4318000"/>
-            <a:ext cx="1778000" cy="279400"/>
-          </a:xfrm>
-          <a:prstGeom prst="roundRect">
-            <a:avLst>
-              <a:gd name="adj" fmla="val 50000"/>
-            </a:avLst>
-          </a:prstGeom>
-          <a:solidFill>
-            <a:srgbClr val="F5F5F5"/>
-          </a:solidFill>
-          <a:ln w="12700">
-            <a:solidFill>
-              <a:srgbClr val="777777"/>
-            </a:solidFill>
-          </a:ln>
-        </p:spPr>
-        <p:txBody>
-          <a:bodyPr anchor="ctr"/>
-          <a:lstStyle/>
-          <a:p>
-            <a:endParaRPr/>
-          </a:p>
-        </p:txBody>
-      </p:sp>
-      <p:sp>
-        <p:nvSpPr>
-          <p:cNvPr id="820" name="UChipTxt_0"/>
-          <p:cNvSpPr>
-            <a:spLocks noGrp="1"/>
-          </p:cNvSpPr>
-          <p:nvPr/>
-        </p:nvSpPr>
-        <p:spPr>
-          <a:xfrm>
-            <a:off x="7874000" y="4318000"/>
-            <a:ext cx="1778000" cy="279400"/>
-          </a:xfrm>
-          <a:prstGeom prst="rect">
-            <a:avLst/>
-          </a:prstGeom>
-          <a:noFill/>
-          <a:ln>
-            <a:noFill/>
-          </a:ln>
-        </p:spPr>
-        <p:txBody>
-          <a:bodyPr lIns="91440" tIns="45720" rIns="91440" bIns="45720" anchor="ctr"/>
-          <a:lstStyle/>
-          <a:p>
-            <a:pPr algn="ctr">
-              <a:buNone/>
-            </a:pPr>
-            <a:r>
-              <a:rPr lang="en-US" sz="1200" b="1" i="0" dirty="0">
-                <a:solidFill>
-                  <a:srgbClr val="222222"/>
-                </a:solidFill>
-              </a:rPr>
-              <a:t>Write Code</a:t>
-            </a:r>
-          </a:p>
-        </p:txBody>
-      </p:sp>
-      <p:sp>
-        <p:nvSpPr>
-          <p:cNvPr id="811" name="UChip_1"/>
-          <p:cNvSpPr>
-            <a:spLocks noGrp="1"/>
-          </p:cNvSpPr>
-          <p:nvPr/>
-        </p:nvSpPr>
-        <p:spPr>
-          <a:xfrm>
-            <a:off x="9906000" y="4318000"/>
-            <a:ext cx="1778000" cy="279400"/>
-          </a:xfrm>
-          <a:prstGeom prst="roundRect">
-            <a:avLst>
-              <a:gd name="adj" fmla="val 50000"/>
-            </a:avLst>
-          </a:prstGeom>
-          <a:solidFill>
-            <a:srgbClr val="F5F5F5"/>
-          </a:solidFill>
-          <a:ln w="12700">
-            <a:solidFill>
-              <a:srgbClr val="777777"/>
-            </a:solidFill>
-          </a:ln>
-        </p:spPr>
-        <p:txBody>
-          <a:bodyPr anchor="ctr"/>
-          <a:lstStyle/>
-          <a:p>
-            <a:endParaRPr/>
-          </a:p>
-        </p:txBody>
-      </p:sp>
-      <p:sp>
-        <p:nvSpPr>
-          <p:cNvPr id="821" name="UChipTxt_1"/>
-          <p:cNvSpPr>
-            <a:spLocks noGrp="1"/>
-          </p:cNvSpPr>
-          <p:nvPr/>
-        </p:nvSpPr>
-        <p:spPr>
-          <a:xfrm>
-            <a:off x="9906000" y="4318000"/>
-            <a:ext cx="1778000" cy="279400"/>
-          </a:xfrm>
-          <a:prstGeom prst="rect">
-            <a:avLst/>
-          </a:prstGeom>
-          <a:noFill/>
-          <a:ln>
-            <a:noFill/>
-          </a:ln>
-        </p:spPr>
-        <p:txBody>
-          <a:bodyPr lIns="91440" tIns="45720" rIns="91440" bIns="45720" anchor="ctr"/>
-          <a:lstStyle/>
-          <a:p>
-            <a:pPr algn="ctr">
-              <a:buNone/>
-            </a:pPr>
-            <a:r>
-              <a:rPr lang="en-US" sz="1200" b="1" i="0" dirty="0">
-                <a:solidFill>
-                  <a:srgbClr val="222222"/>
-                </a:solidFill>
-              </a:rPr>
-              <a:t>Debug</a:t>
-            </a:r>
-          </a:p>
-        </p:txBody>
-      </p:sp>
-      <p:sp>
-        <p:nvSpPr>
-          <p:cNvPr id="812" name="UChip_2"/>
-          <p:cNvSpPr>
-            <a:spLocks noGrp="1"/>
-          </p:cNvSpPr>
-          <p:nvPr/>
-        </p:nvSpPr>
-        <p:spPr>
-          <a:xfrm>
-            <a:off x="7874000" y="4673600"/>
-            <a:ext cx="1778000" cy="279400"/>
-          </a:xfrm>
-          <a:prstGeom prst="roundRect">
-            <a:avLst>
-              <a:gd name="adj" fmla="val 50000"/>
-            </a:avLst>
-          </a:prstGeom>
-          <a:solidFill>
-            <a:srgbClr val="F5F5F5"/>
-          </a:solidFill>
-          <a:ln w="12700">
-            <a:solidFill>
-              <a:srgbClr val="777777"/>
-            </a:solidFill>
-          </a:ln>
-        </p:spPr>
-        <p:txBody>
-          <a:bodyPr anchor="ctr"/>
-          <a:lstStyle/>
-          <a:p>
-            <a:endParaRPr/>
-          </a:p>
-        </p:txBody>
-      </p:sp>
-      <p:sp>
-        <p:nvSpPr>
-          <p:cNvPr id="822" name="UChipTxt_2"/>
-          <p:cNvSpPr>
-            <a:spLocks noGrp="1"/>
-          </p:cNvSpPr>
-          <p:nvPr/>
-        </p:nvSpPr>
-        <p:spPr>
-          <a:xfrm>
-            <a:off x="7874000" y="4673600"/>
-            <a:ext cx="1778000" cy="279400"/>
-          </a:xfrm>
-          <a:prstGeom prst="rect">
-            <a:avLst/>
-          </a:prstGeom>
-          <a:noFill/>
-          <a:ln>
-            <a:noFill/>
-          </a:ln>
-        </p:spPr>
-        <p:txBody>
-          <a:bodyPr lIns="91440" tIns="45720" rIns="91440" bIns="45720" anchor="ctr"/>
-          <a:lstStyle/>
-          <a:p>
-            <a:pPr algn="ctr">
-              <a:buNone/>
-            </a:pPr>
-            <a:r>
-              <a:rPr lang="en-US" sz="1200" b="1" i="0" dirty="0">
-                <a:solidFill>
-                  <a:srgbClr val="222222"/>
-                </a:solidFill>
-              </a:rPr>
-              <a:t>Translate</a:t>
-            </a:r>
-          </a:p>
-        </p:txBody>
-      </p:sp>
-      <p:sp>
-        <p:nvSpPr>
-          <p:cNvPr id="813" name="UChip_3"/>
-          <p:cNvSpPr>
-            <a:spLocks noGrp="1"/>
-          </p:cNvSpPr>
-          <p:nvPr/>
-        </p:nvSpPr>
-        <p:spPr>
-          <a:xfrm>
-            <a:off x="9906000" y="4673600"/>
-            <a:ext cx="1778000" cy="279400"/>
-          </a:xfrm>
-          <a:prstGeom prst="roundRect">
-            <a:avLst>
-              <a:gd name="adj" fmla="val 50000"/>
-            </a:avLst>
-          </a:prstGeom>
-          <a:solidFill>
-            <a:srgbClr val="F5F5F5"/>
-          </a:solidFill>
-          <a:ln w="12700">
-            <a:solidFill>
-              <a:srgbClr val="777777"/>
-            </a:solidFill>
-          </a:ln>
-        </p:spPr>
-        <p:txBody>
-          <a:bodyPr anchor="ctr"/>
-          <a:lstStyle/>
-          <a:p>
-            <a:endParaRPr/>
-          </a:p>
-        </p:txBody>
-      </p:sp>
-      <p:sp>
-        <p:nvSpPr>
-          <p:cNvPr id="823" name="UChipTxt_3"/>
-          <p:cNvSpPr>
-            <a:spLocks noGrp="1"/>
-          </p:cNvSpPr>
-          <p:nvPr/>
-        </p:nvSpPr>
-        <p:spPr>
-          <a:xfrm>
-            <a:off x="9906000" y="4673600"/>
-            <a:ext cx="1778000" cy="279400"/>
-          </a:xfrm>
-          <a:prstGeom prst="rect">
-            <a:avLst/>
-          </a:prstGeom>
-          <a:noFill/>
-          <a:ln>
-            <a:noFill/>
-          </a:ln>
-        </p:spPr>
-        <p:txBody>
-          <a:bodyPr lIns="91440" tIns="45720" rIns="91440" bIns="45720" anchor="ctr"/>
-          <a:lstStyle/>
-          <a:p>
-            <a:pPr algn="ctr">
-              <a:buNone/>
-            </a:pPr>
-            <a:r>
-              <a:rPr lang="en-US" sz="1200" b="1" i="0" dirty="0">
-                <a:solidFill>
-                  <a:srgbClr val="222222"/>
-                </a:solidFill>
-              </a:rPr>
-              <a:t>Search</a:t>
-            </a:r>
-          </a:p>
-        </p:txBody>
-      </p:sp>
-      <p:sp>
-        <p:nvSpPr>
-          <p:cNvPr id="814" name="UChip_4"/>
-          <p:cNvSpPr>
-            <a:spLocks noGrp="1"/>
-          </p:cNvSpPr>
-          <p:nvPr/>
-        </p:nvSpPr>
-        <p:spPr>
-          <a:xfrm>
-            <a:off x="7874000" y="5029200"/>
-            <a:ext cx="1778000" cy="279400"/>
-          </a:xfrm>
-          <a:prstGeom prst="roundRect">
-            <a:avLst>
-              <a:gd name="adj" fmla="val 50000"/>
-            </a:avLst>
-          </a:prstGeom>
-          <a:solidFill>
-            <a:srgbClr val="F5F5F5"/>
-          </a:solidFill>
-          <a:ln w="12700">
-            <a:solidFill>
-              <a:srgbClr val="777777"/>
-            </a:solidFill>
-          </a:ln>
-        </p:spPr>
-        <p:txBody>
-          <a:bodyPr anchor="ctr"/>
-          <a:lstStyle/>
-          <a:p>
-            <a:endParaRPr/>
-          </a:p>
-        </p:txBody>
-      </p:sp>
-      <p:sp>
-        <p:nvSpPr>
-          <p:cNvPr id="824" name="UChipTxt_4"/>
-          <p:cNvSpPr>
-            <a:spLocks noGrp="1"/>
-          </p:cNvSpPr>
-          <p:nvPr/>
-        </p:nvSpPr>
-        <p:spPr>
-          <a:xfrm>
-            <a:off x="7874000" y="5029200"/>
-            <a:ext cx="1778000" cy="279400"/>
-          </a:xfrm>
-          <a:prstGeom prst="rect">
-            <a:avLst/>
-          </a:prstGeom>
-          <a:noFill/>
-          <a:ln>
-            <a:noFill/>
-          </a:ln>
-        </p:spPr>
-        <p:txBody>
-          <a:bodyPr lIns="91440" tIns="45720" rIns="91440" bIns="45720" anchor="ctr"/>
-          <a:lstStyle/>
-          <a:p>
-            <a:pPr algn="ctr">
-              <a:buNone/>
-            </a:pPr>
-            <a:r>
-              <a:rPr lang="en-US" sz="1200" b="1" i="0" dirty="0">
-                <a:solidFill>
-                  <a:srgbClr val="222222"/>
-                </a:solidFill>
-              </a:rPr>
-              <a:t>Reformat</a:t>
-            </a:r>
-          </a:p>
-        </p:txBody>
-      </p:sp>
-      <p:sp>
-        <p:nvSpPr>
-          <p:cNvPr id="815" name="UChip_5"/>
-          <p:cNvSpPr>
-            <a:spLocks noGrp="1"/>
-          </p:cNvSpPr>
-          <p:nvPr/>
-        </p:nvSpPr>
-        <p:spPr>
-          <a:xfrm>
-            <a:off x="9906000" y="5029200"/>
-            <a:ext cx="1778000" cy="279400"/>
-          </a:xfrm>
-          <a:prstGeom prst="roundRect">
-            <a:avLst>
-              <a:gd name="adj" fmla="val 50000"/>
-            </a:avLst>
-          </a:prstGeom>
-          <a:solidFill>
-            <a:srgbClr val="F5F5F5"/>
-          </a:solidFill>
-          <a:ln w="12700">
-            <a:solidFill>
-              <a:srgbClr val="777777"/>
-            </a:solidFill>
-          </a:ln>
-        </p:spPr>
-        <p:txBody>
-          <a:bodyPr anchor="ctr"/>
-          <a:lstStyle/>
-          <a:p>
-            <a:endParaRPr/>
-          </a:p>
-        </p:txBody>
-      </p:sp>
-      <p:sp>
-        <p:nvSpPr>
-          <p:cNvPr id="825" name="UChipTxt_5"/>
-          <p:cNvSpPr>
-            <a:spLocks noGrp="1"/>
-          </p:cNvSpPr>
-          <p:nvPr/>
-        </p:nvSpPr>
-        <p:spPr>
-          <a:xfrm>
-            <a:off x="9906000" y="5029200"/>
-            <a:ext cx="1778000" cy="279400"/>
-          </a:xfrm>
-          <a:prstGeom prst="rect">
-            <a:avLst/>
-          </a:prstGeom>
-          <a:noFill/>
-          <a:ln>
-            <a:noFill/>
-          </a:ln>
-        </p:spPr>
-        <p:txBody>
-          <a:bodyPr lIns="91440" tIns="45720" rIns="91440" bIns="45720" anchor="ctr"/>
-          <a:lstStyle/>
-          <a:p>
-            <a:pPr algn="ctr">
-              <a:buNone/>
-            </a:pPr>
-            <a:r>
-              <a:rPr lang="en-US" sz="1200" b="1" i="0" dirty="0">
-                <a:solidFill>
-                  <a:srgbClr val="222222"/>
-                </a:solidFill>
-              </a:rPr>
-              <a:t>Extract</a:t>
-            </a:r>
-          </a:p>
-        </p:txBody>
-      </p:sp>
-      <p:sp>
-        <p:nvSpPr>
-          <p:cNvPr id="900" name="Line900"/>
-          <p:cNvSpPr>
-            <a:spLocks noGrp="1"/>
-          </p:cNvSpPr>
-          <p:nvPr/>
-        </p:nvSpPr>
-        <p:spPr>
-          <a:xfrm>
-            <a:off x="4572000" y="3403600"/>
-            <a:ext cx="254000" cy="12700"/>
-          </a:xfrm>
-          <a:prstGeom prst="line">
-            <a:avLst/>
-          </a:prstGeom>
-          <a:noFill/>
-          <a:ln w="18000">
-            <a:solidFill>
-              <a:srgbClr val="1F4E79"/>
-            </a:solidFill>
-            <a:prstDash val="solid"/>
-          </a:ln>
-        </p:spPr>
-        <p:txBody>
-          <a:bodyPr/>
-          <a:lstStyle/>
-          <a:p>
-            <a:endParaRPr/>
-          </a:p>
-        </p:txBody>
-      </p:sp>
-      <p:sp>
-        <p:nvSpPr>
-          <p:cNvPr id="901" name="Line901"/>
-          <p:cNvSpPr>
-            <a:spLocks noGrp="1"/>
-          </p:cNvSpPr>
-          <p:nvPr/>
-        </p:nvSpPr>
-        <p:spPr>
-          <a:xfrm>
-            <a:off x="7366000" y="3403600"/>
-            <a:ext cx="254000" cy="12700"/>
-          </a:xfrm>
-          <a:prstGeom prst="line">
-            <a:avLst/>
-          </a:prstGeom>
-          <a:noFill/>
-          <a:ln w="18000">
-            <a:solidFill>
-              <a:srgbClr val="7B2D8E"/>
-            </a:solidFill>
-            <a:prstDash val="solid"/>
-          </a:ln>
-        </p:spPr>
-        <p:txBody>
-          <a:bodyPr/>
-          <a:lstStyle/>
-          <a:p>
-            <a:endParaRPr/>
-          </a:p>
-        </p:txBody>
-      </p:sp>
-      <p:sp>
-        <p:nvSpPr>
-          <p:cNvPr id="902" name="LineLabel1"/>
-          <p:cNvSpPr>
-            <a:spLocks noGrp="1"/>
-          </p:cNvSpPr>
-          <p:nvPr/>
-        </p:nvSpPr>
-        <p:spPr>
-          <a:xfrm>
-            <a:off x="4572000" y="3149600"/>
-            <a:ext cx="254000" cy="228600"/>
-          </a:xfrm>
-          <a:prstGeom prst="rect">
-            <a:avLst/>
-          </a:prstGeom>
-          <a:noFill/>
-          <a:ln>
-            <a:noFill/>
-          </a:ln>
-        </p:spPr>
-        <p:txBody>
-          <a:bodyPr lIns="91440" tIns="45720" rIns="91440" bIns="45720" anchor="ctr"/>
-          <a:lstStyle/>
-          <a:p>
-            <a:pPr algn="ctr">
-              <a:buNone/>
-            </a:pPr>
-            <a:r>
-              <a:rPr lang="en-US" sz="1400" b="1" i="0" dirty="0">
-                <a:solidFill>
-                  <a:srgbClr val="1F4E79"/>
-                </a:solidFill>
-              </a:rPr>
-              <a:t>→</a:t>
-            </a:r>
-          </a:p>
-        </p:txBody>
-      </p:sp>
-      <p:sp>
-        <p:nvSpPr>
-          <p:cNvPr id="903" name="LineLabel2"/>
-          <p:cNvSpPr>
-            <a:spLocks noGrp="1"/>
-          </p:cNvSpPr>
-          <p:nvPr/>
-        </p:nvSpPr>
-        <p:spPr>
-          <a:xfrm>
-            <a:off x="7366000" y="3149600"/>
-            <a:ext cx="254000" cy="228600"/>
-          </a:xfrm>
-          <a:prstGeom prst="rect">
-            <a:avLst/>
-          </a:prstGeom>
-          <a:noFill/>
-          <a:ln>
-            <a:noFill/>
-          </a:ln>
-        </p:spPr>
-        <p:txBody>
-          <a:bodyPr lIns="91440" tIns="45720" rIns="91440" bIns="45720" anchor="ctr"/>
-          <a:lstStyle/>
-          <a:p>
-            <a:pPr algn="ctr">
-              <a:buNone/>
-            </a:pPr>
-            <a:r>
-              <a:rPr lang="en-US" sz="1400" b="1" i="0" dirty="0">
-                <a:solidFill>
-                  <a:srgbClr val="7B2D8E"/>
-                </a:solidFill>
-              </a:rPr>
-              <a:t>→</a:t>
-            </a:r>
-          </a:p>
-        </p:txBody>
-      </p:sp>
-      <p:sp>
-        <p:nvSpPr>
-          <p:cNvPr id="950" name="KeyBg"/>
-          <p:cNvSpPr>
-            <a:spLocks noGrp="1"/>
-          </p:cNvSpPr>
-          <p:nvPr/>
-        </p:nvSpPr>
-        <p:spPr>
-          <a:xfrm>
-            <a:off x="254000" y="6350000"/>
-            <a:ext cx="11684000" cy="406400"/>
-          </a:xfrm>
-          <a:prstGeom prst="rect">
-            <a:avLst/>
-          </a:prstGeom>
-          <a:solidFill>
-            <a:srgbClr val="F0F0F0"/>
-          </a:solidFill>
-          <a:ln w="12700">
-            <a:solidFill>
-              <a:srgbClr val="CCCCCC"/>
-            </a:solidFill>
-          </a:ln>
-        </p:spPr>
-        <p:txBody>
-          <a:bodyPr anchor="ctr"/>
-          <a:lstStyle/>
-          <a:p>
-            <a:endParaRPr/>
-          </a:p>
-        </p:txBody>
-      </p:sp>
-      <p:sp>
-        <p:nvSpPr>
-          <p:cNvPr id="951" name="KeyTxt"/>
-          <p:cNvSpPr>
-            <a:spLocks noGrp="1"/>
-          </p:cNvSpPr>
-          <p:nvPr/>
-        </p:nvSpPr>
-        <p:spPr>
-          <a:xfrm>
-            <a:off x="254000" y="6350000"/>
-            <a:ext cx="11684000" cy="406400"/>
-          </a:xfrm>
-          <a:prstGeom prst="rect">
-            <a:avLst/>
-          </a:prstGeom>
-          <a:noFill/>
-          <a:ln>
-            <a:noFill/>
-          </a:ln>
-        </p:spPr>
-        <p:txBody>
-          <a:bodyPr lIns="91440" tIns="45720" rIns="91440" bIns="45720" anchor="ctr"/>
-          <a:lstStyle/>
-          <a:p>
-            <a:pPr algn="ctr">
-              <a:buNone/>
-            </a:pPr>
-            <a:r>
-              <a:rPr lang="en-US" sz="1100" b="0" i="0" dirty="0">
-                <a:solidFill>
-                  <a:srgbClr val="666666"/>
-                </a:solidFill>
-              </a:rPr>
-              <a:t>Context pulls from the full inventory each turn  ·  Persona is pre-configured with a fixed skill set  ·  Unassigned skills are unavailable to the persona</a:t>
+              <a:rPr lang="en-US" sz="1800" i="1" dirty="0">
+                <a:solidFill>
+                  <a:srgbClr val="555555"/>
+                </a:solidFill>
+              </a:rPr>
+              <a:t>The persona is the colleague you handed it to.</a:t>
             </a:r>
           </a:p>
         </p:txBody>
@@ -7371,7 +5217,7 @@
     </p:spTree>
     <p:extLst>
       <p:ext uri="{BB962C8B-B14F-4D97-AF65-F5344CB8AC3E}">
-        <p14:creationId xmlns:p14="http://schemas.microsoft.com/office/powerpoint/2010/main" val="891345001"/>
+        <p14:creationId xmlns:p14="http://schemas.microsoft.com/office/powerpoint/2010/main" val="1363818408"/>
       </p:ext>
     </p:extLst>
   </p:cSld>
@@ -7400,6 +5246,3314 @@
       </p:grpSpPr>
       <p:sp>
         <p:nvSpPr>
+          <p:cNvPr id="101" name="LeftHeader"/>
+          <p:cNvSpPr>
+            <a:spLocks noGrp="1"/>
+          </p:cNvSpPr>
+          <p:nvPr/>
+        </p:nvSpPr>
+        <p:spPr>
+          <a:xfrm>
+            <a:off x="508000" y="0"/>
+            <a:ext cx="5334000" cy="635000"/>
+          </a:xfrm>
+          <a:prstGeom prst="rect">
+            <a:avLst/>
+          </a:prstGeom>
+          <a:solidFill>
+            <a:srgbClr val="1F4E79"/>
+          </a:solidFill>
+          <a:ln>
+            <a:noFill/>
+          </a:ln>
+        </p:spPr>
+        <p:txBody>
+          <a:bodyPr anchor="ctr"/>
+          <a:lstStyle/>
+          <a:p>
+            <a:pPr algn="ctr">
+              <a:buNone/>
+            </a:pPr>
+            <a:r>
+              <a:rPr lang="en-US" sz="1600" b="1" i="0" dirty="0">
+                <a:solidFill>
+                  <a:srgbClr val="FFFFFF"/>
+                </a:solidFill>
+              </a:rPr>
+              <a:t>Working with Context</a:t>
+            </a:r>
+          </a:p>
+        </p:txBody>
+      </p:sp>
+      <p:sp>
+        <p:nvSpPr>
+          <p:cNvPr id="102" name="RightHeader"/>
+          <p:cNvSpPr>
+            <a:spLocks noGrp="1"/>
+          </p:cNvSpPr>
+          <p:nvPr/>
+        </p:nvSpPr>
+        <p:spPr>
+          <a:xfrm>
+            <a:off x="6350000" y="0"/>
+            <a:ext cx="5334000" cy="635000"/>
+          </a:xfrm>
+          <a:prstGeom prst="rect">
+            <a:avLst/>
+          </a:prstGeom>
+          <a:solidFill>
+            <a:srgbClr val="7B2D8E"/>
+          </a:solidFill>
+          <a:ln>
+            <a:noFill/>
+          </a:ln>
+        </p:spPr>
+        <p:txBody>
+          <a:bodyPr anchor="ctr"/>
+          <a:lstStyle/>
+          <a:p>
+            <a:pPr algn="ctr">
+              <a:buNone/>
+            </a:pPr>
+            <a:r>
+              <a:rPr lang="en-US" sz="1600" b="1" i="0" dirty="0">
+                <a:solidFill>
+                  <a:srgbClr val="FFFFFF"/>
+                </a:solidFill>
+              </a:rPr>
+              <a:t>Working with a Persona</a:t>
+            </a:r>
+          </a:p>
+        </p:txBody>
+      </p:sp>
+      <p:sp>
+        <p:nvSpPr>
+          <p:cNvPr id="103" name="Divider"/>
+          <p:cNvSpPr>
+            <a:spLocks noGrp="1"/>
+          </p:cNvSpPr>
+          <p:nvPr/>
+        </p:nvSpPr>
+        <p:spPr>
+          <a:xfrm>
+            <a:off x="6096000" y="0"/>
+            <a:ext cx="12700" cy="6858000"/>
+          </a:xfrm>
+          <a:prstGeom prst="rect">
+            <a:avLst/>
+          </a:prstGeom>
+          <a:solidFill>
+            <a:srgbClr val="CCCCCC"/>
+          </a:solidFill>
+          <a:ln>
+            <a:noFill/>
+          </a:ln>
+        </p:spPr>
+        <p:txBody>
+          <a:bodyPr/>
+          <a:lstStyle/>
+          <a:p>
+            <a:endParaRPr/>
+          </a:p>
+        </p:txBody>
+      </p:sp>
+      <p:sp>
+        <p:nvSpPr>
+          <p:cNvPr id="104" name="LeftIconZone"/>
+          <p:cNvSpPr>
+            <a:spLocks noGrp="1"/>
+          </p:cNvSpPr>
+          <p:nvPr/>
+        </p:nvSpPr>
+        <p:spPr>
+          <a:xfrm>
+            <a:off x="508000" y="660400"/>
+            <a:ext cx="5334000" cy="1905000"/>
+          </a:xfrm>
+          <a:prstGeom prst="rect">
+            <a:avLst/>
+          </a:prstGeom>
+          <a:solidFill>
+            <a:srgbClr val="E8F1F8"/>
+          </a:solidFill>
+          <a:ln>
+            <a:noFill/>
+          </a:ln>
+        </p:spPr>
+        <p:txBody>
+          <a:bodyPr anchor="ctr"/>
+          <a:lstStyle/>
+          <a:p>
+            <a:pPr algn="ctr">
+              <a:buNone/>
+            </a:pPr>
+            <a:endParaRPr/>
+          </a:p>
+        </p:txBody>
+      </p:sp>
+      <p:sp>
+        <p:nvSpPr>
+          <p:cNvPr id="105" name="RightIconZone"/>
+          <p:cNvSpPr>
+            <a:spLocks noGrp="1"/>
+          </p:cNvSpPr>
+          <p:nvPr/>
+        </p:nvSpPr>
+        <p:spPr>
+          <a:xfrm>
+            <a:off x="6350000" y="660400"/>
+            <a:ext cx="5334000" cy="1905000"/>
+          </a:xfrm>
+          <a:prstGeom prst="rect">
+            <a:avLst/>
+          </a:prstGeom>
+          <a:solidFill>
+            <a:srgbClr val="F3EAF7"/>
+          </a:solidFill>
+          <a:ln>
+            <a:noFill/>
+          </a:ln>
+        </p:spPr>
+        <p:txBody>
+          <a:bodyPr anchor="ctr"/>
+          <a:lstStyle/>
+          <a:p>
+            <a:pPr algn="ctr">
+              <a:buNone/>
+            </a:pPr>
+            <a:endParaRPr/>
+          </a:p>
+        </p:txBody>
+      </p:sp>
+      <p:sp>
+        <p:nvSpPr>
+          <p:cNvPr id="108" name="LeftContent"/>
+          <p:cNvSpPr>
+            <a:spLocks noGrp="1"/>
+          </p:cNvSpPr>
+          <p:nvPr/>
+        </p:nvSpPr>
+        <p:spPr>
+          <a:xfrm>
+            <a:off x="508000" y="2667000"/>
+            <a:ext cx="5334000" cy="4064000"/>
+          </a:xfrm>
+          <a:prstGeom prst="rect">
+            <a:avLst/>
+          </a:prstGeom>
+          <a:solidFill>
+            <a:srgbClr val="F7FAFD"/>
+          </a:solidFill>
+          <a:ln>
+            <a:noFill/>
+          </a:ln>
+        </p:spPr>
+        <p:txBody>
+          <a:bodyPr lIns="342900" tIns="342900" rIns="342900" anchor="t"/>
+          <a:lstStyle/>
+          <a:p>
+            <a:pPr algn="ctr">
+              <a:spcBef>
+                <a:spcPts val="400"/>
+              </a:spcBef>
+              <a:spcAft>
+                <a:spcPts val="200"/>
+              </a:spcAft>
+              <a:buNone/>
+            </a:pPr>
+            <a:r>
+              <a:rPr lang="en-US" sz="1600" b="1" dirty="0">
+                <a:solidFill>
+                  <a:srgbClr val="1F4E79"/>
+                </a:solidFill>
+              </a:rPr>
+              <a:t>How you work with context</a:t>
+            </a:r>
+          </a:p>
+          <a:p>
+            <a:pPr marL="342900" indent="-342900">
+              <a:spcBef>
+                <a:spcPts val="200"/>
+              </a:spcBef>
+              <a:buFont typeface="Arial"/>
+              <a:buChar char="•"/>
+            </a:pPr>
+            <a:r>
+              <a:rPr lang="en-US" sz="1500" dirty="0">
+                <a:solidFill>
+                  <a:srgbClr val="444444"/>
+                </a:solidFill>
+              </a:rPr>
+              <a:t>Upload an Excel Spreadsheet</a:t>
+            </a:r>
+          </a:p>
+          <a:p>
+            <a:pPr marL="342900" indent="-342900">
+              <a:spcBef>
+                <a:spcPts val="200"/>
+              </a:spcBef>
+              <a:buFont typeface="Arial"/>
+              <a:buChar char="•"/>
+            </a:pPr>
+            <a:r>
+              <a:rPr lang="en-US" sz="1500" dirty="0">
+                <a:solidFill>
+                  <a:srgbClr val="444444"/>
+                </a:solidFill>
+              </a:rPr>
+              <a:t>Ask agent to get a list of products</a:t>
+            </a:r>
+          </a:p>
+          <a:p>
+            <a:pPr marL="342900" indent="-342900">
+              <a:spcBef>
+                <a:spcPts val="200"/>
+              </a:spcBef>
+              <a:buFont typeface="Arial"/>
+              <a:buChar char="•"/>
+            </a:pPr>
+            <a:r>
+              <a:rPr lang="en-US" sz="1500" dirty="0">
+                <a:solidFill>
+                  <a:srgbClr val="444444"/>
+                </a:solidFill>
+              </a:rPr>
+              <a:t>Ask agent to query the database to get the total sales volume and put into the spreadsheet.</a:t>
+            </a:r>
+          </a:p>
+          <a:p>
+            <a:pPr marL="342900" indent="-342900">
+              <a:spcBef>
+                <a:spcPts val="200"/>
+              </a:spcBef>
+              <a:buFont typeface="Arial"/>
+              <a:buChar char="•"/>
+            </a:pPr>
+            <a:r>
+              <a:rPr lang="en-US" sz="1500" dirty="0">
+                <a:solidFill>
+                  <a:srgbClr val="444444"/>
+                </a:solidFill>
+              </a:rPr>
+              <a:t>Agent uses MCP tool or CLI to work with database</a:t>
+            </a:r>
+          </a:p>
+          <a:p>
+            <a:pPr marL="342900" indent="-342900">
+              <a:spcBef>
+                <a:spcPts val="200"/>
+              </a:spcBef>
+              <a:buFont typeface="Arial"/>
+              <a:buChar char="•"/>
+            </a:pPr>
+            <a:r>
+              <a:rPr lang="en-US" sz="1500" dirty="0">
+                <a:solidFill>
+                  <a:srgbClr val="444444"/>
+                </a:solidFill>
+              </a:rPr>
+              <a:t>Ask agent to get the top 10 grossing products</a:t>
+            </a:r>
+          </a:p>
+          <a:p>
+            <a:pPr marL="342900" indent="-342900">
+              <a:spcBef>
+                <a:spcPts val="200"/>
+              </a:spcBef>
+              <a:buFont typeface="Arial"/>
+              <a:buChar char="•"/>
+            </a:pPr>
+            <a:r>
+              <a:rPr lang="en-US" sz="1500" dirty="0">
+                <a:solidFill>
+                  <a:srgbClr val="444444"/>
+                </a:solidFill>
+              </a:rPr>
+              <a:t>Ask agent to notify team members by email</a:t>
+            </a:r>
+          </a:p>
+        </p:txBody>
+      </p:sp>
+      <p:sp>
+        <p:nvSpPr>
+          <p:cNvPr id="109" name="RightContent"/>
+          <p:cNvSpPr>
+            <a:spLocks noGrp="1"/>
+          </p:cNvSpPr>
+          <p:nvPr/>
+        </p:nvSpPr>
+        <p:spPr>
+          <a:xfrm>
+            <a:off x="6350000" y="2667000"/>
+            <a:ext cx="5334000" cy="4064000"/>
+          </a:xfrm>
+          <a:prstGeom prst="rect">
+            <a:avLst/>
+          </a:prstGeom>
+          <a:solidFill>
+            <a:srgbClr val="FAF4FD"/>
+          </a:solidFill>
+          <a:ln>
+            <a:noFill/>
+          </a:ln>
+        </p:spPr>
+        <p:txBody>
+          <a:bodyPr lIns="342900" tIns="342900" rIns="342900" anchor="t"/>
+          <a:lstStyle/>
+          <a:p>
+            <a:pPr algn="ctr">
+              <a:spcBef>
+                <a:spcPts val="400"/>
+              </a:spcBef>
+              <a:spcAft>
+                <a:spcPts val="200"/>
+              </a:spcAft>
+              <a:buNone/>
+            </a:pPr>
+            <a:r>
+              <a:rPr lang="en-US" sz="1600" b="1" dirty="0">
+                <a:solidFill>
+                  <a:srgbClr val="7B2D8E"/>
+                </a:solidFill>
+              </a:rPr>
+              <a:t>How you work with a persona</a:t>
+            </a:r>
+          </a:p>
+          <a:p>
+            <a:pPr marL="342900" indent="-342900">
+              <a:spcBef>
+                <a:spcPts val="200"/>
+              </a:spcBef>
+              <a:buFont typeface="Arial"/>
+              <a:buChar char="•"/>
+            </a:pPr>
+            <a:r>
+              <a:rPr lang="en-US" sz="1500" dirty="0">
+                <a:solidFill>
+                  <a:srgbClr val="444444"/>
+                </a:solidFill>
+              </a:rPr>
+              <a:t>Dana, can you send the top 10 grossing products that were included in last month’s sales spreadsheet and send it to the marketing team. Add a column for the sales volume for each product. </a:t>
+            </a:r>
+          </a:p>
+        </p:txBody>
+      </p:sp>
+      <p:pic>
+        <p:nvPicPr>
+          <p:cNvPr id="110" name="Graphic 110" descr="Cog/gear icon representing context"/>
+          <p:cNvPicPr>
+            <a:picLocks noChangeAspect="1"/>
+          </p:cNvPicPr>
+          <p:nvPr/>
+        </p:nvPicPr>
+        <p:blipFill>
+          <a:blip>
+            <a:extLst>
+              <a:ext uri="{96DAC541-7B7A-43D3-8B79-37D633B846F1}">
+                <asvg:svgBlip xmlns:asvg="http://schemas.microsoft.com/office/drawing/2016/SVG/main" r:embed="rId2"/>
+              </a:ext>
+            </a:extLst>
+          </a:blip>
+          <a:stretch>
+            <a:fillRect/>
+          </a:stretch>
+        </p:blipFill>
+        <p:spPr>
+          <a:xfrm>
+            <a:off x="2413000" y="977900"/>
+            <a:ext cx="1270000" cy="1270000"/>
+          </a:xfrm>
+          <a:prstGeom prst="rect">
+            <a:avLst/>
+          </a:prstGeom>
+        </p:spPr>
+      </p:pic>
+      <p:pic>
+        <p:nvPicPr>
+          <p:cNvPr id="111" name="Graphic 111" descr="Person avatar icon representing persona"/>
+          <p:cNvPicPr>
+            <a:picLocks noChangeAspect="1"/>
+          </p:cNvPicPr>
+          <p:nvPr/>
+        </p:nvPicPr>
+        <p:blipFill>
+          <a:blip>
+            <a:extLst>
+              <a:ext uri="{96DAC541-7B7A-43D3-8B79-37D633B846F1}">
+                <asvg:svgBlip xmlns:asvg="http://schemas.microsoft.com/office/drawing/2016/SVG/main" r:embed="rId3"/>
+              </a:ext>
+            </a:extLst>
+          </a:blip>
+          <a:stretch>
+            <a:fillRect/>
+          </a:stretch>
+        </p:blipFill>
+        <p:spPr>
+          <a:xfrm>
+            <a:off x="8255000" y="977900"/>
+            <a:ext cx="1270000" cy="1270000"/>
+          </a:xfrm>
+          <a:prstGeom prst="rect">
+            <a:avLst/>
+          </a:prstGeom>
+        </p:spPr>
+      </p:pic>
+    </p:spTree>
+    <p:extLst>
+      <p:ext uri="{BB962C8B-B14F-4D97-AF65-F5344CB8AC3E}">
+        <p14:creationId xmlns:p14="http://schemas.microsoft.com/office/powerpoint/2010/main" val="3918661051"/>
+      </p:ext>
+    </p:extLst>
+  </p:cSld>
+  <p:clrMapOvr>
+    <a:masterClrMapping/>
+  </p:clrMapOvr>
+</p:sld>
+</file>
+
+<file path=ppt/slides/slide5.xml><?xml version="1.0" encoding="utf-8"?>
+<p:sld xmlns:a="http://schemas.openxmlformats.org/drawingml/2006/main" xmlns:r="http://schemas.openxmlformats.org/officeDocument/2006/relationships" xmlns:p="http://schemas.openxmlformats.org/presentationml/2006/main">
+  <p:cSld>
+    <p:spTree>
+      <p:nvGrpSpPr>
+        <p:cNvPr id="1" name=""/>
+        <p:cNvGrpSpPr/>
+        <p:nvPr/>
+      </p:nvGrpSpPr>
+      <p:grpSpPr>
+        <a:xfrm>
+          <a:off x="0" y="0"/>
+          <a:ext cx="0" cy="0"/>
+          <a:chOff x="0" y="0"/>
+          <a:chExt cx="0" cy="0"/>
+        </a:xfrm>
+      </p:grpSpPr>
+      <p:sp>
+        <p:nvSpPr>
+          <p:cNvPr id="200" name="TitleBg"/>
+          <p:cNvSpPr>
+            <a:spLocks noGrp="1"/>
+          </p:cNvSpPr>
+          <p:nvPr/>
+        </p:nvSpPr>
+        <p:spPr>
+          <a:xfrm>
+            <a:off x="0" y="0"/>
+            <a:ext cx="12192000" cy="609600"/>
+          </a:xfrm>
+          <a:prstGeom prst="rect">
+            <a:avLst/>
+          </a:prstGeom>
+          <a:solidFill>
+            <a:srgbClr val="1A1A2E"/>
+          </a:solidFill>
+          <a:ln>
+            <a:noFill/>
+          </a:ln>
+        </p:spPr>
+        <p:txBody>
+          <a:bodyPr anchor="ctr"/>
+          <a:lstStyle/>
+          <a:p>
+            <a:endParaRPr/>
+          </a:p>
+        </p:txBody>
+      </p:sp>
+      <p:sp>
+        <p:nvSpPr>
+          <p:cNvPr id="201" name="Title"/>
+          <p:cNvSpPr>
+            <a:spLocks noGrp="1"/>
+          </p:cNvSpPr>
+          <p:nvPr/>
+        </p:nvSpPr>
+        <p:spPr>
+          <a:xfrm>
+            <a:off x="0" y="0"/>
+            <a:ext cx="12192000" cy="609600"/>
+          </a:xfrm>
+          <a:prstGeom prst="rect">
+            <a:avLst/>
+          </a:prstGeom>
+          <a:noFill/>
+          <a:ln>
+            <a:noFill/>
+          </a:ln>
+        </p:spPr>
+        <p:txBody>
+          <a:bodyPr lIns="91440" tIns="45720" rIns="91440" bIns="45720" anchor="ctr"/>
+          <a:lstStyle/>
+          <a:p>
+            <a:pPr algn="ctr">
+              <a:buNone/>
+            </a:pPr>
+            <a:r>
+              <a:rPr lang="en-US" sz="2000" b="1" i="0" dirty="0">
+                <a:solidFill>
+                  <a:srgbClr val="FFFFFF"/>
+                </a:solidFill>
+              </a:rPr>
+              <a:t>Context sees everything · Persona gets what it needs</a:t>
+            </a:r>
+          </a:p>
+        </p:txBody>
+      </p:sp>
+      <p:sp>
+        <p:nvSpPr>
+          <p:cNvPr id="210" name="HubBg"/>
+          <p:cNvSpPr>
+            <a:spLocks noGrp="1"/>
+          </p:cNvSpPr>
+          <p:nvPr/>
+        </p:nvSpPr>
+        <p:spPr>
+          <a:xfrm>
+            <a:off x="4826000" y="2476500"/>
+            <a:ext cx="2540000" cy="1841500"/>
+          </a:xfrm>
+          <a:prstGeom prst="roundRect">
+            <a:avLst>
+              <a:gd name="adj" fmla="val 20000"/>
+            </a:avLst>
+          </a:prstGeom>
+          <a:solidFill>
+            <a:srgbClr val="1A1A2E"/>
+          </a:solidFill>
+          <a:ln w="12700">
+            <a:solidFill>
+              <a:srgbClr val="4FC3F7"/>
+            </a:solidFill>
+          </a:ln>
+        </p:spPr>
+        <p:txBody>
+          <a:bodyPr anchor="ctr"/>
+          <a:lstStyle/>
+          <a:p>
+            <a:endParaRPr/>
+          </a:p>
+        </p:txBody>
+      </p:sp>
+      <p:sp>
+        <p:nvSpPr>
+          <p:cNvPr id="211" name="HubLabel"/>
+          <p:cNvSpPr>
+            <a:spLocks noGrp="1"/>
+          </p:cNvSpPr>
+          <p:nvPr/>
+        </p:nvSpPr>
+        <p:spPr>
+          <a:xfrm>
+            <a:off x="4826000" y="2476500"/>
+            <a:ext cx="2540000" cy="482600"/>
+          </a:xfrm>
+          <a:prstGeom prst="rect">
+            <a:avLst/>
+          </a:prstGeom>
+          <a:noFill/>
+          <a:ln>
+            <a:noFill/>
+          </a:ln>
+        </p:spPr>
+        <p:txBody>
+          <a:bodyPr lIns="91440" tIns="45720" rIns="91440" bIns="45720" anchor="ctr"/>
+          <a:lstStyle/>
+          <a:p>
+            <a:pPr algn="ctr">
+              <a:buNone/>
+            </a:pPr>
+            <a:r>
+              <a:rPr lang="en-US" sz="1200" b="1" i="0" dirty="0">
+                <a:solidFill>
+                  <a:srgbClr val="4FC3F7"/>
+                </a:solidFill>
+              </a:rPr>
+              <a:t>SKILL INVENTORY</a:t>
+            </a:r>
+          </a:p>
+        </p:txBody>
+      </p:sp>
+      <p:sp>
+        <p:nvSpPr>
+          <p:cNvPr id="212" name="HubSub"/>
+          <p:cNvSpPr>
+            <a:spLocks noGrp="1"/>
+          </p:cNvSpPr>
+          <p:nvPr/>
+        </p:nvSpPr>
+        <p:spPr>
+          <a:xfrm>
+            <a:off x="4826000" y="2857500"/>
+            <a:ext cx="2540000" cy="1460500"/>
+          </a:xfrm>
+          <a:prstGeom prst="rect">
+            <a:avLst/>
+          </a:prstGeom>
+          <a:noFill/>
+          <a:ln>
+            <a:noFill/>
+          </a:ln>
+        </p:spPr>
+        <p:txBody>
+          <a:bodyPr lIns="91440" tIns="45720" rIns="91440" bIns="45720" anchor="ctr"/>
+          <a:lstStyle/>
+          <a:p>
+            <a:pPr algn="ctr">
+              <a:buNone/>
+            </a:pPr>
+            <a:r>
+              <a:rPr lang="en-US" sz="1200" b="0" i="0" dirty="0">
+                <a:solidFill>
+                  <a:srgbClr val="CCDDEE"/>
+                </a:solidFill>
+              </a:rPr>
+              <a:t>All skills available to the system</a:t>
+            </a:r>
+          </a:p>
+        </p:txBody>
+      </p:sp>
+      <p:sp>
+        <p:nvSpPr>
+          <p:cNvPr id="220" name="CtxPanel"/>
+          <p:cNvSpPr>
+            <a:spLocks noGrp="1"/>
+          </p:cNvSpPr>
+          <p:nvPr/>
+        </p:nvSpPr>
+        <p:spPr>
+          <a:xfrm>
+            <a:off x="254000" y="711200"/>
+            <a:ext cx="4318000" cy="6045200"/>
+          </a:xfrm>
+          <a:prstGeom prst="roundRect">
+            <a:avLst>
+              <a:gd name="adj" fmla="val 10000"/>
+            </a:avLst>
+          </a:prstGeom>
+          <a:solidFill>
+            <a:srgbClr val="E8F4FF"/>
+          </a:solidFill>
+          <a:ln w="12700">
+            <a:solidFill>
+              <a:srgbClr val="1F4E79"/>
+            </a:solidFill>
+          </a:ln>
+        </p:spPr>
+        <p:txBody>
+          <a:bodyPr anchor="ctr"/>
+          <a:lstStyle/>
+          <a:p>
+            <a:endParaRPr/>
+          </a:p>
+        </p:txBody>
+      </p:sp>
+      <p:sp>
+        <p:nvSpPr>
+          <p:cNvPr id="221" name="CtxHeader"/>
+          <p:cNvSpPr>
+            <a:spLocks noGrp="1"/>
+          </p:cNvSpPr>
+          <p:nvPr/>
+        </p:nvSpPr>
+        <p:spPr>
+          <a:xfrm>
+            <a:off x="254000" y="711200"/>
+            <a:ext cx="4318000" cy="508000"/>
+          </a:xfrm>
+          <a:prstGeom prst="rect">
+            <a:avLst/>
+          </a:prstGeom>
+          <a:solidFill>
+            <a:srgbClr val="1F4E79"/>
+          </a:solidFill>
+          <a:ln>
+            <a:noFill/>
+          </a:ln>
+        </p:spPr>
+        <p:txBody>
+          <a:bodyPr anchor="ctr"/>
+          <a:lstStyle/>
+          <a:p>
+            <a:endParaRPr/>
+          </a:p>
+        </p:txBody>
+      </p:sp>
+      <p:sp>
+        <p:nvSpPr>
+          <p:cNvPr id="222" name="CtxHeaderTxt"/>
+          <p:cNvSpPr>
+            <a:spLocks noGrp="1"/>
+          </p:cNvSpPr>
+          <p:nvPr/>
+        </p:nvSpPr>
+        <p:spPr>
+          <a:xfrm>
+            <a:off x="254000" y="711200"/>
+            <a:ext cx="4318000" cy="508000"/>
+          </a:xfrm>
+          <a:prstGeom prst="rect">
+            <a:avLst/>
+          </a:prstGeom>
+          <a:noFill/>
+          <a:ln>
+            <a:noFill/>
+          </a:ln>
+        </p:spPr>
+        <p:txBody>
+          <a:bodyPr lIns="91440" tIns="45720" rIns="91440" bIns="45720" anchor="ctr"/>
+          <a:lstStyle/>
+          <a:p>
+            <a:pPr algn="ctr">
+              <a:buNone/>
+            </a:pPr>
+            <a:r>
+              <a:rPr lang="en-US" sz="1500" b="1" i="0" dirty="0">
+                <a:solidFill>
+                  <a:srgbClr val="FFFFFF"/>
+                </a:solidFill>
+              </a:rPr>
+              <a:t>CONTEXT — Full Access</a:t>
+            </a:r>
+          </a:p>
+        </p:txBody>
+      </p:sp>
+      <p:sp>
+        <p:nvSpPr>
+          <p:cNvPr id="223" name="CtxSub"/>
+          <p:cNvSpPr>
+            <a:spLocks noGrp="1"/>
+          </p:cNvSpPr>
+          <p:nvPr/>
+        </p:nvSpPr>
+        <p:spPr>
+          <a:xfrm>
+            <a:off x="381000" y="1270000"/>
+            <a:ext cx="4064000" cy="355600"/>
+          </a:xfrm>
+          <a:prstGeom prst="rect">
+            <a:avLst/>
+          </a:prstGeom>
+          <a:noFill/>
+          <a:ln>
+            <a:noFill/>
+          </a:ln>
+        </p:spPr>
+        <p:txBody>
+          <a:bodyPr lIns="91440" tIns="45720" rIns="91440" bIns="45720" anchor="ctr"/>
+          <a:lstStyle/>
+          <a:p>
+            <a:pPr algn="ctr">
+              <a:buNone/>
+            </a:pPr>
+            <a:r>
+              <a:rPr lang="en-US" sz="1300" b="0" i="0" dirty="0">
+                <a:solidFill>
+                  <a:srgbClr val="1F4E79"/>
+                </a:solidFill>
+              </a:rPr>
+              <a:t>Can draw on any skill at any time</a:t>
+            </a:r>
+          </a:p>
+        </p:txBody>
+      </p:sp>
+      <p:sp>
+        <p:nvSpPr>
+          <p:cNvPr id="300" name="Chip_0"/>
+          <p:cNvSpPr>
+            <a:spLocks noGrp="1"/>
+          </p:cNvSpPr>
+          <p:nvPr/>
+        </p:nvSpPr>
+        <p:spPr>
+          <a:xfrm>
+            <a:off x="381000" y="1714500"/>
+            <a:ext cx="1270000" cy="330200"/>
+          </a:xfrm>
+          <a:prstGeom prst="roundRect">
+            <a:avLst>
+              <a:gd name="adj" fmla="val 50000"/>
+            </a:avLst>
+          </a:prstGeom>
+          <a:solidFill>
+            <a:srgbClr val="C7E3FF"/>
+          </a:solidFill>
+          <a:ln w="12700">
+            <a:solidFill>
+              <a:srgbClr val="1F4E79"/>
+            </a:solidFill>
+          </a:ln>
+        </p:spPr>
+        <p:txBody>
+          <a:bodyPr anchor="ctr"/>
+          <a:lstStyle/>
+          <a:p>
+            <a:endParaRPr/>
+          </a:p>
+        </p:txBody>
+      </p:sp>
+      <p:sp>
+        <p:nvSpPr>
+          <p:cNvPr id="400" name="ChipTxt_0"/>
+          <p:cNvSpPr>
+            <a:spLocks noGrp="1"/>
+          </p:cNvSpPr>
+          <p:nvPr/>
+        </p:nvSpPr>
+        <p:spPr>
+          <a:xfrm>
+            <a:off x="381000" y="1714500"/>
+            <a:ext cx="1270000" cy="330200"/>
+          </a:xfrm>
+          <a:prstGeom prst="rect">
+            <a:avLst/>
+          </a:prstGeom>
+          <a:noFill/>
+          <a:ln>
+            <a:noFill/>
+          </a:ln>
+        </p:spPr>
+        <p:txBody>
+          <a:bodyPr lIns="91440" tIns="45720" rIns="91440" bIns="45720" anchor="ctr"/>
+          <a:lstStyle/>
+          <a:p>
+            <a:pPr algn="ctr">
+              <a:buNone/>
+            </a:pPr>
+            <a:r>
+              <a:rPr lang="en-US" sz="1100" b="0" i="0" dirty="0">
+                <a:solidFill>
+                  <a:srgbClr val="1F4E79"/>
+                </a:solidFill>
+              </a:rPr>
+              <a:t>Summarise</a:t>
+            </a:r>
+          </a:p>
+        </p:txBody>
+      </p:sp>
+      <p:sp>
+        <p:nvSpPr>
+          <p:cNvPr id="301" name="Chip_1"/>
+          <p:cNvSpPr>
+            <a:spLocks noGrp="1"/>
+          </p:cNvSpPr>
+          <p:nvPr/>
+        </p:nvSpPr>
+        <p:spPr>
+          <a:xfrm>
+            <a:off x="1778000" y="1714500"/>
+            <a:ext cx="1270000" cy="330200"/>
+          </a:xfrm>
+          <a:prstGeom prst="roundRect">
+            <a:avLst>
+              <a:gd name="adj" fmla="val 50000"/>
+            </a:avLst>
+          </a:prstGeom>
+          <a:solidFill>
+            <a:srgbClr val="C7E3FF"/>
+          </a:solidFill>
+          <a:ln w="12700">
+            <a:solidFill>
+              <a:srgbClr val="1F4E79"/>
+            </a:solidFill>
+          </a:ln>
+        </p:spPr>
+        <p:txBody>
+          <a:bodyPr anchor="ctr"/>
+          <a:lstStyle/>
+          <a:p>
+            <a:endParaRPr/>
+          </a:p>
+        </p:txBody>
+      </p:sp>
+      <p:sp>
+        <p:nvSpPr>
+          <p:cNvPr id="401" name="ChipTxt_1"/>
+          <p:cNvSpPr>
+            <a:spLocks noGrp="1"/>
+          </p:cNvSpPr>
+          <p:nvPr/>
+        </p:nvSpPr>
+        <p:spPr>
+          <a:xfrm>
+            <a:off x="1778000" y="1714500"/>
+            <a:ext cx="1270000" cy="330200"/>
+          </a:xfrm>
+          <a:prstGeom prst="rect">
+            <a:avLst/>
+          </a:prstGeom>
+          <a:noFill/>
+          <a:ln>
+            <a:noFill/>
+          </a:ln>
+        </p:spPr>
+        <p:txBody>
+          <a:bodyPr lIns="91440" tIns="45720" rIns="91440" bIns="45720" anchor="ctr"/>
+          <a:lstStyle/>
+          <a:p>
+            <a:pPr algn="ctr">
+              <a:buNone/>
+            </a:pPr>
+            <a:r>
+              <a:rPr lang="en-US" sz="1100" b="0" i="0" dirty="0">
+                <a:solidFill>
+                  <a:srgbClr val="1F4E79"/>
+                </a:solidFill>
+              </a:rPr>
+              <a:t>Translate</a:t>
+            </a:r>
+          </a:p>
+        </p:txBody>
+      </p:sp>
+      <p:sp>
+        <p:nvSpPr>
+          <p:cNvPr id="302" name="Chip_2"/>
+          <p:cNvSpPr>
+            <a:spLocks noGrp="1"/>
+          </p:cNvSpPr>
+          <p:nvPr/>
+        </p:nvSpPr>
+        <p:spPr>
+          <a:xfrm>
+            <a:off x="3175000" y="1714500"/>
+            <a:ext cx="1270000" cy="330200"/>
+          </a:xfrm>
+          <a:prstGeom prst="roundRect">
+            <a:avLst>
+              <a:gd name="adj" fmla="val 50000"/>
+            </a:avLst>
+          </a:prstGeom>
+          <a:solidFill>
+            <a:srgbClr val="C7E3FF"/>
+          </a:solidFill>
+          <a:ln w="12700">
+            <a:solidFill>
+              <a:srgbClr val="1F4E79"/>
+            </a:solidFill>
+          </a:ln>
+        </p:spPr>
+        <p:txBody>
+          <a:bodyPr anchor="ctr"/>
+          <a:lstStyle/>
+          <a:p>
+            <a:endParaRPr/>
+          </a:p>
+        </p:txBody>
+      </p:sp>
+      <p:sp>
+        <p:nvSpPr>
+          <p:cNvPr id="402" name="ChipTxt_2"/>
+          <p:cNvSpPr>
+            <a:spLocks noGrp="1"/>
+          </p:cNvSpPr>
+          <p:nvPr/>
+        </p:nvSpPr>
+        <p:spPr>
+          <a:xfrm>
+            <a:off x="3175000" y="1714500"/>
+            <a:ext cx="1270000" cy="330200"/>
+          </a:xfrm>
+          <a:prstGeom prst="rect">
+            <a:avLst/>
+          </a:prstGeom>
+          <a:noFill/>
+          <a:ln>
+            <a:noFill/>
+          </a:ln>
+        </p:spPr>
+        <p:txBody>
+          <a:bodyPr lIns="91440" tIns="45720" rIns="91440" bIns="45720" anchor="ctr"/>
+          <a:lstStyle/>
+          <a:p>
+            <a:pPr algn="ctr">
+              <a:buNone/>
+            </a:pPr>
+            <a:r>
+              <a:rPr lang="en-US" sz="1100" b="0" i="0" dirty="0">
+                <a:solidFill>
+                  <a:srgbClr val="1F4E79"/>
+                </a:solidFill>
+              </a:rPr>
+              <a:t>Classify</a:t>
+            </a:r>
+          </a:p>
+        </p:txBody>
+      </p:sp>
+      <p:sp>
+        <p:nvSpPr>
+          <p:cNvPr id="303" name="Chip_3"/>
+          <p:cNvSpPr>
+            <a:spLocks noGrp="1"/>
+          </p:cNvSpPr>
+          <p:nvPr/>
+        </p:nvSpPr>
+        <p:spPr>
+          <a:xfrm>
+            <a:off x="381000" y="2146300"/>
+            <a:ext cx="1270000" cy="330200"/>
+          </a:xfrm>
+          <a:prstGeom prst="roundRect">
+            <a:avLst>
+              <a:gd name="adj" fmla="val 50000"/>
+            </a:avLst>
+          </a:prstGeom>
+          <a:solidFill>
+            <a:srgbClr val="C7E3FF"/>
+          </a:solidFill>
+          <a:ln w="12700">
+            <a:solidFill>
+              <a:srgbClr val="1F4E79"/>
+            </a:solidFill>
+          </a:ln>
+        </p:spPr>
+        <p:txBody>
+          <a:bodyPr anchor="ctr"/>
+          <a:lstStyle/>
+          <a:p>
+            <a:endParaRPr/>
+          </a:p>
+        </p:txBody>
+      </p:sp>
+      <p:sp>
+        <p:nvSpPr>
+          <p:cNvPr id="403" name="ChipTxt_3"/>
+          <p:cNvSpPr>
+            <a:spLocks noGrp="1"/>
+          </p:cNvSpPr>
+          <p:nvPr/>
+        </p:nvSpPr>
+        <p:spPr>
+          <a:xfrm>
+            <a:off x="381000" y="2146300"/>
+            <a:ext cx="1270000" cy="330200"/>
+          </a:xfrm>
+          <a:prstGeom prst="rect">
+            <a:avLst/>
+          </a:prstGeom>
+          <a:noFill/>
+          <a:ln>
+            <a:noFill/>
+          </a:ln>
+        </p:spPr>
+        <p:txBody>
+          <a:bodyPr lIns="91440" tIns="45720" rIns="91440" bIns="45720" anchor="ctr"/>
+          <a:lstStyle/>
+          <a:p>
+            <a:pPr algn="ctr">
+              <a:buNone/>
+            </a:pPr>
+            <a:r>
+              <a:rPr lang="en-US" sz="1100" b="0" i="0" dirty="0">
+                <a:solidFill>
+                  <a:srgbClr val="1F4E79"/>
+                </a:solidFill>
+              </a:rPr>
+              <a:t>Extract</a:t>
+            </a:r>
+          </a:p>
+        </p:txBody>
+      </p:sp>
+      <p:sp>
+        <p:nvSpPr>
+          <p:cNvPr id="304" name="Chip_4"/>
+          <p:cNvSpPr>
+            <a:spLocks noGrp="1"/>
+          </p:cNvSpPr>
+          <p:nvPr/>
+        </p:nvSpPr>
+        <p:spPr>
+          <a:xfrm>
+            <a:off x="1778000" y="2146300"/>
+            <a:ext cx="1270000" cy="330200"/>
+          </a:xfrm>
+          <a:prstGeom prst="roundRect">
+            <a:avLst>
+              <a:gd name="adj" fmla="val 50000"/>
+            </a:avLst>
+          </a:prstGeom>
+          <a:solidFill>
+            <a:srgbClr val="C7E3FF"/>
+          </a:solidFill>
+          <a:ln w="12700">
+            <a:solidFill>
+              <a:srgbClr val="1F4E79"/>
+            </a:solidFill>
+          </a:ln>
+        </p:spPr>
+        <p:txBody>
+          <a:bodyPr anchor="ctr"/>
+          <a:lstStyle/>
+          <a:p>
+            <a:endParaRPr/>
+          </a:p>
+        </p:txBody>
+      </p:sp>
+      <p:sp>
+        <p:nvSpPr>
+          <p:cNvPr id="404" name="ChipTxt_4"/>
+          <p:cNvSpPr>
+            <a:spLocks noGrp="1"/>
+          </p:cNvSpPr>
+          <p:nvPr/>
+        </p:nvSpPr>
+        <p:spPr>
+          <a:xfrm>
+            <a:off x="1778000" y="2146300"/>
+            <a:ext cx="1270000" cy="330200"/>
+          </a:xfrm>
+          <a:prstGeom prst="rect">
+            <a:avLst/>
+          </a:prstGeom>
+          <a:noFill/>
+          <a:ln>
+            <a:noFill/>
+          </a:ln>
+        </p:spPr>
+        <p:txBody>
+          <a:bodyPr lIns="91440" tIns="45720" rIns="91440" bIns="45720" anchor="ctr"/>
+          <a:lstStyle/>
+          <a:p>
+            <a:pPr algn="ctr">
+              <a:buNone/>
+            </a:pPr>
+            <a:r>
+              <a:rPr lang="en-US" sz="1100" b="0" i="0" dirty="0">
+                <a:solidFill>
+                  <a:srgbClr val="1F4E79"/>
+                </a:solidFill>
+              </a:rPr>
+              <a:t>Compare</a:t>
+            </a:r>
+          </a:p>
+        </p:txBody>
+      </p:sp>
+      <p:sp>
+        <p:nvSpPr>
+          <p:cNvPr id="305" name="Chip_5"/>
+          <p:cNvSpPr>
+            <a:spLocks noGrp="1"/>
+          </p:cNvSpPr>
+          <p:nvPr/>
+        </p:nvSpPr>
+        <p:spPr>
+          <a:xfrm>
+            <a:off x="3175000" y="2146300"/>
+            <a:ext cx="1270000" cy="330200"/>
+          </a:xfrm>
+          <a:prstGeom prst="roundRect">
+            <a:avLst>
+              <a:gd name="adj" fmla="val 50000"/>
+            </a:avLst>
+          </a:prstGeom>
+          <a:solidFill>
+            <a:srgbClr val="C7E3FF"/>
+          </a:solidFill>
+          <a:ln w="12700">
+            <a:solidFill>
+              <a:srgbClr val="1F4E79"/>
+            </a:solidFill>
+          </a:ln>
+        </p:spPr>
+        <p:txBody>
+          <a:bodyPr anchor="ctr"/>
+          <a:lstStyle/>
+          <a:p>
+            <a:endParaRPr/>
+          </a:p>
+        </p:txBody>
+      </p:sp>
+      <p:sp>
+        <p:nvSpPr>
+          <p:cNvPr id="405" name="ChipTxt_5"/>
+          <p:cNvSpPr>
+            <a:spLocks noGrp="1"/>
+          </p:cNvSpPr>
+          <p:nvPr/>
+        </p:nvSpPr>
+        <p:spPr>
+          <a:xfrm>
+            <a:off x="3175000" y="2146300"/>
+            <a:ext cx="1270000" cy="330200"/>
+          </a:xfrm>
+          <a:prstGeom prst="rect">
+            <a:avLst/>
+          </a:prstGeom>
+          <a:noFill/>
+          <a:ln>
+            <a:noFill/>
+          </a:ln>
+        </p:spPr>
+        <p:txBody>
+          <a:bodyPr lIns="91440" tIns="45720" rIns="91440" bIns="45720" anchor="ctr"/>
+          <a:lstStyle/>
+          <a:p>
+            <a:pPr algn="ctr">
+              <a:buNone/>
+            </a:pPr>
+            <a:r>
+              <a:rPr lang="en-US" sz="1100" b="0" i="0" dirty="0">
+                <a:solidFill>
+                  <a:srgbClr val="1F4E79"/>
+                </a:solidFill>
+              </a:rPr>
+              <a:t>Write Code</a:t>
+            </a:r>
+          </a:p>
+        </p:txBody>
+      </p:sp>
+      <p:sp>
+        <p:nvSpPr>
+          <p:cNvPr id="306" name="Chip_6"/>
+          <p:cNvSpPr>
+            <a:spLocks noGrp="1"/>
+          </p:cNvSpPr>
+          <p:nvPr/>
+        </p:nvSpPr>
+        <p:spPr>
+          <a:xfrm>
+            <a:off x="381000" y="2578100"/>
+            <a:ext cx="1270000" cy="330200"/>
+          </a:xfrm>
+          <a:prstGeom prst="roundRect">
+            <a:avLst>
+              <a:gd name="adj" fmla="val 50000"/>
+            </a:avLst>
+          </a:prstGeom>
+          <a:solidFill>
+            <a:srgbClr val="C7E3FF"/>
+          </a:solidFill>
+          <a:ln w="12700">
+            <a:solidFill>
+              <a:srgbClr val="1F4E79"/>
+            </a:solidFill>
+          </a:ln>
+        </p:spPr>
+        <p:txBody>
+          <a:bodyPr anchor="ctr"/>
+          <a:lstStyle/>
+          <a:p>
+            <a:endParaRPr/>
+          </a:p>
+        </p:txBody>
+      </p:sp>
+      <p:sp>
+        <p:nvSpPr>
+          <p:cNvPr id="406" name="ChipTxt_6"/>
+          <p:cNvSpPr>
+            <a:spLocks noGrp="1"/>
+          </p:cNvSpPr>
+          <p:nvPr/>
+        </p:nvSpPr>
+        <p:spPr>
+          <a:xfrm>
+            <a:off x="381000" y="2578100"/>
+            <a:ext cx="1270000" cy="330200"/>
+          </a:xfrm>
+          <a:prstGeom prst="rect">
+            <a:avLst/>
+          </a:prstGeom>
+          <a:noFill/>
+          <a:ln>
+            <a:noFill/>
+          </a:ln>
+        </p:spPr>
+        <p:txBody>
+          <a:bodyPr lIns="91440" tIns="45720" rIns="91440" bIns="45720" anchor="ctr"/>
+          <a:lstStyle/>
+          <a:p>
+            <a:pPr algn="ctr">
+              <a:buNone/>
+            </a:pPr>
+            <a:r>
+              <a:rPr lang="en-US" sz="1100" b="0" i="0" dirty="0">
+                <a:solidFill>
+                  <a:srgbClr val="1F4E79"/>
+                </a:solidFill>
+              </a:rPr>
+              <a:t>Debug</a:t>
+            </a:r>
+          </a:p>
+        </p:txBody>
+      </p:sp>
+      <p:sp>
+        <p:nvSpPr>
+          <p:cNvPr id="307" name="Chip_7"/>
+          <p:cNvSpPr>
+            <a:spLocks noGrp="1"/>
+          </p:cNvSpPr>
+          <p:nvPr/>
+        </p:nvSpPr>
+        <p:spPr>
+          <a:xfrm>
+            <a:off x="1778000" y="2578100"/>
+            <a:ext cx="1270000" cy="330200"/>
+          </a:xfrm>
+          <a:prstGeom prst="roundRect">
+            <a:avLst>
+              <a:gd name="adj" fmla="val 50000"/>
+            </a:avLst>
+          </a:prstGeom>
+          <a:solidFill>
+            <a:srgbClr val="C7E3FF"/>
+          </a:solidFill>
+          <a:ln w="12700">
+            <a:solidFill>
+              <a:srgbClr val="1F4E79"/>
+            </a:solidFill>
+          </a:ln>
+        </p:spPr>
+        <p:txBody>
+          <a:bodyPr anchor="ctr"/>
+          <a:lstStyle/>
+          <a:p>
+            <a:endParaRPr/>
+          </a:p>
+        </p:txBody>
+      </p:sp>
+      <p:sp>
+        <p:nvSpPr>
+          <p:cNvPr id="407" name="ChipTxt_7"/>
+          <p:cNvSpPr>
+            <a:spLocks noGrp="1"/>
+          </p:cNvSpPr>
+          <p:nvPr/>
+        </p:nvSpPr>
+        <p:spPr>
+          <a:xfrm>
+            <a:off x="1778000" y="2578100"/>
+            <a:ext cx="1270000" cy="330200"/>
+          </a:xfrm>
+          <a:prstGeom prst="rect">
+            <a:avLst/>
+          </a:prstGeom>
+          <a:noFill/>
+          <a:ln>
+            <a:noFill/>
+          </a:ln>
+        </p:spPr>
+        <p:txBody>
+          <a:bodyPr lIns="91440" tIns="45720" rIns="91440" bIns="45720" anchor="ctr"/>
+          <a:lstStyle/>
+          <a:p>
+            <a:pPr algn="ctr">
+              <a:buNone/>
+            </a:pPr>
+            <a:r>
+              <a:rPr lang="en-US" sz="1100" b="0" i="0" dirty="0">
+                <a:solidFill>
+                  <a:srgbClr val="1F4E79"/>
+                </a:solidFill>
+              </a:rPr>
+              <a:t>Reformat</a:t>
+            </a:r>
+          </a:p>
+        </p:txBody>
+      </p:sp>
+      <p:sp>
+        <p:nvSpPr>
+          <p:cNvPr id="308" name="Chip_8"/>
+          <p:cNvSpPr>
+            <a:spLocks noGrp="1"/>
+          </p:cNvSpPr>
+          <p:nvPr/>
+        </p:nvSpPr>
+        <p:spPr>
+          <a:xfrm>
+            <a:off x="3175000" y="2578100"/>
+            <a:ext cx="1270000" cy="330200"/>
+          </a:xfrm>
+          <a:prstGeom prst="roundRect">
+            <a:avLst>
+              <a:gd name="adj" fmla="val 50000"/>
+            </a:avLst>
+          </a:prstGeom>
+          <a:solidFill>
+            <a:srgbClr val="C7E3FF"/>
+          </a:solidFill>
+          <a:ln w="12700">
+            <a:solidFill>
+              <a:srgbClr val="1F4E79"/>
+            </a:solidFill>
+          </a:ln>
+        </p:spPr>
+        <p:txBody>
+          <a:bodyPr anchor="ctr"/>
+          <a:lstStyle/>
+          <a:p>
+            <a:endParaRPr/>
+          </a:p>
+        </p:txBody>
+      </p:sp>
+      <p:sp>
+        <p:nvSpPr>
+          <p:cNvPr id="408" name="ChipTxt_8"/>
+          <p:cNvSpPr>
+            <a:spLocks noGrp="1"/>
+          </p:cNvSpPr>
+          <p:nvPr/>
+        </p:nvSpPr>
+        <p:spPr>
+          <a:xfrm>
+            <a:off x="3175000" y="2578100"/>
+            <a:ext cx="1270000" cy="330200"/>
+          </a:xfrm>
+          <a:prstGeom prst="rect">
+            <a:avLst/>
+          </a:prstGeom>
+          <a:noFill/>
+          <a:ln>
+            <a:noFill/>
+          </a:ln>
+        </p:spPr>
+        <p:txBody>
+          <a:bodyPr lIns="91440" tIns="45720" rIns="91440" bIns="45720" anchor="ctr"/>
+          <a:lstStyle/>
+          <a:p>
+            <a:pPr algn="ctr">
+              <a:buNone/>
+            </a:pPr>
+            <a:r>
+              <a:rPr lang="en-US" sz="1100" b="0" i="0" dirty="0">
+                <a:solidFill>
+                  <a:srgbClr val="1F4E79"/>
+                </a:solidFill>
+              </a:rPr>
+              <a:t>Search</a:t>
+            </a:r>
+          </a:p>
+        </p:txBody>
+      </p:sp>
+      <p:sp>
+        <p:nvSpPr>
+          <p:cNvPr id="309" name="Chip_9"/>
+          <p:cNvSpPr>
+            <a:spLocks noGrp="1"/>
+          </p:cNvSpPr>
+          <p:nvPr/>
+        </p:nvSpPr>
+        <p:spPr>
+          <a:xfrm>
+            <a:off x="381000" y="3009900"/>
+            <a:ext cx="1270000" cy="330200"/>
+          </a:xfrm>
+          <a:prstGeom prst="roundRect">
+            <a:avLst>
+              <a:gd name="adj" fmla="val 50000"/>
+            </a:avLst>
+          </a:prstGeom>
+          <a:solidFill>
+            <a:srgbClr val="C7E3FF"/>
+          </a:solidFill>
+          <a:ln w="12700">
+            <a:solidFill>
+              <a:srgbClr val="1F4E79"/>
+            </a:solidFill>
+          </a:ln>
+        </p:spPr>
+        <p:txBody>
+          <a:bodyPr anchor="ctr"/>
+          <a:lstStyle/>
+          <a:p>
+            <a:endParaRPr/>
+          </a:p>
+        </p:txBody>
+      </p:sp>
+      <p:sp>
+        <p:nvSpPr>
+          <p:cNvPr id="409" name="ChipTxt_9"/>
+          <p:cNvSpPr>
+            <a:spLocks noGrp="1"/>
+          </p:cNvSpPr>
+          <p:nvPr/>
+        </p:nvSpPr>
+        <p:spPr>
+          <a:xfrm>
+            <a:off x="381000" y="3009900"/>
+            <a:ext cx="1270000" cy="330200"/>
+          </a:xfrm>
+          <a:prstGeom prst="rect">
+            <a:avLst/>
+          </a:prstGeom>
+          <a:noFill/>
+          <a:ln>
+            <a:noFill/>
+          </a:ln>
+        </p:spPr>
+        <p:txBody>
+          <a:bodyPr lIns="91440" tIns="45720" rIns="91440" bIns="45720" anchor="ctr"/>
+          <a:lstStyle/>
+          <a:p>
+            <a:pPr algn="ctr">
+              <a:buNone/>
+            </a:pPr>
+            <a:r>
+              <a:rPr lang="en-US" sz="1100" b="0" i="0" dirty="0">
+                <a:solidFill>
+                  <a:srgbClr val="1F4E79"/>
+                </a:solidFill>
+              </a:rPr>
+              <a:t>Explain</a:t>
+            </a:r>
+          </a:p>
+        </p:txBody>
+      </p:sp>
+      <p:sp>
+        <p:nvSpPr>
+          <p:cNvPr id="310" name="Chip_10"/>
+          <p:cNvSpPr>
+            <a:spLocks noGrp="1"/>
+          </p:cNvSpPr>
+          <p:nvPr/>
+        </p:nvSpPr>
+        <p:spPr>
+          <a:xfrm>
+            <a:off x="1778000" y="3009900"/>
+            <a:ext cx="1270000" cy="330200"/>
+          </a:xfrm>
+          <a:prstGeom prst="roundRect">
+            <a:avLst>
+              <a:gd name="adj" fmla="val 50000"/>
+            </a:avLst>
+          </a:prstGeom>
+          <a:solidFill>
+            <a:srgbClr val="C7E3FF"/>
+          </a:solidFill>
+          <a:ln w="12700">
+            <a:solidFill>
+              <a:srgbClr val="1F4E79"/>
+            </a:solidFill>
+          </a:ln>
+        </p:spPr>
+        <p:txBody>
+          <a:bodyPr anchor="ctr"/>
+          <a:lstStyle/>
+          <a:p>
+            <a:endParaRPr/>
+          </a:p>
+        </p:txBody>
+      </p:sp>
+      <p:sp>
+        <p:nvSpPr>
+          <p:cNvPr id="410" name="ChipTxt_10"/>
+          <p:cNvSpPr>
+            <a:spLocks noGrp="1"/>
+          </p:cNvSpPr>
+          <p:nvPr/>
+        </p:nvSpPr>
+        <p:spPr>
+          <a:xfrm>
+            <a:off x="1778000" y="3009900"/>
+            <a:ext cx="1270000" cy="330200"/>
+          </a:xfrm>
+          <a:prstGeom prst="rect">
+            <a:avLst/>
+          </a:prstGeom>
+          <a:noFill/>
+          <a:ln>
+            <a:noFill/>
+          </a:ln>
+        </p:spPr>
+        <p:txBody>
+          <a:bodyPr lIns="91440" tIns="45720" rIns="91440" bIns="45720" anchor="ctr"/>
+          <a:lstStyle/>
+          <a:p>
+            <a:pPr algn="ctr">
+              <a:buNone/>
+            </a:pPr>
+            <a:r>
+              <a:rPr lang="en-US" sz="1100" b="0" i="0" dirty="0">
+                <a:solidFill>
+                  <a:srgbClr val="1F4E79"/>
+                </a:solidFill>
+              </a:rPr>
+              <a:t>Draft Email</a:t>
+            </a:r>
+          </a:p>
+        </p:txBody>
+      </p:sp>
+      <p:sp>
+        <p:nvSpPr>
+          <p:cNvPr id="311" name="Chip_11"/>
+          <p:cNvSpPr>
+            <a:spLocks noGrp="1"/>
+          </p:cNvSpPr>
+          <p:nvPr/>
+        </p:nvSpPr>
+        <p:spPr>
+          <a:xfrm>
+            <a:off x="3175000" y="3009900"/>
+            <a:ext cx="1270000" cy="330200"/>
+          </a:xfrm>
+          <a:prstGeom prst="roundRect">
+            <a:avLst>
+              <a:gd name="adj" fmla="val 50000"/>
+            </a:avLst>
+          </a:prstGeom>
+          <a:solidFill>
+            <a:srgbClr val="C7E3FF"/>
+          </a:solidFill>
+          <a:ln w="12700">
+            <a:solidFill>
+              <a:srgbClr val="1F4E79"/>
+            </a:solidFill>
+          </a:ln>
+        </p:spPr>
+        <p:txBody>
+          <a:bodyPr anchor="ctr"/>
+          <a:lstStyle/>
+          <a:p>
+            <a:endParaRPr/>
+          </a:p>
+        </p:txBody>
+      </p:sp>
+      <p:sp>
+        <p:nvSpPr>
+          <p:cNvPr id="411" name="ChipTxt_11"/>
+          <p:cNvSpPr>
+            <a:spLocks noGrp="1"/>
+          </p:cNvSpPr>
+          <p:nvPr/>
+        </p:nvSpPr>
+        <p:spPr>
+          <a:xfrm>
+            <a:off x="3175000" y="3009900"/>
+            <a:ext cx="1270000" cy="330200"/>
+          </a:xfrm>
+          <a:prstGeom prst="rect">
+            <a:avLst/>
+          </a:prstGeom>
+          <a:noFill/>
+          <a:ln>
+            <a:noFill/>
+          </a:ln>
+        </p:spPr>
+        <p:txBody>
+          <a:bodyPr lIns="91440" tIns="45720" rIns="91440" bIns="45720" anchor="ctr"/>
+          <a:lstStyle/>
+          <a:p>
+            <a:pPr algn="ctr">
+              <a:buNone/>
+            </a:pPr>
+            <a:r>
+              <a:rPr lang="en-US" sz="1100" b="0" i="0" dirty="0">
+                <a:solidFill>
+                  <a:srgbClr val="1F4E79"/>
+                </a:solidFill>
+              </a:rPr>
+              <a:t>Brainstorm</a:t>
+            </a:r>
+          </a:p>
+        </p:txBody>
+      </p:sp>
+      <p:sp>
+        <p:nvSpPr>
+          <p:cNvPr id="312" name="Chip_12"/>
+          <p:cNvSpPr>
+            <a:spLocks noGrp="1"/>
+          </p:cNvSpPr>
+          <p:nvPr/>
+        </p:nvSpPr>
+        <p:spPr>
+          <a:xfrm>
+            <a:off x="381000" y="3441700"/>
+            <a:ext cx="1270000" cy="330200"/>
+          </a:xfrm>
+          <a:prstGeom prst="roundRect">
+            <a:avLst>
+              <a:gd name="adj" fmla="val 50000"/>
+            </a:avLst>
+          </a:prstGeom>
+          <a:solidFill>
+            <a:srgbClr val="C7E3FF"/>
+          </a:solidFill>
+          <a:ln w="12700">
+            <a:solidFill>
+              <a:srgbClr val="1F4E79"/>
+            </a:solidFill>
+          </a:ln>
+        </p:spPr>
+        <p:txBody>
+          <a:bodyPr anchor="ctr"/>
+          <a:lstStyle/>
+          <a:p>
+            <a:endParaRPr/>
+          </a:p>
+        </p:txBody>
+      </p:sp>
+      <p:sp>
+        <p:nvSpPr>
+          <p:cNvPr id="412" name="ChipTxt_12"/>
+          <p:cNvSpPr>
+            <a:spLocks noGrp="1"/>
+          </p:cNvSpPr>
+          <p:nvPr/>
+        </p:nvSpPr>
+        <p:spPr>
+          <a:xfrm>
+            <a:off x="381000" y="3441700"/>
+            <a:ext cx="1270000" cy="330200"/>
+          </a:xfrm>
+          <a:prstGeom prst="rect">
+            <a:avLst/>
+          </a:prstGeom>
+          <a:noFill/>
+          <a:ln>
+            <a:noFill/>
+          </a:ln>
+        </p:spPr>
+        <p:txBody>
+          <a:bodyPr lIns="91440" tIns="45720" rIns="91440" bIns="45720" anchor="ctr"/>
+          <a:lstStyle/>
+          <a:p>
+            <a:pPr algn="ctr">
+              <a:buNone/>
+            </a:pPr>
+            <a:r>
+              <a:rPr lang="en-US" sz="1100" b="0" i="0" dirty="0">
+                <a:solidFill>
+                  <a:srgbClr val="1F4E79"/>
+                </a:solidFill>
+              </a:rPr>
+              <a:t>Critique</a:t>
+            </a:r>
+          </a:p>
+        </p:txBody>
+      </p:sp>
+      <p:sp>
+        <p:nvSpPr>
+          <p:cNvPr id="313" name="Chip_13"/>
+          <p:cNvSpPr>
+            <a:spLocks noGrp="1"/>
+          </p:cNvSpPr>
+          <p:nvPr/>
+        </p:nvSpPr>
+        <p:spPr>
+          <a:xfrm>
+            <a:off x="1778000" y="3441700"/>
+            <a:ext cx="1270000" cy="330200"/>
+          </a:xfrm>
+          <a:prstGeom prst="roundRect">
+            <a:avLst>
+              <a:gd name="adj" fmla="val 50000"/>
+            </a:avLst>
+          </a:prstGeom>
+          <a:solidFill>
+            <a:srgbClr val="C7E3FF"/>
+          </a:solidFill>
+          <a:ln w="12700">
+            <a:solidFill>
+              <a:srgbClr val="1F4E79"/>
+            </a:solidFill>
+          </a:ln>
+        </p:spPr>
+        <p:txBody>
+          <a:bodyPr anchor="ctr"/>
+          <a:lstStyle/>
+          <a:p>
+            <a:endParaRPr/>
+          </a:p>
+        </p:txBody>
+      </p:sp>
+      <p:sp>
+        <p:nvSpPr>
+          <p:cNvPr id="413" name="ChipTxt_13"/>
+          <p:cNvSpPr>
+            <a:spLocks noGrp="1"/>
+          </p:cNvSpPr>
+          <p:nvPr/>
+        </p:nvSpPr>
+        <p:spPr>
+          <a:xfrm>
+            <a:off x="1778000" y="3441700"/>
+            <a:ext cx="1270000" cy="330200"/>
+          </a:xfrm>
+          <a:prstGeom prst="rect">
+            <a:avLst/>
+          </a:prstGeom>
+          <a:noFill/>
+          <a:ln>
+            <a:noFill/>
+          </a:ln>
+        </p:spPr>
+        <p:txBody>
+          <a:bodyPr lIns="91440" tIns="45720" rIns="91440" bIns="45720" anchor="ctr"/>
+          <a:lstStyle/>
+          <a:p>
+            <a:pPr algn="ctr">
+              <a:buNone/>
+            </a:pPr>
+            <a:r>
+              <a:rPr lang="en-US" sz="1100" b="0" i="0" dirty="0">
+                <a:solidFill>
+                  <a:srgbClr val="1F4E79"/>
+                </a:solidFill>
+              </a:rPr>
+              <a:t>Synthesise</a:t>
+            </a:r>
+          </a:p>
+        </p:txBody>
+      </p:sp>
+      <p:sp>
+        <p:nvSpPr>
+          <p:cNvPr id="314" name="Chip_14"/>
+          <p:cNvSpPr>
+            <a:spLocks noGrp="1"/>
+          </p:cNvSpPr>
+          <p:nvPr/>
+        </p:nvSpPr>
+        <p:spPr>
+          <a:xfrm>
+            <a:off x="3175000" y="3441700"/>
+            <a:ext cx="1270000" cy="330200"/>
+          </a:xfrm>
+          <a:prstGeom prst="roundRect">
+            <a:avLst>
+              <a:gd name="adj" fmla="val 50000"/>
+            </a:avLst>
+          </a:prstGeom>
+          <a:solidFill>
+            <a:srgbClr val="C7E3FF"/>
+          </a:solidFill>
+          <a:ln w="12700">
+            <a:solidFill>
+              <a:srgbClr val="1F4E79"/>
+            </a:solidFill>
+          </a:ln>
+        </p:spPr>
+        <p:txBody>
+          <a:bodyPr anchor="ctr"/>
+          <a:lstStyle/>
+          <a:p>
+            <a:endParaRPr/>
+          </a:p>
+        </p:txBody>
+      </p:sp>
+      <p:sp>
+        <p:nvSpPr>
+          <p:cNvPr id="414" name="ChipTxt_14"/>
+          <p:cNvSpPr>
+            <a:spLocks noGrp="1"/>
+          </p:cNvSpPr>
+          <p:nvPr/>
+        </p:nvSpPr>
+        <p:spPr>
+          <a:xfrm>
+            <a:off x="3175000" y="3441700"/>
+            <a:ext cx="1270000" cy="330200"/>
+          </a:xfrm>
+          <a:prstGeom prst="rect">
+            <a:avLst/>
+          </a:prstGeom>
+          <a:noFill/>
+          <a:ln>
+            <a:noFill/>
+          </a:ln>
+        </p:spPr>
+        <p:txBody>
+          <a:bodyPr lIns="91440" tIns="45720" rIns="91440" bIns="45720" anchor="ctr"/>
+          <a:lstStyle/>
+          <a:p>
+            <a:pPr algn="ctr">
+              <a:buNone/>
+            </a:pPr>
+            <a:r>
+              <a:rPr lang="en-US" sz="1100" b="0" i="0" dirty="0">
+                <a:solidFill>
+                  <a:srgbClr val="1F4E79"/>
+                </a:solidFill>
+              </a:rPr>
+              <a:t>Plan</a:t>
+            </a:r>
+          </a:p>
+        </p:txBody>
+      </p:sp>
+      <p:sp>
+        <p:nvSpPr>
+          <p:cNvPr id="500" name="PerPanel"/>
+          <p:cNvSpPr>
+            <a:spLocks noGrp="1"/>
+          </p:cNvSpPr>
+          <p:nvPr/>
+        </p:nvSpPr>
+        <p:spPr>
+          <a:xfrm>
+            <a:off x="7620000" y="711200"/>
+            <a:ext cx="4318000" cy="6045200"/>
+          </a:xfrm>
+          <a:prstGeom prst="roundRect">
+            <a:avLst>
+              <a:gd name="adj" fmla="val 10000"/>
+            </a:avLst>
+          </a:prstGeom>
+          <a:solidFill>
+            <a:srgbClr val="F6EAFD"/>
+          </a:solidFill>
+          <a:ln w="12700">
+            <a:solidFill>
+              <a:srgbClr val="7B2D8E"/>
+            </a:solidFill>
+          </a:ln>
+        </p:spPr>
+        <p:txBody>
+          <a:bodyPr anchor="ctr"/>
+          <a:lstStyle/>
+          <a:p>
+            <a:endParaRPr/>
+          </a:p>
+        </p:txBody>
+      </p:sp>
+      <p:sp>
+        <p:nvSpPr>
+          <p:cNvPr id="501" name="PerHeader"/>
+          <p:cNvSpPr>
+            <a:spLocks noGrp="1"/>
+          </p:cNvSpPr>
+          <p:nvPr/>
+        </p:nvSpPr>
+        <p:spPr>
+          <a:xfrm>
+            <a:off x="7620000" y="711200"/>
+            <a:ext cx="4318000" cy="508000"/>
+          </a:xfrm>
+          <a:prstGeom prst="rect">
+            <a:avLst/>
+          </a:prstGeom>
+          <a:solidFill>
+            <a:srgbClr val="7B2D8E"/>
+          </a:solidFill>
+          <a:ln>
+            <a:noFill/>
+          </a:ln>
+        </p:spPr>
+        <p:txBody>
+          <a:bodyPr anchor="ctr"/>
+          <a:lstStyle/>
+          <a:p>
+            <a:endParaRPr/>
+          </a:p>
+        </p:txBody>
+      </p:sp>
+      <p:sp>
+        <p:nvSpPr>
+          <p:cNvPr id="502" name="PerHeaderTxt"/>
+          <p:cNvSpPr>
+            <a:spLocks noGrp="1"/>
+          </p:cNvSpPr>
+          <p:nvPr/>
+        </p:nvSpPr>
+        <p:spPr>
+          <a:xfrm>
+            <a:off x="7620000" y="711200"/>
+            <a:ext cx="4318000" cy="508000"/>
+          </a:xfrm>
+          <a:prstGeom prst="rect">
+            <a:avLst/>
+          </a:prstGeom>
+          <a:noFill/>
+          <a:ln>
+            <a:noFill/>
+          </a:ln>
+        </p:spPr>
+        <p:txBody>
+          <a:bodyPr lIns="91440" tIns="45720" rIns="91440" bIns="45720" anchor="ctr"/>
+          <a:lstStyle/>
+          <a:p>
+            <a:pPr algn="ctr">
+              <a:buNone/>
+            </a:pPr>
+            <a:r>
+              <a:rPr lang="en-US" sz="1500" b="1" i="0" dirty="0">
+                <a:solidFill>
+                  <a:srgbClr val="FFFFFF"/>
+                </a:solidFill>
+              </a:rPr>
+              <a:t>PERSONA — Assigned Skills</a:t>
+            </a:r>
+          </a:p>
+        </p:txBody>
+      </p:sp>
+      <p:sp>
+        <p:nvSpPr>
+          <p:cNvPr id="503" name="PerSub"/>
+          <p:cNvSpPr>
+            <a:spLocks noGrp="1"/>
+          </p:cNvSpPr>
+          <p:nvPr/>
+        </p:nvSpPr>
+        <p:spPr>
+          <a:xfrm>
+            <a:off x="7747000" y="1270000"/>
+            <a:ext cx="4064000" cy="355600"/>
+          </a:xfrm>
+          <a:prstGeom prst="rect">
+            <a:avLst/>
+          </a:prstGeom>
+          <a:noFill/>
+          <a:ln>
+            <a:noFill/>
+          </a:ln>
+        </p:spPr>
+        <p:txBody>
+          <a:bodyPr lIns="91440" tIns="45720" rIns="91440" bIns="45720" anchor="ctr"/>
+          <a:lstStyle/>
+          <a:p>
+            <a:pPr algn="ctr">
+              <a:buNone/>
+            </a:pPr>
+            <a:r>
+              <a:rPr lang="en-US" sz="1300" b="0" i="0" dirty="0">
+                <a:solidFill>
+                  <a:srgbClr val="7B2D8E"/>
+                </a:solidFill>
+              </a:rPr>
+              <a:t>Only specific skills assigned to this role</a:t>
+            </a:r>
+          </a:p>
+        </p:txBody>
+      </p:sp>
+      <p:sp>
+        <p:nvSpPr>
+          <p:cNvPr id="504" name="PersonaBadge"/>
+          <p:cNvSpPr>
+            <a:spLocks noGrp="1"/>
+          </p:cNvSpPr>
+          <p:nvPr/>
+        </p:nvSpPr>
+        <p:spPr>
+          <a:xfrm>
+            <a:off x="8255000" y="1701800"/>
+            <a:ext cx="3048000" cy="457200"/>
+          </a:xfrm>
+          <a:prstGeom prst="roundRect">
+            <a:avLst>
+              <a:gd name="adj" fmla="val 30000"/>
+            </a:avLst>
+          </a:prstGeom>
+          <a:solidFill>
+            <a:srgbClr val="7B2D8E"/>
+          </a:solidFill>
+          <a:ln>
+            <a:noFill/>
+          </a:ln>
+        </p:spPr>
+        <p:txBody>
+          <a:bodyPr anchor="ctr"/>
+          <a:lstStyle/>
+          <a:p>
+            <a:endParaRPr/>
+          </a:p>
+        </p:txBody>
+      </p:sp>
+      <p:sp>
+        <p:nvSpPr>
+          <p:cNvPr id="505" name="PersonaName"/>
+          <p:cNvSpPr>
+            <a:spLocks noGrp="1"/>
+          </p:cNvSpPr>
+          <p:nvPr/>
+        </p:nvSpPr>
+        <p:spPr>
+          <a:xfrm>
+            <a:off x="8255000" y="1701800"/>
+            <a:ext cx="3048000" cy="457200"/>
+          </a:xfrm>
+          <a:prstGeom prst="rect">
+            <a:avLst/>
+          </a:prstGeom>
+          <a:noFill/>
+          <a:ln>
+            <a:noFill/>
+          </a:ln>
+        </p:spPr>
+        <p:txBody>
+          <a:bodyPr lIns="91440" tIns="45720" rIns="91440" bIns="45720" anchor="ctr"/>
+          <a:lstStyle/>
+          <a:p>
+            <a:pPr algn="ctr">
+              <a:buNone/>
+            </a:pPr>
+            <a:r>
+              <a:rPr lang="en-US" sz="1300" b="1" i="0" dirty="0">
+                <a:solidFill>
+                  <a:srgbClr val="FFFFFF"/>
+                </a:solidFill>
+              </a:rPr>
+              <a:t>★  Sales Assistant Persona</a:t>
+            </a:r>
+          </a:p>
+        </p:txBody>
+      </p:sp>
+      <p:sp>
+        <p:nvSpPr>
+          <p:cNvPr id="600" name="AChip_0"/>
+          <p:cNvSpPr>
+            <a:spLocks noGrp="1"/>
+          </p:cNvSpPr>
+          <p:nvPr/>
+        </p:nvSpPr>
+        <p:spPr>
+          <a:xfrm>
+            <a:off x="7874000" y="2311400"/>
+            <a:ext cx="1778000" cy="381000"/>
+          </a:xfrm>
+          <a:prstGeom prst="roundRect">
+            <a:avLst>
+              <a:gd name="adj" fmla="val 50000"/>
+            </a:avLst>
+          </a:prstGeom>
+          <a:solidFill>
+            <a:srgbClr val="E8C8F8"/>
+          </a:solidFill>
+          <a:ln w="12700">
+            <a:solidFill>
+              <a:srgbClr val="7B2D8E"/>
+            </a:solidFill>
+          </a:ln>
+        </p:spPr>
+        <p:txBody>
+          <a:bodyPr anchor="ctr"/>
+          <a:lstStyle/>
+          <a:p>
+            <a:endParaRPr/>
+          </a:p>
+        </p:txBody>
+      </p:sp>
+      <p:sp>
+        <p:nvSpPr>
+          <p:cNvPr id="700" name="AChipTxt_0"/>
+          <p:cNvSpPr>
+            <a:spLocks noGrp="1"/>
+          </p:cNvSpPr>
+          <p:nvPr/>
+        </p:nvSpPr>
+        <p:spPr>
+          <a:xfrm>
+            <a:off x="7874000" y="2311400"/>
+            <a:ext cx="1778000" cy="381000"/>
+          </a:xfrm>
+          <a:prstGeom prst="rect">
+            <a:avLst/>
+          </a:prstGeom>
+          <a:noFill/>
+          <a:ln>
+            <a:noFill/>
+          </a:ln>
+        </p:spPr>
+        <p:txBody>
+          <a:bodyPr lIns="91440" tIns="45720" rIns="91440" bIns="45720" anchor="ctr"/>
+          <a:lstStyle/>
+          <a:p>
+            <a:pPr algn="ctr">
+              <a:buNone/>
+            </a:pPr>
+            <a:r>
+              <a:rPr lang="en-US" sz="1200" b="1" i="0" dirty="0">
+                <a:solidFill>
+                  <a:srgbClr val="7B2D8E"/>
+                </a:solidFill>
+              </a:rPr>
+              <a:t>Summarise</a:t>
+            </a:r>
+          </a:p>
+        </p:txBody>
+      </p:sp>
+      <p:sp>
+        <p:nvSpPr>
+          <p:cNvPr id="601" name="AChip_1"/>
+          <p:cNvSpPr>
+            <a:spLocks noGrp="1"/>
+          </p:cNvSpPr>
+          <p:nvPr/>
+        </p:nvSpPr>
+        <p:spPr>
+          <a:xfrm>
+            <a:off x="9906000" y="2311400"/>
+            <a:ext cx="1778000" cy="381000"/>
+          </a:xfrm>
+          <a:prstGeom prst="roundRect">
+            <a:avLst>
+              <a:gd name="adj" fmla="val 50000"/>
+            </a:avLst>
+          </a:prstGeom>
+          <a:solidFill>
+            <a:srgbClr val="E8C8F8"/>
+          </a:solidFill>
+          <a:ln w="12700">
+            <a:solidFill>
+              <a:srgbClr val="7B2D8E"/>
+            </a:solidFill>
+          </a:ln>
+        </p:spPr>
+        <p:txBody>
+          <a:bodyPr anchor="ctr"/>
+          <a:lstStyle/>
+          <a:p>
+            <a:endParaRPr/>
+          </a:p>
+        </p:txBody>
+      </p:sp>
+      <p:sp>
+        <p:nvSpPr>
+          <p:cNvPr id="701" name="AChipTxt_1"/>
+          <p:cNvSpPr>
+            <a:spLocks noGrp="1"/>
+          </p:cNvSpPr>
+          <p:nvPr/>
+        </p:nvSpPr>
+        <p:spPr>
+          <a:xfrm>
+            <a:off x="9906000" y="2311400"/>
+            <a:ext cx="1778000" cy="381000"/>
+          </a:xfrm>
+          <a:prstGeom prst="rect">
+            <a:avLst/>
+          </a:prstGeom>
+          <a:noFill/>
+          <a:ln>
+            <a:noFill/>
+          </a:ln>
+        </p:spPr>
+        <p:txBody>
+          <a:bodyPr lIns="91440" tIns="45720" rIns="91440" bIns="45720" anchor="ctr"/>
+          <a:lstStyle/>
+          <a:p>
+            <a:pPr algn="ctr">
+              <a:buNone/>
+            </a:pPr>
+            <a:r>
+              <a:rPr lang="en-US" sz="1200" b="1" i="0" dirty="0">
+                <a:solidFill>
+                  <a:srgbClr val="7B2D8E"/>
+                </a:solidFill>
+              </a:rPr>
+              <a:t>Draft Email</a:t>
+            </a:r>
+          </a:p>
+        </p:txBody>
+      </p:sp>
+      <p:sp>
+        <p:nvSpPr>
+          <p:cNvPr id="602" name="AChip_2"/>
+          <p:cNvSpPr>
+            <a:spLocks noGrp="1"/>
+          </p:cNvSpPr>
+          <p:nvPr/>
+        </p:nvSpPr>
+        <p:spPr>
+          <a:xfrm>
+            <a:off x="7874000" y="2819400"/>
+            <a:ext cx="1778000" cy="381000"/>
+          </a:xfrm>
+          <a:prstGeom prst="roundRect">
+            <a:avLst>
+              <a:gd name="adj" fmla="val 50000"/>
+            </a:avLst>
+          </a:prstGeom>
+          <a:solidFill>
+            <a:srgbClr val="E8C8F8"/>
+          </a:solidFill>
+          <a:ln w="12700">
+            <a:solidFill>
+              <a:srgbClr val="7B2D8E"/>
+            </a:solidFill>
+          </a:ln>
+        </p:spPr>
+        <p:txBody>
+          <a:bodyPr anchor="ctr"/>
+          <a:lstStyle/>
+          <a:p>
+            <a:endParaRPr/>
+          </a:p>
+        </p:txBody>
+      </p:sp>
+      <p:sp>
+        <p:nvSpPr>
+          <p:cNvPr id="702" name="AChipTxt_2"/>
+          <p:cNvSpPr>
+            <a:spLocks noGrp="1"/>
+          </p:cNvSpPr>
+          <p:nvPr/>
+        </p:nvSpPr>
+        <p:spPr>
+          <a:xfrm>
+            <a:off x="7874000" y="2819400"/>
+            <a:ext cx="1778000" cy="381000"/>
+          </a:xfrm>
+          <a:prstGeom prst="rect">
+            <a:avLst/>
+          </a:prstGeom>
+          <a:noFill/>
+          <a:ln>
+            <a:noFill/>
+          </a:ln>
+        </p:spPr>
+        <p:txBody>
+          <a:bodyPr lIns="91440" tIns="45720" rIns="91440" bIns="45720" anchor="ctr"/>
+          <a:lstStyle/>
+          <a:p>
+            <a:pPr algn="ctr">
+              <a:buNone/>
+            </a:pPr>
+            <a:r>
+              <a:rPr lang="en-US" sz="1200" b="1" i="0" dirty="0">
+                <a:solidFill>
+                  <a:srgbClr val="7B2D8E"/>
+                </a:solidFill>
+              </a:rPr>
+              <a:t>Brainstorm</a:t>
+            </a:r>
+          </a:p>
+        </p:txBody>
+      </p:sp>
+      <p:sp>
+        <p:nvSpPr>
+          <p:cNvPr id="603" name="AChip_3"/>
+          <p:cNvSpPr>
+            <a:spLocks noGrp="1"/>
+          </p:cNvSpPr>
+          <p:nvPr/>
+        </p:nvSpPr>
+        <p:spPr>
+          <a:xfrm>
+            <a:off x="9906000" y="2819400"/>
+            <a:ext cx="1778000" cy="381000"/>
+          </a:xfrm>
+          <a:prstGeom prst="roundRect">
+            <a:avLst>
+              <a:gd name="adj" fmla="val 50000"/>
+            </a:avLst>
+          </a:prstGeom>
+          <a:solidFill>
+            <a:srgbClr val="E8C8F8"/>
+          </a:solidFill>
+          <a:ln w="12700">
+            <a:solidFill>
+              <a:srgbClr val="7B2D8E"/>
+            </a:solidFill>
+          </a:ln>
+        </p:spPr>
+        <p:txBody>
+          <a:bodyPr anchor="ctr"/>
+          <a:lstStyle/>
+          <a:p>
+            <a:endParaRPr/>
+          </a:p>
+        </p:txBody>
+      </p:sp>
+      <p:sp>
+        <p:nvSpPr>
+          <p:cNvPr id="703" name="AChipTxt_3"/>
+          <p:cNvSpPr>
+            <a:spLocks noGrp="1"/>
+          </p:cNvSpPr>
+          <p:nvPr/>
+        </p:nvSpPr>
+        <p:spPr>
+          <a:xfrm>
+            <a:off x="9906000" y="2819400"/>
+            <a:ext cx="1778000" cy="381000"/>
+          </a:xfrm>
+          <a:prstGeom prst="rect">
+            <a:avLst/>
+          </a:prstGeom>
+          <a:noFill/>
+          <a:ln>
+            <a:noFill/>
+          </a:ln>
+        </p:spPr>
+        <p:txBody>
+          <a:bodyPr lIns="91440" tIns="45720" rIns="91440" bIns="45720" anchor="ctr"/>
+          <a:lstStyle/>
+          <a:p>
+            <a:pPr algn="ctr">
+              <a:buNone/>
+            </a:pPr>
+            <a:r>
+              <a:rPr lang="en-US" sz="1200" b="1" i="0" dirty="0">
+                <a:solidFill>
+                  <a:srgbClr val="7B2D8E"/>
+                </a:solidFill>
+              </a:rPr>
+              <a:t>Classify</a:t>
+            </a:r>
+          </a:p>
+        </p:txBody>
+      </p:sp>
+      <p:sp>
+        <p:nvSpPr>
+          <p:cNvPr id="604" name="AChip_4"/>
+          <p:cNvSpPr>
+            <a:spLocks noGrp="1"/>
+          </p:cNvSpPr>
+          <p:nvPr/>
+        </p:nvSpPr>
+        <p:spPr>
+          <a:xfrm>
+            <a:off x="7874000" y="3327400"/>
+            <a:ext cx="1778000" cy="381000"/>
+          </a:xfrm>
+          <a:prstGeom prst="roundRect">
+            <a:avLst>
+              <a:gd name="adj" fmla="val 50000"/>
+            </a:avLst>
+          </a:prstGeom>
+          <a:solidFill>
+            <a:srgbClr val="E8C8F8"/>
+          </a:solidFill>
+          <a:ln w="12700">
+            <a:solidFill>
+              <a:srgbClr val="7B2D8E"/>
+            </a:solidFill>
+          </a:ln>
+        </p:spPr>
+        <p:txBody>
+          <a:bodyPr anchor="ctr"/>
+          <a:lstStyle/>
+          <a:p>
+            <a:endParaRPr/>
+          </a:p>
+        </p:txBody>
+      </p:sp>
+      <p:sp>
+        <p:nvSpPr>
+          <p:cNvPr id="704" name="AChipTxt_4"/>
+          <p:cNvSpPr>
+            <a:spLocks noGrp="1"/>
+          </p:cNvSpPr>
+          <p:nvPr/>
+        </p:nvSpPr>
+        <p:spPr>
+          <a:xfrm>
+            <a:off x="7874000" y="3327400"/>
+            <a:ext cx="1778000" cy="381000"/>
+          </a:xfrm>
+          <a:prstGeom prst="rect">
+            <a:avLst/>
+          </a:prstGeom>
+          <a:noFill/>
+          <a:ln>
+            <a:noFill/>
+          </a:ln>
+        </p:spPr>
+        <p:txBody>
+          <a:bodyPr lIns="91440" tIns="45720" rIns="91440" bIns="45720" anchor="ctr"/>
+          <a:lstStyle/>
+          <a:p>
+            <a:pPr algn="ctr">
+              <a:buNone/>
+            </a:pPr>
+            <a:r>
+              <a:rPr lang="en-US" sz="1200" b="1" i="0" dirty="0">
+                <a:solidFill>
+                  <a:srgbClr val="7B2D8E"/>
+                </a:solidFill>
+              </a:rPr>
+              <a:t>Synthesise</a:t>
+            </a:r>
+          </a:p>
+        </p:txBody>
+      </p:sp>
+      <p:sp>
+        <p:nvSpPr>
+          <p:cNvPr id="605" name="AChip_5"/>
+          <p:cNvSpPr>
+            <a:spLocks noGrp="1"/>
+          </p:cNvSpPr>
+          <p:nvPr/>
+        </p:nvSpPr>
+        <p:spPr>
+          <a:xfrm>
+            <a:off x="9906000" y="3327400"/>
+            <a:ext cx="1778000" cy="381000"/>
+          </a:xfrm>
+          <a:prstGeom prst="roundRect">
+            <a:avLst>
+              <a:gd name="adj" fmla="val 50000"/>
+            </a:avLst>
+          </a:prstGeom>
+          <a:solidFill>
+            <a:srgbClr val="E8C8F8"/>
+          </a:solidFill>
+          <a:ln w="12700">
+            <a:solidFill>
+              <a:srgbClr val="7B2D8E"/>
+            </a:solidFill>
+          </a:ln>
+        </p:spPr>
+        <p:txBody>
+          <a:bodyPr anchor="ctr"/>
+          <a:lstStyle/>
+          <a:p>
+            <a:endParaRPr/>
+          </a:p>
+        </p:txBody>
+      </p:sp>
+      <p:sp>
+        <p:nvSpPr>
+          <p:cNvPr id="705" name="AChipTxt_5"/>
+          <p:cNvSpPr>
+            <a:spLocks noGrp="1"/>
+          </p:cNvSpPr>
+          <p:nvPr/>
+        </p:nvSpPr>
+        <p:spPr>
+          <a:xfrm>
+            <a:off x="9906000" y="3327400"/>
+            <a:ext cx="1778000" cy="381000"/>
+          </a:xfrm>
+          <a:prstGeom prst="rect">
+            <a:avLst/>
+          </a:prstGeom>
+          <a:noFill/>
+          <a:ln>
+            <a:noFill/>
+          </a:ln>
+        </p:spPr>
+        <p:txBody>
+          <a:bodyPr lIns="91440" tIns="45720" rIns="91440" bIns="45720" anchor="ctr"/>
+          <a:lstStyle/>
+          <a:p>
+            <a:pPr algn="ctr">
+              <a:buNone/>
+            </a:pPr>
+            <a:r>
+              <a:rPr lang="en-US" sz="1200" b="1" i="0" dirty="0">
+                <a:solidFill>
+                  <a:srgbClr val="7B2D8E"/>
+                </a:solidFill>
+              </a:rPr>
+              <a:t>Plan</a:t>
+            </a:r>
+          </a:p>
+        </p:txBody>
+      </p:sp>
+      <p:sp>
+        <p:nvSpPr>
+          <p:cNvPr id="800" name="UnassignedLabel"/>
+          <p:cNvSpPr>
+            <a:spLocks noGrp="1"/>
+          </p:cNvSpPr>
+          <p:nvPr/>
+        </p:nvSpPr>
+        <p:spPr>
+          <a:xfrm>
+            <a:off x="7747000" y="4127500"/>
+            <a:ext cx="4064000" cy="254000"/>
+          </a:xfrm>
+          <a:prstGeom prst="rect">
+            <a:avLst/>
+          </a:prstGeom>
+          <a:noFill/>
+          <a:ln>
+            <a:noFill/>
+          </a:ln>
+        </p:spPr>
+        <p:txBody>
+          <a:bodyPr lIns="91440" tIns="45720" rIns="91440" bIns="45720" anchor="ctr"/>
+          <a:lstStyle/>
+          <a:p>
+            <a:pPr algn="l">
+              <a:buNone/>
+            </a:pPr>
+            <a:r>
+              <a:rPr lang="en-US" sz="1100" b="1" i="0" dirty="0">
+                <a:solidFill>
+                  <a:srgbClr val="444444"/>
+                </a:solidFill>
+              </a:rPr>
+              <a:t>Not assigned to this persona:</a:t>
+            </a:r>
+          </a:p>
+        </p:txBody>
+      </p:sp>
+      <p:sp>
+        <p:nvSpPr>
+          <p:cNvPr id="810" name="UChip_0"/>
+          <p:cNvSpPr>
+            <a:spLocks noGrp="1"/>
+          </p:cNvSpPr>
+          <p:nvPr/>
+        </p:nvSpPr>
+        <p:spPr>
+          <a:xfrm>
+            <a:off x="7874000" y="4318000"/>
+            <a:ext cx="1778000" cy="279400"/>
+          </a:xfrm>
+          <a:prstGeom prst="roundRect">
+            <a:avLst>
+              <a:gd name="adj" fmla="val 50000"/>
+            </a:avLst>
+          </a:prstGeom>
+          <a:solidFill>
+            <a:srgbClr val="F5F5F5"/>
+          </a:solidFill>
+          <a:ln w="12700">
+            <a:solidFill>
+              <a:srgbClr val="777777"/>
+            </a:solidFill>
+          </a:ln>
+        </p:spPr>
+        <p:txBody>
+          <a:bodyPr anchor="ctr"/>
+          <a:lstStyle/>
+          <a:p>
+            <a:endParaRPr/>
+          </a:p>
+        </p:txBody>
+      </p:sp>
+      <p:sp>
+        <p:nvSpPr>
+          <p:cNvPr id="820" name="UChipTxt_0"/>
+          <p:cNvSpPr>
+            <a:spLocks noGrp="1"/>
+          </p:cNvSpPr>
+          <p:nvPr/>
+        </p:nvSpPr>
+        <p:spPr>
+          <a:xfrm>
+            <a:off x="7874000" y="4318000"/>
+            <a:ext cx="1778000" cy="279400"/>
+          </a:xfrm>
+          <a:prstGeom prst="rect">
+            <a:avLst/>
+          </a:prstGeom>
+          <a:noFill/>
+          <a:ln>
+            <a:noFill/>
+          </a:ln>
+        </p:spPr>
+        <p:txBody>
+          <a:bodyPr lIns="91440" tIns="45720" rIns="91440" bIns="45720" anchor="ctr"/>
+          <a:lstStyle/>
+          <a:p>
+            <a:pPr algn="ctr">
+              <a:buNone/>
+            </a:pPr>
+            <a:r>
+              <a:rPr lang="en-US" sz="1200" b="1" i="0" dirty="0">
+                <a:solidFill>
+                  <a:srgbClr val="222222"/>
+                </a:solidFill>
+              </a:rPr>
+              <a:t>Write Code</a:t>
+            </a:r>
+          </a:p>
+        </p:txBody>
+      </p:sp>
+      <p:sp>
+        <p:nvSpPr>
+          <p:cNvPr id="811" name="UChip_1"/>
+          <p:cNvSpPr>
+            <a:spLocks noGrp="1"/>
+          </p:cNvSpPr>
+          <p:nvPr/>
+        </p:nvSpPr>
+        <p:spPr>
+          <a:xfrm>
+            <a:off x="9906000" y="4318000"/>
+            <a:ext cx="1778000" cy="279400"/>
+          </a:xfrm>
+          <a:prstGeom prst="roundRect">
+            <a:avLst>
+              <a:gd name="adj" fmla="val 50000"/>
+            </a:avLst>
+          </a:prstGeom>
+          <a:solidFill>
+            <a:srgbClr val="F5F5F5"/>
+          </a:solidFill>
+          <a:ln w="12700">
+            <a:solidFill>
+              <a:srgbClr val="777777"/>
+            </a:solidFill>
+          </a:ln>
+        </p:spPr>
+        <p:txBody>
+          <a:bodyPr anchor="ctr"/>
+          <a:lstStyle/>
+          <a:p>
+            <a:endParaRPr/>
+          </a:p>
+        </p:txBody>
+      </p:sp>
+      <p:sp>
+        <p:nvSpPr>
+          <p:cNvPr id="821" name="UChipTxt_1"/>
+          <p:cNvSpPr>
+            <a:spLocks noGrp="1"/>
+          </p:cNvSpPr>
+          <p:nvPr/>
+        </p:nvSpPr>
+        <p:spPr>
+          <a:xfrm>
+            <a:off x="9906000" y="4318000"/>
+            <a:ext cx="1778000" cy="279400"/>
+          </a:xfrm>
+          <a:prstGeom prst="rect">
+            <a:avLst/>
+          </a:prstGeom>
+          <a:noFill/>
+          <a:ln>
+            <a:noFill/>
+          </a:ln>
+        </p:spPr>
+        <p:txBody>
+          <a:bodyPr lIns="91440" tIns="45720" rIns="91440" bIns="45720" anchor="ctr"/>
+          <a:lstStyle/>
+          <a:p>
+            <a:pPr algn="ctr">
+              <a:buNone/>
+            </a:pPr>
+            <a:r>
+              <a:rPr lang="en-US" sz="1200" b="1" i="0" dirty="0">
+                <a:solidFill>
+                  <a:srgbClr val="222222"/>
+                </a:solidFill>
+              </a:rPr>
+              <a:t>Debug</a:t>
+            </a:r>
+          </a:p>
+        </p:txBody>
+      </p:sp>
+      <p:sp>
+        <p:nvSpPr>
+          <p:cNvPr id="812" name="UChip_2"/>
+          <p:cNvSpPr>
+            <a:spLocks noGrp="1"/>
+          </p:cNvSpPr>
+          <p:nvPr/>
+        </p:nvSpPr>
+        <p:spPr>
+          <a:xfrm>
+            <a:off x="7874000" y="4673600"/>
+            <a:ext cx="1778000" cy="279400"/>
+          </a:xfrm>
+          <a:prstGeom prst="roundRect">
+            <a:avLst>
+              <a:gd name="adj" fmla="val 50000"/>
+            </a:avLst>
+          </a:prstGeom>
+          <a:solidFill>
+            <a:srgbClr val="F5F5F5"/>
+          </a:solidFill>
+          <a:ln w="12700">
+            <a:solidFill>
+              <a:srgbClr val="777777"/>
+            </a:solidFill>
+          </a:ln>
+        </p:spPr>
+        <p:txBody>
+          <a:bodyPr anchor="ctr"/>
+          <a:lstStyle/>
+          <a:p>
+            <a:endParaRPr/>
+          </a:p>
+        </p:txBody>
+      </p:sp>
+      <p:sp>
+        <p:nvSpPr>
+          <p:cNvPr id="822" name="UChipTxt_2"/>
+          <p:cNvSpPr>
+            <a:spLocks noGrp="1"/>
+          </p:cNvSpPr>
+          <p:nvPr/>
+        </p:nvSpPr>
+        <p:spPr>
+          <a:xfrm>
+            <a:off x="7874000" y="4673600"/>
+            <a:ext cx="1778000" cy="279400"/>
+          </a:xfrm>
+          <a:prstGeom prst="rect">
+            <a:avLst/>
+          </a:prstGeom>
+          <a:noFill/>
+          <a:ln>
+            <a:noFill/>
+          </a:ln>
+        </p:spPr>
+        <p:txBody>
+          <a:bodyPr lIns="91440" tIns="45720" rIns="91440" bIns="45720" anchor="ctr"/>
+          <a:lstStyle/>
+          <a:p>
+            <a:pPr algn="ctr">
+              <a:buNone/>
+            </a:pPr>
+            <a:r>
+              <a:rPr lang="en-US" sz="1200" b="1" i="0" dirty="0">
+                <a:solidFill>
+                  <a:srgbClr val="222222"/>
+                </a:solidFill>
+              </a:rPr>
+              <a:t>Translate</a:t>
+            </a:r>
+          </a:p>
+        </p:txBody>
+      </p:sp>
+      <p:sp>
+        <p:nvSpPr>
+          <p:cNvPr id="813" name="UChip_3"/>
+          <p:cNvSpPr>
+            <a:spLocks noGrp="1"/>
+          </p:cNvSpPr>
+          <p:nvPr/>
+        </p:nvSpPr>
+        <p:spPr>
+          <a:xfrm>
+            <a:off x="9906000" y="4673600"/>
+            <a:ext cx="1778000" cy="279400"/>
+          </a:xfrm>
+          <a:prstGeom prst="roundRect">
+            <a:avLst>
+              <a:gd name="adj" fmla="val 50000"/>
+            </a:avLst>
+          </a:prstGeom>
+          <a:solidFill>
+            <a:srgbClr val="F5F5F5"/>
+          </a:solidFill>
+          <a:ln w="12700">
+            <a:solidFill>
+              <a:srgbClr val="777777"/>
+            </a:solidFill>
+          </a:ln>
+        </p:spPr>
+        <p:txBody>
+          <a:bodyPr anchor="ctr"/>
+          <a:lstStyle/>
+          <a:p>
+            <a:endParaRPr/>
+          </a:p>
+        </p:txBody>
+      </p:sp>
+      <p:sp>
+        <p:nvSpPr>
+          <p:cNvPr id="823" name="UChipTxt_3"/>
+          <p:cNvSpPr>
+            <a:spLocks noGrp="1"/>
+          </p:cNvSpPr>
+          <p:nvPr/>
+        </p:nvSpPr>
+        <p:spPr>
+          <a:xfrm>
+            <a:off x="9906000" y="4673600"/>
+            <a:ext cx="1778000" cy="279400"/>
+          </a:xfrm>
+          <a:prstGeom prst="rect">
+            <a:avLst/>
+          </a:prstGeom>
+          <a:noFill/>
+          <a:ln>
+            <a:noFill/>
+          </a:ln>
+        </p:spPr>
+        <p:txBody>
+          <a:bodyPr lIns="91440" tIns="45720" rIns="91440" bIns="45720" anchor="ctr"/>
+          <a:lstStyle/>
+          <a:p>
+            <a:pPr algn="ctr">
+              <a:buNone/>
+            </a:pPr>
+            <a:r>
+              <a:rPr lang="en-US" sz="1200" b="1" i="0" dirty="0">
+                <a:solidFill>
+                  <a:srgbClr val="222222"/>
+                </a:solidFill>
+              </a:rPr>
+              <a:t>Search</a:t>
+            </a:r>
+          </a:p>
+        </p:txBody>
+      </p:sp>
+      <p:sp>
+        <p:nvSpPr>
+          <p:cNvPr id="814" name="UChip_4"/>
+          <p:cNvSpPr>
+            <a:spLocks noGrp="1"/>
+          </p:cNvSpPr>
+          <p:nvPr/>
+        </p:nvSpPr>
+        <p:spPr>
+          <a:xfrm>
+            <a:off x="7874000" y="5029200"/>
+            <a:ext cx="1778000" cy="279400"/>
+          </a:xfrm>
+          <a:prstGeom prst="roundRect">
+            <a:avLst>
+              <a:gd name="adj" fmla="val 50000"/>
+            </a:avLst>
+          </a:prstGeom>
+          <a:solidFill>
+            <a:srgbClr val="F5F5F5"/>
+          </a:solidFill>
+          <a:ln w="12700">
+            <a:solidFill>
+              <a:srgbClr val="777777"/>
+            </a:solidFill>
+          </a:ln>
+        </p:spPr>
+        <p:txBody>
+          <a:bodyPr anchor="ctr"/>
+          <a:lstStyle/>
+          <a:p>
+            <a:endParaRPr/>
+          </a:p>
+        </p:txBody>
+      </p:sp>
+      <p:sp>
+        <p:nvSpPr>
+          <p:cNvPr id="824" name="UChipTxt_4"/>
+          <p:cNvSpPr>
+            <a:spLocks noGrp="1"/>
+          </p:cNvSpPr>
+          <p:nvPr/>
+        </p:nvSpPr>
+        <p:spPr>
+          <a:xfrm>
+            <a:off x="7874000" y="5029200"/>
+            <a:ext cx="1778000" cy="279400"/>
+          </a:xfrm>
+          <a:prstGeom prst="rect">
+            <a:avLst/>
+          </a:prstGeom>
+          <a:noFill/>
+          <a:ln>
+            <a:noFill/>
+          </a:ln>
+        </p:spPr>
+        <p:txBody>
+          <a:bodyPr lIns="91440" tIns="45720" rIns="91440" bIns="45720" anchor="ctr"/>
+          <a:lstStyle/>
+          <a:p>
+            <a:pPr algn="ctr">
+              <a:buNone/>
+            </a:pPr>
+            <a:r>
+              <a:rPr lang="en-US" sz="1200" b="1" i="0" dirty="0">
+                <a:solidFill>
+                  <a:srgbClr val="222222"/>
+                </a:solidFill>
+              </a:rPr>
+              <a:t>Reformat</a:t>
+            </a:r>
+          </a:p>
+        </p:txBody>
+      </p:sp>
+      <p:sp>
+        <p:nvSpPr>
+          <p:cNvPr id="815" name="UChip_5"/>
+          <p:cNvSpPr>
+            <a:spLocks noGrp="1"/>
+          </p:cNvSpPr>
+          <p:nvPr/>
+        </p:nvSpPr>
+        <p:spPr>
+          <a:xfrm>
+            <a:off x="9906000" y="5029200"/>
+            <a:ext cx="1778000" cy="279400"/>
+          </a:xfrm>
+          <a:prstGeom prst="roundRect">
+            <a:avLst>
+              <a:gd name="adj" fmla="val 50000"/>
+            </a:avLst>
+          </a:prstGeom>
+          <a:solidFill>
+            <a:srgbClr val="F5F5F5"/>
+          </a:solidFill>
+          <a:ln w="12700">
+            <a:solidFill>
+              <a:srgbClr val="777777"/>
+            </a:solidFill>
+          </a:ln>
+        </p:spPr>
+        <p:txBody>
+          <a:bodyPr anchor="ctr"/>
+          <a:lstStyle/>
+          <a:p>
+            <a:endParaRPr/>
+          </a:p>
+        </p:txBody>
+      </p:sp>
+      <p:sp>
+        <p:nvSpPr>
+          <p:cNvPr id="825" name="UChipTxt_5"/>
+          <p:cNvSpPr>
+            <a:spLocks noGrp="1"/>
+          </p:cNvSpPr>
+          <p:nvPr/>
+        </p:nvSpPr>
+        <p:spPr>
+          <a:xfrm>
+            <a:off x="9906000" y="5029200"/>
+            <a:ext cx="1778000" cy="279400"/>
+          </a:xfrm>
+          <a:prstGeom prst="rect">
+            <a:avLst/>
+          </a:prstGeom>
+          <a:noFill/>
+          <a:ln>
+            <a:noFill/>
+          </a:ln>
+        </p:spPr>
+        <p:txBody>
+          <a:bodyPr lIns="91440" tIns="45720" rIns="91440" bIns="45720" anchor="ctr"/>
+          <a:lstStyle/>
+          <a:p>
+            <a:pPr algn="ctr">
+              <a:buNone/>
+            </a:pPr>
+            <a:r>
+              <a:rPr lang="en-US" sz="1200" b="1" i="0" dirty="0">
+                <a:solidFill>
+                  <a:srgbClr val="222222"/>
+                </a:solidFill>
+              </a:rPr>
+              <a:t>Extract</a:t>
+            </a:r>
+          </a:p>
+        </p:txBody>
+      </p:sp>
+      <p:sp>
+        <p:nvSpPr>
+          <p:cNvPr id="900" name="Line900"/>
+          <p:cNvSpPr>
+            <a:spLocks noGrp="1"/>
+          </p:cNvSpPr>
+          <p:nvPr/>
+        </p:nvSpPr>
+        <p:spPr>
+          <a:xfrm>
+            <a:off x="4572000" y="3403600"/>
+            <a:ext cx="254000" cy="12700"/>
+          </a:xfrm>
+          <a:prstGeom prst="line">
+            <a:avLst/>
+          </a:prstGeom>
+          <a:noFill/>
+          <a:ln w="18000">
+            <a:solidFill>
+              <a:srgbClr val="1F4E79"/>
+            </a:solidFill>
+            <a:prstDash val="solid"/>
+          </a:ln>
+        </p:spPr>
+        <p:txBody>
+          <a:bodyPr/>
+          <a:lstStyle/>
+          <a:p>
+            <a:endParaRPr/>
+          </a:p>
+        </p:txBody>
+      </p:sp>
+      <p:sp>
+        <p:nvSpPr>
+          <p:cNvPr id="901" name="Line901"/>
+          <p:cNvSpPr>
+            <a:spLocks noGrp="1"/>
+          </p:cNvSpPr>
+          <p:nvPr/>
+        </p:nvSpPr>
+        <p:spPr>
+          <a:xfrm>
+            <a:off x="7366000" y="3403600"/>
+            <a:ext cx="254000" cy="12700"/>
+          </a:xfrm>
+          <a:prstGeom prst="line">
+            <a:avLst/>
+          </a:prstGeom>
+          <a:noFill/>
+          <a:ln w="18000">
+            <a:solidFill>
+              <a:srgbClr val="7B2D8E"/>
+            </a:solidFill>
+            <a:prstDash val="solid"/>
+          </a:ln>
+        </p:spPr>
+        <p:txBody>
+          <a:bodyPr/>
+          <a:lstStyle/>
+          <a:p>
+            <a:endParaRPr/>
+          </a:p>
+        </p:txBody>
+      </p:sp>
+      <p:sp>
+        <p:nvSpPr>
+          <p:cNvPr id="902" name="LineLabel1"/>
+          <p:cNvSpPr>
+            <a:spLocks noGrp="1"/>
+          </p:cNvSpPr>
+          <p:nvPr/>
+        </p:nvSpPr>
+        <p:spPr>
+          <a:xfrm>
+            <a:off x="4572000" y="3149600"/>
+            <a:ext cx="254000" cy="228600"/>
+          </a:xfrm>
+          <a:prstGeom prst="rect">
+            <a:avLst/>
+          </a:prstGeom>
+          <a:noFill/>
+          <a:ln>
+            <a:noFill/>
+          </a:ln>
+        </p:spPr>
+        <p:txBody>
+          <a:bodyPr lIns="91440" tIns="45720" rIns="91440" bIns="45720" anchor="ctr"/>
+          <a:lstStyle/>
+          <a:p>
+            <a:pPr algn="ctr">
+              <a:buNone/>
+            </a:pPr>
+            <a:r>
+              <a:rPr lang="en-US" sz="1400" b="1" i="0" dirty="0">
+                <a:solidFill>
+                  <a:srgbClr val="1F4E79"/>
+                </a:solidFill>
+              </a:rPr>
+              <a:t>→</a:t>
+            </a:r>
+          </a:p>
+        </p:txBody>
+      </p:sp>
+      <p:sp>
+        <p:nvSpPr>
+          <p:cNvPr id="903" name="LineLabel2"/>
+          <p:cNvSpPr>
+            <a:spLocks noGrp="1"/>
+          </p:cNvSpPr>
+          <p:nvPr/>
+        </p:nvSpPr>
+        <p:spPr>
+          <a:xfrm>
+            <a:off x="7366000" y="3149600"/>
+            <a:ext cx="254000" cy="228600"/>
+          </a:xfrm>
+          <a:prstGeom prst="rect">
+            <a:avLst/>
+          </a:prstGeom>
+          <a:noFill/>
+          <a:ln>
+            <a:noFill/>
+          </a:ln>
+        </p:spPr>
+        <p:txBody>
+          <a:bodyPr lIns="91440" tIns="45720" rIns="91440" bIns="45720" anchor="ctr"/>
+          <a:lstStyle/>
+          <a:p>
+            <a:pPr algn="ctr">
+              <a:buNone/>
+            </a:pPr>
+            <a:r>
+              <a:rPr lang="en-US" sz="1400" b="1" i="0" dirty="0">
+                <a:solidFill>
+                  <a:srgbClr val="7B2D8E"/>
+                </a:solidFill>
+              </a:rPr>
+              <a:t>→</a:t>
+            </a:r>
+          </a:p>
+        </p:txBody>
+      </p:sp>
+      <p:sp>
+        <p:nvSpPr>
+          <p:cNvPr id="950" name="KeyBg"/>
+          <p:cNvSpPr>
+            <a:spLocks noGrp="1"/>
+          </p:cNvSpPr>
+          <p:nvPr/>
+        </p:nvSpPr>
+        <p:spPr>
+          <a:xfrm>
+            <a:off x="254000" y="6350000"/>
+            <a:ext cx="11684000" cy="406400"/>
+          </a:xfrm>
+          <a:prstGeom prst="rect">
+            <a:avLst/>
+          </a:prstGeom>
+          <a:solidFill>
+            <a:srgbClr val="F0F0F0"/>
+          </a:solidFill>
+          <a:ln w="12700">
+            <a:solidFill>
+              <a:srgbClr val="CCCCCC"/>
+            </a:solidFill>
+          </a:ln>
+        </p:spPr>
+        <p:txBody>
+          <a:bodyPr anchor="ctr"/>
+          <a:lstStyle/>
+          <a:p>
+            <a:endParaRPr/>
+          </a:p>
+        </p:txBody>
+      </p:sp>
+      <p:sp>
+        <p:nvSpPr>
+          <p:cNvPr id="951" name="KeyTxt"/>
+          <p:cNvSpPr>
+            <a:spLocks noGrp="1"/>
+          </p:cNvSpPr>
+          <p:nvPr/>
+        </p:nvSpPr>
+        <p:spPr>
+          <a:xfrm>
+            <a:off x="254000" y="6350000"/>
+            <a:ext cx="11684000" cy="406400"/>
+          </a:xfrm>
+          <a:prstGeom prst="rect">
+            <a:avLst/>
+          </a:prstGeom>
+          <a:noFill/>
+          <a:ln>
+            <a:noFill/>
+          </a:ln>
+        </p:spPr>
+        <p:txBody>
+          <a:bodyPr lIns="91440" tIns="45720" rIns="91440" bIns="45720" anchor="ctr"/>
+          <a:lstStyle/>
+          <a:p>
+            <a:pPr algn="ctr">
+              <a:buNone/>
+            </a:pPr>
+            <a:r>
+              <a:rPr lang="en-US" sz="1100" b="0" i="0" dirty="0">
+                <a:solidFill>
+                  <a:srgbClr val="666666"/>
+                </a:solidFill>
+              </a:rPr>
+              <a:t>Context pulls from the full inventory each turn  ·  Persona is pre-configured with a fixed skill set  ·  Unassigned skills are unavailable to the persona</a:t>
+            </a:r>
+          </a:p>
+        </p:txBody>
+      </p:sp>
+    </p:spTree>
+    <p:extLst>
+      <p:ext uri="{BB962C8B-B14F-4D97-AF65-F5344CB8AC3E}">
+        <p14:creationId xmlns:p14="http://schemas.microsoft.com/office/powerpoint/2010/main" val="891345001"/>
+      </p:ext>
+    </p:extLst>
+  </p:cSld>
+  <p:clrMapOvr>
+    <a:masterClrMapping/>
+  </p:clrMapOvr>
+</p:sld>
+</file>
+
+<file path=ppt/slides/slide6.xml><?xml version="1.0" encoding="utf-8"?>
+<p:sld xmlns:a="http://schemas.openxmlformats.org/drawingml/2006/main" xmlns:r="http://schemas.openxmlformats.org/officeDocument/2006/relationships" xmlns:p="http://schemas.openxmlformats.org/presentationml/2006/main">
+  <p:cSld>
+    <p:spTree>
+      <p:nvGrpSpPr>
+        <p:cNvPr id="1" name=""/>
+        <p:cNvGrpSpPr/>
+        <p:nvPr/>
+      </p:nvGrpSpPr>
+      <p:grpSpPr>
+        <a:xfrm>
+          <a:off x="0" y="0"/>
+          <a:ext cx="0" cy="0"/>
+          <a:chOff x="0" y="0"/>
+          <a:chExt cx="0" cy="0"/>
+        </a:xfrm>
+      </p:grpSpPr>
+      <p:sp>
+        <p:nvSpPr>
           <p:cNvPr id="200" name="bg"/>
           <p:cNvSpPr>
             <a:spLocks noGrp="1"/>
@@ -8952,7 +10106,7 @@
 </p:sld>
 </file>
 
-<file path=ppt/slides/slide5.xml><?xml version="1.0" encoding="utf-8"?>
+<file path=ppt/slides/slide7.xml><?xml version="1.0" encoding="utf-8"?>
 <p:sld xmlns:a="http://schemas.openxmlformats.org/drawingml/2006/main" xmlns:r="http://schemas.openxmlformats.org/officeDocument/2006/relationships" xmlns:p="http://schemas.openxmlformats.org/presentationml/2006/main">
   <p:cSld>
     <p:spTree>
@@ -9309,7 +10463,7 @@
 
 <file path=ppt/webextensions/taskpanes.xml><?xml version="1.0" encoding="utf-8"?>
 <wetp:taskpanes xmlns:wetp="http://schemas.microsoft.com/office/webextensions/taskpanes/2010/11">
-  <wetp:taskpane dockstate="right" visibility="1" width="525" row="1">
+  <wetp:taskpane dockstate="right" visibility="1" width="525" row="2">
     <wetp:webextensionref xmlns:r="http://schemas.openxmlformats.org/officeDocument/2006/relationships" r:id="rId1"/>
   </wetp:taskpane>
 </wetp:taskpanes>
